--- a/slides/07-automations.pptx
+++ b/slides/07-automations.pptx
@@ -560,91 +560,91 @@
 </file>
 
 <file path=ppt/notesSlides/notesSlide10.xml><?xml version="1.0" encoding="utf-8"?>
-<p:notes xmlns:a="http://schemas.openxmlformats.org/drawingml/2006/main" xmlns:r="http://schemas.openxmlformats.org/officeDocument/2006/relationships" xmlns:p="http://schemas.openxmlformats.org/presentationml/2006/main">
-  <p:cSld>
-    <p:spTree>
-      <p:nvGrpSpPr>
-        <p:cNvPr id="1" name=""/>
-        <p:cNvGrpSpPr/>
-        <p:nvPr/>
-      </p:nvGrpSpPr>
-      <p:grpSpPr>
-        <a:xfrm>
-          <a:off x="0" y="0"/>
-          <a:ext cx="0" cy="0"/>
-          <a:chOff x="0" y="0"/>
-          <a:chExt cx="0" cy="0"/>
-        </a:xfrm>
-      </p:grpSpPr>
-      <p:sp>
-        <p:nvSpPr>
-          <p:cNvPr id="2" name="Slide Image Placeholder 1"/>
-          <p:cNvSpPr>
-            <a:spLocks noGrp="1" noRot="1" noChangeAspect="1"/>
-          </p:cNvSpPr>
-          <p:nvPr>
-            <p:ph type="sldImg"/>
-          </p:nvPr>
-        </p:nvSpPr>
-        <p:spPr/>
-      </p:sp>
-      <p:sp>
-        <p:nvSpPr>
-          <p:cNvPr id="3" name="Notes Placeholder 2"/>
-          <p:cNvSpPr>
-            <a:spLocks noGrp="1"/>
-          </p:cNvSpPr>
-          <p:nvPr>
-            <p:ph type="body" idx="1"/>
-          </p:nvPr>
-        </p:nvSpPr>
-        <p:spPr/>
-        <p:txBody>
-          <a:bodyPr/>
-          <a:lstStyle/>
-          <a:p>
-            <a:r>
-              <a:rPr lang="en-US" dirty="0"/>
-              <a:t>A manual automation answers what is the status right now. A scheduled one answers what changed since yesterday, without you remembering to ask. This automation is local, so a scheduled run happens only when your computer is awake and the app is running. Open the automation, select Edit, change the trigger to Daily, set Hours to 08:00, and keep Minute at 00. Confirm the project picker still shows your fork, then select Save automation. The card shows the Daily trigger, and Automation details shows the schedule and Next run time. If the result is noisy, tighten the prompt, for example to PRs with failing checks. The app also supports Hourly, Weekly, and CRON, with a readable preview of a CRON expression.</a:t>
-            </a:r>
-            <a:endParaRPr lang="en-US" dirty="0"/>
-          </a:p>
-        </p:txBody>
-      </p:sp>
-      <p:sp>
-        <p:nvSpPr>
-          <p:cNvPr id="4" name="Slide Number Placeholder 3"/>
-          <p:cNvSpPr>
-            <a:spLocks noGrp="1"/>
-          </p:cNvSpPr>
-          <p:nvPr>
-            <p:ph type="sldNum" sz="quarter" idx="10"/>
-          </p:nvPr>
-        </p:nvSpPr>
-        <p:spPr/>
-        <p:txBody>
-          <a:bodyPr/>
-          <a:lstStyle/>
-          <a:p>
-            <a:fld id="{F7021451-1387-4CA6-816F-3879F97B5CBC}" type="slidenum">
-              <a:rPr lang="en-US"/>
-              <a:t>10</a:t>
-            </a:fld>
-            <a:endParaRPr lang="en-US"/>
-          </a:p>
-        </p:txBody>
-      </p:sp>
-    </p:spTree>
-    <p:extLst>
-      <p:ext uri="{BB962C8B-B14F-4D97-AF65-F5344CB8AC3E}">
-        <p14:creationId xmlns:p14="http://schemas.microsoft.com/office/powerpoint/2010/main" val="1024086991"/>
-      </p:ext>
-    </p:extLst>
-  </p:cSld>
-  <p:clrMapOvr>
-    <a:masterClrMapping/>
-  </p:clrMapOvr>
-</p:notes>
+<ns0:notes xmlns:ns0="http://schemas.openxmlformats.org/presentationml/2006/main" xmlns:ns1="http://schemas.openxmlformats.org/drawingml/2006/main" xmlns:ns2="http://schemas.microsoft.com/office/powerpoint/2010/main">
+  <ns0:cSld>
+    <ns0:spTree>
+      <ns0:nvGrpSpPr>
+        <ns0:cNvPr id="1" name=""/>
+        <ns0:cNvGrpSpPr/>
+        <ns0:nvPr/>
+      </ns0:nvGrpSpPr>
+      <ns0:grpSpPr>
+        <ns1:xfrm>
+          <ns1:off x="0" y="0"/>
+          <ns1:ext cx="0" cy="0"/>
+          <ns1:chOff x="0" y="0"/>
+          <ns1:chExt cx="0" cy="0"/>
+        </ns1:xfrm>
+      </ns0:grpSpPr>
+      <ns0:sp>
+        <ns0:nvSpPr>
+          <ns0:cNvPr id="2" name="Slide Image Placeholder 1"/>
+          <ns0:cNvSpPr>
+            <ns1:spLocks noGrp="1" noRot="1" noChangeAspect="1"/>
+          </ns0:cNvSpPr>
+          <ns0:nvPr>
+            <ns0:ph type="sldImg"/>
+          </ns0:nvPr>
+        </ns0:nvSpPr>
+        <ns0:spPr/>
+      </ns0:sp>
+      <ns0:sp>
+        <ns0:nvSpPr>
+          <ns0:cNvPr id="3" name="Notes Placeholder 2"/>
+          <ns0:cNvSpPr>
+            <ns1:spLocks noGrp="1"/>
+          </ns0:cNvSpPr>
+          <ns0:nvPr>
+            <ns0:ph type="body" idx="1"/>
+          </ns0:nvPr>
+        </ns0:nvSpPr>
+        <ns0:spPr/>
+        <ns0:txBody>
+          <ns1:bodyPr/>
+          <ns1:lstStyle/>
+          <ns1:p>
+            <ns1:r>
+              <ns1:rPr lang="en-US" dirty="0"/>
+              <ns1:t>A manual automation answers what is the status right now. A scheduled one answers what changed since yesterday. This automation is local, so it runs only when your computer is awake and the app is running. Open it, select Edit, change the trigger to Daily, and choose 08:00 in Hours. Hours can have more than one time selected. Clear any other selected hours, including the default 09:00, so only 08:00 remains. Keep Minute at 00, confirm the repository, and save. Check the Daily label, schedule, and Next run time. The app also supports Hourly, Weekly, and CRON.</ns1:t>
+            </ns1:r>
+            <ns1:endParaRPr lang="en-US" dirty="0"/>
+          </ns1:p>
+        </ns0:txBody>
+      </ns0:sp>
+      <ns0:sp>
+        <ns0:nvSpPr>
+          <ns0:cNvPr id="4" name="Slide Number Placeholder 3"/>
+          <ns0:cNvSpPr>
+            <ns1:spLocks noGrp="1"/>
+          </ns0:cNvSpPr>
+          <ns0:nvPr>
+            <ns0:ph type="sldNum" sz="quarter" idx="10"/>
+          </ns0:nvPr>
+        </ns0:nvSpPr>
+        <ns0:spPr/>
+        <ns0:txBody>
+          <ns1:bodyPr/>
+          <ns1:lstStyle/>
+          <ns1:p>
+            <ns1:fld id="{F7021451-1387-4CA6-816F-3879F97B5CBC}" type="slidenum">
+              <ns1:rPr lang="en-US"/>
+              <ns1:t>10</ns1:t>
+            </ns1:fld>
+            <ns1:endParaRPr lang="en-US"/>
+          </ns1:p>
+        </ns0:txBody>
+      </ns0:sp>
+    </ns0:spTree>
+    <ns0:extLst>
+      <ns0:ext uri="{BB962C8B-B14F-4D97-AF65-F5344CB8AC3E}">
+        <ns2:creationId val="1024086991"/>
+      </ns0:ext>
+    </ns0:extLst>
+  </ns0:cSld>
+  <ns0:clrMapOvr>
+    <ns1:masterClrMapping/>
+  </ns0:clrMapOvr>
+</ns0:notes>
 </file>
 
 <file path=ppt/notesSlides/notesSlide11.xml><?xml version="1.0" encoding="utf-8"?>
@@ -736,179 +736,179 @@
 </file>
 
 <file path=ppt/notesSlides/notesSlide12.xml><?xml version="1.0" encoding="utf-8"?>
-<p:notes xmlns:a="http://schemas.openxmlformats.org/drawingml/2006/main" xmlns:r="http://schemas.openxmlformats.org/officeDocument/2006/relationships" xmlns:p="http://schemas.openxmlformats.org/presentationml/2006/main">
-  <p:cSld>
-    <p:spTree>
-      <p:nvGrpSpPr>
-        <p:cNvPr id="1" name=""/>
-        <p:cNvGrpSpPr/>
-        <p:nvPr/>
-      </p:nvGrpSpPr>
-      <p:grpSpPr>
-        <a:xfrm>
-          <a:off x="0" y="0"/>
-          <a:ext cx="0" cy="0"/>
-          <a:chOff x="0" y="0"/>
-          <a:chExt cx="0" cy="0"/>
-        </a:xfrm>
-      </p:grpSpPr>
-      <p:sp>
-        <p:nvSpPr>
-          <p:cNvPr id="2" name="Slide Image Placeholder 1"/>
-          <p:cNvSpPr>
-            <a:spLocks noGrp="1" noRot="1" noChangeAspect="1"/>
-          </p:cNvSpPr>
-          <p:nvPr>
-            <p:ph type="sldImg"/>
-          </p:nvPr>
-        </p:nvSpPr>
-        <p:spPr/>
-      </p:sp>
-      <p:sp>
-        <p:nvSpPr>
-          <p:cNvPr id="3" name="Notes Placeholder 2"/>
-          <p:cNvSpPr>
-            <a:spLocks noGrp="1"/>
-          </p:cNvSpPr>
-          <p:nvPr>
-            <p:ph type="body" idx="1"/>
-          </p:nvPr>
-        </p:nvSpPr>
-        <p:spPr/>
-        <p:txBody>
-          <a:bodyPr/>
-          <a:lstStyle/>
-          <a:p>
-            <a:r>
-              <a:rPr lang="en-US" dirty="0"/>
-              <a:t>The trigger menu includes Issue, Pull request, Discussion opened, Discussion updated, Discussion comment, Sub issue added, Workflow (a GitHub Actions workflow you name completes, for example by failing), and Automation completed (an upstream automation you name finishes), alongside the schedule choices. Because these react to external input, keep them read-only, scoped to one repository, and filtered by label or query. Avoid write tools until the summary is reliable, and review the run history regularly.</a:t>
-            </a:r>
-            <a:endParaRPr lang="en-US" dirty="0"/>
-          </a:p>
-        </p:txBody>
-      </p:sp>
-      <p:sp>
-        <p:nvSpPr>
-          <p:cNvPr id="4" name="Slide Number Placeholder 3"/>
-          <p:cNvSpPr>
-            <a:spLocks noGrp="1"/>
-          </p:cNvSpPr>
-          <p:nvPr>
-            <p:ph type="sldNum" sz="quarter" idx="10"/>
-          </p:nvPr>
-        </p:nvSpPr>
-        <p:spPr/>
-        <p:txBody>
-          <a:bodyPr/>
-          <a:lstStyle/>
-          <a:p>
-            <a:fld id="{F7021451-1387-4CA6-816F-3879F97B5CBC}" type="slidenum">
-              <a:rPr lang="en-US"/>
-              <a:t>12</a:t>
-            </a:fld>
-            <a:endParaRPr lang="en-US"/>
-          </a:p>
-        </p:txBody>
-      </p:sp>
-    </p:spTree>
-    <p:extLst>
-      <p:ext uri="{BB962C8B-B14F-4D97-AF65-F5344CB8AC3E}">
-        <p14:creationId xmlns:p14="http://schemas.microsoft.com/office/powerpoint/2010/main" val="1024086991"/>
-      </p:ext>
-    </p:extLst>
-  </p:cSld>
-  <p:clrMapOvr>
-    <a:masterClrMapping/>
-  </p:clrMapOvr>
-</p:notes>
+<ns0:notes xmlns:ns0="http://schemas.openxmlformats.org/presentationml/2006/main" xmlns:ns1="http://schemas.openxmlformats.org/drawingml/2006/main" xmlns:ns2="http://schemas.microsoft.com/office/powerpoint/2010/main">
+  <ns0:cSld>
+    <ns0:spTree>
+      <ns0:nvGrpSpPr>
+        <ns0:cNvPr id="1" name=""/>
+        <ns0:cNvGrpSpPr/>
+        <ns0:nvPr/>
+      </ns0:nvGrpSpPr>
+      <ns0:grpSpPr>
+        <ns1:xfrm>
+          <ns1:off x="0" y="0"/>
+          <ns1:ext cx="0" cy="0"/>
+          <ns1:chOff x="0" y="0"/>
+          <ns1:chExt cx="0" cy="0"/>
+        </ns1:xfrm>
+      </ns0:grpSpPr>
+      <ns0:sp>
+        <ns0:nvSpPr>
+          <ns0:cNvPr id="2" name="Slide Image Placeholder 1"/>
+          <ns0:cNvSpPr>
+            <ns1:spLocks noGrp="1" noRot="1" noChangeAspect="1"/>
+          </ns0:cNvSpPr>
+          <ns0:nvPr>
+            <ns0:ph type="sldImg"/>
+          </ns0:nvPr>
+        </ns0:nvSpPr>
+        <ns0:spPr/>
+      </ns0:sp>
+      <ns0:sp>
+        <ns0:nvSpPr>
+          <ns0:cNvPr id="3" name="Notes Placeholder 2"/>
+          <ns0:cNvSpPr>
+            <ns1:spLocks noGrp="1"/>
+          </ns0:cNvSpPr>
+          <ns0:nvPr>
+            <ns0:ph type="body" idx="1"/>
+          </ns0:nvPr>
+        </ns0:nvSpPr>
+        <ns0:spPr/>
+        <ns0:txBody>
+          <ns1:bodyPr/>
+          <ns1:lstStyle/>
+          <ns1:p>
+            <ns1:r>
+              <ns1:rPr lang="en-US" dirty="0"/>
+              <ns1:t>The current Trigger menu includes Issue, Automation failed, Automation completed, Code scanning alert, Dependabot alert, Discussion comment, Discussion opened, Discussion updated, Pull request, Secret scanning alert, Sub issue added, and Workflow. Schedule choices include Hourly, Daily, Weekly, and CRON. The menu is longer than its window, so scroll to see every choice. Event triggers react to external input. Keep them read-only, scope them to one repository, and filter by label or query. Avoid write tools until the summary is reliable, and review the run history regularly.</ns1:t>
+            </ns1:r>
+            <ns1:endParaRPr lang="en-US" dirty="0"/>
+          </ns1:p>
+        </ns0:txBody>
+      </ns0:sp>
+      <ns0:sp>
+        <ns0:nvSpPr>
+          <ns0:cNvPr id="4" name="Slide Number Placeholder 3"/>
+          <ns0:cNvSpPr>
+            <ns1:spLocks noGrp="1"/>
+          </ns0:cNvSpPr>
+          <ns0:nvPr>
+            <ns0:ph type="sldNum" sz="quarter" idx="10"/>
+          </ns0:nvPr>
+        </ns0:nvSpPr>
+        <ns0:spPr/>
+        <ns0:txBody>
+          <ns1:bodyPr/>
+          <ns1:lstStyle/>
+          <ns1:p>
+            <ns1:fld id="{F7021451-1387-4CA6-816F-3879F97B5CBC}" type="slidenum">
+              <ns1:rPr lang="en-US"/>
+              <ns1:t>12</ns1:t>
+            </ns1:fld>
+            <ns1:endParaRPr lang="en-US"/>
+          </ns1:p>
+        </ns0:txBody>
+      </ns0:sp>
+    </ns0:spTree>
+    <ns0:extLst>
+      <ns0:ext uri="{BB962C8B-B14F-4D97-AF65-F5344CB8AC3E}">
+        <ns2:creationId val="1024086991"/>
+      </ns0:ext>
+    </ns0:extLst>
+  </ns0:cSld>
+  <ns0:clrMapOvr>
+    <ns1:masterClrMapping/>
+  </ns0:clrMapOvr>
+</ns0:notes>
 </file>
 
 <file path=ppt/notesSlides/notesSlide13.xml><?xml version="1.0" encoding="utf-8"?>
-<p:notes xmlns:a="http://schemas.openxmlformats.org/drawingml/2006/main" xmlns:r="http://schemas.openxmlformats.org/officeDocument/2006/relationships" xmlns:p="http://schemas.openxmlformats.org/presentationml/2006/main">
-  <p:cSld>
-    <p:spTree>
-      <p:nvGrpSpPr>
-        <p:cNvPr id="1" name=""/>
-        <p:cNvGrpSpPr/>
-        <p:nvPr/>
-      </p:nvGrpSpPr>
-      <p:grpSpPr>
-        <a:xfrm>
-          <a:off x="0" y="0"/>
-          <a:ext cx="0" cy="0"/>
-          <a:chOff x="0" y="0"/>
-          <a:chExt cx="0" cy="0"/>
-        </a:xfrm>
-      </p:grpSpPr>
-      <p:sp>
-        <p:nvSpPr>
-          <p:cNvPr id="2" name="Slide Image Placeholder 1"/>
-          <p:cNvSpPr>
-            <a:spLocks noGrp="1" noRot="1" noChangeAspect="1"/>
-          </p:cNvSpPr>
-          <p:nvPr>
-            <p:ph type="sldImg"/>
-          </p:nvPr>
-        </p:nvSpPr>
-        <p:spPr/>
-      </p:sp>
-      <p:sp>
-        <p:nvSpPr>
-          <p:cNvPr id="3" name="Notes Placeholder 2"/>
-          <p:cNvSpPr>
-            <a:spLocks noGrp="1"/>
-          </p:cNvSpPr>
-          <p:nvPr>
-            <p:ph type="body" idx="1"/>
-          </p:nvPr>
-        </p:nvSpPr>
-        <p:spPr/>
-        <p:txBody>
-          <a:bodyPr/>
-          <a:lstStyle/>
-          <a:p>
-            <a:r>
-              <a:rPr lang="en-US" dirty="0"/>
-              <a:t>Every automation so far is local: it runs from your machine while the app is open. A cloud automation runs on GitHub-hosted infrastructure. Cloud fits when a run must happen overnight, a team shares the run history, or the trigger is an event that can happen at any time. It needs Copilot cloud agent enabled and an organization that allows automations. The repository must be private or internal; a fork of this public course is public, so read this section without creating one. Each cloud run uses Actions minutes and AI credits, billed to the creator. When you turn on Run in the cloud, a Tools list appears with all tools selected. Clear every tool you do not need. For the PR report, keep Read PR, List PRs, and Search PRs, and maybe a read-only Actions tool for CI status.</a:t>
-            </a:r>
-            <a:endParaRPr lang="en-US" dirty="0"/>
-          </a:p>
-        </p:txBody>
-      </p:sp>
-      <p:sp>
-        <p:nvSpPr>
-          <p:cNvPr id="4" name="Slide Number Placeholder 3"/>
-          <p:cNvSpPr>
-            <a:spLocks noGrp="1"/>
-          </p:cNvSpPr>
-          <p:nvPr>
-            <p:ph type="sldNum" sz="quarter" idx="10"/>
-          </p:nvPr>
-        </p:nvSpPr>
-        <p:spPr/>
-        <p:txBody>
-          <a:bodyPr/>
-          <a:lstStyle/>
-          <a:p>
-            <a:fld id="{F7021451-1387-4CA6-816F-3879F97B5CBC}" type="slidenum">
-              <a:rPr lang="en-US"/>
-              <a:t>13</a:t>
-            </a:fld>
-            <a:endParaRPr lang="en-US"/>
-          </a:p>
-        </p:txBody>
-      </p:sp>
-    </p:spTree>
-    <p:extLst>
-      <p:ext uri="{BB962C8B-B14F-4D97-AF65-F5344CB8AC3E}">
-        <p14:creationId xmlns:p14="http://schemas.microsoft.com/office/powerpoint/2010/main" val="1024086991"/>
-      </p:ext>
-    </p:extLst>
-  </p:cSld>
-  <p:clrMapOvr>
-    <a:masterClrMapping/>
-  </p:clrMapOvr>
-</p:notes>
+<ns0:notes xmlns:ns0="http://schemas.openxmlformats.org/presentationml/2006/main" xmlns:ns1="http://schemas.openxmlformats.org/drawingml/2006/main" xmlns:ns2="http://schemas.microsoft.com/office/powerpoint/2010/main">
+  <ns0:cSld>
+    <ns0:spTree>
+      <ns0:nvGrpSpPr>
+        <ns0:cNvPr id="1" name=""/>
+        <ns0:cNvGrpSpPr/>
+        <ns0:nvPr/>
+      </ns0:nvGrpSpPr>
+      <ns0:grpSpPr>
+        <ns1:xfrm>
+          <ns1:off x="0" y="0"/>
+          <ns1:ext cx="0" cy="0"/>
+          <ns1:chOff x="0" y="0"/>
+          <ns1:chExt cx="0" cy="0"/>
+        </ns1:xfrm>
+      </ns0:grpSpPr>
+      <ns0:sp>
+        <ns0:nvSpPr>
+          <ns0:cNvPr id="2" name="Slide Image Placeholder 1"/>
+          <ns0:cNvSpPr>
+            <ns1:spLocks noGrp="1" noRot="1" noChangeAspect="1"/>
+          </ns0:cNvSpPr>
+          <ns0:nvPr>
+            <ns0:ph type="sldImg"/>
+          </ns0:nvPr>
+        </ns0:nvSpPr>
+        <ns0:spPr/>
+      </ns0:sp>
+      <ns0:sp>
+        <ns0:nvSpPr>
+          <ns0:cNvPr id="3" name="Notes Placeholder 2"/>
+          <ns0:cNvSpPr>
+            <ns1:spLocks noGrp="1"/>
+          </ns0:cNvSpPr>
+          <ns0:nvPr>
+            <ns0:ph type="body" idx="1"/>
+          </ns0:nvPr>
+        </ns0:nvSpPr>
+        <ns0:spPr/>
+        <ns0:txBody>
+          <ns1:bodyPr/>
+          <ns1:lstStyle/>
+          <ns1:p>
+            <ns1:r>
+              <ns1:rPr lang="en-US" dirty="0"/>
+              <ns1:t>Every automation so far is local: it runs from your machine while the app is open. A cloud automation runs on GitHub-hosted infrastructure. It needs Copilot cloud agent enabled and an organization that allows automations. The repository must be private or internal; this public course fork cannot use cloud automations. Each cloud run uses Actions minutes and AI credits. Personal charges AI credits to you and uses your GitHub identity for actions. Shared is visible to people with repository access, charges credits to the repository owner, and uses Copilot's identity for actions. Personal does not make cloud sessions or logs private; people with repository access can see them. The current Tools picker shows Select tools before you choose. Select only what the task needs.</ns1:t>
+            </ns1:r>
+            <ns1:endParaRPr lang="en-US" dirty="0"/>
+          </ns1:p>
+        </ns0:txBody>
+      </ns0:sp>
+      <ns0:sp>
+        <ns0:nvSpPr>
+          <ns0:cNvPr id="4" name="Slide Number Placeholder 3"/>
+          <ns0:cNvSpPr>
+            <ns1:spLocks noGrp="1"/>
+          </ns0:cNvSpPr>
+          <ns0:nvPr>
+            <ns0:ph type="sldNum" sz="quarter" idx="10"/>
+          </ns0:nvPr>
+        </ns0:nvSpPr>
+        <ns0:spPr/>
+        <ns0:txBody>
+          <ns1:bodyPr/>
+          <ns1:lstStyle/>
+          <ns1:p>
+            <ns1:fld id="{F7021451-1387-4CA6-816F-3879F97B5CBC}" type="slidenum">
+              <ns1:rPr lang="en-US"/>
+              <ns1:t>13</ns1:t>
+            </ns1:fld>
+            <ns1:endParaRPr lang="en-US"/>
+          </ns1:p>
+        </ns0:txBody>
+      </ns0:sp>
+    </ns0:spTree>
+    <ns0:extLst>
+      <ns0:ext uri="{BB962C8B-B14F-4D97-AF65-F5344CB8AC3E}">
+        <ns2:creationId val="1024086991"/>
+      </ns0:ext>
+    </ns0:extLst>
+  </ns0:cSld>
+  <ns0:clrMapOvr>
+    <ns1:masterClrMapping/>
+  </ns0:clrMapOvr>
+</ns0:notes>
 </file>
 
 <file path=ppt/notesSlides/notesSlide14.xml><?xml version="1.0" encoding="utf-8"?>
@@ -1704,91 +1704,91 @@
 </file>
 
 <file path=ppt/notesSlides/notesSlide8.xml><?xml version="1.0" encoding="utf-8"?>
-<p:notes xmlns:a="http://schemas.openxmlformats.org/drawingml/2006/main" xmlns:r="http://schemas.openxmlformats.org/officeDocument/2006/relationships" xmlns:p="http://schemas.openxmlformats.org/presentationml/2006/main">
-  <p:cSld>
-    <p:spTree>
-      <p:nvGrpSpPr>
-        <p:cNvPr id="1" name=""/>
-        <p:cNvGrpSpPr/>
-        <p:nvPr/>
-      </p:nvGrpSpPr>
-      <p:grpSpPr>
-        <a:xfrm>
-          <a:off x="0" y="0"/>
-          <a:ext cx="0" cy="0"/>
-          <a:chOff x="0" y="0"/>
-          <a:chExt cx="0" cy="0"/>
-        </a:xfrm>
-      </p:grpSpPr>
-      <p:sp>
-        <p:nvSpPr>
-          <p:cNvPr id="2" name="Slide Image Placeholder 1"/>
-          <p:cNvSpPr>
-            <a:spLocks noGrp="1" noRot="1" noChangeAspect="1"/>
-          </p:cNvSpPr>
-          <p:nvPr>
-            <p:ph type="sldImg"/>
-          </p:nvPr>
-        </p:nvSpPr>
-        <p:spPr/>
-      </p:sp>
-      <p:sp>
-        <p:nvSpPr>
-          <p:cNvPr id="3" name="Notes Placeholder 2"/>
-          <p:cNvSpPr>
-            <a:spLocks noGrp="1"/>
-          </p:cNvSpPr>
-          <p:nvPr>
-            <p:ph type="body" idx="1"/>
-          </p:nvPr>
-        </p:nvSpPr>
-        <p:spPr/>
-        <p:txBody>
-          <a:bodyPr/>
-          <a:lstStyle/>
-          <a:p>
-            <a:r>
-              <a:rPr lang="en-US" dirty="0"/>
-              <a:t>Before you start, select Pull requests and your fork. On Authored by me, you should see at least three practice PRs. If you finished Chapter 03, some may already be fixed, and your search-fix PR appears too; that is expected. Then open Automations, select New automation, name it PR review readiness report, change Trigger from Daily to Manual, make sure Run in the cloud is off so it runs locally, and paste the full prompt from the chapter. Use Select project to pick your copilot-app-for-beginners project, and set Workspace to Current checkout, because the report only reads data. Use the arrow next to Create and choose Create and run. It appears under Your automations with a Manual label, and the run appears under Recent runs.</a:t>
-            </a:r>
-            <a:endParaRPr lang="en-US" dirty="0"/>
-          </a:p>
-        </p:txBody>
-      </p:sp>
-      <p:sp>
-        <p:nvSpPr>
-          <p:cNvPr id="4" name="Slide Number Placeholder 3"/>
-          <p:cNvSpPr>
-            <a:spLocks noGrp="1"/>
-          </p:cNvSpPr>
-          <p:nvPr>
-            <p:ph type="sldNum" sz="quarter" idx="10"/>
-          </p:nvPr>
-        </p:nvSpPr>
-        <p:spPr/>
-        <p:txBody>
-          <a:bodyPr/>
-          <a:lstStyle/>
-          <a:p>
-            <a:fld id="{F7021451-1387-4CA6-816F-3879F97B5CBC}" type="slidenum">
-              <a:rPr lang="en-US"/>
-              <a:t>8</a:t>
-            </a:fld>
-            <a:endParaRPr lang="en-US"/>
-          </a:p>
-        </p:txBody>
-      </p:sp>
-    </p:spTree>
-    <p:extLst>
-      <p:ext uri="{BB962C8B-B14F-4D97-AF65-F5344CB8AC3E}">
-        <p14:creationId xmlns:p14="http://schemas.microsoft.com/office/powerpoint/2010/main" val="1024086991"/>
-      </p:ext>
-    </p:extLst>
-  </p:cSld>
-  <p:clrMapOvr>
-    <a:masterClrMapping/>
-  </p:clrMapOvr>
-</p:notes>
+<ns0:notes xmlns:ns0="http://schemas.openxmlformats.org/presentationml/2006/main" xmlns:ns1="http://schemas.openxmlformats.org/drawingml/2006/main" xmlns:ns2="http://schemas.microsoft.com/office/powerpoint/2010/main">
+  <ns0:cSld>
+    <ns0:spTree>
+      <ns0:nvGrpSpPr>
+        <ns0:cNvPr id="1" name=""/>
+        <ns0:cNvGrpSpPr/>
+        <ns0:nvPr/>
+      </ns0:nvGrpSpPr>
+      <ns0:grpSpPr>
+        <ns1:xfrm>
+          <ns1:off x="0" y="0"/>
+          <ns1:ext cx="0" cy="0"/>
+          <ns1:chOff x="0" y="0"/>
+          <ns1:chExt cx="0" cy="0"/>
+        </ns1:xfrm>
+      </ns0:grpSpPr>
+      <ns0:sp>
+        <ns0:nvSpPr>
+          <ns0:cNvPr id="2" name="Slide Image Placeholder 1"/>
+          <ns0:cNvSpPr>
+            <ns1:spLocks noGrp="1" noRot="1" noChangeAspect="1"/>
+          </ns0:cNvSpPr>
+          <ns0:nvPr>
+            <ns0:ph type="sldImg"/>
+          </ns0:nvPr>
+        </ns0:nvSpPr>
+        <ns0:spPr/>
+      </ns0:sp>
+      <ns0:sp>
+        <ns0:nvSpPr>
+          <ns0:cNvPr id="3" name="Notes Placeholder 2"/>
+          <ns0:cNvSpPr>
+            <ns1:spLocks noGrp="1"/>
+          </ns0:cNvSpPr>
+          <ns0:nvPr>
+            <ns0:ph type="body" idx="1"/>
+          </ns0:nvPr>
+        </ns0:nvSpPr>
+        <ns0:spPr/>
+        <ns0:txBody>
+          <ns1:bodyPr/>
+          <ns1:lstStyle/>
+          <ns1:p>
+            <ns1:r>
+              <ns1:rPr lang="en-US" dirty="0"/>
+              <ns1:t>Before you start, select Pull requests and your fork. On Authored by me, you should see practice PRs. Open Automations, select New automation, name it PR review readiness report, change Trigger from Daily to Manual, make sure Run in the cloud is off so it runs locally, and paste the full prompt from the chapter. Use Select repository to pick your copilot-app-for-beginners fork, then set Workspace to Current checkout because the report only reads data. Use the arrow next to Create and choose Create and run. It appears under Your automations with a Manual label, and the run appears under Recent runs.</ns1:t>
+            </ns1:r>
+            <ns1:endParaRPr lang="en-US" dirty="0"/>
+          </ns1:p>
+        </ns0:txBody>
+      </ns0:sp>
+      <ns0:sp>
+        <ns0:nvSpPr>
+          <ns0:cNvPr id="4" name="Slide Number Placeholder 3"/>
+          <ns0:cNvSpPr>
+            <ns1:spLocks noGrp="1"/>
+          </ns0:cNvSpPr>
+          <ns0:nvPr>
+            <ns0:ph type="sldNum" sz="quarter" idx="10"/>
+          </ns0:nvPr>
+        </ns0:nvSpPr>
+        <ns0:spPr/>
+        <ns0:txBody>
+          <ns1:bodyPr/>
+          <ns1:lstStyle/>
+          <ns1:p>
+            <ns1:fld id="{F7021451-1387-4CA6-816F-3879F97B5CBC}" type="slidenum">
+              <ns1:rPr lang="en-US"/>
+              <ns1:t>8</ns1:t>
+            </ns1:fld>
+            <ns1:endParaRPr lang="en-US"/>
+          </ns1:p>
+        </ns0:txBody>
+      </ns0:sp>
+    </ns0:spTree>
+    <ns0:extLst>
+      <ns0:ext uri="{BB962C8B-B14F-4D97-AF65-F5344CB8AC3E}">
+        <ns2:creationId val="1024086991"/>
+      </ns0:ext>
+    </ns0:extLst>
+  </ns0:cSld>
+  <ns0:clrMapOvr>
+    <ns1:masterClrMapping/>
+  </ns0:clrMapOvr>
+</ns0:notes>
 </file>
 
 <file path=ppt/notesSlides/notesSlide9.xml><?xml version="1.0" encoding="utf-8"?>
@@ -2509,1047 +2509,1047 @@
 </file>
 
 <file path=ppt/slides/slide10.xml><?xml version="1.0" encoding="utf-8"?>
-<p:sld xmlns:a="http://schemas.openxmlformats.org/drawingml/2006/main" xmlns:r="http://schemas.openxmlformats.org/officeDocument/2006/relationships" xmlns:p="http://schemas.openxmlformats.org/presentationml/2006/main">
-  <p:cSld name="Slide 10">
-    <p:bg>
-      <p:bgPr>
-        <a:solidFill>
-          <a:srgbClr val="FFFFFF"/>
-        </a:solidFill>
-      </p:bgPr>
-    </p:bg>
-    <p:spTree>
-      <p:nvGrpSpPr>
-        <p:cNvPr id="1" name=""/>
-        <p:cNvGrpSpPr/>
-        <p:nvPr/>
-      </p:nvGrpSpPr>
-      <p:grpSpPr>
-        <a:xfrm>
-          <a:off x="0" y="0"/>
-          <a:ext cx="0" cy="0"/>
-          <a:chOff x="0" y="0"/>
-          <a:chExt cx="0" cy="0"/>
-        </a:xfrm>
-      </p:grpSpPr>
-      <p:pic>
-        <p:nvPicPr>
-          <p:cNvPr id="2" name="Image 0" descr="">
-            <a:extLst>
-              <a:ext uri="{C183D7F6-B498-43B3-948B-1728B52AA6E4}">
-                <adec:decorative xmlns:adec="http://schemas.microsoft.com/office/drawing/2017/decorative" val="1"/>
-              </a:ext>
-            </a:extLst>
-          </p:cNvPr>
-          <p:cNvPicPr>
-            <a:picLocks noChangeAspect="1"/>
-          </p:cNvPicPr>
-          <p:nvPr/>
-        </p:nvPicPr>
-        <p:blipFill>
-          <a:blip r:embed="rId1"/>
-          <a:stretch>
-            <a:fillRect/>
-          </a:stretch>
-        </p:blipFill>
-        <p:spPr>
-          <a:xfrm>
-            <a:off x="6349901" y="0"/>
-            <a:ext cx="2793950" cy="1308050"/>
-          </a:xfrm>
-          <a:prstGeom prst="rect">
-            <a:avLst/>
-          </a:prstGeom>
-        </p:spPr>
-      </p:pic>
-      <p:sp>
-        <p:nvSpPr>
-          <p:cNvPr id="3" name="Text 0"/>
-          <p:cNvSpPr/>
-          <p:nvPr/>
-        </p:nvSpPr>
-        <p:spPr>
-          <a:xfrm>
-            <a:off x="7340501" y="177701"/>
-            <a:ext cx="1168301" cy="279350"/>
-          </a:xfrm>
-          <a:prstGeom prst="roundRect">
-            <a:avLst>
-              <a:gd name="adj" fmla="val 22731"/>
-            </a:avLst>
-          </a:prstGeom>
-          <a:solidFill>
-            <a:srgbClr val="1A7F37"/>
-          </a:solidFill>
-          <a:ln/>
-        </p:spPr>
-        <p:txBody>
-          <a:bodyPr wrap="square" rtlCol="0" anchor="ctr"/>
-          <a:lstStyle/>
-          <a:p>
-            <a:pPr indent="0" marL="0">
-              <a:buNone/>
-            </a:pPr>
-            <a:endParaRPr lang="en-US" dirty="0"/>
-          </a:p>
-        </p:txBody>
-      </p:sp>
-      <p:sp>
-        <p:nvSpPr>
-          <p:cNvPr id="4" name="Text 1"/>
-          <p:cNvSpPr/>
-          <p:nvPr/>
-        </p:nvSpPr>
-        <p:spPr>
-          <a:xfrm>
-            <a:off x="7461041" y="231577"/>
-            <a:ext cx="927071" cy="171450"/>
-          </a:xfrm>
-          <a:prstGeom prst="rect">
-            <a:avLst/>
-          </a:prstGeom>
-          <a:noFill/>
-          <a:ln/>
-        </p:spPr>
-        <p:txBody>
-          <a:bodyPr wrap="square" lIns="0" tIns="0" rIns="0" bIns="0" rtlCol="0" anchor="t"/>
-          <a:lstStyle/>
-          <a:p>
-            <a:pPr algn="ctr" indent="0" marL="0">
-              <a:buNone/>
-            </a:pPr>
-            <a:r>
-              <a:rPr lang="en-US" sz="1150" b="1" dirty="0">
-                <a:solidFill>
-                  <a:srgbClr val="FFFFFF"/>
-                </a:solidFill>
-                <a:latin typeface="Arial" pitchFamily="34" charset="0"/>
-                <a:ea typeface="Arial" pitchFamily="34" charset="-122"/>
-                <a:cs typeface="Arial" pitchFamily="34" charset="-120"/>
-              </a:rPr>
-              <a:t>CHAPTER 07</a:t>
-            </a:r>
-            <a:endParaRPr lang="en-US" sz="1150" dirty="0"/>
-          </a:p>
-        </p:txBody>
-      </p:sp>
-      <p:pic>
-        <p:nvPicPr>
-          <p:cNvPr id="5" name="Image 1" descr="Open this chapter on GitHub">
-            <a:hlinkClick r:id="rId3" tooltip="https://github.com/github/copilot-app-for-beginners/tree/main/07-automations"/>
-          </p:cNvPr>
-          <p:cNvPicPr>
-            <a:picLocks noChangeAspect="1"/>
-          </p:cNvPicPr>
-          <p:nvPr/>
-        </p:nvPicPr>
-        <p:blipFill>
-          <a:blip r:embed="rId2"/>
-          <a:stretch>
-            <a:fillRect/>
-          </a:stretch>
-        </p:blipFill>
-        <p:spPr>
-          <a:xfrm>
-            <a:off x="8610600" y="165050"/>
-            <a:ext cx="304800" cy="304800"/>
-          </a:xfrm>
-          <a:prstGeom prst="rect">
-            <a:avLst/>
-          </a:prstGeom>
-        </p:spPr>
-      </p:pic>
-      <p:sp>
-        <p:nvSpPr>
-          <p:cNvPr id="6" name="Text 2"/>
-          <p:cNvSpPr/>
-          <p:nvPr/>
-        </p:nvSpPr>
-        <p:spPr>
-          <a:xfrm>
-            <a:off x="507950" y="381000"/>
-            <a:ext cx="8161020" cy="190500"/>
-          </a:xfrm>
-          <a:prstGeom prst="rect">
-            <a:avLst/>
-          </a:prstGeom>
-          <a:noFill/>
-          <a:ln/>
-        </p:spPr>
-        <p:txBody>
-          <a:bodyPr wrap="square" lIns="0" tIns="0" rIns="0" bIns="0" rtlCol="0" anchor="t"/>
-          <a:lstStyle/>
-          <a:p>
-            <a:pPr algn="l" indent="0" marL="0">
-              <a:buNone/>
-            </a:pPr>
-            <a:r>
-              <a:rPr lang="en-US" sz="1250" b="1" dirty="0">
-                <a:solidFill>
-                  <a:srgbClr val="8250DF"/>
-                </a:solidFill>
-                <a:latin typeface="Arial" pitchFamily="34" charset="0"/>
-                <a:ea typeface="Arial" pitchFamily="34" charset="-122"/>
-                <a:cs typeface="Arial" pitchFamily="34" charset="-120"/>
-              </a:rPr>
-              <a:t>EXERCISE</a:t>
-            </a:r>
-            <a:endParaRPr lang="en-US" sz="1250" dirty="0"/>
-          </a:p>
-        </p:txBody>
-      </p:sp>
-      <p:sp>
-        <p:nvSpPr>
-          <p:cNvPr id="7" name="Text 3"/>
-          <p:cNvSpPr/>
-          <p:nvPr/>
-        </p:nvSpPr>
-        <p:spPr>
-          <a:xfrm>
-            <a:off x="507950" y="622250"/>
-            <a:ext cx="8161020" cy="419100"/>
-          </a:xfrm>
-          <a:prstGeom prst="rect">
-            <a:avLst/>
-          </a:prstGeom>
-          <a:noFill/>
-          <a:ln/>
-        </p:spPr>
-        <p:txBody>
-          <a:bodyPr wrap="square" lIns="0" tIns="0" rIns="0" bIns="0" rtlCol="0" anchor="t"/>
-          <a:lstStyle/>
-          <a:p>
-            <a:pPr algn="l" indent="0" marL="0">
-              <a:lnSpc>
-                <a:spcPts val="3300"/>
-              </a:lnSpc>
-              <a:spcBef>
-                <a:spcPts val="400"/>
-              </a:spcBef>
-              <a:buNone/>
-            </a:pPr>
-            <a:r>
-              <a:rPr lang="en-US" sz="2800" b="1" dirty="0">
-                <a:solidFill>
-                  <a:srgbClr val="1F2328"/>
-                </a:solidFill>
-                <a:latin typeface="Arial" pitchFamily="34" charset="0"/>
-                <a:ea typeface="Arial" pitchFamily="34" charset="-122"/>
-                <a:cs typeface="Arial" pitchFamily="34" charset="-120"/>
-              </a:rPr>
-              <a:t>Schedule it for every morning</a:t>
-            </a:r>
-            <a:endParaRPr lang="en-US" sz="2800" dirty="0"/>
-          </a:p>
-        </p:txBody>
-      </p:sp>
-      <p:sp>
-        <p:nvSpPr>
-          <p:cNvPr id="8" name="Text 4"/>
-          <p:cNvSpPr/>
-          <p:nvPr/>
-        </p:nvSpPr>
-        <p:spPr>
-          <a:xfrm>
-            <a:off x="1302395" y="1450777"/>
-            <a:ext cx="2221111" cy="2990850"/>
-          </a:xfrm>
-          <a:prstGeom prst="roundRect">
-            <a:avLst>
-              <a:gd name="adj" fmla="val 3431"/>
-            </a:avLst>
-          </a:prstGeom>
-          <a:solidFill>
-            <a:srgbClr val="FFFFFF"/>
-          </a:solidFill>
-          <a:ln w="9525">
-            <a:solidFill>
-              <a:srgbClr val="D1D9E0"/>
-            </a:solidFill>
-          </a:ln>
-          <a:effectLst>
-            <a:outerShdw sx="100000" sy="100000" kx="0" ky="0" algn="bl" rotWithShape="0" blurRad="38100" dist="9525" dir="5400000">
-              <a:srgbClr val="1f2328">
-                <a:alpha val="12000"/>
-              </a:srgbClr>
-            </a:outerShdw>
-          </a:effectLst>
-        </p:spPr>
-        <p:txBody>
-          <a:bodyPr wrap="square" rtlCol="0" anchor="ctr"/>
-          <a:lstStyle/>
-          <a:p>
-            <a:pPr indent="0" marL="0">
-              <a:buNone/>
-            </a:pPr>
-            <a:endParaRPr lang="en-US" dirty="0"/>
-          </a:p>
-        </p:txBody>
-      </p:sp>
-      <p:pic>
-        <p:nvPicPr>
-          <p:cNvPr id="9" name="Image 2" descr="Automation trigger options in the new-automation form">    </p:cNvPr>
-          <p:cNvPicPr>
-            <a:picLocks noChangeAspect="1"/>
-          </p:cNvPicPr>
-          <p:nvPr/>
-        </p:nvPicPr>
-        <p:blipFill>
-          <a:blip r:embed="rId4"/>
-          <a:stretch>
-            <a:fillRect/>
-          </a:stretch>
-        </p:blipFill>
-        <p:spPr>
-          <a:xfrm>
-            <a:off x="1350020" y="1498402"/>
-            <a:ext cx="2125861" cy="2895600"/>
-          </a:xfrm>
-          <a:prstGeom prst="rect">
-            <a:avLst/>
-          </a:prstGeom>
-        </p:spPr>
-      </p:pic>
-      <p:sp>
-        <p:nvSpPr>
-          <p:cNvPr id="10" name="Text 5"/>
-          <p:cNvSpPr/>
-          <p:nvPr/>
-        </p:nvSpPr>
-        <p:spPr>
-          <a:xfrm>
-            <a:off x="4571851" y="1522214"/>
-            <a:ext cx="1968550" cy="901601"/>
-          </a:xfrm>
-          <a:prstGeom prst="roundRect">
-            <a:avLst>
-              <a:gd name="adj" fmla="val 14086"/>
-            </a:avLst>
-          </a:prstGeom>
-          <a:solidFill>
-            <a:srgbClr val="DDF4FF"/>
-          </a:solidFill>
-          <a:ln w="9525">
-            <a:solidFill>
-              <a:srgbClr val="9CD7FF"/>
-            </a:solidFill>
-          </a:ln>
-        </p:spPr>
-        <p:txBody>
-          <a:bodyPr wrap="square" rtlCol="0" anchor="ctr"/>
-          <a:lstStyle/>
-          <a:p>
-            <a:pPr indent="0" marL="0">
-              <a:buNone/>
-            </a:pPr>
-            <a:endParaRPr lang="en-US" dirty="0"/>
-          </a:p>
-        </p:txBody>
-      </p:sp>
-      <p:sp>
-        <p:nvSpPr>
-          <p:cNvPr id="11" name="Text 6"/>
-          <p:cNvSpPr/>
-          <p:nvPr/>
-        </p:nvSpPr>
-        <p:spPr>
-          <a:xfrm>
-            <a:off x="4733776" y="1658689"/>
-            <a:ext cx="1677594" cy="419100"/>
-          </a:xfrm>
-          <a:prstGeom prst="rect">
-            <a:avLst/>
-          </a:prstGeom>
-          <a:noFill/>
-          <a:ln/>
-        </p:spPr>
-        <p:txBody>
-          <a:bodyPr wrap="square" lIns="0" tIns="0" rIns="0" bIns="0" rtlCol="0" anchor="t"/>
-          <a:lstStyle/>
-          <a:p>
-            <a:pPr algn="l" indent="0" marL="0">
-              <a:buNone/>
-            </a:pPr>
-            <a:r>
-              <a:rPr lang="en-US" sz="1450" b="1" dirty="0">
-                <a:solidFill>
-                  <a:srgbClr val="1F2328"/>
-                </a:solidFill>
-                <a:latin typeface="Arial" pitchFamily="34" charset="0"/>
-                <a:ea typeface="Arial" pitchFamily="34" charset="-122"/>
-                <a:cs typeface="Arial" pitchFamily="34" charset="-120"/>
-              </a:rPr>
-              <a:t>Manual: "What is the status now?"</a:t>
-            </a:r>
-            <a:endParaRPr lang="en-US" sz="1450" dirty="0"/>
-          </a:p>
-        </p:txBody>
-      </p:sp>
-      <p:sp>
-        <p:nvSpPr>
-          <p:cNvPr id="12" name="Text 7"/>
-          <p:cNvSpPr/>
-          <p:nvPr/>
-        </p:nvSpPr>
-        <p:spPr>
-          <a:xfrm>
-            <a:off x="6667351" y="1522214"/>
-            <a:ext cx="1968550" cy="901601"/>
-          </a:xfrm>
-          <a:prstGeom prst="roundRect">
-            <a:avLst>
-              <a:gd name="adj" fmla="val 14086"/>
-            </a:avLst>
-          </a:prstGeom>
-          <a:solidFill>
-            <a:srgbClr val="DAFBE1"/>
-          </a:solidFill>
-          <a:ln w="9525">
-            <a:solidFill>
-              <a:srgbClr val="8CE7A5"/>
-            </a:solidFill>
-          </a:ln>
-        </p:spPr>
-        <p:txBody>
-          <a:bodyPr wrap="square" rtlCol="0" anchor="ctr"/>
-          <a:lstStyle/>
-          <a:p>
-            <a:pPr indent="0" marL="0">
-              <a:buNone/>
-            </a:pPr>
-            <a:endParaRPr lang="en-US" dirty="0"/>
-          </a:p>
-        </p:txBody>
-      </p:sp>
-      <p:sp>
-        <p:nvSpPr>
-          <p:cNvPr id="13" name="Text 8"/>
-          <p:cNvSpPr/>
-          <p:nvPr/>
-        </p:nvSpPr>
-        <p:spPr>
-          <a:xfrm>
-            <a:off x="6829276" y="1658689"/>
-            <a:ext cx="1677594" cy="628650"/>
-          </a:xfrm>
-          <a:prstGeom prst="rect">
-            <a:avLst/>
-          </a:prstGeom>
-          <a:noFill/>
-          <a:ln/>
-        </p:spPr>
-        <p:txBody>
-          <a:bodyPr wrap="square" lIns="0" tIns="0" rIns="0" bIns="0" rtlCol="0" anchor="t"/>
-          <a:lstStyle/>
-          <a:p>
-            <a:pPr algn="l" indent="0" marL="0">
-              <a:buNone/>
-            </a:pPr>
-            <a:r>
-              <a:rPr lang="en-US" sz="1450" b="1" dirty="0">
-                <a:solidFill>
-                  <a:srgbClr val="1F2328"/>
-                </a:solidFill>
-                <a:latin typeface="Arial" pitchFamily="34" charset="0"/>
-                <a:ea typeface="Arial" pitchFamily="34" charset="-122"/>
-                <a:cs typeface="Arial" pitchFamily="34" charset="-120"/>
-              </a:rPr>
-              <a:t>Daily: "What changed since yesterday?"</a:t>
-            </a:r>
-            <a:endParaRPr lang="en-US" sz="1450" dirty="0"/>
-          </a:p>
-        </p:txBody>
-      </p:sp>
-      <p:sp>
-        <p:nvSpPr>
-          <p:cNvPr id="14" name="Text 9"/>
-          <p:cNvSpPr/>
-          <p:nvPr/>
-        </p:nvSpPr>
-        <p:spPr>
-          <a:xfrm>
-            <a:off x="4571851" y="2626965"/>
-            <a:ext cx="279350" cy="279350"/>
-          </a:xfrm>
-          <a:prstGeom prst="roundRect">
-            <a:avLst>
-              <a:gd name="adj" fmla="val 327331"/>
-            </a:avLst>
-          </a:prstGeom>
-          <a:solidFill>
-            <a:srgbClr val="8250DF"/>
-          </a:solidFill>
-          <a:ln/>
-        </p:spPr>
-        <p:txBody>
-          <a:bodyPr wrap="square" rtlCol="0" anchor="ctr"/>
-          <a:lstStyle/>
-          <a:p>
-            <a:pPr indent="0" marL="0">
-              <a:buNone/>
-            </a:pPr>
-            <a:endParaRPr lang="en-US" dirty="0"/>
-          </a:p>
-        </p:txBody>
-      </p:sp>
-      <p:sp>
-        <p:nvSpPr>
-          <p:cNvPr id="15" name="Text 10"/>
-          <p:cNvSpPr/>
-          <p:nvPr/>
-        </p:nvSpPr>
-        <p:spPr>
-          <a:xfrm>
-            <a:off x="4666516" y="2671316"/>
-            <a:ext cx="90020" cy="190500"/>
-          </a:xfrm>
-          <a:prstGeom prst="rect">
-            <a:avLst/>
-          </a:prstGeom>
-          <a:noFill/>
-          <a:ln/>
-        </p:spPr>
-        <p:txBody>
-          <a:bodyPr wrap="square" lIns="0" tIns="0" rIns="0" bIns="0" rtlCol="0" anchor="t"/>
-          <a:lstStyle/>
-          <a:p>
-            <a:pPr algn="ctr" indent="0" marL="0">
-              <a:buNone/>
-            </a:pPr>
-            <a:r>
-              <a:rPr lang="en-US" sz="1250" b="1" dirty="0">
-                <a:solidFill>
-                  <a:srgbClr val="FFFFFF"/>
-                </a:solidFill>
-                <a:latin typeface="Arial" pitchFamily="34" charset="0"/>
-                <a:ea typeface="Arial" pitchFamily="34" charset="-122"/>
-                <a:cs typeface="Arial" pitchFamily="34" charset="-120"/>
-              </a:rPr>
-              <a:t>1</a:t>
-            </a:r>
-            <a:endParaRPr lang="en-US" sz="1250" dirty="0"/>
-          </a:p>
-        </p:txBody>
-      </p:sp>
-      <p:sp>
-        <p:nvSpPr>
-          <p:cNvPr id="16" name="Text 11"/>
-          <p:cNvSpPr/>
-          <p:nvPr/>
-        </p:nvSpPr>
-        <p:spPr>
-          <a:xfrm>
-            <a:off x="5003602" y="2626965"/>
-            <a:ext cx="2051337" cy="222200"/>
-          </a:xfrm>
-          <a:prstGeom prst="rect">
-            <a:avLst/>
-          </a:prstGeom>
-          <a:noFill/>
-          <a:ln/>
-        </p:spPr>
-        <p:txBody>
-          <a:bodyPr wrap="square" lIns="0" tIns="0" rIns="0" bIns="0" rtlCol="0" anchor="t"/>
-          <a:lstStyle/>
-          <a:p>
-            <a:pPr algn="l" indent="0" marL="0">
-              <a:lnSpc>
-                <a:spcPts val="1750"/>
-              </a:lnSpc>
-              <a:buNone/>
-            </a:pPr>
-            <a:r>
-              <a:rPr lang="en-US" sz="1550" b="1" dirty="0">
-                <a:solidFill>
-                  <a:srgbClr val="1F2328"/>
-                </a:solidFill>
-                <a:latin typeface="Arial" pitchFamily="34" charset="0"/>
-                <a:ea typeface="Arial" pitchFamily="34" charset="-122"/>
-                <a:cs typeface="Arial" pitchFamily="34" charset="-120"/>
-              </a:rPr>
-              <a:t>Edit the trigger</a:t>
-            </a:r>
-            <a:endParaRPr lang="en-US" sz="1550" dirty="0"/>
-          </a:p>
-        </p:txBody>
-      </p:sp>
-      <p:sp>
-        <p:nvSpPr>
-          <p:cNvPr id="17" name="Text 12"/>
-          <p:cNvSpPr/>
-          <p:nvPr/>
-        </p:nvSpPr>
-        <p:spPr>
-          <a:xfrm>
-            <a:off x="5003602" y="2874466"/>
-            <a:ext cx="2051337" cy="198090"/>
-          </a:xfrm>
-          <a:prstGeom prst="rect">
-            <a:avLst/>
-          </a:prstGeom>
-          <a:noFill/>
-          <a:ln/>
-        </p:spPr>
-        <p:txBody>
-          <a:bodyPr wrap="square" lIns="0" tIns="0" rIns="0" bIns="0" rtlCol="0" anchor="t"/>
-          <a:lstStyle/>
-          <a:p>
-            <a:pPr algn="l" indent="0" marL="0">
-              <a:lnSpc>
-                <a:spcPts val="1560"/>
-              </a:lnSpc>
-              <a:buNone/>
-            </a:pPr>
-            <a:r>
-              <a:rPr lang="en-US" sz="1350" b="1" dirty="0">
-                <a:solidFill>
-                  <a:srgbClr val="59636E"/>
-                </a:solidFill>
-                <a:latin typeface="Arial" pitchFamily="34" charset="0"/>
-                <a:ea typeface="Arial" pitchFamily="34" charset="-122"/>
-                <a:cs typeface="Arial" pitchFamily="34" charset="-120"/>
-              </a:rPr>
-              <a:t>Manual</a:t>
-            </a:r>
-            <a:pPr algn="l" indent="0" marL="0">
-              <a:lnSpc>
-                <a:spcPts val="1560"/>
-              </a:lnSpc>
-              <a:buNone/>
-            </a:pPr>
-            <a:r>
-              <a:rPr lang="en-US" sz="1350" dirty="0">
-                <a:solidFill>
-                  <a:srgbClr val="59636E"/>
-                </a:solidFill>
-                <a:latin typeface="Arial" pitchFamily="34" charset="0"/>
-                <a:ea typeface="Arial" pitchFamily="34" charset="-122"/>
-                <a:cs typeface="Arial" pitchFamily="34" charset="-120"/>
-              </a:rPr>
-              <a:t> to </a:t>
-            </a:r>
-            <a:pPr algn="l" indent="0" marL="0">
-              <a:lnSpc>
-                <a:spcPts val="1560"/>
-              </a:lnSpc>
-              <a:buNone/>
-            </a:pPr>
-            <a:r>
-              <a:rPr lang="en-US" sz="1350" b="1" dirty="0">
-                <a:solidFill>
-                  <a:srgbClr val="59636E"/>
-                </a:solidFill>
-                <a:latin typeface="Arial" pitchFamily="34" charset="0"/>
-                <a:ea typeface="Arial" pitchFamily="34" charset="-122"/>
-                <a:cs typeface="Arial" pitchFamily="34" charset="-120"/>
-              </a:rPr>
-              <a:t>Daily</a:t>
-            </a:r>
-            <a:pPr algn="l" indent="0" marL="0">
-              <a:lnSpc>
-                <a:spcPts val="1560"/>
-              </a:lnSpc>
-              <a:buNone/>
-            </a:pPr>
-            <a:r>
-              <a:rPr lang="en-US" sz="1350" dirty="0">
-                <a:solidFill>
-                  <a:srgbClr val="59636E"/>
-                </a:solidFill>
-                <a:latin typeface="Arial" pitchFamily="34" charset="0"/>
-                <a:ea typeface="Arial" pitchFamily="34" charset="-122"/>
-                <a:cs typeface="Arial" pitchFamily="34" charset="-120"/>
-              </a:rPr>
-              <a:t>, at </a:t>
-            </a:r>
-            <a:pPr algn="l" indent="0" marL="0">
-              <a:lnSpc>
-                <a:spcPts val="1560"/>
-              </a:lnSpc>
-              <a:buNone/>
-            </a:pPr>
-            <a:r>
-              <a:rPr lang="en-US" sz="1350" b="1" dirty="0">
-                <a:solidFill>
-                  <a:srgbClr val="59636E"/>
-                </a:solidFill>
-                <a:latin typeface="Arial" pitchFamily="34" charset="0"/>
-                <a:ea typeface="Arial" pitchFamily="34" charset="-122"/>
-                <a:cs typeface="Arial" pitchFamily="34" charset="-120"/>
-              </a:rPr>
-              <a:t>08:00</a:t>
-            </a:r>
-            <a:pPr algn="l" indent="0" marL="0">
-              <a:lnSpc>
-                <a:spcPts val="1560"/>
-              </a:lnSpc>
-              <a:buNone/>
-            </a:pPr>
-            <a:r>
-              <a:rPr lang="en-US" sz="1350" dirty="0">
-                <a:solidFill>
-                  <a:srgbClr val="59636E"/>
-                </a:solidFill>
-                <a:latin typeface="Arial" pitchFamily="34" charset="0"/>
-                <a:ea typeface="Arial" pitchFamily="34" charset="-122"/>
-                <a:cs typeface="Arial" pitchFamily="34" charset="-120"/>
-              </a:rPr>
-              <a:t>.</a:t>
-            </a:r>
-            <a:endParaRPr lang="en-US" sz="1350" dirty="0"/>
-          </a:p>
-        </p:txBody>
-      </p:sp>
-      <p:sp>
-        <p:nvSpPr>
-          <p:cNvPr id="18" name="Text 13"/>
-          <p:cNvSpPr/>
-          <p:nvPr/>
-        </p:nvSpPr>
-        <p:spPr>
-          <a:xfrm>
-            <a:off x="4571851" y="3275707"/>
-            <a:ext cx="279350" cy="279350"/>
-          </a:xfrm>
-          <a:prstGeom prst="roundRect">
-            <a:avLst>
-              <a:gd name="adj" fmla="val 327331"/>
-            </a:avLst>
-          </a:prstGeom>
-          <a:solidFill>
-            <a:srgbClr val="8250DF"/>
-          </a:solidFill>
-          <a:ln/>
-        </p:spPr>
-        <p:txBody>
-          <a:bodyPr wrap="square" rtlCol="0" anchor="ctr"/>
-          <a:lstStyle/>
-          <a:p>
-            <a:pPr indent="0" marL="0">
-              <a:buNone/>
-            </a:pPr>
-            <a:endParaRPr lang="en-US" dirty="0"/>
-          </a:p>
-        </p:txBody>
-      </p:sp>
-      <p:sp>
-        <p:nvSpPr>
-          <p:cNvPr id="19" name="Text 14"/>
-          <p:cNvSpPr/>
-          <p:nvPr/>
-        </p:nvSpPr>
-        <p:spPr>
-          <a:xfrm>
-            <a:off x="4666516" y="3320058"/>
-            <a:ext cx="90020" cy="190500"/>
-          </a:xfrm>
-          <a:prstGeom prst="rect">
-            <a:avLst/>
-          </a:prstGeom>
-          <a:noFill/>
-          <a:ln/>
-        </p:spPr>
-        <p:txBody>
-          <a:bodyPr wrap="square" lIns="0" tIns="0" rIns="0" bIns="0" rtlCol="0" anchor="t"/>
-          <a:lstStyle/>
-          <a:p>
-            <a:pPr algn="ctr" indent="0" marL="0">
-              <a:buNone/>
-            </a:pPr>
-            <a:r>
-              <a:rPr lang="en-US" sz="1250" b="1" dirty="0">
-                <a:solidFill>
-                  <a:srgbClr val="FFFFFF"/>
-                </a:solidFill>
-                <a:latin typeface="Arial" pitchFamily="34" charset="0"/>
-                <a:ea typeface="Arial" pitchFamily="34" charset="-122"/>
-                <a:cs typeface="Arial" pitchFamily="34" charset="-120"/>
-              </a:rPr>
-              <a:t>2</a:t>
-            </a:r>
-            <a:endParaRPr lang="en-US" sz="1250" dirty="0"/>
-          </a:p>
-        </p:txBody>
-      </p:sp>
-      <p:sp>
-        <p:nvSpPr>
-          <p:cNvPr id="20" name="Text 15"/>
-          <p:cNvSpPr/>
-          <p:nvPr/>
-        </p:nvSpPr>
-        <p:spPr>
-          <a:xfrm>
-            <a:off x="5003602" y="3275707"/>
-            <a:ext cx="3257273" cy="222200"/>
-          </a:xfrm>
-          <a:prstGeom prst="rect">
-            <a:avLst/>
-          </a:prstGeom>
-          <a:noFill/>
-          <a:ln/>
-        </p:spPr>
-        <p:txBody>
-          <a:bodyPr wrap="square" lIns="0" tIns="0" rIns="0" bIns="0" rtlCol="0" anchor="t"/>
-          <a:lstStyle/>
-          <a:p>
-            <a:pPr algn="l" indent="0" marL="0">
-              <a:lnSpc>
-                <a:spcPts val="1750"/>
-              </a:lnSpc>
-              <a:buNone/>
-            </a:pPr>
-            <a:r>
-              <a:rPr lang="en-US" sz="1550" b="1" dirty="0">
-                <a:solidFill>
-                  <a:srgbClr val="1F2328"/>
-                </a:solidFill>
-                <a:latin typeface="Arial" pitchFamily="34" charset="0"/>
-                <a:ea typeface="Arial" pitchFamily="34" charset="-122"/>
-                <a:cs typeface="Arial" pitchFamily="34" charset="-120"/>
-              </a:rPr>
-              <a:t>Keep the app running</a:t>
-            </a:r>
-            <a:endParaRPr lang="en-US" sz="1550" dirty="0"/>
-          </a:p>
-        </p:txBody>
-      </p:sp>
-      <p:sp>
-        <p:nvSpPr>
-          <p:cNvPr id="21" name="Text 16"/>
-          <p:cNvSpPr/>
-          <p:nvPr/>
-        </p:nvSpPr>
-        <p:spPr>
-          <a:xfrm>
-            <a:off x="5003602" y="3523208"/>
-            <a:ext cx="3257273" cy="198090"/>
-          </a:xfrm>
-          <a:prstGeom prst="rect">
-            <a:avLst/>
-          </a:prstGeom>
-          <a:noFill/>
-          <a:ln/>
-        </p:spPr>
-        <p:txBody>
-          <a:bodyPr wrap="square" lIns="0" tIns="0" rIns="0" bIns="0" rtlCol="0" anchor="t"/>
-          <a:lstStyle/>
-          <a:p>
-            <a:pPr algn="l" indent="0" marL="0">
-              <a:lnSpc>
-                <a:spcPts val="1560"/>
-              </a:lnSpc>
-              <a:buNone/>
-            </a:pPr>
-            <a:r>
-              <a:rPr lang="en-US" sz="1350" dirty="0">
-                <a:solidFill>
-                  <a:srgbClr val="59636E"/>
-                </a:solidFill>
-                <a:latin typeface="Arial" pitchFamily="34" charset="0"/>
-                <a:ea typeface="Arial" pitchFamily="34" charset="-122"/>
-                <a:cs typeface="Arial" pitchFamily="34" charset="-120"/>
-              </a:rPr>
-              <a:t>Local runs need the app open and awake.</a:t>
-            </a:r>
-            <a:endParaRPr lang="en-US" sz="1350" dirty="0"/>
-          </a:p>
-        </p:txBody>
-      </p:sp>
-      <p:sp>
-        <p:nvSpPr>
-          <p:cNvPr id="22" name="Text 17"/>
-          <p:cNvSpPr/>
-          <p:nvPr/>
-        </p:nvSpPr>
-        <p:spPr>
-          <a:xfrm>
-            <a:off x="4571851" y="3924449"/>
-            <a:ext cx="279350" cy="279350"/>
-          </a:xfrm>
-          <a:prstGeom prst="roundRect">
-            <a:avLst>
-              <a:gd name="adj" fmla="val 327331"/>
-            </a:avLst>
-          </a:prstGeom>
-          <a:solidFill>
-            <a:srgbClr val="8250DF"/>
-          </a:solidFill>
-          <a:ln/>
-        </p:spPr>
-        <p:txBody>
-          <a:bodyPr wrap="square" rtlCol="0" anchor="ctr"/>
-          <a:lstStyle/>
-          <a:p>
-            <a:pPr indent="0" marL="0">
-              <a:buNone/>
-            </a:pPr>
-            <a:endParaRPr lang="en-US" dirty="0"/>
-          </a:p>
-        </p:txBody>
-      </p:sp>
-      <p:sp>
-        <p:nvSpPr>
-          <p:cNvPr id="23" name="Text 18"/>
-          <p:cNvSpPr/>
-          <p:nvPr/>
-        </p:nvSpPr>
-        <p:spPr>
-          <a:xfrm>
-            <a:off x="4666516" y="3968800"/>
-            <a:ext cx="90020" cy="190500"/>
-          </a:xfrm>
-          <a:prstGeom prst="rect">
-            <a:avLst/>
-          </a:prstGeom>
-          <a:noFill/>
-          <a:ln/>
-        </p:spPr>
-        <p:txBody>
-          <a:bodyPr wrap="square" lIns="0" tIns="0" rIns="0" bIns="0" rtlCol="0" anchor="t"/>
-          <a:lstStyle/>
-          <a:p>
-            <a:pPr algn="ctr" indent="0" marL="0">
-              <a:buNone/>
-            </a:pPr>
-            <a:r>
-              <a:rPr lang="en-US" sz="1250" b="1" dirty="0">
-                <a:solidFill>
-                  <a:srgbClr val="FFFFFF"/>
-                </a:solidFill>
-                <a:latin typeface="Arial" pitchFamily="34" charset="0"/>
-                <a:ea typeface="Arial" pitchFamily="34" charset="-122"/>
-                <a:cs typeface="Arial" pitchFamily="34" charset="-120"/>
-              </a:rPr>
-              <a:t>3</a:t>
-            </a:r>
-            <a:endParaRPr lang="en-US" sz="1250" dirty="0"/>
-          </a:p>
-        </p:txBody>
-      </p:sp>
-      <p:sp>
-        <p:nvSpPr>
-          <p:cNvPr id="24" name="Text 19"/>
-          <p:cNvSpPr/>
-          <p:nvPr/>
-        </p:nvSpPr>
-        <p:spPr>
-          <a:xfrm>
-            <a:off x="5003602" y="3924449"/>
-            <a:ext cx="3207937" cy="222200"/>
-          </a:xfrm>
-          <a:prstGeom prst="rect">
-            <a:avLst/>
-          </a:prstGeom>
-          <a:noFill/>
-          <a:ln/>
-        </p:spPr>
-        <p:txBody>
-          <a:bodyPr wrap="square" lIns="0" tIns="0" rIns="0" bIns="0" rtlCol="0" anchor="t"/>
-          <a:lstStyle/>
-          <a:p>
-            <a:pPr algn="l" indent="0" marL="0">
-              <a:lnSpc>
-                <a:spcPts val="1750"/>
-              </a:lnSpc>
-              <a:buNone/>
-            </a:pPr>
-            <a:r>
-              <a:rPr lang="en-US" sz="1550" b="1" dirty="0">
-                <a:solidFill>
-                  <a:srgbClr val="1F2328"/>
-                </a:solidFill>
-                <a:latin typeface="Arial" pitchFamily="34" charset="0"/>
-                <a:ea typeface="Arial" pitchFamily="34" charset="-122"/>
-                <a:cs typeface="Arial" pitchFamily="34" charset="-120"/>
-              </a:rPr>
-              <a:t>Check Recent runs</a:t>
-            </a:r>
-            <a:endParaRPr lang="en-US" sz="1550" dirty="0"/>
-          </a:p>
-        </p:txBody>
-      </p:sp>
-      <p:sp>
-        <p:nvSpPr>
-          <p:cNvPr id="25" name="Text 20"/>
-          <p:cNvSpPr/>
-          <p:nvPr/>
-        </p:nvSpPr>
-        <p:spPr>
-          <a:xfrm>
-            <a:off x="5003602" y="4171950"/>
-            <a:ext cx="3207937" cy="198090"/>
-          </a:xfrm>
-          <a:prstGeom prst="rect">
-            <a:avLst/>
-          </a:prstGeom>
-          <a:noFill/>
-          <a:ln/>
-        </p:spPr>
-        <p:txBody>
-          <a:bodyPr wrap="square" lIns="0" tIns="0" rIns="0" bIns="0" rtlCol="0" anchor="t"/>
-          <a:lstStyle/>
-          <a:p>
-            <a:pPr algn="l" indent="0" marL="0">
-              <a:lnSpc>
-                <a:spcPts val="1560"/>
-              </a:lnSpc>
-              <a:buNone/>
-            </a:pPr>
-            <a:r>
-              <a:rPr lang="en-US" sz="1350" dirty="0">
-                <a:solidFill>
-                  <a:srgbClr val="59636E"/>
-                </a:solidFill>
-                <a:latin typeface="Arial" pitchFamily="34" charset="0"/>
-                <a:ea typeface="Arial" pitchFamily="34" charset="-122"/>
-                <a:cs typeface="Arial" pitchFamily="34" charset="-120"/>
-              </a:rPr>
-              <a:t>A new run appears without pressing </a:t>
-            </a:r>
-            <a:pPr algn="l" indent="0" marL="0">
-              <a:lnSpc>
-                <a:spcPts val="1560"/>
-              </a:lnSpc>
-              <a:buNone/>
-            </a:pPr>
-            <a:r>
-              <a:rPr lang="en-US" sz="1350" b="1" dirty="0">
-                <a:solidFill>
-                  <a:srgbClr val="59636E"/>
-                </a:solidFill>
-                <a:latin typeface="Arial" pitchFamily="34" charset="0"/>
-                <a:ea typeface="Arial" pitchFamily="34" charset="-122"/>
-                <a:cs typeface="Arial" pitchFamily="34" charset="-120"/>
-              </a:rPr>
-              <a:t>Run</a:t>
-            </a:r>
-            <a:pPr algn="l" indent="0" marL="0">
-              <a:lnSpc>
-                <a:spcPts val="1560"/>
-              </a:lnSpc>
-              <a:buNone/>
-            </a:pPr>
-            <a:r>
-              <a:rPr lang="en-US" sz="1350" dirty="0">
-                <a:solidFill>
-                  <a:srgbClr val="59636E"/>
-                </a:solidFill>
-                <a:latin typeface="Arial" pitchFamily="34" charset="0"/>
-                <a:ea typeface="Arial" pitchFamily="34" charset="-122"/>
-                <a:cs typeface="Arial" pitchFamily="34" charset="-120"/>
-              </a:rPr>
-              <a:t>.</a:t>
-            </a:r>
-            <a:endParaRPr lang="en-US" sz="1350" dirty="0"/>
-          </a:p>
-        </p:txBody>
-      </p:sp>
-    </p:spTree>
-  </p:cSld>
-  <p:clrMapOvr>
-    <a:masterClrMapping/>
-  </p:clrMapOvr>
-</p:sld>
+<ns0:sld xmlns:ns0="http://schemas.openxmlformats.org/presentationml/2006/main" xmlns:ns1="http://schemas.openxmlformats.org/drawingml/2006/main" xmlns:ns2="http://schemas.microsoft.com/office/drawing/2017/decorative" xmlns:ns3="http://schemas.openxmlformats.org/officeDocument/2006/relationships">
+  <ns0:cSld name="Slide 10">
+    <ns0:bg>
+      <ns0:bgPr>
+        <ns1:solidFill>
+          <ns1:srgbClr val="FFFFFF"/>
+        </ns1:solidFill>
+      </ns0:bgPr>
+    </ns0:bg>
+    <ns0:spTree>
+      <ns0:nvGrpSpPr>
+        <ns0:cNvPr id="1" name=""/>
+        <ns0:cNvGrpSpPr/>
+        <ns0:nvPr/>
+      </ns0:nvGrpSpPr>
+      <ns0:grpSpPr>
+        <ns1:xfrm>
+          <ns1:off x="0" y="0"/>
+          <ns1:ext cx="0" cy="0"/>
+          <ns1:chOff x="0" y="0"/>
+          <ns1:chExt cx="0" cy="0"/>
+        </ns1:xfrm>
+      </ns0:grpSpPr>
+      <ns0:pic>
+        <ns0:nvPicPr>
+          <ns0:cNvPr id="2" name="Image 0" descr="">
+            <ns1:extLst>
+              <ns1:ext uri="{C183D7F6-B498-43B3-948B-1728B52AA6E4}">
+                <ns2:decorative val="1"/>
+              </ns1:ext>
+            </ns1:extLst>
+          </ns0:cNvPr>
+          <ns0:cNvPicPr>
+            <ns1:picLocks noChangeAspect="1"/>
+          </ns0:cNvPicPr>
+          <ns0:nvPr/>
+        </ns0:nvPicPr>
+        <ns0:blipFill>
+          <ns1:blip ns3:embed="rId1"/>
+          <ns1:stretch>
+            <ns1:fillRect/>
+          </ns1:stretch>
+        </ns0:blipFill>
+        <ns0:spPr>
+          <ns1:xfrm>
+            <ns1:off x="6349901" y="0"/>
+            <ns1:ext cx="2793950" cy="1308050"/>
+          </ns1:xfrm>
+          <ns1:prstGeom prst="rect">
+            <ns1:avLst/>
+          </ns1:prstGeom>
+        </ns0:spPr>
+      </ns0:pic>
+      <ns0:sp>
+        <ns0:nvSpPr>
+          <ns0:cNvPr id="3" name="Text 0"/>
+          <ns0:cNvSpPr/>
+          <ns0:nvPr/>
+        </ns0:nvSpPr>
+        <ns0:spPr>
+          <ns1:xfrm>
+            <ns1:off x="7340501" y="177701"/>
+            <ns1:ext cx="1168301" cy="279350"/>
+          </ns1:xfrm>
+          <ns1:prstGeom prst="roundRect">
+            <ns1:avLst>
+              <ns1:gd name="adj" fmla="val 22731"/>
+            </ns1:avLst>
+          </ns1:prstGeom>
+          <ns1:solidFill>
+            <ns1:srgbClr val="1A7F37"/>
+          </ns1:solidFill>
+          <ns1:ln/>
+        </ns0:spPr>
+        <ns0:txBody>
+          <ns1:bodyPr wrap="square" rtlCol="0" anchor="ctr"/>
+          <ns1:lstStyle/>
+          <ns1:p>
+            <ns1:pPr indent="0" marL="0">
+              <ns1:buNone/>
+            </ns1:pPr>
+            <ns1:endParaRPr lang="en-US" dirty="0"/>
+          </ns1:p>
+        </ns0:txBody>
+      </ns0:sp>
+      <ns0:sp>
+        <ns0:nvSpPr>
+          <ns0:cNvPr id="4" name="Text 1"/>
+          <ns0:cNvSpPr/>
+          <ns0:nvPr/>
+        </ns0:nvSpPr>
+        <ns0:spPr>
+          <ns1:xfrm>
+            <ns1:off x="7461041" y="231577"/>
+            <ns1:ext cx="927071" cy="171450"/>
+          </ns1:xfrm>
+          <ns1:prstGeom prst="rect">
+            <ns1:avLst/>
+          </ns1:prstGeom>
+          <ns1:noFill/>
+          <ns1:ln/>
+        </ns0:spPr>
+        <ns0:txBody>
+          <ns1:bodyPr wrap="square" lIns="0" tIns="0" rIns="0" bIns="0" rtlCol="0" anchor="t"/>
+          <ns1:lstStyle/>
+          <ns1:p>
+            <ns1:pPr algn="ctr" indent="0" marL="0">
+              <ns1:buNone/>
+            </ns1:pPr>
+            <ns1:r>
+              <ns1:rPr lang="en-US" sz="1150" b="1" dirty="0">
+                <ns1:solidFill>
+                  <ns1:srgbClr val="FFFFFF"/>
+                </ns1:solidFill>
+                <ns1:latin typeface="Arial" pitchFamily="34" charset="0"/>
+                <ns1:ea typeface="Arial" pitchFamily="34" charset="-122"/>
+                <ns1:cs typeface="Arial" pitchFamily="34" charset="-120"/>
+              </ns1:rPr>
+              <ns1:t>CHAPTER 07</ns1:t>
+            </ns1:r>
+            <ns1:endParaRPr lang="en-US" sz="1150" dirty="0"/>
+          </ns1:p>
+        </ns0:txBody>
+      </ns0:sp>
+      <ns0:pic>
+        <ns0:nvPicPr>
+          <ns0:cNvPr id="5" name="Image 1" descr="Open this chapter on GitHub">
+            <ns1:hlinkClick ns3:id="rId3" tooltip="https://github.com/github/copilot-app-for-beginners/tree/main/07-automations"/>
+          </ns0:cNvPr>
+          <ns0:cNvPicPr>
+            <ns1:picLocks noChangeAspect="1"/>
+          </ns0:cNvPicPr>
+          <ns0:nvPr/>
+        </ns0:nvPicPr>
+        <ns0:blipFill>
+          <ns1:blip ns3:embed="rId2"/>
+          <ns1:stretch>
+            <ns1:fillRect/>
+          </ns1:stretch>
+        </ns0:blipFill>
+        <ns0:spPr>
+          <ns1:xfrm>
+            <ns1:off x="8610600" y="165050"/>
+            <ns1:ext cx="304800" cy="304800"/>
+          </ns1:xfrm>
+          <ns1:prstGeom prst="rect">
+            <ns1:avLst/>
+          </ns1:prstGeom>
+        </ns0:spPr>
+      </ns0:pic>
+      <ns0:sp>
+        <ns0:nvSpPr>
+          <ns0:cNvPr id="6" name="Text 2"/>
+          <ns0:cNvSpPr/>
+          <ns0:nvPr/>
+        </ns0:nvSpPr>
+        <ns0:spPr>
+          <ns1:xfrm>
+            <ns1:off x="507950" y="381000"/>
+            <ns1:ext cx="8161020" cy="190500"/>
+          </ns1:xfrm>
+          <ns1:prstGeom prst="rect">
+            <ns1:avLst/>
+          </ns1:prstGeom>
+          <ns1:noFill/>
+          <ns1:ln/>
+        </ns0:spPr>
+        <ns0:txBody>
+          <ns1:bodyPr wrap="square" lIns="0" tIns="0" rIns="0" bIns="0" rtlCol="0" anchor="t"/>
+          <ns1:lstStyle/>
+          <ns1:p>
+            <ns1:pPr algn="l" indent="0" marL="0">
+              <ns1:buNone/>
+            </ns1:pPr>
+            <ns1:r>
+              <ns1:rPr lang="en-US" sz="1250" b="1" dirty="0">
+                <ns1:solidFill>
+                  <ns1:srgbClr val="8250DF"/>
+                </ns1:solidFill>
+                <ns1:latin typeface="Arial" pitchFamily="34" charset="0"/>
+                <ns1:ea typeface="Arial" pitchFamily="34" charset="-122"/>
+                <ns1:cs typeface="Arial" pitchFamily="34" charset="-120"/>
+              </ns1:rPr>
+              <ns1:t>EXERCISE</ns1:t>
+            </ns1:r>
+            <ns1:endParaRPr lang="en-US" sz="1250" dirty="0"/>
+          </ns1:p>
+        </ns0:txBody>
+      </ns0:sp>
+      <ns0:sp>
+        <ns0:nvSpPr>
+          <ns0:cNvPr id="7" name="Text 3"/>
+          <ns0:cNvSpPr/>
+          <ns0:nvPr/>
+        </ns0:nvSpPr>
+        <ns0:spPr>
+          <ns1:xfrm>
+            <ns1:off x="507950" y="622250"/>
+            <ns1:ext cx="8161020" cy="419100"/>
+          </ns1:xfrm>
+          <ns1:prstGeom prst="rect">
+            <ns1:avLst/>
+          </ns1:prstGeom>
+          <ns1:noFill/>
+          <ns1:ln/>
+        </ns0:spPr>
+        <ns0:txBody>
+          <ns1:bodyPr wrap="square" lIns="0" tIns="0" rIns="0" bIns="0" rtlCol="0" anchor="t"/>
+          <ns1:lstStyle/>
+          <ns1:p>
+            <ns1:pPr algn="l" indent="0" marL="0">
+              <ns1:lnSpc>
+                <ns1:spcPts val="3300"/>
+              </ns1:lnSpc>
+              <ns1:spcBef>
+                <ns1:spcPts val="400"/>
+              </ns1:spcBef>
+              <ns1:buNone/>
+            </ns1:pPr>
+            <ns1:r>
+              <ns1:rPr lang="en-US" sz="2800" b="1" dirty="0">
+                <ns1:solidFill>
+                  <ns1:srgbClr val="1F2328"/>
+                </ns1:solidFill>
+                <ns1:latin typeface="Arial" pitchFamily="34" charset="0"/>
+                <ns1:ea typeface="Arial" pitchFamily="34" charset="-122"/>
+                <ns1:cs typeface="Arial" pitchFamily="34" charset="-120"/>
+              </ns1:rPr>
+              <ns1:t>Schedule it for every morning</ns1:t>
+            </ns1:r>
+            <ns1:endParaRPr lang="en-US" sz="2800" dirty="0"/>
+          </ns1:p>
+        </ns0:txBody>
+      </ns0:sp>
+      <ns0:sp>
+        <ns0:nvSpPr>
+          <ns0:cNvPr id="8" name="Text 4"/>
+          <ns0:cNvSpPr/>
+          <ns0:nvPr/>
+        </ns0:nvSpPr>
+        <ns0:spPr>
+          <ns1:xfrm>
+            <ns1:off x="1302395" y="1450777"/>
+            <ns1:ext cx="2221111" cy="2990850"/>
+          </ns1:xfrm>
+          <ns1:prstGeom prst="roundRect">
+            <ns1:avLst>
+              <ns1:gd name="adj" fmla="val 3431"/>
+            </ns1:avLst>
+          </ns1:prstGeom>
+          <ns1:solidFill>
+            <ns1:srgbClr val="FFFFFF"/>
+          </ns1:solidFill>
+          <ns1:ln w="9525">
+            <ns1:solidFill>
+              <ns1:srgbClr val="D1D9E0"/>
+            </ns1:solidFill>
+          </ns1:ln>
+          <ns1:effectLst>
+            <ns1:outerShdw sx="100000" sy="100000" kx="0" ky="0" algn="bl" rotWithShape="0" blurRad="38100" dist="9525" dir="5400000">
+              <ns1:srgbClr val="1f2328">
+                <ns1:alpha val="12000"/>
+              </ns1:srgbClr>
+            </ns1:outerShdw>
+          </ns1:effectLst>
+        </ns0:spPr>
+        <ns0:txBody>
+          <ns1:bodyPr wrap="square" rtlCol="0" anchor="ctr"/>
+          <ns1:lstStyle/>
+          <ns1:p>
+            <ns1:pPr indent="0" marL="0">
+              <ns1:buNone/>
+            </ns1:pPr>
+            <ns1:endParaRPr lang="en-US" dirty="0"/>
+          </ns1:p>
+        </ns0:txBody>
+      </ns0:sp>
+      <ns0:pic>
+        <ns0:nvPicPr>
+          <ns0:cNvPr id="9" name="Image 2" descr="Automation trigger options in the new-automation form"/>
+          <ns0:cNvPicPr>
+            <ns1:picLocks noChangeAspect="1"/>
+          </ns0:cNvPicPr>
+          <ns0:nvPr/>
+        </ns0:nvPicPr>
+        <ns0:blipFill>
+          <ns1:blip ns3:embed="rId4"/>
+          <ns1:stretch>
+            <ns1:fillRect/>
+          </ns1:stretch>
+        </ns0:blipFill>
+        <ns0:spPr>
+          <ns1:xfrm>
+            <ns1:off x="1350020" y="1498402"/>
+            <ns1:ext cx="2125861" cy="2895600"/>
+          </ns1:xfrm>
+          <ns1:prstGeom prst="rect">
+            <ns1:avLst/>
+          </ns1:prstGeom>
+        </ns0:spPr>
+      </ns0:pic>
+      <ns0:sp>
+        <ns0:nvSpPr>
+          <ns0:cNvPr id="10" name="Text 5"/>
+          <ns0:cNvSpPr/>
+          <ns0:nvPr/>
+        </ns0:nvSpPr>
+        <ns0:spPr>
+          <ns1:xfrm>
+            <ns1:off x="4571851" y="1522214"/>
+            <ns1:ext cx="1968550" cy="901601"/>
+          </ns1:xfrm>
+          <ns1:prstGeom prst="roundRect">
+            <ns1:avLst>
+              <ns1:gd name="adj" fmla="val 14086"/>
+            </ns1:avLst>
+          </ns1:prstGeom>
+          <ns1:solidFill>
+            <ns1:srgbClr val="DDF4FF"/>
+          </ns1:solidFill>
+          <ns1:ln w="9525">
+            <ns1:solidFill>
+              <ns1:srgbClr val="9CD7FF"/>
+            </ns1:solidFill>
+          </ns1:ln>
+        </ns0:spPr>
+        <ns0:txBody>
+          <ns1:bodyPr wrap="square" rtlCol="0" anchor="ctr"/>
+          <ns1:lstStyle/>
+          <ns1:p>
+            <ns1:pPr indent="0" marL="0">
+              <ns1:buNone/>
+            </ns1:pPr>
+            <ns1:endParaRPr lang="en-US" dirty="0"/>
+          </ns1:p>
+        </ns0:txBody>
+      </ns0:sp>
+      <ns0:sp>
+        <ns0:nvSpPr>
+          <ns0:cNvPr id="11" name="Text 6"/>
+          <ns0:cNvSpPr/>
+          <ns0:nvPr/>
+        </ns0:nvSpPr>
+        <ns0:spPr>
+          <ns1:xfrm>
+            <ns1:off x="4733776" y="1658689"/>
+            <ns1:ext cx="1677594" cy="419100"/>
+          </ns1:xfrm>
+          <ns1:prstGeom prst="rect">
+            <ns1:avLst/>
+          </ns1:prstGeom>
+          <ns1:noFill/>
+          <ns1:ln/>
+        </ns0:spPr>
+        <ns0:txBody>
+          <ns1:bodyPr wrap="square" lIns="0" tIns="0" rIns="0" bIns="0" rtlCol="0" anchor="t"/>
+          <ns1:lstStyle/>
+          <ns1:p>
+            <ns1:pPr algn="l" indent="0" marL="0">
+              <ns1:buNone/>
+            </ns1:pPr>
+            <ns1:r>
+              <ns1:rPr lang="en-US" sz="1450" b="1" dirty="0">
+                <ns1:solidFill>
+                  <ns1:srgbClr val="1F2328"/>
+                </ns1:solidFill>
+                <ns1:latin typeface="Arial" pitchFamily="34" charset="0"/>
+                <ns1:ea typeface="Arial" pitchFamily="34" charset="-122"/>
+                <ns1:cs typeface="Arial" pitchFamily="34" charset="-120"/>
+              </ns1:rPr>
+              <ns1:t>Manual: "What is the status now?"</ns1:t>
+            </ns1:r>
+            <ns1:endParaRPr lang="en-US" sz="1450" dirty="0"/>
+          </ns1:p>
+        </ns0:txBody>
+      </ns0:sp>
+      <ns0:sp>
+        <ns0:nvSpPr>
+          <ns0:cNvPr id="12" name="Text 7"/>
+          <ns0:cNvSpPr/>
+          <ns0:nvPr/>
+        </ns0:nvSpPr>
+        <ns0:spPr>
+          <ns1:xfrm>
+            <ns1:off x="6667351" y="1522214"/>
+            <ns1:ext cx="1968550" cy="901601"/>
+          </ns1:xfrm>
+          <ns1:prstGeom prst="roundRect">
+            <ns1:avLst>
+              <ns1:gd name="adj" fmla="val 14086"/>
+            </ns1:avLst>
+          </ns1:prstGeom>
+          <ns1:solidFill>
+            <ns1:srgbClr val="DAFBE1"/>
+          </ns1:solidFill>
+          <ns1:ln w="9525">
+            <ns1:solidFill>
+              <ns1:srgbClr val="8CE7A5"/>
+            </ns1:solidFill>
+          </ns1:ln>
+        </ns0:spPr>
+        <ns0:txBody>
+          <ns1:bodyPr wrap="square" rtlCol="0" anchor="ctr"/>
+          <ns1:lstStyle/>
+          <ns1:p>
+            <ns1:pPr indent="0" marL="0">
+              <ns1:buNone/>
+            </ns1:pPr>
+            <ns1:endParaRPr lang="en-US" dirty="0"/>
+          </ns1:p>
+        </ns0:txBody>
+      </ns0:sp>
+      <ns0:sp>
+        <ns0:nvSpPr>
+          <ns0:cNvPr id="13" name="Text 8"/>
+          <ns0:cNvSpPr/>
+          <ns0:nvPr/>
+        </ns0:nvSpPr>
+        <ns0:spPr>
+          <ns1:xfrm>
+            <ns1:off x="6829276" y="1658689"/>
+            <ns1:ext cx="1677594" cy="628650"/>
+          </ns1:xfrm>
+          <ns1:prstGeom prst="rect">
+            <ns1:avLst/>
+          </ns1:prstGeom>
+          <ns1:noFill/>
+          <ns1:ln/>
+        </ns0:spPr>
+        <ns0:txBody>
+          <ns1:bodyPr wrap="square" lIns="0" tIns="0" rIns="0" bIns="0" rtlCol="0" anchor="t"/>
+          <ns1:lstStyle/>
+          <ns1:p>
+            <ns1:pPr algn="l" indent="0" marL="0">
+              <ns1:buNone/>
+            </ns1:pPr>
+            <ns1:r>
+              <ns1:rPr lang="en-US" sz="1450" b="1" dirty="0">
+                <ns1:solidFill>
+                  <ns1:srgbClr val="1F2328"/>
+                </ns1:solidFill>
+                <ns1:latin typeface="Arial" pitchFamily="34" charset="0"/>
+                <ns1:ea typeface="Arial" pitchFamily="34" charset="-122"/>
+                <ns1:cs typeface="Arial" pitchFamily="34" charset="-120"/>
+              </ns1:rPr>
+              <ns1:t>Daily: "What changed since yesterday?"</ns1:t>
+            </ns1:r>
+            <ns1:endParaRPr lang="en-US" sz="1450" dirty="0"/>
+          </ns1:p>
+        </ns0:txBody>
+      </ns0:sp>
+      <ns0:sp>
+        <ns0:nvSpPr>
+          <ns0:cNvPr id="14" name="Text 9"/>
+          <ns0:cNvSpPr/>
+          <ns0:nvPr/>
+        </ns0:nvSpPr>
+        <ns0:spPr>
+          <ns1:xfrm>
+            <ns1:off x="4571851" y="2626965"/>
+            <ns1:ext cx="279350" cy="279350"/>
+          </ns1:xfrm>
+          <ns1:prstGeom prst="roundRect">
+            <ns1:avLst>
+              <ns1:gd name="adj" fmla="val 327331"/>
+            </ns1:avLst>
+          </ns1:prstGeom>
+          <ns1:solidFill>
+            <ns1:srgbClr val="8250DF"/>
+          </ns1:solidFill>
+          <ns1:ln/>
+        </ns0:spPr>
+        <ns0:txBody>
+          <ns1:bodyPr wrap="square" rtlCol="0" anchor="ctr"/>
+          <ns1:lstStyle/>
+          <ns1:p>
+            <ns1:pPr indent="0" marL="0">
+              <ns1:buNone/>
+            </ns1:pPr>
+            <ns1:endParaRPr lang="en-US" dirty="0"/>
+          </ns1:p>
+        </ns0:txBody>
+      </ns0:sp>
+      <ns0:sp>
+        <ns0:nvSpPr>
+          <ns0:cNvPr id="15" name="Text 10"/>
+          <ns0:cNvSpPr/>
+          <ns0:nvPr/>
+        </ns0:nvSpPr>
+        <ns0:spPr>
+          <ns1:xfrm>
+            <ns1:off x="4666516" y="2671316"/>
+            <ns1:ext cx="90020" cy="190500"/>
+          </ns1:xfrm>
+          <ns1:prstGeom prst="rect">
+            <ns1:avLst/>
+          </ns1:prstGeom>
+          <ns1:noFill/>
+          <ns1:ln/>
+        </ns0:spPr>
+        <ns0:txBody>
+          <ns1:bodyPr wrap="square" lIns="0" tIns="0" rIns="0" bIns="0" rtlCol="0" anchor="t"/>
+          <ns1:lstStyle/>
+          <ns1:p>
+            <ns1:pPr algn="ctr" indent="0" marL="0">
+              <ns1:buNone/>
+            </ns1:pPr>
+            <ns1:r>
+              <ns1:rPr lang="en-US" sz="1250" b="1" dirty="0">
+                <ns1:solidFill>
+                  <ns1:srgbClr val="FFFFFF"/>
+                </ns1:solidFill>
+                <ns1:latin typeface="Arial" pitchFamily="34" charset="0"/>
+                <ns1:ea typeface="Arial" pitchFamily="34" charset="-122"/>
+                <ns1:cs typeface="Arial" pitchFamily="34" charset="-120"/>
+              </ns1:rPr>
+              <ns1:t>1</ns1:t>
+            </ns1:r>
+            <ns1:endParaRPr lang="en-US" sz="1250" dirty="0"/>
+          </ns1:p>
+        </ns0:txBody>
+      </ns0:sp>
+      <ns0:sp>
+        <ns0:nvSpPr>
+          <ns0:cNvPr id="16" name="Text 11"/>
+          <ns0:cNvSpPr/>
+          <ns0:nvPr/>
+        </ns0:nvSpPr>
+        <ns0:spPr>
+          <ns1:xfrm>
+            <ns1:off x="5003602" y="2626965"/>
+            <ns1:ext cx="2051337" cy="222200"/>
+          </ns1:xfrm>
+          <ns1:prstGeom prst="rect">
+            <ns1:avLst/>
+          </ns1:prstGeom>
+          <ns1:noFill/>
+          <ns1:ln/>
+        </ns0:spPr>
+        <ns0:txBody>
+          <ns1:bodyPr wrap="square" lIns="0" tIns="0" rIns="0" bIns="0" rtlCol="0" anchor="t"/>
+          <ns1:lstStyle/>
+          <ns1:p>
+            <ns1:pPr algn="l" indent="0" marL="0">
+              <ns1:lnSpc>
+                <ns1:spcPts val="1750"/>
+              </ns1:lnSpc>
+              <ns1:buNone/>
+            </ns1:pPr>
+            <ns1:r>
+              <ns1:rPr lang="en-US" sz="1550" b="1" dirty="0">
+                <ns1:solidFill>
+                  <ns1:srgbClr val="1F2328"/>
+                </ns1:solidFill>
+                <ns1:latin typeface="Arial" pitchFamily="34" charset="0"/>
+                <ns1:ea typeface="Arial" pitchFamily="34" charset="-122"/>
+                <ns1:cs typeface="Arial" pitchFamily="34" charset="-120"/>
+              </ns1:rPr>
+              <ns1:t>Edit the trigger</ns1:t>
+            </ns1:r>
+            <ns1:endParaRPr lang="en-US" sz="1550" dirty="0"/>
+          </ns1:p>
+        </ns0:txBody>
+      </ns0:sp>
+      <ns0:sp>
+        <ns0:nvSpPr>
+          <ns0:cNvPr id="17" name="Text 12"/>
+          <ns0:cNvSpPr/>
+          <ns0:nvPr/>
+        </ns0:nvSpPr>
+        <ns0:spPr>
+          <ns1:xfrm>
+            <ns1:off x="5003602" y="2874466"/>
+            <ns1:ext cx="2051337" cy="198090"/>
+          </ns1:xfrm>
+          <ns1:prstGeom prst="rect">
+            <ns1:avLst/>
+          </ns1:prstGeom>
+          <ns1:noFill/>
+          <ns1:ln/>
+        </ns0:spPr>
+        <ns0:txBody>
+          <ns1:bodyPr wrap="square" lIns="0" tIns="0" rIns="0" bIns="0" rtlCol="0" anchor="t"/>
+          <ns1:lstStyle/>
+          <ns1:p>
+            <ns1:pPr algn="l" indent="0" marL="0">
+              <ns1:lnSpc>
+                <ns1:spcPts val="1560"/>
+              </ns1:lnSpc>
+              <ns1:buNone/>
+            </ns1:pPr>
+            <ns1:r>
+              <ns1:rPr lang="en-US" sz="1350" b="1" dirty="0">
+                <ns1:solidFill>
+                  <ns1:srgbClr val="59636E"/>
+                </ns1:solidFill>
+                <ns1:latin typeface="Arial" pitchFamily="34" charset="0"/>
+                <ns1:ea typeface="Arial" pitchFamily="34" charset="-122"/>
+                <ns1:cs typeface="Arial" pitchFamily="34" charset="-120"/>
+              </ns1:rPr>
+              <ns1:t>Manual</ns1:t>
+            </ns1:r>
+            <ns1:pPr algn="l" indent="0" marL="0">
+              <ns1:lnSpc>
+                <ns1:spcPts val="1560"/>
+              </ns1:lnSpc>
+              <ns1:buNone/>
+            </ns1:pPr>
+            <ns1:r>
+              <ns1:rPr lang="en-US" sz="1350" dirty="0">
+                <ns1:solidFill>
+                  <ns1:srgbClr val="59636E"/>
+                </ns1:solidFill>
+                <ns1:latin typeface="Arial" pitchFamily="34" charset="0"/>
+                <ns1:ea typeface="Arial" pitchFamily="34" charset="-122"/>
+                <ns1:cs typeface="Arial" pitchFamily="34" charset="-120"/>
+              </ns1:rPr>
+              <ns1:t> to </ns1:t>
+            </ns1:r>
+            <ns1:pPr algn="l" indent="0" marL="0">
+              <ns1:lnSpc>
+                <ns1:spcPts val="1560"/>
+              </ns1:lnSpc>
+              <ns1:buNone/>
+            </ns1:pPr>
+            <ns1:r>
+              <ns1:rPr lang="en-US" sz="1350" b="1" dirty="0">
+                <ns1:solidFill>
+                  <ns1:srgbClr val="59636E"/>
+                </ns1:solidFill>
+                <ns1:latin typeface="Arial" pitchFamily="34" charset="0"/>
+                <ns1:ea typeface="Arial" pitchFamily="34" charset="-122"/>
+                <ns1:cs typeface="Arial" pitchFamily="34" charset="-120"/>
+              </ns1:rPr>
+              <ns1:t>Daily</ns1:t>
+            </ns1:r>
+            <ns1:pPr algn="l" indent="0" marL="0">
+              <ns1:lnSpc>
+                <ns1:spcPts val="1560"/>
+              </ns1:lnSpc>
+              <ns1:buNone/>
+            </ns1:pPr>
+            <ns1:r>
+              <ns1:rPr lang="en-US" sz="1350" dirty="0">
+                <ns1:solidFill>
+                  <ns1:srgbClr val="59636E"/>
+                </ns1:solidFill>
+                <ns1:latin typeface="Arial" pitchFamily="34" charset="0"/>
+                <ns1:ea typeface="Arial" pitchFamily="34" charset="-122"/>
+                <ns1:cs typeface="Arial" pitchFamily="34" charset="-120"/>
+              </ns1:rPr>
+              <ns1:t>, at </ns1:t>
+            </ns1:r>
+            <ns1:pPr algn="l" indent="0" marL="0">
+              <ns1:lnSpc>
+                <ns1:spcPts val="1560"/>
+              </ns1:lnSpc>
+              <ns1:buNone/>
+            </ns1:pPr>
+            <ns1:r>
+              <ns1:rPr lang="en-US" sz="1350" b="1" dirty="0">
+                <ns1:solidFill>
+                  <ns1:srgbClr val="59636E"/>
+                </ns1:solidFill>
+                <ns1:latin typeface="Arial" pitchFamily="34" charset="0"/>
+                <ns1:ea typeface="Arial" pitchFamily="34" charset="-122"/>
+                <ns1:cs typeface="Arial" pitchFamily="34" charset="-120"/>
+              </ns1:rPr>
+              <ns1:t>08:00</ns1:t>
+            </ns1:r>
+            <ns1:pPr algn="l" indent="0" marL="0">
+              <ns1:lnSpc>
+                <ns1:spcPts val="1560"/>
+              </ns1:lnSpc>
+              <ns1:buNone/>
+            </ns1:pPr>
+            <ns1:r>
+              <ns1:rPr lang="en-US" sz="1350" dirty="0">
+                <ns1:solidFill>
+                  <ns1:srgbClr val="59636E"/>
+                </ns1:solidFill>
+                <ns1:latin typeface="Arial" pitchFamily="34" charset="0"/>
+                <ns1:ea typeface="Arial" pitchFamily="34" charset="-122"/>
+                <ns1:cs typeface="Arial" pitchFamily="34" charset="-120"/>
+              </ns1:rPr>
+              <ns1:t>.</ns1:t>
+            </ns1:r>
+            <ns1:endParaRPr lang="en-US" sz="1350" dirty="0"/>
+          </ns1:p>
+        </ns0:txBody>
+      </ns0:sp>
+      <ns0:sp>
+        <ns0:nvSpPr>
+          <ns0:cNvPr id="18" name="Text 13"/>
+          <ns0:cNvSpPr/>
+          <ns0:nvPr/>
+        </ns0:nvSpPr>
+        <ns0:spPr>
+          <ns1:xfrm>
+            <ns1:off x="4571851" y="3275707"/>
+            <ns1:ext cx="279350" cy="279350"/>
+          </ns1:xfrm>
+          <ns1:prstGeom prst="roundRect">
+            <ns1:avLst>
+              <ns1:gd name="adj" fmla="val 327331"/>
+            </ns1:avLst>
+          </ns1:prstGeom>
+          <ns1:solidFill>
+            <ns1:srgbClr val="8250DF"/>
+          </ns1:solidFill>
+          <ns1:ln/>
+        </ns0:spPr>
+        <ns0:txBody>
+          <ns1:bodyPr wrap="square" rtlCol="0" anchor="ctr"/>
+          <ns1:lstStyle/>
+          <ns1:p>
+            <ns1:pPr indent="0" marL="0">
+              <ns1:buNone/>
+            </ns1:pPr>
+            <ns1:endParaRPr lang="en-US" dirty="0"/>
+          </ns1:p>
+        </ns0:txBody>
+      </ns0:sp>
+      <ns0:sp>
+        <ns0:nvSpPr>
+          <ns0:cNvPr id="19" name="Text 14"/>
+          <ns0:cNvSpPr/>
+          <ns0:nvPr/>
+        </ns0:nvSpPr>
+        <ns0:spPr>
+          <ns1:xfrm>
+            <ns1:off x="4666516" y="3320058"/>
+            <ns1:ext cx="90020" cy="190500"/>
+          </ns1:xfrm>
+          <ns1:prstGeom prst="rect">
+            <ns1:avLst/>
+          </ns1:prstGeom>
+          <ns1:noFill/>
+          <ns1:ln/>
+        </ns0:spPr>
+        <ns0:txBody>
+          <ns1:bodyPr wrap="square" lIns="0" tIns="0" rIns="0" bIns="0" rtlCol="0" anchor="t"/>
+          <ns1:lstStyle/>
+          <ns1:p>
+            <ns1:pPr algn="ctr" indent="0" marL="0">
+              <ns1:buNone/>
+            </ns1:pPr>
+            <ns1:r>
+              <ns1:rPr lang="en-US" sz="1250" b="1" dirty="0">
+                <ns1:solidFill>
+                  <ns1:srgbClr val="FFFFFF"/>
+                </ns1:solidFill>
+                <ns1:latin typeface="Arial" pitchFamily="34" charset="0"/>
+                <ns1:ea typeface="Arial" pitchFamily="34" charset="-122"/>
+                <ns1:cs typeface="Arial" pitchFamily="34" charset="-120"/>
+              </ns1:rPr>
+              <ns1:t>2</ns1:t>
+            </ns1:r>
+            <ns1:endParaRPr lang="en-US" sz="1250" dirty="0"/>
+          </ns1:p>
+        </ns0:txBody>
+      </ns0:sp>
+      <ns0:sp>
+        <ns0:nvSpPr>
+          <ns0:cNvPr id="20" name="Text 15"/>
+          <ns0:cNvSpPr/>
+          <ns0:nvPr/>
+        </ns0:nvSpPr>
+        <ns0:spPr>
+          <ns1:xfrm>
+            <ns1:off x="5003602" y="3275707"/>
+            <ns1:ext cx="3257273" cy="222200"/>
+          </ns1:xfrm>
+          <ns1:prstGeom prst="rect">
+            <ns1:avLst/>
+          </ns1:prstGeom>
+          <ns1:noFill/>
+          <ns1:ln/>
+        </ns0:spPr>
+        <ns0:txBody>
+          <ns1:bodyPr wrap="square" lIns="0" tIns="0" rIns="0" bIns="0" rtlCol="0" anchor="t"/>
+          <ns1:lstStyle/>
+          <ns1:p>
+            <ns1:pPr algn="l" indent="0" marL="0">
+              <ns1:lnSpc>
+                <ns1:spcPts val="1750"/>
+              </ns1:lnSpc>
+              <ns1:buNone/>
+            </ns1:pPr>
+            <ns1:r>
+              <ns1:rPr lang="en-US" sz="1550" b="1" dirty="0">
+                <ns1:solidFill>
+                  <ns1:srgbClr val="1F2328"/>
+                </ns1:solidFill>
+                <ns1:latin typeface="Arial" pitchFamily="34" charset="0"/>
+                <ns1:ea typeface="Arial" pitchFamily="34" charset="-122"/>
+                <ns1:cs typeface="Arial" pitchFamily="34" charset="-120"/>
+              </ns1:rPr>
+              <ns1:t>Keep the app running</ns1:t>
+            </ns1:r>
+            <ns1:endParaRPr lang="en-US" sz="1550" dirty="0"/>
+          </ns1:p>
+        </ns0:txBody>
+      </ns0:sp>
+      <ns0:sp>
+        <ns0:nvSpPr>
+          <ns0:cNvPr id="21" name="Text 16"/>
+          <ns0:cNvSpPr/>
+          <ns0:nvPr/>
+        </ns0:nvSpPr>
+        <ns0:spPr>
+          <ns1:xfrm>
+            <ns1:off x="5003602" y="3523208"/>
+            <ns1:ext cx="3257273" cy="198090"/>
+          </ns1:xfrm>
+          <ns1:prstGeom prst="rect">
+            <ns1:avLst/>
+          </ns1:prstGeom>
+          <ns1:noFill/>
+          <ns1:ln/>
+        </ns0:spPr>
+        <ns0:txBody>
+          <ns1:bodyPr wrap="square" lIns="0" tIns="0" rIns="0" bIns="0" rtlCol="0" anchor="t"/>
+          <ns1:lstStyle/>
+          <ns1:p>
+            <ns1:pPr algn="l" indent="0" marL="0">
+              <ns1:lnSpc>
+                <ns1:spcPts val="1560"/>
+              </ns1:lnSpc>
+              <ns1:buNone/>
+            </ns1:pPr>
+            <ns1:r>
+              <ns1:rPr lang="en-US" sz="1350" dirty="0">
+                <ns1:solidFill>
+                  <ns1:srgbClr val="59636E"/>
+                </ns1:solidFill>
+                <ns1:latin typeface="Arial" pitchFamily="34" charset="0"/>
+                <ns1:ea typeface="Arial" pitchFamily="34" charset="-122"/>
+                <ns1:cs typeface="Arial" pitchFamily="34" charset="-120"/>
+              </ns1:rPr>
+              <ns1:t>Local runs need the app open and awake.</ns1:t>
+            </ns1:r>
+            <ns1:endParaRPr lang="en-US" sz="1350" dirty="0"/>
+          </ns1:p>
+        </ns0:txBody>
+      </ns0:sp>
+      <ns0:sp>
+        <ns0:nvSpPr>
+          <ns0:cNvPr id="22" name="Text 17"/>
+          <ns0:cNvSpPr/>
+          <ns0:nvPr/>
+        </ns0:nvSpPr>
+        <ns0:spPr>
+          <ns1:xfrm>
+            <ns1:off x="4571851" y="3924449"/>
+            <ns1:ext cx="279350" cy="279350"/>
+          </ns1:xfrm>
+          <ns1:prstGeom prst="roundRect">
+            <ns1:avLst>
+              <ns1:gd name="adj" fmla="val 327331"/>
+            </ns1:avLst>
+          </ns1:prstGeom>
+          <ns1:solidFill>
+            <ns1:srgbClr val="8250DF"/>
+          </ns1:solidFill>
+          <ns1:ln/>
+        </ns0:spPr>
+        <ns0:txBody>
+          <ns1:bodyPr wrap="square" rtlCol="0" anchor="ctr"/>
+          <ns1:lstStyle/>
+          <ns1:p>
+            <ns1:pPr indent="0" marL="0">
+              <ns1:buNone/>
+            </ns1:pPr>
+            <ns1:endParaRPr lang="en-US" dirty="0"/>
+          </ns1:p>
+        </ns0:txBody>
+      </ns0:sp>
+      <ns0:sp>
+        <ns0:nvSpPr>
+          <ns0:cNvPr id="23" name="Text 18"/>
+          <ns0:cNvSpPr/>
+          <ns0:nvPr/>
+        </ns0:nvSpPr>
+        <ns0:spPr>
+          <ns1:xfrm>
+            <ns1:off x="4666516" y="3968800"/>
+            <ns1:ext cx="90020" cy="190500"/>
+          </ns1:xfrm>
+          <ns1:prstGeom prst="rect">
+            <ns1:avLst/>
+          </ns1:prstGeom>
+          <ns1:noFill/>
+          <ns1:ln/>
+        </ns0:spPr>
+        <ns0:txBody>
+          <ns1:bodyPr wrap="square" lIns="0" tIns="0" rIns="0" bIns="0" rtlCol="0" anchor="t"/>
+          <ns1:lstStyle/>
+          <ns1:p>
+            <ns1:pPr algn="ctr" indent="0" marL="0">
+              <ns1:buNone/>
+            </ns1:pPr>
+            <ns1:r>
+              <ns1:rPr lang="en-US" sz="1250" b="1" dirty="0">
+                <ns1:solidFill>
+                  <ns1:srgbClr val="FFFFFF"/>
+                </ns1:solidFill>
+                <ns1:latin typeface="Arial" pitchFamily="34" charset="0"/>
+                <ns1:ea typeface="Arial" pitchFamily="34" charset="-122"/>
+                <ns1:cs typeface="Arial" pitchFamily="34" charset="-120"/>
+              </ns1:rPr>
+              <ns1:t>3</ns1:t>
+            </ns1:r>
+            <ns1:endParaRPr lang="en-US" sz="1250" dirty="0"/>
+          </ns1:p>
+        </ns0:txBody>
+      </ns0:sp>
+      <ns0:sp>
+        <ns0:nvSpPr>
+          <ns0:cNvPr id="24" name="Text 19"/>
+          <ns0:cNvSpPr/>
+          <ns0:nvPr/>
+        </ns0:nvSpPr>
+        <ns0:spPr>
+          <ns1:xfrm>
+            <ns1:off x="5003602" y="3924449"/>
+            <ns1:ext cx="3207937" cy="222200"/>
+          </ns1:xfrm>
+          <ns1:prstGeom prst="rect">
+            <ns1:avLst/>
+          </ns1:prstGeom>
+          <ns1:noFill/>
+          <ns1:ln/>
+        </ns0:spPr>
+        <ns0:txBody>
+          <ns1:bodyPr wrap="square" lIns="0" tIns="0" rIns="0" bIns="0" rtlCol="0" anchor="t"/>
+          <ns1:lstStyle/>
+          <ns1:p>
+            <ns1:pPr algn="l" indent="0" marL="0">
+              <ns1:lnSpc>
+                <ns1:spcPts val="1750"/>
+              </ns1:lnSpc>
+              <ns1:buNone/>
+            </ns1:pPr>
+            <ns1:r>
+              <ns1:rPr lang="en-US" sz="1550" b="1" dirty="0">
+                <ns1:solidFill>
+                  <ns1:srgbClr val="1F2328"/>
+                </ns1:solidFill>
+                <ns1:latin typeface="Arial" pitchFamily="34" charset="0"/>
+                <ns1:ea typeface="Arial" pitchFamily="34" charset="-122"/>
+                <ns1:cs typeface="Arial" pitchFamily="34" charset="-120"/>
+              </ns1:rPr>
+              <ns1:t>Check Recent runs</ns1:t>
+            </ns1:r>
+            <ns1:endParaRPr lang="en-US" sz="1550" dirty="0"/>
+          </ns1:p>
+        </ns0:txBody>
+      </ns0:sp>
+      <ns0:sp>
+        <ns0:nvSpPr>
+          <ns0:cNvPr id="25" name="Text 20"/>
+          <ns0:cNvSpPr/>
+          <ns0:nvPr/>
+        </ns0:nvSpPr>
+        <ns0:spPr>
+          <ns1:xfrm>
+            <ns1:off x="5003602" y="4171950"/>
+            <ns1:ext cx="3207937" cy="198090"/>
+          </ns1:xfrm>
+          <ns1:prstGeom prst="rect">
+            <ns1:avLst/>
+          </ns1:prstGeom>
+          <ns1:noFill/>
+          <ns1:ln/>
+        </ns0:spPr>
+        <ns0:txBody>
+          <ns1:bodyPr wrap="square" lIns="0" tIns="0" rIns="0" bIns="0" rtlCol="0" anchor="t"/>
+          <ns1:lstStyle/>
+          <ns1:p>
+            <ns1:pPr algn="l" indent="0" marL="0">
+              <ns1:lnSpc>
+                <ns1:spcPts val="1560"/>
+              </ns1:lnSpc>
+              <ns1:buNone/>
+            </ns1:pPr>
+            <ns1:r>
+              <ns1:rPr lang="en-US" sz="1350" dirty="0">
+                <ns1:solidFill>
+                  <ns1:srgbClr val="59636E"/>
+                </ns1:solidFill>
+                <ns1:latin typeface="Arial" pitchFamily="34" charset="0"/>
+                <ns1:ea typeface="Arial" pitchFamily="34" charset="-122"/>
+                <ns1:cs typeface="Arial" pitchFamily="34" charset="-120"/>
+              </ns1:rPr>
+              <ns1:t>A new run appears without pressing </ns1:t>
+            </ns1:r>
+            <ns1:pPr algn="l" indent="0" marL="0">
+              <ns1:lnSpc>
+                <ns1:spcPts val="1560"/>
+              </ns1:lnSpc>
+              <ns1:buNone/>
+            </ns1:pPr>
+            <ns1:r>
+              <ns1:rPr lang="en-US" sz="1350" b="1" dirty="0">
+                <ns1:solidFill>
+                  <ns1:srgbClr val="59636E"/>
+                </ns1:solidFill>
+                <ns1:latin typeface="Arial" pitchFamily="34" charset="0"/>
+                <ns1:ea typeface="Arial" pitchFamily="34" charset="-122"/>
+                <ns1:cs typeface="Arial" pitchFamily="34" charset="-120"/>
+              </ns1:rPr>
+              <ns1:t>Run</ns1:t>
+            </ns1:r>
+            <ns1:pPr algn="l" indent="0" marL="0">
+              <ns1:lnSpc>
+                <ns1:spcPts val="1560"/>
+              </ns1:lnSpc>
+              <ns1:buNone/>
+            </ns1:pPr>
+            <ns1:r>
+              <ns1:rPr lang="en-US" sz="1350" dirty="0">
+                <ns1:solidFill>
+                  <ns1:srgbClr val="59636E"/>
+                </ns1:solidFill>
+                <ns1:latin typeface="Arial" pitchFamily="34" charset="0"/>
+                <ns1:ea typeface="Arial" pitchFamily="34" charset="-122"/>
+                <ns1:cs typeface="Arial" pitchFamily="34" charset="-120"/>
+              </ns1:rPr>
+              <ns1:t>.</ns1:t>
+            </ns1:r>
+            <ns1:endParaRPr lang="en-US" sz="1350" dirty="0"/>
+          </ns1:p>
+        </ns0:txBody>
+      </ns0:sp>
+    </ns0:spTree>
+  </ns0:cSld>
+  <ns0:clrMapOvr>
+    <ns1:masterClrMapping/>
+  </ns0:clrMapOvr>
+</ns0:sld>
 </file>
 
 <file path=ppt/slides/slide11.xml><?xml version="1.0" encoding="utf-8"?>
@@ -3972,2050 +3972,2050 @@
 </file>
 
 <file path=ppt/slides/slide12.xml><?xml version="1.0" encoding="utf-8"?>
-<p:sld xmlns:a="http://schemas.openxmlformats.org/drawingml/2006/main" xmlns:r="http://schemas.openxmlformats.org/officeDocument/2006/relationships" xmlns:p="http://schemas.openxmlformats.org/presentationml/2006/main">
-  <p:cSld name="Slide 12">
-    <p:bg>
-      <p:bgPr>
-        <a:solidFill>
-          <a:srgbClr val="FFFFFF"/>
-        </a:solidFill>
-      </p:bgPr>
-    </p:bg>
-    <p:spTree>
-      <p:nvGrpSpPr>
-        <p:cNvPr id="1" name=""/>
-        <p:cNvGrpSpPr/>
-        <p:nvPr/>
-      </p:nvGrpSpPr>
-      <p:grpSpPr>
-        <a:xfrm>
-          <a:off x="0" y="0"/>
-          <a:ext cx="0" cy="0"/>
-          <a:chOff x="0" y="0"/>
-          <a:chExt cx="0" cy="0"/>
-        </a:xfrm>
-      </p:grpSpPr>
-      <p:pic>
-        <p:nvPicPr>
-          <p:cNvPr id="2" name="Image 0" descr="">
-            <a:extLst>
-              <a:ext uri="{C183D7F6-B498-43B3-948B-1728B52AA6E4}">
-                <adec:decorative xmlns:adec="http://schemas.microsoft.com/office/drawing/2017/decorative" val="1"/>
-              </a:ext>
-            </a:extLst>
-          </p:cNvPr>
-          <p:cNvPicPr>
-            <a:picLocks noChangeAspect="1"/>
-          </p:cNvPicPr>
-          <p:nvPr/>
-        </p:nvPicPr>
-        <p:blipFill>
-          <a:blip r:embed="rId1"/>
-          <a:stretch>
-            <a:fillRect/>
-          </a:stretch>
-        </p:blipFill>
-        <p:spPr>
-          <a:xfrm>
-            <a:off x="6349901" y="0"/>
-            <a:ext cx="2793950" cy="1308050"/>
-          </a:xfrm>
-          <a:prstGeom prst="rect">
-            <a:avLst/>
-          </a:prstGeom>
-        </p:spPr>
-      </p:pic>
-      <p:sp>
-        <p:nvSpPr>
-          <p:cNvPr id="3" name="Text 0"/>
-          <p:cNvSpPr/>
-          <p:nvPr/>
-        </p:nvSpPr>
-        <p:spPr>
-          <a:xfrm>
-            <a:off x="7340501" y="177701"/>
-            <a:ext cx="1168301" cy="279350"/>
-          </a:xfrm>
-          <a:prstGeom prst="roundRect">
-            <a:avLst>
-              <a:gd name="adj" fmla="val 22731"/>
-            </a:avLst>
-          </a:prstGeom>
-          <a:solidFill>
-            <a:srgbClr val="1A7F37"/>
-          </a:solidFill>
-          <a:ln/>
-        </p:spPr>
-        <p:txBody>
-          <a:bodyPr wrap="square" rtlCol="0" anchor="ctr"/>
-          <a:lstStyle/>
-          <a:p>
-            <a:pPr indent="0" marL="0">
-              <a:buNone/>
-            </a:pPr>
-            <a:endParaRPr lang="en-US" dirty="0"/>
-          </a:p>
-        </p:txBody>
-      </p:sp>
-      <p:sp>
-        <p:nvSpPr>
-          <p:cNvPr id="4" name="Text 1"/>
-          <p:cNvSpPr/>
-          <p:nvPr/>
-        </p:nvSpPr>
-        <p:spPr>
-          <a:xfrm>
-            <a:off x="7461041" y="231577"/>
-            <a:ext cx="927071" cy="171450"/>
-          </a:xfrm>
-          <a:prstGeom prst="rect">
-            <a:avLst/>
-          </a:prstGeom>
-          <a:noFill/>
-          <a:ln/>
-        </p:spPr>
-        <p:txBody>
-          <a:bodyPr wrap="square" lIns="0" tIns="0" rIns="0" bIns="0" rtlCol="0" anchor="t"/>
-          <a:lstStyle/>
-          <a:p>
-            <a:pPr algn="ctr" indent="0" marL="0">
-              <a:buNone/>
-            </a:pPr>
-            <a:r>
-              <a:rPr lang="en-US" sz="1150" b="1" dirty="0">
-                <a:solidFill>
-                  <a:srgbClr val="FFFFFF"/>
-                </a:solidFill>
-                <a:latin typeface="Arial" pitchFamily="34" charset="0"/>
-                <a:ea typeface="Arial" pitchFamily="34" charset="-122"/>
-                <a:cs typeface="Arial" pitchFamily="34" charset="-120"/>
-              </a:rPr>
-              <a:t>CHAPTER 07</a:t>
-            </a:r>
-            <a:endParaRPr lang="en-US" sz="1150" dirty="0"/>
-          </a:p>
-        </p:txBody>
-      </p:sp>
-      <p:pic>
-        <p:nvPicPr>
-          <p:cNvPr id="5" name="Image 1" descr="Open this chapter on GitHub">
-            <a:hlinkClick r:id="rId3" tooltip="https://github.com/github/copilot-app-for-beginners/tree/main/07-automations"/>
-          </p:cNvPr>
-          <p:cNvPicPr>
-            <a:picLocks noChangeAspect="1"/>
-          </p:cNvPicPr>
-          <p:nvPr/>
-        </p:nvPicPr>
-        <p:blipFill>
-          <a:blip r:embed="rId2"/>
-          <a:stretch>
-            <a:fillRect/>
-          </a:stretch>
-        </p:blipFill>
-        <p:spPr>
-          <a:xfrm>
-            <a:off x="8610600" y="165050"/>
-            <a:ext cx="304800" cy="304800"/>
-          </a:xfrm>
-          <a:prstGeom prst="rect">
-            <a:avLst/>
-          </a:prstGeom>
-        </p:spPr>
-      </p:pic>
-      <p:sp>
-        <p:nvSpPr>
-          <p:cNvPr id="6" name="Text 2"/>
-          <p:cNvSpPr/>
-          <p:nvPr/>
-        </p:nvSpPr>
-        <p:spPr>
-          <a:xfrm>
-            <a:off x="507950" y="381000"/>
-            <a:ext cx="8161020" cy="190500"/>
-          </a:xfrm>
-          <a:prstGeom prst="rect">
-            <a:avLst/>
-          </a:prstGeom>
-          <a:noFill/>
-          <a:ln/>
-        </p:spPr>
-        <p:txBody>
-          <a:bodyPr wrap="square" lIns="0" tIns="0" rIns="0" bIns="0" rtlCol="0" anchor="t"/>
-          <a:lstStyle/>
-          <a:p>
-            <a:pPr algn="l" indent="0" marL="0">
-              <a:buNone/>
-            </a:pPr>
-            <a:r>
-              <a:rPr lang="en-US" sz="1250" b="1" dirty="0">
-                <a:solidFill>
-                  <a:srgbClr val="1A7F37"/>
-                </a:solidFill>
-                <a:latin typeface="Arial" pitchFamily="34" charset="0"/>
-                <a:ea typeface="Arial" pitchFamily="34" charset="-122"/>
-                <a:cs typeface="Arial" pitchFamily="34" charset="-120"/>
-              </a:rPr>
-              <a:t>EVENT TRIGGERS</a:t>
-            </a:r>
-            <a:endParaRPr lang="en-US" sz="1250" dirty="0"/>
-          </a:p>
-        </p:txBody>
-      </p:sp>
-      <p:sp>
-        <p:nvSpPr>
-          <p:cNvPr id="7" name="Text 3"/>
-          <p:cNvSpPr/>
-          <p:nvPr/>
-        </p:nvSpPr>
-        <p:spPr>
-          <a:xfrm>
-            <a:off x="507950" y="622250"/>
-            <a:ext cx="8161020" cy="419100"/>
-          </a:xfrm>
-          <a:prstGeom prst="rect">
-            <a:avLst/>
-          </a:prstGeom>
-          <a:noFill/>
-          <a:ln/>
-        </p:spPr>
-        <p:txBody>
-          <a:bodyPr wrap="square" lIns="0" tIns="0" rIns="0" bIns="0" rtlCol="0" anchor="t"/>
-          <a:lstStyle/>
-          <a:p>
-            <a:pPr algn="l" indent="0" marL="0">
-              <a:lnSpc>
-                <a:spcPts val="3300"/>
-              </a:lnSpc>
-              <a:spcBef>
-                <a:spcPts val="400"/>
-              </a:spcBef>
-              <a:buNone/>
-            </a:pPr>
-            <a:r>
-              <a:rPr lang="en-US" sz="2800" b="1" dirty="0">
-                <a:solidFill>
-                  <a:srgbClr val="1F2328"/>
-                </a:solidFill>
-                <a:latin typeface="Arial" pitchFamily="34" charset="0"/>
-                <a:ea typeface="Arial" pitchFamily="34" charset="-122"/>
-                <a:cs typeface="Arial" pitchFamily="34" charset="-120"/>
-              </a:rPr>
-              <a:t>React to repository activity, safely</a:t>
-            </a:r>
-            <a:endParaRPr lang="en-US" sz="2800" dirty="0"/>
-          </a:p>
-        </p:txBody>
-      </p:sp>
-      <p:sp>
-        <p:nvSpPr>
-          <p:cNvPr id="8" name="Text 4"/>
-          <p:cNvSpPr/>
-          <p:nvPr/>
-        </p:nvSpPr>
-        <p:spPr>
-          <a:xfrm>
-            <a:off x="507950" y="1104751"/>
-            <a:ext cx="8161020" cy="254050"/>
-          </a:xfrm>
-          <a:prstGeom prst="rect">
-            <a:avLst/>
-          </a:prstGeom>
-          <a:noFill/>
-          <a:ln/>
-        </p:spPr>
-        <p:txBody>
-          <a:bodyPr wrap="square" lIns="0" tIns="0" rIns="0" bIns="0" rtlCol="0" anchor="t"/>
-          <a:lstStyle/>
-          <a:p>
-            <a:pPr algn="l" indent="0" marL="0">
-              <a:lnSpc>
-                <a:spcPts val="2000"/>
-              </a:lnSpc>
-              <a:spcBef>
-                <a:spcPts val="500"/>
-              </a:spcBef>
-              <a:buNone/>
-            </a:pPr>
-            <a:r>
-              <a:rPr lang="en-US" sz="1650" dirty="0">
-                <a:solidFill>
-                  <a:srgbClr val="59636E"/>
-                </a:solidFill>
-                <a:latin typeface="Arial" pitchFamily="34" charset="0"/>
-                <a:ea typeface="Arial" pitchFamily="34" charset="-122"/>
-                <a:cs typeface="Arial" pitchFamily="34" charset="-120"/>
-              </a:rPr>
-              <a:t>Issues, PRs, discussions, workflows, and other automations can start a run.</a:t>
-            </a:r>
-            <a:endParaRPr lang="en-US" sz="1650" dirty="0"/>
-          </a:p>
-        </p:txBody>
-      </p:sp>
-      <p:sp>
-        <p:nvSpPr>
-          <p:cNvPr id="9" name="Text 5"/>
-          <p:cNvSpPr/>
-          <p:nvPr/>
-        </p:nvSpPr>
-        <p:spPr>
-          <a:xfrm>
-            <a:off x="507950" y="2004268"/>
-            <a:ext cx="5079950" cy="2214116"/>
-          </a:xfrm>
-          <a:prstGeom prst="roundRect">
-            <a:avLst>
-              <a:gd name="adj" fmla="val 5736"/>
-            </a:avLst>
-          </a:prstGeom>
-          <a:solidFill>
-            <a:srgbClr val="FFFFFF"/>
-          </a:solidFill>
-          <a:ln w="9525">
-            <a:solidFill>
-              <a:srgbClr val="8CE7A5"/>
-            </a:solidFill>
-          </a:ln>
-        </p:spPr>
-        <p:txBody>
-          <a:bodyPr wrap="square" rtlCol="0" anchor="ctr"/>
-          <a:lstStyle/>
-          <a:p>
-            <a:pPr indent="0" marL="0">
-              <a:buNone/>
-            </a:pPr>
-            <a:endParaRPr lang="en-US" dirty="0"/>
-          </a:p>
-        </p:txBody>
-      </p:sp>
-      <p:sp>
-        <p:nvSpPr>
-          <p:cNvPr id="10" name="Shape 6"/>
-          <p:cNvSpPr/>
-          <p:nvPr/>
-        </p:nvSpPr>
-        <p:spPr>
-          <a:xfrm>
-            <a:off x="517475" y="2526506"/>
-            <a:ext cx="5060900" cy="0"/>
-          </a:xfrm>
-          <a:prstGeom prst="line">
-            <a:avLst/>
-          </a:prstGeom>
-          <a:noFill/>
-          <a:ln w="9525">
-            <a:solidFill>
-              <a:srgbClr val="D1D9E0"/>
-            </a:solidFill>
-            <a:prstDash val="solid"/>
-          </a:ln>
-        </p:spPr>
-      </p:sp>
-      <p:sp>
-        <p:nvSpPr>
-          <p:cNvPr id="11" name="Text 7"/>
-          <p:cNvSpPr/>
-          <p:nvPr/>
-        </p:nvSpPr>
-        <p:spPr>
-          <a:xfrm>
-            <a:off x="695176" y="2128093"/>
-            <a:ext cx="279350" cy="279350"/>
-          </a:xfrm>
-          <a:prstGeom prst="roundRect">
-            <a:avLst>
-              <a:gd name="adj" fmla="val 327331"/>
-            </a:avLst>
-          </a:prstGeom>
-          <a:solidFill>
-            <a:srgbClr val="1A7F37"/>
-          </a:solidFill>
-          <a:ln/>
-        </p:spPr>
-        <p:txBody>
-          <a:bodyPr wrap="square" rtlCol="0" anchor="ctr"/>
-          <a:lstStyle/>
-          <a:p>
-            <a:pPr indent="0" marL="0">
-              <a:buNone/>
-            </a:pPr>
-            <a:endParaRPr lang="en-US" dirty="0"/>
-          </a:p>
-        </p:txBody>
-      </p:sp>
-      <p:sp>
-        <p:nvSpPr>
-          <p:cNvPr id="12" name="Text 8"/>
-          <p:cNvSpPr/>
-          <p:nvPr/>
-        </p:nvSpPr>
-        <p:spPr>
-          <a:xfrm>
-            <a:off x="789841" y="2172444"/>
-            <a:ext cx="90020" cy="190500"/>
-          </a:xfrm>
-          <a:prstGeom prst="rect">
-            <a:avLst/>
-          </a:prstGeom>
-          <a:noFill/>
-          <a:ln/>
-        </p:spPr>
-        <p:txBody>
-          <a:bodyPr wrap="square" lIns="0" tIns="0" rIns="0" bIns="0" rtlCol="0" anchor="t"/>
-          <a:lstStyle/>
-          <a:p>
-            <a:pPr algn="ctr" indent="0" marL="0">
-              <a:buNone/>
-            </a:pPr>
-            <a:r>
-              <a:rPr lang="en-US" sz="1250" b="1" dirty="0">
-                <a:solidFill>
-                  <a:srgbClr val="FFFFFF"/>
-                </a:solidFill>
-                <a:latin typeface="Arial" pitchFamily="34" charset="0"/>
-                <a:ea typeface="Arial" pitchFamily="34" charset="-122"/>
-                <a:cs typeface="Arial" pitchFamily="34" charset="-120"/>
-              </a:rPr>
-              <a:t>1</a:t>
-            </a:r>
-            <a:endParaRPr lang="en-US" sz="1250" dirty="0"/>
-          </a:p>
-        </p:txBody>
-      </p:sp>
-      <p:sp>
-        <p:nvSpPr>
-          <p:cNvPr id="13" name="Text 9"/>
-          <p:cNvSpPr/>
-          <p:nvPr/>
-        </p:nvSpPr>
-        <p:spPr>
-          <a:xfrm>
-            <a:off x="1152227" y="2160389"/>
-            <a:ext cx="1813459" cy="214610"/>
-          </a:xfrm>
-          <a:prstGeom prst="rect">
-            <a:avLst/>
-          </a:prstGeom>
-          <a:noFill/>
-          <a:ln/>
-        </p:spPr>
-        <p:txBody>
-          <a:bodyPr wrap="square" lIns="0" tIns="0" rIns="0" bIns="0" rtlCol="0" anchor="t"/>
-          <a:lstStyle/>
-          <a:p>
-            <a:pPr algn="l" indent="0" marL="0">
-              <a:lnSpc>
-                <a:spcPts val="1690"/>
-              </a:lnSpc>
-              <a:buNone/>
-            </a:pPr>
-            <a:r>
-              <a:rPr lang="en-US" sz="1500" b="1" dirty="0">
-                <a:solidFill>
-                  <a:srgbClr val="1F2328"/>
-                </a:solidFill>
-                <a:latin typeface="Arial" pitchFamily="34" charset="0"/>
-                <a:ea typeface="Arial" pitchFamily="34" charset="-122"/>
-                <a:cs typeface="Arial" pitchFamily="34" charset="-120"/>
-              </a:rPr>
-              <a:t>Start read-only</a:t>
-            </a:r>
-            <a:endParaRPr lang="en-US" sz="1500" dirty="0"/>
-          </a:p>
-        </p:txBody>
-      </p:sp>
-      <p:sp>
-        <p:nvSpPr>
-          <p:cNvPr id="14" name="Text 10"/>
-          <p:cNvSpPr/>
-          <p:nvPr/>
-        </p:nvSpPr>
-        <p:spPr>
-          <a:xfrm>
-            <a:off x="3107829" y="2164259"/>
-            <a:ext cx="2338703" cy="207020"/>
-          </a:xfrm>
-          <a:prstGeom prst="rect">
-            <a:avLst/>
-          </a:prstGeom>
-          <a:noFill/>
-          <a:ln/>
-        </p:spPr>
-        <p:txBody>
-          <a:bodyPr wrap="square" lIns="0" tIns="0" rIns="0" bIns="0" rtlCol="0" anchor="t"/>
-          <a:lstStyle/>
-          <a:p>
-            <a:pPr algn="l" indent="0" marL="0">
-              <a:lnSpc>
-                <a:spcPts val="1630"/>
-              </a:lnSpc>
-              <a:buNone/>
-            </a:pPr>
-            <a:r>
-              <a:rPr lang="en-US" sz="1400" dirty="0">
-                <a:solidFill>
-                  <a:srgbClr val="59636E"/>
-                </a:solidFill>
-                <a:latin typeface="Arial" pitchFamily="34" charset="0"/>
-                <a:ea typeface="Arial" pitchFamily="34" charset="-122"/>
-                <a:cs typeface="Arial" pitchFamily="34" charset="-120"/>
-              </a:rPr>
-              <a:t>Summaries, not edits.</a:t>
-            </a:r>
-            <a:endParaRPr lang="en-US" sz="1400" dirty="0"/>
-          </a:p>
-        </p:txBody>
-      </p:sp>
-      <p:sp>
-        <p:nvSpPr>
-          <p:cNvPr id="15" name="Shape 11"/>
-          <p:cNvSpPr/>
-          <p:nvPr/>
-        </p:nvSpPr>
-        <p:spPr>
-          <a:xfrm>
-            <a:off x="517475" y="3178671"/>
-            <a:ext cx="5060900" cy="0"/>
-          </a:xfrm>
-          <a:prstGeom prst="line">
-            <a:avLst/>
-          </a:prstGeom>
-          <a:noFill/>
-          <a:ln w="9525">
-            <a:solidFill>
-              <a:srgbClr val="D1D9E0"/>
-            </a:solidFill>
-            <a:prstDash val="solid"/>
-          </a:ln>
-        </p:spPr>
-      </p:sp>
-      <p:sp>
-        <p:nvSpPr>
-          <p:cNvPr id="16" name="Text 12"/>
-          <p:cNvSpPr/>
-          <p:nvPr/>
-        </p:nvSpPr>
-        <p:spPr>
-          <a:xfrm>
-            <a:off x="695176" y="2712839"/>
-            <a:ext cx="279350" cy="279350"/>
-          </a:xfrm>
-          <a:prstGeom prst="roundRect">
-            <a:avLst>
-              <a:gd name="adj" fmla="val 327331"/>
-            </a:avLst>
-          </a:prstGeom>
-          <a:solidFill>
-            <a:srgbClr val="1A7F37"/>
-          </a:solidFill>
-          <a:ln/>
-        </p:spPr>
-        <p:txBody>
-          <a:bodyPr wrap="square" rtlCol="0" anchor="ctr"/>
-          <a:lstStyle/>
-          <a:p>
-            <a:pPr indent="0" marL="0">
-              <a:buNone/>
-            </a:pPr>
-            <a:endParaRPr lang="en-US" dirty="0"/>
-          </a:p>
-        </p:txBody>
-      </p:sp>
-      <p:sp>
-        <p:nvSpPr>
-          <p:cNvPr id="17" name="Text 13"/>
-          <p:cNvSpPr/>
-          <p:nvPr/>
-        </p:nvSpPr>
-        <p:spPr>
-          <a:xfrm>
-            <a:off x="789841" y="2757190"/>
-            <a:ext cx="90020" cy="190500"/>
-          </a:xfrm>
-          <a:prstGeom prst="rect">
-            <a:avLst/>
-          </a:prstGeom>
-          <a:noFill/>
-          <a:ln/>
-        </p:spPr>
-        <p:txBody>
-          <a:bodyPr wrap="square" lIns="0" tIns="0" rIns="0" bIns="0" rtlCol="0" anchor="t"/>
-          <a:lstStyle/>
-          <a:p>
-            <a:pPr algn="ctr" indent="0" marL="0">
-              <a:buNone/>
-            </a:pPr>
-            <a:r>
-              <a:rPr lang="en-US" sz="1250" b="1" dirty="0">
-                <a:solidFill>
-                  <a:srgbClr val="FFFFFF"/>
-                </a:solidFill>
-                <a:latin typeface="Arial" pitchFamily="34" charset="0"/>
-                <a:ea typeface="Arial" pitchFamily="34" charset="-122"/>
-                <a:cs typeface="Arial" pitchFamily="34" charset="-120"/>
-              </a:rPr>
-              <a:t>2</a:t>
-            </a:r>
-            <a:endParaRPr lang="en-US" sz="1250" dirty="0"/>
-          </a:p>
-        </p:txBody>
-      </p:sp>
-      <p:sp>
-        <p:nvSpPr>
-          <p:cNvPr id="18" name="Text 14"/>
-          <p:cNvSpPr/>
-          <p:nvPr/>
-        </p:nvSpPr>
-        <p:spPr>
-          <a:xfrm>
-            <a:off x="1152227" y="2745284"/>
-            <a:ext cx="1813459" cy="214610"/>
-          </a:xfrm>
-          <a:prstGeom prst="rect">
-            <a:avLst/>
-          </a:prstGeom>
-          <a:noFill/>
-          <a:ln/>
-        </p:spPr>
-        <p:txBody>
-          <a:bodyPr wrap="square" lIns="0" tIns="0" rIns="0" bIns="0" rtlCol="0" anchor="t"/>
-          <a:lstStyle/>
-          <a:p>
-            <a:pPr algn="l" indent="0" marL="0">
-              <a:lnSpc>
-                <a:spcPts val="1690"/>
-              </a:lnSpc>
-              <a:buNone/>
-            </a:pPr>
-            <a:r>
-              <a:rPr lang="en-US" sz="1500" b="1" dirty="0">
-                <a:solidFill>
-                  <a:srgbClr val="1F2328"/>
-                </a:solidFill>
-                <a:latin typeface="Arial" pitchFamily="34" charset="0"/>
-                <a:ea typeface="Arial" pitchFamily="34" charset="-122"/>
-                <a:cs typeface="Arial" pitchFamily="34" charset="-120"/>
-              </a:rPr>
-              <a:t>One repository</a:t>
-            </a:r>
-            <a:endParaRPr lang="en-US" sz="1500" dirty="0"/>
-          </a:p>
-        </p:txBody>
-      </p:sp>
-      <p:sp>
-        <p:nvSpPr>
-          <p:cNvPr id="19" name="Text 15"/>
-          <p:cNvSpPr/>
-          <p:nvPr/>
-        </p:nvSpPr>
-        <p:spPr>
-          <a:xfrm>
-            <a:off x="3107829" y="2645569"/>
-            <a:ext cx="2338703" cy="414040"/>
-          </a:xfrm>
-          <a:prstGeom prst="rect">
-            <a:avLst/>
-          </a:prstGeom>
-          <a:noFill/>
-          <a:ln/>
-        </p:spPr>
-        <p:txBody>
-          <a:bodyPr wrap="square" lIns="0" tIns="0" rIns="0" bIns="0" rtlCol="0" anchor="t"/>
-          <a:lstStyle/>
-          <a:p>
-            <a:pPr algn="l" indent="0" marL="0">
-              <a:lnSpc>
-                <a:spcPts val="1630"/>
-              </a:lnSpc>
-              <a:buNone/>
-            </a:pPr>
-            <a:r>
-              <a:rPr lang="en-US" sz="1400" dirty="0">
-                <a:solidFill>
-                  <a:srgbClr val="59636E"/>
-                </a:solidFill>
-                <a:latin typeface="Arial" pitchFamily="34" charset="0"/>
-                <a:ea typeface="Arial" pitchFamily="34" charset="-122"/>
-                <a:cs typeface="Arial" pitchFamily="34" charset="-120"/>
-              </a:rPr>
-              <a:t>Never every repo you can access.</a:t>
-            </a:r>
-            <a:endParaRPr lang="en-US" sz="1400" dirty="0"/>
-          </a:p>
-        </p:txBody>
-      </p:sp>
-      <p:sp>
-        <p:nvSpPr>
-          <p:cNvPr id="20" name="Shape 16"/>
-          <p:cNvSpPr/>
-          <p:nvPr/>
-        </p:nvSpPr>
-        <p:spPr>
-          <a:xfrm>
-            <a:off x="517475" y="3696146"/>
-            <a:ext cx="5060900" cy="0"/>
-          </a:xfrm>
-          <a:prstGeom prst="line">
-            <a:avLst/>
-          </a:prstGeom>
-          <a:noFill/>
-          <a:ln w="9525">
-            <a:solidFill>
-              <a:srgbClr val="D1D9E0"/>
-            </a:solidFill>
-            <a:prstDash val="solid"/>
-          </a:ln>
-        </p:spPr>
-      </p:sp>
-      <p:sp>
-        <p:nvSpPr>
-          <p:cNvPr id="21" name="Text 17"/>
-          <p:cNvSpPr/>
-          <p:nvPr/>
-        </p:nvSpPr>
-        <p:spPr>
-          <a:xfrm>
-            <a:off x="695176" y="3297734"/>
-            <a:ext cx="279350" cy="279350"/>
-          </a:xfrm>
-          <a:prstGeom prst="roundRect">
-            <a:avLst>
-              <a:gd name="adj" fmla="val 327331"/>
-            </a:avLst>
-          </a:prstGeom>
-          <a:solidFill>
-            <a:srgbClr val="1A7F37"/>
-          </a:solidFill>
-          <a:ln/>
-        </p:spPr>
-        <p:txBody>
-          <a:bodyPr wrap="square" rtlCol="0" anchor="ctr"/>
-          <a:lstStyle/>
-          <a:p>
-            <a:pPr indent="0" marL="0">
-              <a:buNone/>
-            </a:pPr>
-            <a:endParaRPr lang="en-US" dirty="0"/>
-          </a:p>
-        </p:txBody>
-      </p:sp>
-      <p:sp>
-        <p:nvSpPr>
-          <p:cNvPr id="22" name="Text 18"/>
-          <p:cNvSpPr/>
-          <p:nvPr/>
-        </p:nvSpPr>
-        <p:spPr>
-          <a:xfrm>
-            <a:off x="789841" y="3342084"/>
-            <a:ext cx="90020" cy="190500"/>
-          </a:xfrm>
-          <a:prstGeom prst="rect">
-            <a:avLst/>
-          </a:prstGeom>
-          <a:noFill/>
-          <a:ln/>
-        </p:spPr>
-        <p:txBody>
-          <a:bodyPr wrap="square" lIns="0" tIns="0" rIns="0" bIns="0" rtlCol="0" anchor="t"/>
-          <a:lstStyle/>
-          <a:p>
-            <a:pPr algn="ctr" indent="0" marL="0">
-              <a:buNone/>
-            </a:pPr>
-            <a:r>
-              <a:rPr lang="en-US" sz="1250" b="1" dirty="0">
-                <a:solidFill>
-                  <a:srgbClr val="FFFFFF"/>
-                </a:solidFill>
-                <a:latin typeface="Arial" pitchFamily="34" charset="0"/>
-                <a:ea typeface="Arial" pitchFamily="34" charset="-122"/>
-                <a:cs typeface="Arial" pitchFamily="34" charset="-120"/>
-              </a:rPr>
-              <a:t>3</a:t>
-            </a:r>
-            <a:endParaRPr lang="en-US" sz="1250" dirty="0"/>
-          </a:p>
-        </p:txBody>
-      </p:sp>
-      <p:sp>
-        <p:nvSpPr>
-          <p:cNvPr id="23" name="Text 19"/>
-          <p:cNvSpPr/>
-          <p:nvPr/>
-        </p:nvSpPr>
-        <p:spPr>
-          <a:xfrm>
-            <a:off x="1152227" y="3330029"/>
-            <a:ext cx="1813459" cy="214610"/>
-          </a:xfrm>
-          <a:prstGeom prst="rect">
-            <a:avLst/>
-          </a:prstGeom>
-          <a:noFill/>
-          <a:ln/>
-        </p:spPr>
-        <p:txBody>
-          <a:bodyPr wrap="square" lIns="0" tIns="0" rIns="0" bIns="0" rtlCol="0" anchor="t"/>
-          <a:lstStyle/>
-          <a:p>
-            <a:pPr algn="l" indent="0" marL="0">
-              <a:lnSpc>
-                <a:spcPts val="1690"/>
-              </a:lnSpc>
-              <a:buNone/>
-            </a:pPr>
-            <a:r>
-              <a:rPr lang="en-US" sz="1500" b="1" dirty="0">
-                <a:solidFill>
-                  <a:srgbClr val="1F2328"/>
-                </a:solidFill>
-                <a:latin typeface="Arial" pitchFamily="34" charset="0"/>
-                <a:ea typeface="Arial" pitchFamily="34" charset="-122"/>
-                <a:cs typeface="Arial" pitchFamily="34" charset="-120"/>
-              </a:rPr>
-              <a:t>Filter narrowly</a:t>
-            </a:r>
-            <a:endParaRPr lang="en-US" sz="1500" dirty="0"/>
-          </a:p>
-        </p:txBody>
-      </p:sp>
-      <p:sp>
-        <p:nvSpPr>
-          <p:cNvPr id="24" name="Text 20"/>
-          <p:cNvSpPr/>
-          <p:nvPr/>
-        </p:nvSpPr>
-        <p:spPr>
-          <a:xfrm>
-            <a:off x="3107829" y="3333899"/>
-            <a:ext cx="2338703" cy="207020"/>
-          </a:xfrm>
-          <a:prstGeom prst="rect">
-            <a:avLst/>
-          </a:prstGeom>
-          <a:noFill/>
-          <a:ln/>
-        </p:spPr>
-        <p:txBody>
-          <a:bodyPr wrap="square" lIns="0" tIns="0" rIns="0" bIns="0" rtlCol="0" anchor="t"/>
-          <a:lstStyle/>
-          <a:p>
-            <a:pPr algn="l" indent="0" marL="0">
-              <a:lnSpc>
-                <a:spcPts val="1630"/>
-              </a:lnSpc>
-              <a:buNone/>
-            </a:pPr>
-            <a:r>
-              <a:rPr lang="en-US" sz="1400" dirty="0">
-                <a:solidFill>
-                  <a:srgbClr val="59636E"/>
-                </a:solidFill>
-                <a:latin typeface="Arial" pitchFamily="34" charset="0"/>
-                <a:ea typeface="Arial" pitchFamily="34" charset="-122"/>
-                <a:cs typeface="Arial" pitchFamily="34" charset="-120"/>
-              </a:rPr>
-              <a:t>By label or search query.</a:t>
-            </a:r>
-            <a:endParaRPr lang="en-US" sz="1400" dirty="0"/>
-          </a:p>
-        </p:txBody>
-      </p:sp>
-      <p:sp>
-        <p:nvSpPr>
-          <p:cNvPr id="25" name="Text 21"/>
-          <p:cNvSpPr/>
-          <p:nvPr/>
-        </p:nvSpPr>
-        <p:spPr>
-          <a:xfrm>
-            <a:off x="695176" y="3815209"/>
-            <a:ext cx="279350" cy="279350"/>
-          </a:xfrm>
-          <a:prstGeom prst="roundRect">
-            <a:avLst>
-              <a:gd name="adj" fmla="val 327331"/>
-            </a:avLst>
-          </a:prstGeom>
-          <a:solidFill>
-            <a:srgbClr val="1A7F37"/>
-          </a:solidFill>
-          <a:ln/>
-        </p:spPr>
-        <p:txBody>
-          <a:bodyPr wrap="square" rtlCol="0" anchor="ctr"/>
-          <a:lstStyle/>
-          <a:p>
-            <a:pPr indent="0" marL="0">
-              <a:buNone/>
-            </a:pPr>
-            <a:endParaRPr lang="en-US" dirty="0"/>
-          </a:p>
-        </p:txBody>
-      </p:sp>
-      <p:sp>
-        <p:nvSpPr>
-          <p:cNvPr id="26" name="Text 22"/>
-          <p:cNvSpPr/>
-          <p:nvPr/>
-        </p:nvSpPr>
-        <p:spPr>
-          <a:xfrm>
-            <a:off x="789841" y="3859560"/>
-            <a:ext cx="90020" cy="190500"/>
-          </a:xfrm>
-          <a:prstGeom prst="rect">
-            <a:avLst/>
-          </a:prstGeom>
-          <a:noFill/>
-          <a:ln/>
-        </p:spPr>
-        <p:txBody>
-          <a:bodyPr wrap="square" lIns="0" tIns="0" rIns="0" bIns="0" rtlCol="0" anchor="t"/>
-          <a:lstStyle/>
-          <a:p>
-            <a:pPr algn="ctr" indent="0" marL="0">
-              <a:buNone/>
-            </a:pPr>
-            <a:r>
-              <a:rPr lang="en-US" sz="1250" b="1" dirty="0">
-                <a:solidFill>
-                  <a:srgbClr val="FFFFFF"/>
-                </a:solidFill>
-                <a:latin typeface="Arial" pitchFamily="34" charset="0"/>
-                <a:ea typeface="Arial" pitchFamily="34" charset="-122"/>
-                <a:cs typeface="Arial" pitchFamily="34" charset="-120"/>
-              </a:rPr>
-              <a:t>4</a:t>
-            </a:r>
-            <a:endParaRPr lang="en-US" sz="1250" dirty="0"/>
-          </a:p>
-        </p:txBody>
-      </p:sp>
-      <p:sp>
-        <p:nvSpPr>
-          <p:cNvPr id="27" name="Text 23"/>
-          <p:cNvSpPr/>
-          <p:nvPr/>
-        </p:nvSpPr>
-        <p:spPr>
-          <a:xfrm>
-            <a:off x="1152227" y="3847505"/>
-            <a:ext cx="1813459" cy="214610"/>
-          </a:xfrm>
-          <a:prstGeom prst="rect">
-            <a:avLst/>
-          </a:prstGeom>
-          <a:noFill/>
-          <a:ln/>
-        </p:spPr>
-        <p:txBody>
-          <a:bodyPr wrap="square" lIns="0" tIns="0" rIns="0" bIns="0" rtlCol="0" anchor="t"/>
-          <a:lstStyle/>
-          <a:p>
-            <a:pPr algn="l" indent="0" marL="0">
-              <a:lnSpc>
-                <a:spcPts val="1690"/>
-              </a:lnSpc>
-              <a:buNone/>
-            </a:pPr>
-            <a:r>
-              <a:rPr lang="en-US" sz="1500" b="1" dirty="0">
-                <a:solidFill>
-                  <a:srgbClr val="1F2328"/>
-                </a:solidFill>
-                <a:latin typeface="Arial" pitchFamily="34" charset="0"/>
-                <a:ea typeface="Arial" pitchFamily="34" charset="-122"/>
-                <a:cs typeface="Arial" pitchFamily="34" charset="-120"/>
-              </a:rPr>
-              <a:t>Hold write tools</a:t>
-            </a:r>
-            <a:endParaRPr lang="en-US" sz="1500" dirty="0"/>
-          </a:p>
-        </p:txBody>
-      </p:sp>
-      <p:sp>
-        <p:nvSpPr>
-          <p:cNvPr id="28" name="Text 24"/>
-          <p:cNvSpPr/>
-          <p:nvPr/>
-        </p:nvSpPr>
-        <p:spPr>
-          <a:xfrm>
-            <a:off x="3107829" y="3851374"/>
-            <a:ext cx="2338703" cy="207020"/>
-          </a:xfrm>
-          <a:prstGeom prst="rect">
-            <a:avLst/>
-          </a:prstGeom>
-          <a:noFill/>
-          <a:ln/>
-        </p:spPr>
-        <p:txBody>
-          <a:bodyPr wrap="square" lIns="0" tIns="0" rIns="0" bIns="0" rtlCol="0" anchor="t"/>
-          <a:lstStyle/>
-          <a:p>
-            <a:pPr algn="l" indent="0" marL="0">
-              <a:lnSpc>
-                <a:spcPts val="1630"/>
-              </a:lnSpc>
-              <a:buNone/>
-            </a:pPr>
-            <a:r>
-              <a:rPr lang="en-US" sz="1400" dirty="0">
-                <a:solidFill>
-                  <a:srgbClr val="59636E"/>
-                </a:solidFill>
-                <a:latin typeface="Arial" pitchFamily="34" charset="0"/>
-                <a:ea typeface="Arial" pitchFamily="34" charset="-122"/>
-                <a:cs typeface="Arial" pitchFamily="34" charset="-120"/>
-              </a:rPr>
-              <a:t>Until several runs look right.</a:t>
-            </a:r>
-            <a:endParaRPr lang="en-US" sz="1400" dirty="0"/>
-          </a:p>
-        </p:txBody>
-      </p:sp>
-      <p:sp>
-        <p:nvSpPr>
-          <p:cNvPr id="29" name="Text 25"/>
-          <p:cNvSpPr/>
-          <p:nvPr/>
-        </p:nvSpPr>
-        <p:spPr>
-          <a:xfrm>
-            <a:off x="5791051" y="2639467"/>
-            <a:ext cx="2844701" cy="943570"/>
-          </a:xfrm>
-          <a:prstGeom prst="roundRect">
-            <a:avLst>
-              <a:gd name="adj" fmla="val 10768"/>
-            </a:avLst>
-          </a:prstGeom>
-          <a:solidFill>
-            <a:srgbClr val="FFEBE9"/>
-          </a:solidFill>
-          <a:ln w="9525">
-            <a:solidFill>
-              <a:srgbClr val="FFCECB"/>
-            </a:solidFill>
-          </a:ln>
-        </p:spPr>
-        <p:txBody>
-          <a:bodyPr wrap="square" rtlCol="0" anchor="ctr"/>
-          <a:lstStyle/>
-          <a:p>
-            <a:pPr indent="0" marL="0">
-              <a:buNone/>
-            </a:pPr>
-            <a:endParaRPr lang="en-US" dirty="0"/>
-          </a:p>
-        </p:txBody>
-      </p:sp>
-      <p:pic>
-        <p:nvPicPr>
-          <p:cNvPr id="30" name="Image 2" descr="">
-            <a:extLst>
-              <a:ext uri="{C183D7F6-B498-43B3-948B-1728B52AA6E4}">
-                <adec:decorative xmlns:adec="http://schemas.microsoft.com/office/drawing/2017/decorative" val="1"/>
-              </a:ext>
-            </a:extLst>
-          </p:cNvPr>
-          <p:cNvPicPr>
-            <a:picLocks noChangeAspect="1"/>
-          </p:cNvPicPr>
-          <p:nvPr/>
-        </p:nvPicPr>
-        <p:blipFill>
-          <a:blip r:embed="rId4"/>
-          <a:stretch>
-            <a:fillRect/>
-          </a:stretch>
-        </p:blipFill>
-        <p:spPr>
-          <a:xfrm>
-            <a:off x="5978277" y="3009602"/>
-            <a:ext cx="203150" cy="203150"/>
-          </a:xfrm>
-          <a:prstGeom prst="rect">
-            <a:avLst/>
-          </a:prstGeom>
-        </p:spPr>
-      </p:pic>
-      <p:sp>
-        <p:nvSpPr>
-          <p:cNvPr id="31" name="Text 26"/>
-          <p:cNvSpPr/>
-          <p:nvPr/>
-        </p:nvSpPr>
-        <p:spPr>
-          <a:xfrm>
-            <a:off x="6308378" y="2775942"/>
-            <a:ext cx="2182951" cy="670620"/>
-          </a:xfrm>
-          <a:prstGeom prst="rect">
-            <a:avLst/>
-          </a:prstGeom>
-          <a:noFill/>
-          <a:ln/>
-        </p:spPr>
-        <p:txBody>
-          <a:bodyPr wrap="square" lIns="0" tIns="0" rIns="0" bIns="0" rtlCol="0" anchor="t"/>
-          <a:lstStyle/>
-          <a:p>
-            <a:pPr algn="l" indent="0" marL="0">
-              <a:lnSpc>
-                <a:spcPts val="1760"/>
-              </a:lnSpc>
-              <a:buNone/>
-            </a:pPr>
-            <a:r>
-              <a:rPr lang="en-US" sz="1450" dirty="0">
-                <a:solidFill>
-                  <a:srgbClr val="1F2328"/>
-                </a:solidFill>
-                <a:latin typeface="Arial" pitchFamily="34" charset="0"/>
-                <a:ea typeface="Arial" pitchFamily="34" charset="-122"/>
-                <a:cs typeface="Arial" pitchFamily="34" charset="-120"/>
-              </a:rPr>
-              <a:t>Hostile issue text plus write tools raises </a:t>
-            </a:r>
-            <a:pPr algn="l" indent="0" marL="0">
-              <a:lnSpc>
-                <a:spcPts val="1760"/>
-              </a:lnSpc>
-              <a:buNone/>
-            </a:pPr>
-            <a:r>
-              <a:rPr lang="en-US" sz="1450" b="1" dirty="0">
-                <a:solidFill>
-                  <a:srgbClr val="1F2328"/>
-                </a:solidFill>
-                <a:latin typeface="Arial" pitchFamily="34" charset="0"/>
-                <a:ea typeface="Arial" pitchFamily="34" charset="-122"/>
-                <a:cs typeface="Arial" pitchFamily="34" charset="-120"/>
-              </a:rPr>
-              <a:t>prompt-injection</a:t>
-            </a:r>
-            <a:pPr algn="l" indent="0" marL="0">
-              <a:lnSpc>
-                <a:spcPts val="1760"/>
-              </a:lnSpc>
-              <a:buNone/>
-            </a:pPr>
-            <a:r>
-              <a:rPr lang="en-US" sz="1450" dirty="0">
-                <a:solidFill>
-                  <a:srgbClr val="1F2328"/>
-                </a:solidFill>
-                <a:latin typeface="Arial" pitchFamily="34" charset="0"/>
-                <a:ea typeface="Arial" pitchFamily="34" charset="-122"/>
-                <a:cs typeface="Arial" pitchFamily="34" charset="-120"/>
-              </a:rPr>
-              <a:t> risk.</a:t>
-            </a:r>
-            <a:endParaRPr lang="en-US" sz="1450" dirty="0"/>
-          </a:p>
-        </p:txBody>
-      </p:sp>
-    </p:spTree>
-  </p:cSld>
-  <p:clrMapOvr>
-    <a:masterClrMapping/>
-  </p:clrMapOvr>
-</p:sld>
+<ns0:sld xmlns:ns0="http://schemas.openxmlformats.org/presentationml/2006/main" xmlns:ns1="http://schemas.openxmlformats.org/drawingml/2006/main" xmlns:ns2="http://schemas.microsoft.com/office/drawing/2017/decorative" xmlns:ns3="http://schemas.openxmlformats.org/officeDocument/2006/relationships">
+  <ns0:cSld name="Slide 12">
+    <ns0:bg>
+      <ns0:bgPr>
+        <ns1:solidFill>
+          <ns1:srgbClr val="FFFFFF"/>
+        </ns1:solidFill>
+      </ns0:bgPr>
+    </ns0:bg>
+    <ns0:spTree>
+      <ns0:nvGrpSpPr>
+        <ns0:cNvPr id="1" name=""/>
+        <ns0:cNvGrpSpPr/>
+        <ns0:nvPr/>
+      </ns0:nvGrpSpPr>
+      <ns0:grpSpPr>
+        <ns1:xfrm>
+          <ns1:off x="0" y="0"/>
+          <ns1:ext cx="0" cy="0"/>
+          <ns1:chOff x="0" y="0"/>
+          <ns1:chExt cx="0" cy="0"/>
+        </ns1:xfrm>
+      </ns0:grpSpPr>
+      <ns0:pic>
+        <ns0:nvPicPr>
+          <ns0:cNvPr id="2" name="Image 0" descr="">
+            <ns1:extLst>
+              <ns1:ext uri="{C183D7F6-B498-43B3-948B-1728B52AA6E4}">
+                <ns2:decorative val="1"/>
+              </ns1:ext>
+            </ns1:extLst>
+          </ns0:cNvPr>
+          <ns0:cNvPicPr>
+            <ns1:picLocks noChangeAspect="1"/>
+          </ns0:cNvPicPr>
+          <ns0:nvPr/>
+        </ns0:nvPicPr>
+        <ns0:blipFill>
+          <ns1:blip ns3:embed="rId1"/>
+          <ns1:stretch>
+            <ns1:fillRect/>
+          </ns1:stretch>
+        </ns0:blipFill>
+        <ns0:spPr>
+          <ns1:xfrm>
+            <ns1:off x="6349901" y="0"/>
+            <ns1:ext cx="2793950" cy="1308050"/>
+          </ns1:xfrm>
+          <ns1:prstGeom prst="rect">
+            <ns1:avLst/>
+          </ns1:prstGeom>
+        </ns0:spPr>
+      </ns0:pic>
+      <ns0:sp>
+        <ns0:nvSpPr>
+          <ns0:cNvPr id="3" name="Text 0"/>
+          <ns0:cNvSpPr/>
+          <ns0:nvPr/>
+        </ns0:nvSpPr>
+        <ns0:spPr>
+          <ns1:xfrm>
+            <ns1:off x="7340501" y="177701"/>
+            <ns1:ext cx="1168301" cy="279350"/>
+          </ns1:xfrm>
+          <ns1:prstGeom prst="roundRect">
+            <ns1:avLst>
+              <ns1:gd name="adj" fmla="val 22731"/>
+            </ns1:avLst>
+          </ns1:prstGeom>
+          <ns1:solidFill>
+            <ns1:srgbClr val="1A7F37"/>
+          </ns1:solidFill>
+          <ns1:ln/>
+        </ns0:spPr>
+        <ns0:txBody>
+          <ns1:bodyPr wrap="square" rtlCol="0" anchor="ctr"/>
+          <ns1:lstStyle/>
+          <ns1:p>
+            <ns1:pPr indent="0" marL="0">
+              <ns1:buNone/>
+            </ns1:pPr>
+            <ns1:endParaRPr lang="en-US" dirty="0"/>
+          </ns1:p>
+        </ns0:txBody>
+      </ns0:sp>
+      <ns0:sp>
+        <ns0:nvSpPr>
+          <ns0:cNvPr id="4" name="Text 1"/>
+          <ns0:cNvSpPr/>
+          <ns0:nvPr/>
+        </ns0:nvSpPr>
+        <ns0:spPr>
+          <ns1:xfrm>
+            <ns1:off x="7461041" y="231577"/>
+            <ns1:ext cx="927071" cy="171450"/>
+          </ns1:xfrm>
+          <ns1:prstGeom prst="rect">
+            <ns1:avLst/>
+          </ns1:prstGeom>
+          <ns1:noFill/>
+          <ns1:ln/>
+        </ns0:spPr>
+        <ns0:txBody>
+          <ns1:bodyPr wrap="square" lIns="0" tIns="0" rIns="0" bIns="0" rtlCol="0" anchor="t"/>
+          <ns1:lstStyle/>
+          <ns1:p>
+            <ns1:pPr algn="ctr" indent="0" marL="0">
+              <ns1:buNone/>
+            </ns1:pPr>
+            <ns1:r>
+              <ns1:rPr lang="en-US" sz="1150" b="1" dirty="0">
+                <ns1:solidFill>
+                  <ns1:srgbClr val="FFFFFF"/>
+                </ns1:solidFill>
+                <ns1:latin typeface="Arial" pitchFamily="34" charset="0"/>
+                <ns1:ea typeface="Arial" pitchFamily="34" charset="-122"/>
+                <ns1:cs typeface="Arial" pitchFamily="34" charset="-120"/>
+              </ns1:rPr>
+              <ns1:t>CHAPTER 07</ns1:t>
+            </ns1:r>
+            <ns1:endParaRPr lang="en-US" sz="1150" dirty="0"/>
+          </ns1:p>
+        </ns0:txBody>
+      </ns0:sp>
+      <ns0:pic>
+        <ns0:nvPicPr>
+          <ns0:cNvPr id="5" name="Image 1" descr="Open this chapter on GitHub">
+            <ns1:hlinkClick ns3:id="rId3" tooltip="https://github.com/github/copilot-app-for-beginners/tree/main/07-automations"/>
+          </ns0:cNvPr>
+          <ns0:cNvPicPr>
+            <ns1:picLocks noChangeAspect="1"/>
+          </ns0:cNvPicPr>
+          <ns0:nvPr/>
+        </ns0:nvPicPr>
+        <ns0:blipFill>
+          <ns1:blip ns3:embed="rId2"/>
+          <ns1:stretch>
+            <ns1:fillRect/>
+          </ns1:stretch>
+        </ns0:blipFill>
+        <ns0:spPr>
+          <ns1:xfrm>
+            <ns1:off x="8610600" y="165050"/>
+            <ns1:ext cx="304800" cy="304800"/>
+          </ns1:xfrm>
+          <ns1:prstGeom prst="rect">
+            <ns1:avLst/>
+          </ns1:prstGeom>
+        </ns0:spPr>
+      </ns0:pic>
+      <ns0:sp>
+        <ns0:nvSpPr>
+          <ns0:cNvPr id="6" name="Text 2"/>
+          <ns0:cNvSpPr/>
+          <ns0:nvPr/>
+        </ns0:nvSpPr>
+        <ns0:spPr>
+          <ns1:xfrm>
+            <ns1:off x="507950" y="381000"/>
+            <ns1:ext cx="8161020" cy="190500"/>
+          </ns1:xfrm>
+          <ns1:prstGeom prst="rect">
+            <ns1:avLst/>
+          </ns1:prstGeom>
+          <ns1:noFill/>
+          <ns1:ln/>
+        </ns0:spPr>
+        <ns0:txBody>
+          <ns1:bodyPr wrap="square" lIns="0" tIns="0" rIns="0" bIns="0" rtlCol="0" anchor="t"/>
+          <ns1:lstStyle/>
+          <ns1:p>
+            <ns1:pPr algn="l" indent="0" marL="0">
+              <ns1:buNone/>
+            </ns1:pPr>
+            <ns1:r>
+              <ns1:rPr lang="en-US" sz="1250" b="1" dirty="0">
+                <ns1:solidFill>
+                  <ns1:srgbClr val="1A7F37"/>
+                </ns1:solidFill>
+                <ns1:latin typeface="Arial" pitchFamily="34" charset="0"/>
+                <ns1:ea typeface="Arial" pitchFamily="34" charset="-122"/>
+                <ns1:cs typeface="Arial" pitchFamily="34" charset="-120"/>
+              </ns1:rPr>
+              <ns1:t>EVENT TRIGGERS</ns1:t>
+            </ns1:r>
+            <ns1:endParaRPr lang="en-US" sz="1250" dirty="0"/>
+          </ns1:p>
+        </ns0:txBody>
+      </ns0:sp>
+      <ns0:sp>
+        <ns0:nvSpPr>
+          <ns0:cNvPr id="7" name="Text 3"/>
+          <ns0:cNvSpPr/>
+          <ns0:nvPr/>
+        </ns0:nvSpPr>
+        <ns0:spPr>
+          <ns1:xfrm>
+            <ns1:off x="507950" y="622250"/>
+            <ns1:ext cx="8161020" cy="419100"/>
+          </ns1:xfrm>
+          <ns1:prstGeom prst="rect">
+            <ns1:avLst/>
+          </ns1:prstGeom>
+          <ns1:noFill/>
+          <ns1:ln/>
+        </ns0:spPr>
+        <ns0:txBody>
+          <ns1:bodyPr wrap="square" lIns="0" tIns="0" rIns="0" bIns="0" rtlCol="0" anchor="t"/>
+          <ns1:lstStyle/>
+          <ns1:p>
+            <ns1:pPr algn="l" indent="0" marL="0">
+              <ns1:lnSpc>
+                <ns1:spcPts val="3300"/>
+              </ns1:lnSpc>
+              <ns1:spcBef>
+                <ns1:spcPts val="400"/>
+              </ns1:spcBef>
+              <ns1:buNone/>
+            </ns1:pPr>
+            <ns1:r>
+              <ns1:rPr lang="en-US" sz="2800" b="1" dirty="0">
+                <ns1:solidFill>
+                  <ns1:srgbClr val="1F2328"/>
+                </ns1:solidFill>
+                <ns1:latin typeface="Arial" pitchFamily="34" charset="0"/>
+                <ns1:ea typeface="Arial" pitchFamily="34" charset="-122"/>
+                <ns1:cs typeface="Arial" pitchFamily="34" charset="-120"/>
+              </ns1:rPr>
+              <ns1:t>React to repository activity, safely</ns1:t>
+            </ns1:r>
+            <ns1:endParaRPr lang="en-US" sz="2800" dirty="0"/>
+          </ns1:p>
+        </ns0:txBody>
+      </ns0:sp>
+      <ns0:sp>
+        <ns0:nvSpPr>
+          <ns0:cNvPr id="8" name="Text 4"/>
+          <ns0:cNvSpPr/>
+          <ns0:nvPr/>
+        </ns0:nvSpPr>
+        <ns0:spPr>
+          <ns1:xfrm>
+            <ns1:off x="507950" y="1104751"/>
+            <ns1:ext cx="8161020" cy="254050"/>
+          </ns1:xfrm>
+          <ns1:prstGeom prst="rect">
+            <ns1:avLst/>
+          </ns1:prstGeom>
+          <ns1:noFill/>
+          <ns1:ln/>
+        </ns0:spPr>
+        <ns0:txBody>
+          <ns1:bodyPr wrap="square" lIns="0" tIns="0" rIns="0" bIns="0" rtlCol="0" anchor="t"/>
+          <ns1:lstStyle/>
+          <ns1:p>
+            <ns1:pPr algn="l" indent="0" marL="0">
+              <ns1:lnSpc>
+                <ns1:spcPts val="2000"/>
+              </ns1:lnSpc>
+              <ns1:spcBef>
+                <ns1:spcPts val="500"/>
+              </ns1:spcBef>
+              <ns1:buNone/>
+            </ns1:pPr>
+            <ns1:r>
+              <ns1:rPr lang="en-US" sz="1650" dirty="0">
+                <ns1:solidFill>
+                  <ns1:srgbClr val="59636E"/>
+                </ns1:solidFill>
+                <ns1:latin typeface="Arial" pitchFamily="34" charset="0"/>
+                <ns1:ea typeface="Arial" pitchFamily="34" charset="-122"/>
+                <ns1:cs typeface="Arial" pitchFamily="34" charset="-120"/>
+              </ns1:rPr>
+              <ns1:t>Issue, PR, discussion, alert, workflow, or automation events can start a run.</ns1:t>
+            </ns1:r>
+            <ns1:endParaRPr lang="en-US" sz="1650" dirty="0"/>
+          </ns1:p>
+        </ns0:txBody>
+      </ns0:sp>
+      <ns0:sp>
+        <ns0:nvSpPr>
+          <ns0:cNvPr id="9" name="Text 5"/>
+          <ns0:cNvSpPr/>
+          <ns0:nvPr/>
+        </ns0:nvSpPr>
+        <ns0:spPr>
+          <ns1:xfrm>
+            <ns1:off x="507950" y="2004268"/>
+            <ns1:ext cx="5079950" cy="2214116"/>
+          </ns1:xfrm>
+          <ns1:prstGeom prst="roundRect">
+            <ns1:avLst>
+              <ns1:gd name="adj" fmla="val 5736"/>
+            </ns1:avLst>
+          </ns1:prstGeom>
+          <ns1:solidFill>
+            <ns1:srgbClr val="FFFFFF"/>
+          </ns1:solidFill>
+          <ns1:ln w="9525">
+            <ns1:solidFill>
+              <ns1:srgbClr val="8CE7A5"/>
+            </ns1:solidFill>
+          </ns1:ln>
+        </ns0:spPr>
+        <ns0:txBody>
+          <ns1:bodyPr wrap="square" rtlCol="0" anchor="ctr"/>
+          <ns1:lstStyle/>
+          <ns1:p>
+            <ns1:pPr indent="0" marL="0">
+              <ns1:buNone/>
+            </ns1:pPr>
+            <ns1:endParaRPr lang="en-US" dirty="0"/>
+          </ns1:p>
+        </ns0:txBody>
+      </ns0:sp>
+      <ns0:sp>
+        <ns0:nvSpPr>
+          <ns0:cNvPr id="10" name="Shape 6"/>
+          <ns0:cNvSpPr/>
+          <ns0:nvPr/>
+        </ns0:nvSpPr>
+        <ns0:spPr>
+          <ns1:xfrm>
+            <ns1:off x="517475" y="2526506"/>
+            <ns1:ext cx="5060900" cy="0"/>
+          </ns1:xfrm>
+          <ns1:prstGeom prst="line">
+            <ns1:avLst/>
+          </ns1:prstGeom>
+          <ns1:noFill/>
+          <ns1:ln w="9525">
+            <ns1:solidFill>
+              <ns1:srgbClr val="D1D9E0"/>
+            </ns1:solidFill>
+            <ns1:prstDash val="solid"/>
+          </ns1:ln>
+        </ns0:spPr>
+      </ns0:sp>
+      <ns0:sp>
+        <ns0:nvSpPr>
+          <ns0:cNvPr id="11" name="Text 7"/>
+          <ns0:cNvSpPr/>
+          <ns0:nvPr/>
+        </ns0:nvSpPr>
+        <ns0:spPr>
+          <ns1:xfrm>
+            <ns1:off x="695176" y="2128093"/>
+            <ns1:ext cx="279350" cy="279350"/>
+          </ns1:xfrm>
+          <ns1:prstGeom prst="roundRect">
+            <ns1:avLst>
+              <ns1:gd name="adj" fmla="val 327331"/>
+            </ns1:avLst>
+          </ns1:prstGeom>
+          <ns1:solidFill>
+            <ns1:srgbClr val="1A7F37"/>
+          </ns1:solidFill>
+          <ns1:ln/>
+        </ns0:spPr>
+        <ns0:txBody>
+          <ns1:bodyPr wrap="square" rtlCol="0" anchor="ctr"/>
+          <ns1:lstStyle/>
+          <ns1:p>
+            <ns1:pPr indent="0" marL="0">
+              <ns1:buNone/>
+            </ns1:pPr>
+            <ns1:endParaRPr lang="en-US" dirty="0"/>
+          </ns1:p>
+        </ns0:txBody>
+      </ns0:sp>
+      <ns0:sp>
+        <ns0:nvSpPr>
+          <ns0:cNvPr id="12" name="Text 8"/>
+          <ns0:cNvSpPr/>
+          <ns0:nvPr/>
+        </ns0:nvSpPr>
+        <ns0:spPr>
+          <ns1:xfrm>
+            <ns1:off x="789841" y="2172444"/>
+            <ns1:ext cx="90020" cy="190500"/>
+          </ns1:xfrm>
+          <ns1:prstGeom prst="rect">
+            <ns1:avLst/>
+          </ns1:prstGeom>
+          <ns1:noFill/>
+          <ns1:ln/>
+        </ns0:spPr>
+        <ns0:txBody>
+          <ns1:bodyPr wrap="square" lIns="0" tIns="0" rIns="0" bIns="0" rtlCol="0" anchor="t"/>
+          <ns1:lstStyle/>
+          <ns1:p>
+            <ns1:pPr algn="ctr" indent="0" marL="0">
+              <ns1:buNone/>
+            </ns1:pPr>
+            <ns1:r>
+              <ns1:rPr lang="en-US" sz="1250" b="1" dirty="0">
+                <ns1:solidFill>
+                  <ns1:srgbClr val="FFFFFF"/>
+                </ns1:solidFill>
+                <ns1:latin typeface="Arial" pitchFamily="34" charset="0"/>
+                <ns1:ea typeface="Arial" pitchFamily="34" charset="-122"/>
+                <ns1:cs typeface="Arial" pitchFamily="34" charset="-120"/>
+              </ns1:rPr>
+              <ns1:t>1</ns1:t>
+            </ns1:r>
+            <ns1:endParaRPr lang="en-US" sz="1250" dirty="0"/>
+          </ns1:p>
+        </ns0:txBody>
+      </ns0:sp>
+      <ns0:sp>
+        <ns0:nvSpPr>
+          <ns0:cNvPr id="13" name="Text 9"/>
+          <ns0:cNvSpPr/>
+          <ns0:nvPr/>
+        </ns0:nvSpPr>
+        <ns0:spPr>
+          <ns1:xfrm>
+            <ns1:off x="1152227" y="2160389"/>
+            <ns1:ext cx="1813459" cy="214610"/>
+          </ns1:xfrm>
+          <ns1:prstGeom prst="rect">
+            <ns1:avLst/>
+          </ns1:prstGeom>
+          <ns1:noFill/>
+          <ns1:ln/>
+        </ns0:spPr>
+        <ns0:txBody>
+          <ns1:bodyPr wrap="square" lIns="0" tIns="0" rIns="0" bIns="0" rtlCol="0" anchor="t"/>
+          <ns1:lstStyle/>
+          <ns1:p>
+            <ns1:pPr algn="l" indent="0" marL="0">
+              <ns1:lnSpc>
+                <ns1:spcPts val="1690"/>
+              </ns1:lnSpc>
+              <ns1:buNone/>
+            </ns1:pPr>
+            <ns1:r>
+              <ns1:rPr lang="en-US" sz="1500" b="1" dirty="0">
+                <ns1:solidFill>
+                  <ns1:srgbClr val="1F2328"/>
+                </ns1:solidFill>
+                <ns1:latin typeface="Arial" pitchFamily="34" charset="0"/>
+                <ns1:ea typeface="Arial" pitchFamily="34" charset="-122"/>
+                <ns1:cs typeface="Arial" pitchFamily="34" charset="-120"/>
+              </ns1:rPr>
+              <ns1:t>Start read-only</ns1:t>
+            </ns1:r>
+            <ns1:endParaRPr lang="en-US" sz="1500" dirty="0"/>
+          </ns1:p>
+        </ns0:txBody>
+      </ns0:sp>
+      <ns0:sp>
+        <ns0:nvSpPr>
+          <ns0:cNvPr id="14" name="Text 10"/>
+          <ns0:cNvSpPr/>
+          <ns0:nvPr/>
+        </ns0:nvSpPr>
+        <ns0:spPr>
+          <ns1:xfrm>
+            <ns1:off x="3107829" y="2164259"/>
+            <ns1:ext cx="2338703" cy="207020"/>
+          </ns1:xfrm>
+          <ns1:prstGeom prst="rect">
+            <ns1:avLst/>
+          </ns1:prstGeom>
+          <ns1:noFill/>
+          <ns1:ln/>
+        </ns0:spPr>
+        <ns0:txBody>
+          <ns1:bodyPr wrap="square" lIns="0" tIns="0" rIns="0" bIns="0" rtlCol="0" anchor="t"/>
+          <ns1:lstStyle/>
+          <ns1:p>
+            <ns1:pPr algn="l" indent="0" marL="0">
+              <ns1:lnSpc>
+                <ns1:spcPts val="1630"/>
+              </ns1:lnSpc>
+              <ns1:buNone/>
+            </ns1:pPr>
+            <ns1:r>
+              <ns1:rPr lang="en-US" sz="1400" dirty="0">
+                <ns1:solidFill>
+                  <ns1:srgbClr val="59636E"/>
+                </ns1:solidFill>
+                <ns1:latin typeface="Arial" pitchFamily="34" charset="0"/>
+                <ns1:ea typeface="Arial" pitchFamily="34" charset="-122"/>
+                <ns1:cs typeface="Arial" pitchFamily="34" charset="-120"/>
+              </ns1:rPr>
+              <ns1:t>Summaries, not edits.</ns1:t>
+            </ns1:r>
+            <ns1:endParaRPr lang="en-US" sz="1400" dirty="0"/>
+          </ns1:p>
+        </ns0:txBody>
+      </ns0:sp>
+      <ns0:sp>
+        <ns0:nvSpPr>
+          <ns0:cNvPr id="15" name="Shape 11"/>
+          <ns0:cNvSpPr/>
+          <ns0:nvPr/>
+        </ns0:nvSpPr>
+        <ns0:spPr>
+          <ns1:xfrm>
+            <ns1:off x="517475" y="3178671"/>
+            <ns1:ext cx="5060900" cy="0"/>
+          </ns1:xfrm>
+          <ns1:prstGeom prst="line">
+            <ns1:avLst/>
+          </ns1:prstGeom>
+          <ns1:noFill/>
+          <ns1:ln w="9525">
+            <ns1:solidFill>
+              <ns1:srgbClr val="D1D9E0"/>
+            </ns1:solidFill>
+            <ns1:prstDash val="solid"/>
+          </ns1:ln>
+        </ns0:spPr>
+      </ns0:sp>
+      <ns0:sp>
+        <ns0:nvSpPr>
+          <ns0:cNvPr id="16" name="Text 12"/>
+          <ns0:cNvSpPr/>
+          <ns0:nvPr/>
+        </ns0:nvSpPr>
+        <ns0:spPr>
+          <ns1:xfrm>
+            <ns1:off x="695176" y="2712839"/>
+            <ns1:ext cx="279350" cy="279350"/>
+          </ns1:xfrm>
+          <ns1:prstGeom prst="roundRect">
+            <ns1:avLst>
+              <ns1:gd name="adj" fmla="val 327331"/>
+            </ns1:avLst>
+          </ns1:prstGeom>
+          <ns1:solidFill>
+            <ns1:srgbClr val="1A7F37"/>
+          </ns1:solidFill>
+          <ns1:ln/>
+        </ns0:spPr>
+        <ns0:txBody>
+          <ns1:bodyPr wrap="square" rtlCol="0" anchor="ctr"/>
+          <ns1:lstStyle/>
+          <ns1:p>
+            <ns1:pPr indent="0" marL="0">
+              <ns1:buNone/>
+            </ns1:pPr>
+            <ns1:endParaRPr lang="en-US" dirty="0"/>
+          </ns1:p>
+        </ns0:txBody>
+      </ns0:sp>
+      <ns0:sp>
+        <ns0:nvSpPr>
+          <ns0:cNvPr id="17" name="Text 13"/>
+          <ns0:cNvSpPr/>
+          <ns0:nvPr/>
+        </ns0:nvSpPr>
+        <ns0:spPr>
+          <ns1:xfrm>
+            <ns1:off x="789841" y="2757190"/>
+            <ns1:ext cx="90020" cy="190500"/>
+          </ns1:xfrm>
+          <ns1:prstGeom prst="rect">
+            <ns1:avLst/>
+          </ns1:prstGeom>
+          <ns1:noFill/>
+          <ns1:ln/>
+        </ns0:spPr>
+        <ns0:txBody>
+          <ns1:bodyPr wrap="square" lIns="0" tIns="0" rIns="0" bIns="0" rtlCol="0" anchor="t"/>
+          <ns1:lstStyle/>
+          <ns1:p>
+            <ns1:pPr algn="ctr" indent="0" marL="0">
+              <ns1:buNone/>
+            </ns1:pPr>
+            <ns1:r>
+              <ns1:rPr lang="en-US" sz="1250" b="1" dirty="0">
+                <ns1:solidFill>
+                  <ns1:srgbClr val="FFFFFF"/>
+                </ns1:solidFill>
+                <ns1:latin typeface="Arial" pitchFamily="34" charset="0"/>
+                <ns1:ea typeface="Arial" pitchFamily="34" charset="-122"/>
+                <ns1:cs typeface="Arial" pitchFamily="34" charset="-120"/>
+              </ns1:rPr>
+              <ns1:t>2</ns1:t>
+            </ns1:r>
+            <ns1:endParaRPr lang="en-US" sz="1250" dirty="0"/>
+          </ns1:p>
+        </ns0:txBody>
+      </ns0:sp>
+      <ns0:sp>
+        <ns0:nvSpPr>
+          <ns0:cNvPr id="18" name="Text 14"/>
+          <ns0:cNvSpPr/>
+          <ns0:nvPr/>
+        </ns0:nvSpPr>
+        <ns0:spPr>
+          <ns1:xfrm>
+            <ns1:off x="1152227" y="2745284"/>
+            <ns1:ext cx="1813459" cy="214610"/>
+          </ns1:xfrm>
+          <ns1:prstGeom prst="rect">
+            <ns1:avLst/>
+          </ns1:prstGeom>
+          <ns1:noFill/>
+          <ns1:ln/>
+        </ns0:spPr>
+        <ns0:txBody>
+          <ns1:bodyPr wrap="square" lIns="0" tIns="0" rIns="0" bIns="0" rtlCol="0" anchor="t"/>
+          <ns1:lstStyle/>
+          <ns1:p>
+            <ns1:pPr algn="l" indent="0" marL="0">
+              <ns1:lnSpc>
+                <ns1:spcPts val="1690"/>
+              </ns1:lnSpc>
+              <ns1:buNone/>
+            </ns1:pPr>
+            <ns1:r>
+              <ns1:rPr lang="en-US" sz="1500" b="1" dirty="0">
+                <ns1:solidFill>
+                  <ns1:srgbClr val="1F2328"/>
+                </ns1:solidFill>
+                <ns1:latin typeface="Arial" pitchFamily="34" charset="0"/>
+                <ns1:ea typeface="Arial" pitchFamily="34" charset="-122"/>
+                <ns1:cs typeface="Arial" pitchFamily="34" charset="-120"/>
+              </ns1:rPr>
+              <ns1:t>One repository</ns1:t>
+            </ns1:r>
+            <ns1:endParaRPr lang="en-US" sz="1500" dirty="0"/>
+          </ns1:p>
+        </ns0:txBody>
+      </ns0:sp>
+      <ns0:sp>
+        <ns0:nvSpPr>
+          <ns0:cNvPr id="19" name="Text 15"/>
+          <ns0:cNvSpPr/>
+          <ns0:nvPr/>
+        </ns0:nvSpPr>
+        <ns0:spPr>
+          <ns1:xfrm>
+            <ns1:off x="3107829" y="2645569"/>
+            <ns1:ext cx="2338703" cy="414040"/>
+          </ns1:xfrm>
+          <ns1:prstGeom prst="rect">
+            <ns1:avLst/>
+          </ns1:prstGeom>
+          <ns1:noFill/>
+          <ns1:ln/>
+        </ns0:spPr>
+        <ns0:txBody>
+          <ns1:bodyPr wrap="square" lIns="0" tIns="0" rIns="0" bIns="0" rtlCol="0" anchor="t"/>
+          <ns1:lstStyle/>
+          <ns1:p>
+            <ns1:pPr algn="l" indent="0" marL="0">
+              <ns1:lnSpc>
+                <ns1:spcPts val="1630"/>
+              </ns1:lnSpc>
+              <ns1:buNone/>
+            </ns1:pPr>
+            <ns1:r>
+              <ns1:rPr lang="en-US" sz="1400" dirty="0">
+                <ns1:solidFill>
+                  <ns1:srgbClr val="59636E"/>
+                </ns1:solidFill>
+                <ns1:latin typeface="Arial" pitchFamily="34" charset="0"/>
+                <ns1:ea typeface="Arial" pitchFamily="34" charset="-122"/>
+                <ns1:cs typeface="Arial" pitchFamily="34" charset="-120"/>
+              </ns1:rPr>
+              <ns1:t>Never every repo you can access.</ns1:t>
+            </ns1:r>
+            <ns1:endParaRPr lang="en-US" sz="1400" dirty="0"/>
+          </ns1:p>
+        </ns0:txBody>
+      </ns0:sp>
+      <ns0:sp>
+        <ns0:nvSpPr>
+          <ns0:cNvPr id="20" name="Shape 16"/>
+          <ns0:cNvSpPr/>
+          <ns0:nvPr/>
+        </ns0:nvSpPr>
+        <ns0:spPr>
+          <ns1:xfrm>
+            <ns1:off x="517475" y="3696146"/>
+            <ns1:ext cx="5060900" cy="0"/>
+          </ns1:xfrm>
+          <ns1:prstGeom prst="line">
+            <ns1:avLst/>
+          </ns1:prstGeom>
+          <ns1:noFill/>
+          <ns1:ln w="9525">
+            <ns1:solidFill>
+              <ns1:srgbClr val="D1D9E0"/>
+            </ns1:solidFill>
+            <ns1:prstDash val="solid"/>
+          </ns1:ln>
+        </ns0:spPr>
+      </ns0:sp>
+      <ns0:sp>
+        <ns0:nvSpPr>
+          <ns0:cNvPr id="21" name="Text 17"/>
+          <ns0:cNvSpPr/>
+          <ns0:nvPr/>
+        </ns0:nvSpPr>
+        <ns0:spPr>
+          <ns1:xfrm>
+            <ns1:off x="695176" y="3297734"/>
+            <ns1:ext cx="279350" cy="279350"/>
+          </ns1:xfrm>
+          <ns1:prstGeom prst="roundRect">
+            <ns1:avLst>
+              <ns1:gd name="adj" fmla="val 327331"/>
+            </ns1:avLst>
+          </ns1:prstGeom>
+          <ns1:solidFill>
+            <ns1:srgbClr val="1A7F37"/>
+          </ns1:solidFill>
+          <ns1:ln/>
+        </ns0:spPr>
+        <ns0:txBody>
+          <ns1:bodyPr wrap="square" rtlCol="0" anchor="ctr"/>
+          <ns1:lstStyle/>
+          <ns1:p>
+            <ns1:pPr indent="0" marL="0">
+              <ns1:buNone/>
+            </ns1:pPr>
+            <ns1:endParaRPr lang="en-US" dirty="0"/>
+          </ns1:p>
+        </ns0:txBody>
+      </ns0:sp>
+      <ns0:sp>
+        <ns0:nvSpPr>
+          <ns0:cNvPr id="22" name="Text 18"/>
+          <ns0:cNvSpPr/>
+          <ns0:nvPr/>
+        </ns0:nvSpPr>
+        <ns0:spPr>
+          <ns1:xfrm>
+            <ns1:off x="789841" y="3342084"/>
+            <ns1:ext cx="90020" cy="190500"/>
+          </ns1:xfrm>
+          <ns1:prstGeom prst="rect">
+            <ns1:avLst/>
+          </ns1:prstGeom>
+          <ns1:noFill/>
+          <ns1:ln/>
+        </ns0:spPr>
+        <ns0:txBody>
+          <ns1:bodyPr wrap="square" lIns="0" tIns="0" rIns="0" bIns="0" rtlCol="0" anchor="t"/>
+          <ns1:lstStyle/>
+          <ns1:p>
+            <ns1:pPr algn="ctr" indent="0" marL="0">
+              <ns1:buNone/>
+            </ns1:pPr>
+            <ns1:r>
+              <ns1:rPr lang="en-US" sz="1250" b="1" dirty="0">
+                <ns1:solidFill>
+                  <ns1:srgbClr val="FFFFFF"/>
+                </ns1:solidFill>
+                <ns1:latin typeface="Arial" pitchFamily="34" charset="0"/>
+                <ns1:ea typeface="Arial" pitchFamily="34" charset="-122"/>
+                <ns1:cs typeface="Arial" pitchFamily="34" charset="-120"/>
+              </ns1:rPr>
+              <ns1:t>3</ns1:t>
+            </ns1:r>
+            <ns1:endParaRPr lang="en-US" sz="1250" dirty="0"/>
+          </ns1:p>
+        </ns0:txBody>
+      </ns0:sp>
+      <ns0:sp>
+        <ns0:nvSpPr>
+          <ns0:cNvPr id="23" name="Text 19"/>
+          <ns0:cNvSpPr/>
+          <ns0:nvPr/>
+        </ns0:nvSpPr>
+        <ns0:spPr>
+          <ns1:xfrm>
+            <ns1:off x="1152227" y="3330029"/>
+            <ns1:ext cx="1813459" cy="214610"/>
+          </ns1:xfrm>
+          <ns1:prstGeom prst="rect">
+            <ns1:avLst/>
+          </ns1:prstGeom>
+          <ns1:noFill/>
+          <ns1:ln/>
+        </ns0:spPr>
+        <ns0:txBody>
+          <ns1:bodyPr wrap="square" lIns="0" tIns="0" rIns="0" bIns="0" rtlCol="0" anchor="t"/>
+          <ns1:lstStyle/>
+          <ns1:p>
+            <ns1:pPr algn="l" indent="0" marL="0">
+              <ns1:lnSpc>
+                <ns1:spcPts val="1690"/>
+              </ns1:lnSpc>
+              <ns1:buNone/>
+            </ns1:pPr>
+            <ns1:r>
+              <ns1:rPr lang="en-US" sz="1500" b="1" dirty="0">
+                <ns1:solidFill>
+                  <ns1:srgbClr val="1F2328"/>
+                </ns1:solidFill>
+                <ns1:latin typeface="Arial" pitchFamily="34" charset="0"/>
+                <ns1:ea typeface="Arial" pitchFamily="34" charset="-122"/>
+                <ns1:cs typeface="Arial" pitchFamily="34" charset="-120"/>
+              </ns1:rPr>
+              <ns1:t>Filter narrowly</ns1:t>
+            </ns1:r>
+            <ns1:endParaRPr lang="en-US" sz="1500" dirty="0"/>
+          </ns1:p>
+        </ns0:txBody>
+      </ns0:sp>
+      <ns0:sp>
+        <ns0:nvSpPr>
+          <ns0:cNvPr id="24" name="Text 20"/>
+          <ns0:cNvSpPr/>
+          <ns0:nvPr/>
+        </ns0:nvSpPr>
+        <ns0:spPr>
+          <ns1:xfrm>
+            <ns1:off x="3107829" y="3333899"/>
+            <ns1:ext cx="2338703" cy="207020"/>
+          </ns1:xfrm>
+          <ns1:prstGeom prst="rect">
+            <ns1:avLst/>
+          </ns1:prstGeom>
+          <ns1:noFill/>
+          <ns1:ln/>
+        </ns0:spPr>
+        <ns0:txBody>
+          <ns1:bodyPr wrap="square" lIns="0" tIns="0" rIns="0" bIns="0" rtlCol="0" anchor="t"/>
+          <ns1:lstStyle/>
+          <ns1:p>
+            <ns1:pPr algn="l" indent="0" marL="0">
+              <ns1:lnSpc>
+                <ns1:spcPts val="1630"/>
+              </ns1:lnSpc>
+              <ns1:buNone/>
+            </ns1:pPr>
+            <ns1:r>
+              <ns1:rPr lang="en-US" sz="1400" dirty="0">
+                <ns1:solidFill>
+                  <ns1:srgbClr val="59636E"/>
+                </ns1:solidFill>
+                <ns1:latin typeface="Arial" pitchFamily="34" charset="0"/>
+                <ns1:ea typeface="Arial" pitchFamily="34" charset="-122"/>
+                <ns1:cs typeface="Arial" pitchFamily="34" charset="-120"/>
+              </ns1:rPr>
+              <ns1:t>By label or search query.</ns1:t>
+            </ns1:r>
+            <ns1:endParaRPr lang="en-US" sz="1400" dirty="0"/>
+          </ns1:p>
+        </ns0:txBody>
+      </ns0:sp>
+      <ns0:sp>
+        <ns0:nvSpPr>
+          <ns0:cNvPr id="25" name="Text 21"/>
+          <ns0:cNvSpPr/>
+          <ns0:nvPr/>
+        </ns0:nvSpPr>
+        <ns0:spPr>
+          <ns1:xfrm>
+            <ns1:off x="695176" y="3815209"/>
+            <ns1:ext cx="279350" cy="279350"/>
+          </ns1:xfrm>
+          <ns1:prstGeom prst="roundRect">
+            <ns1:avLst>
+              <ns1:gd name="adj" fmla="val 327331"/>
+            </ns1:avLst>
+          </ns1:prstGeom>
+          <ns1:solidFill>
+            <ns1:srgbClr val="1A7F37"/>
+          </ns1:solidFill>
+          <ns1:ln/>
+        </ns0:spPr>
+        <ns0:txBody>
+          <ns1:bodyPr wrap="square" rtlCol="0" anchor="ctr"/>
+          <ns1:lstStyle/>
+          <ns1:p>
+            <ns1:pPr indent="0" marL="0">
+              <ns1:buNone/>
+            </ns1:pPr>
+            <ns1:endParaRPr lang="en-US" dirty="0"/>
+          </ns1:p>
+        </ns0:txBody>
+      </ns0:sp>
+      <ns0:sp>
+        <ns0:nvSpPr>
+          <ns0:cNvPr id="26" name="Text 22"/>
+          <ns0:cNvSpPr/>
+          <ns0:nvPr/>
+        </ns0:nvSpPr>
+        <ns0:spPr>
+          <ns1:xfrm>
+            <ns1:off x="789841" y="3859560"/>
+            <ns1:ext cx="90020" cy="190500"/>
+          </ns1:xfrm>
+          <ns1:prstGeom prst="rect">
+            <ns1:avLst/>
+          </ns1:prstGeom>
+          <ns1:noFill/>
+          <ns1:ln/>
+        </ns0:spPr>
+        <ns0:txBody>
+          <ns1:bodyPr wrap="square" lIns="0" tIns="0" rIns="0" bIns="0" rtlCol="0" anchor="t"/>
+          <ns1:lstStyle/>
+          <ns1:p>
+            <ns1:pPr algn="ctr" indent="0" marL="0">
+              <ns1:buNone/>
+            </ns1:pPr>
+            <ns1:r>
+              <ns1:rPr lang="en-US" sz="1250" b="1" dirty="0">
+                <ns1:solidFill>
+                  <ns1:srgbClr val="FFFFFF"/>
+                </ns1:solidFill>
+                <ns1:latin typeface="Arial" pitchFamily="34" charset="0"/>
+                <ns1:ea typeface="Arial" pitchFamily="34" charset="-122"/>
+                <ns1:cs typeface="Arial" pitchFamily="34" charset="-120"/>
+              </ns1:rPr>
+              <ns1:t>4</ns1:t>
+            </ns1:r>
+            <ns1:endParaRPr lang="en-US" sz="1250" dirty="0"/>
+          </ns1:p>
+        </ns0:txBody>
+      </ns0:sp>
+      <ns0:sp>
+        <ns0:nvSpPr>
+          <ns0:cNvPr id="27" name="Text 23"/>
+          <ns0:cNvSpPr/>
+          <ns0:nvPr/>
+        </ns0:nvSpPr>
+        <ns0:spPr>
+          <ns1:xfrm>
+            <ns1:off x="1152227" y="3847505"/>
+            <ns1:ext cx="1813459" cy="214610"/>
+          </ns1:xfrm>
+          <ns1:prstGeom prst="rect">
+            <ns1:avLst/>
+          </ns1:prstGeom>
+          <ns1:noFill/>
+          <ns1:ln/>
+        </ns0:spPr>
+        <ns0:txBody>
+          <ns1:bodyPr wrap="square" lIns="0" tIns="0" rIns="0" bIns="0" rtlCol="0" anchor="t"/>
+          <ns1:lstStyle/>
+          <ns1:p>
+            <ns1:pPr algn="l" indent="0" marL="0">
+              <ns1:lnSpc>
+                <ns1:spcPts val="1690"/>
+              </ns1:lnSpc>
+              <ns1:buNone/>
+            </ns1:pPr>
+            <ns1:r>
+              <ns1:rPr lang="en-US" sz="1500" b="1" dirty="0">
+                <ns1:solidFill>
+                  <ns1:srgbClr val="1F2328"/>
+                </ns1:solidFill>
+                <ns1:latin typeface="Arial" pitchFamily="34" charset="0"/>
+                <ns1:ea typeface="Arial" pitchFamily="34" charset="-122"/>
+                <ns1:cs typeface="Arial" pitchFamily="34" charset="-120"/>
+              </ns1:rPr>
+              <ns1:t>Hold write tools</ns1:t>
+            </ns1:r>
+            <ns1:endParaRPr lang="en-US" sz="1500" dirty="0"/>
+          </ns1:p>
+        </ns0:txBody>
+      </ns0:sp>
+      <ns0:sp>
+        <ns0:nvSpPr>
+          <ns0:cNvPr id="28" name="Text 24"/>
+          <ns0:cNvSpPr/>
+          <ns0:nvPr/>
+        </ns0:nvSpPr>
+        <ns0:spPr>
+          <ns1:xfrm>
+            <ns1:off x="3107829" y="3851374"/>
+            <ns1:ext cx="2338703" cy="207020"/>
+          </ns1:xfrm>
+          <ns1:prstGeom prst="rect">
+            <ns1:avLst/>
+          </ns1:prstGeom>
+          <ns1:noFill/>
+          <ns1:ln/>
+        </ns0:spPr>
+        <ns0:txBody>
+          <ns1:bodyPr wrap="square" lIns="0" tIns="0" rIns="0" bIns="0" rtlCol="0" anchor="t"/>
+          <ns1:lstStyle/>
+          <ns1:p>
+            <ns1:pPr algn="l" indent="0" marL="0">
+              <ns1:lnSpc>
+                <ns1:spcPts val="1630"/>
+              </ns1:lnSpc>
+              <ns1:buNone/>
+            </ns1:pPr>
+            <ns1:r>
+              <ns1:rPr lang="en-US" sz="1400" dirty="0">
+                <ns1:solidFill>
+                  <ns1:srgbClr val="59636E"/>
+                </ns1:solidFill>
+                <ns1:latin typeface="Arial" pitchFamily="34" charset="0"/>
+                <ns1:ea typeface="Arial" pitchFamily="34" charset="-122"/>
+                <ns1:cs typeface="Arial" pitchFamily="34" charset="-120"/>
+              </ns1:rPr>
+              <ns1:t>Until several runs look right.</ns1:t>
+            </ns1:r>
+            <ns1:endParaRPr lang="en-US" sz="1400" dirty="0"/>
+          </ns1:p>
+        </ns0:txBody>
+      </ns0:sp>
+      <ns0:sp>
+        <ns0:nvSpPr>
+          <ns0:cNvPr id="29" name="Text 25"/>
+          <ns0:cNvSpPr/>
+          <ns0:nvPr/>
+        </ns0:nvSpPr>
+        <ns0:spPr>
+          <ns1:xfrm>
+            <ns1:off x="5791051" y="2639467"/>
+            <ns1:ext cx="2844701" cy="943570"/>
+          </ns1:xfrm>
+          <ns1:prstGeom prst="roundRect">
+            <ns1:avLst>
+              <ns1:gd name="adj" fmla="val 10768"/>
+            </ns1:avLst>
+          </ns1:prstGeom>
+          <ns1:solidFill>
+            <ns1:srgbClr val="FFEBE9"/>
+          </ns1:solidFill>
+          <ns1:ln w="9525">
+            <ns1:solidFill>
+              <ns1:srgbClr val="FFCECB"/>
+            </ns1:solidFill>
+          </ns1:ln>
+        </ns0:spPr>
+        <ns0:txBody>
+          <ns1:bodyPr wrap="square" rtlCol="0" anchor="ctr"/>
+          <ns1:lstStyle/>
+          <ns1:p>
+            <ns1:pPr indent="0" marL="0">
+              <ns1:buNone/>
+            </ns1:pPr>
+            <ns1:endParaRPr lang="en-US" dirty="0"/>
+          </ns1:p>
+        </ns0:txBody>
+      </ns0:sp>
+      <ns0:pic>
+        <ns0:nvPicPr>
+          <ns0:cNvPr id="30" name="Image 2" descr="">
+            <ns1:extLst>
+              <ns1:ext uri="{C183D7F6-B498-43B3-948B-1728B52AA6E4}">
+                <ns2:decorative val="1"/>
+              </ns1:ext>
+            </ns1:extLst>
+          </ns0:cNvPr>
+          <ns0:cNvPicPr>
+            <ns1:picLocks noChangeAspect="1"/>
+          </ns0:cNvPicPr>
+          <ns0:nvPr/>
+        </ns0:nvPicPr>
+        <ns0:blipFill>
+          <ns1:blip ns3:embed="rId4"/>
+          <ns1:stretch>
+            <ns1:fillRect/>
+          </ns1:stretch>
+        </ns0:blipFill>
+        <ns0:spPr>
+          <ns1:xfrm>
+            <ns1:off x="5978277" y="3009602"/>
+            <ns1:ext cx="203150" cy="203150"/>
+          </ns1:xfrm>
+          <ns1:prstGeom prst="rect">
+            <ns1:avLst/>
+          </ns1:prstGeom>
+        </ns0:spPr>
+      </ns0:pic>
+      <ns0:sp>
+        <ns0:nvSpPr>
+          <ns0:cNvPr id="31" name="Text 26"/>
+          <ns0:cNvSpPr/>
+          <ns0:nvPr/>
+        </ns0:nvSpPr>
+        <ns0:spPr>
+          <ns1:xfrm>
+            <ns1:off x="6308378" y="2775942"/>
+            <ns1:ext cx="2182951" cy="670620"/>
+          </ns1:xfrm>
+          <ns1:prstGeom prst="rect">
+            <ns1:avLst/>
+          </ns1:prstGeom>
+          <ns1:noFill/>
+          <ns1:ln/>
+        </ns0:spPr>
+        <ns0:txBody>
+          <ns1:bodyPr wrap="square" lIns="0" tIns="0" rIns="0" bIns="0" rtlCol="0" anchor="t"/>
+          <ns1:lstStyle/>
+          <ns1:p>
+            <ns1:pPr algn="l" indent="0" marL="0">
+              <ns1:lnSpc>
+                <ns1:spcPts val="1760"/>
+              </ns1:lnSpc>
+              <ns1:buNone/>
+            </ns1:pPr>
+            <ns1:r>
+              <ns1:rPr lang="en-US" sz="1450" dirty="0">
+                <ns1:solidFill>
+                  <ns1:srgbClr val="1F2328"/>
+                </ns1:solidFill>
+                <ns1:latin typeface="Arial" pitchFamily="34" charset="0"/>
+                <ns1:ea typeface="Arial" pitchFamily="34" charset="-122"/>
+                <ns1:cs typeface="Arial" pitchFamily="34" charset="-120"/>
+              </ns1:rPr>
+              <ns1:t>Hostile issue text plus write tools raises </ns1:t>
+            </ns1:r>
+            <ns1:pPr algn="l" indent="0" marL="0">
+              <ns1:lnSpc>
+                <ns1:spcPts val="1760"/>
+              </ns1:lnSpc>
+              <ns1:buNone/>
+            </ns1:pPr>
+            <ns1:r>
+              <ns1:rPr lang="en-US" sz="1450" b="1" dirty="0">
+                <ns1:solidFill>
+                  <ns1:srgbClr val="1F2328"/>
+                </ns1:solidFill>
+                <ns1:latin typeface="Arial" pitchFamily="34" charset="0"/>
+                <ns1:ea typeface="Arial" pitchFamily="34" charset="-122"/>
+                <ns1:cs typeface="Arial" pitchFamily="34" charset="-120"/>
+              </ns1:rPr>
+              <ns1:t>prompt-injection</ns1:t>
+            </ns1:r>
+            <ns1:pPr algn="l" indent="0" marL="0">
+              <ns1:lnSpc>
+                <ns1:spcPts val="1760"/>
+              </ns1:lnSpc>
+              <ns1:buNone/>
+            </ns1:pPr>
+            <ns1:r>
+              <ns1:rPr lang="en-US" sz="1450" dirty="0">
+                <ns1:solidFill>
+                  <ns1:srgbClr val="1F2328"/>
+                </ns1:solidFill>
+                <ns1:latin typeface="Arial" pitchFamily="34" charset="0"/>
+                <ns1:ea typeface="Arial" pitchFamily="34" charset="-122"/>
+                <ns1:cs typeface="Arial" pitchFamily="34" charset="-120"/>
+              </ns1:rPr>
+              <ns1:t> risk.</ns1:t>
+            </ns1:r>
+            <ns1:endParaRPr lang="en-US" sz="1450" dirty="0"/>
+          </ns1:p>
+        </ns0:txBody>
+      </ns0:sp>
+    </ns0:spTree>
+  </ns0:cSld>
+  <ns0:clrMapOvr>
+    <ns1:masterClrMapping/>
+  </ns0:clrMapOvr>
+</ns0:sld>
 </file>
 
 <file path=ppt/slides/slide13.xml><?xml version="1.0" encoding="utf-8"?>
-<p:sld xmlns:a="http://schemas.openxmlformats.org/drawingml/2006/main" xmlns:r="http://schemas.openxmlformats.org/officeDocument/2006/relationships" xmlns:p="http://schemas.openxmlformats.org/presentationml/2006/main">
-  <p:cSld name="Slide 13">
-    <p:bg>
-      <p:bgPr>
-        <a:solidFill>
-          <a:srgbClr val="FFFFFF"/>
-        </a:solidFill>
-      </p:bgPr>
-    </p:bg>
-    <p:spTree>
-      <p:nvGrpSpPr>
-        <p:cNvPr id="1" name=""/>
-        <p:cNvGrpSpPr/>
-        <p:nvPr/>
-      </p:nvGrpSpPr>
-      <p:grpSpPr>
-        <a:xfrm>
-          <a:off x="0" y="0"/>
-          <a:ext cx="0" cy="0"/>
-          <a:chOff x="0" y="0"/>
-          <a:chExt cx="0" cy="0"/>
-        </a:xfrm>
-      </p:grpSpPr>
-      <p:pic>
-        <p:nvPicPr>
-          <p:cNvPr id="2" name="Image 0" descr="">
-            <a:extLst>
-              <a:ext uri="{C183D7F6-B498-43B3-948B-1728B52AA6E4}">
-                <adec:decorative xmlns:adec="http://schemas.microsoft.com/office/drawing/2017/decorative" val="1"/>
-              </a:ext>
-            </a:extLst>
-          </p:cNvPr>
-          <p:cNvPicPr>
-            <a:picLocks noChangeAspect="1"/>
-          </p:cNvPicPr>
-          <p:nvPr/>
-        </p:nvPicPr>
-        <p:blipFill>
-          <a:blip r:embed="rId1"/>
-          <a:stretch>
-            <a:fillRect/>
-          </a:stretch>
-        </p:blipFill>
-        <p:spPr>
-          <a:xfrm>
-            <a:off x="6349901" y="0"/>
-            <a:ext cx="2793950" cy="1308050"/>
-          </a:xfrm>
-          <a:prstGeom prst="rect">
-            <a:avLst/>
-          </a:prstGeom>
-        </p:spPr>
-      </p:pic>
-      <p:sp>
-        <p:nvSpPr>
-          <p:cNvPr id="3" name="Text 0"/>
-          <p:cNvSpPr/>
-          <p:nvPr/>
-        </p:nvSpPr>
-        <p:spPr>
-          <a:xfrm>
-            <a:off x="7340501" y="177701"/>
-            <a:ext cx="1168301" cy="279350"/>
-          </a:xfrm>
-          <a:prstGeom prst="roundRect">
-            <a:avLst>
-              <a:gd name="adj" fmla="val 22731"/>
-            </a:avLst>
-          </a:prstGeom>
-          <a:solidFill>
-            <a:srgbClr val="1A7F37"/>
-          </a:solidFill>
-          <a:ln/>
-        </p:spPr>
-        <p:txBody>
-          <a:bodyPr wrap="square" rtlCol="0" anchor="ctr"/>
-          <a:lstStyle/>
-          <a:p>
-            <a:pPr indent="0" marL="0">
-              <a:buNone/>
-            </a:pPr>
-            <a:endParaRPr lang="en-US" dirty="0"/>
-          </a:p>
-        </p:txBody>
-      </p:sp>
-      <p:sp>
-        <p:nvSpPr>
-          <p:cNvPr id="4" name="Text 1"/>
-          <p:cNvSpPr/>
-          <p:nvPr/>
-        </p:nvSpPr>
-        <p:spPr>
-          <a:xfrm>
-            <a:off x="7461041" y="231577"/>
-            <a:ext cx="927071" cy="171450"/>
-          </a:xfrm>
-          <a:prstGeom prst="rect">
-            <a:avLst/>
-          </a:prstGeom>
-          <a:noFill/>
-          <a:ln/>
-        </p:spPr>
-        <p:txBody>
-          <a:bodyPr wrap="square" lIns="0" tIns="0" rIns="0" bIns="0" rtlCol="0" anchor="t"/>
-          <a:lstStyle/>
-          <a:p>
-            <a:pPr algn="ctr" indent="0" marL="0">
-              <a:buNone/>
-            </a:pPr>
-            <a:r>
-              <a:rPr lang="en-US" sz="1150" b="1" dirty="0">
-                <a:solidFill>
-                  <a:srgbClr val="FFFFFF"/>
-                </a:solidFill>
-                <a:latin typeface="Arial" pitchFamily="34" charset="0"/>
-                <a:ea typeface="Arial" pitchFamily="34" charset="-122"/>
-                <a:cs typeface="Arial" pitchFamily="34" charset="-120"/>
-              </a:rPr>
-              <a:t>CHAPTER 07</a:t>
-            </a:r>
-            <a:endParaRPr lang="en-US" sz="1150" dirty="0"/>
-          </a:p>
-        </p:txBody>
-      </p:sp>
-      <p:pic>
-        <p:nvPicPr>
-          <p:cNvPr id="5" name="Image 1" descr="Open this chapter on GitHub">
-            <a:hlinkClick r:id="rId3" tooltip="https://github.com/github/copilot-app-for-beginners/tree/main/07-automations"/>
-          </p:cNvPr>
-          <p:cNvPicPr>
-            <a:picLocks noChangeAspect="1"/>
-          </p:cNvPicPr>
-          <p:nvPr/>
-        </p:nvPicPr>
-        <p:blipFill>
-          <a:blip r:embed="rId2"/>
-          <a:stretch>
-            <a:fillRect/>
-          </a:stretch>
-        </p:blipFill>
-        <p:spPr>
-          <a:xfrm>
-            <a:off x="8610600" y="165050"/>
-            <a:ext cx="304800" cy="304800"/>
-          </a:xfrm>
-          <a:prstGeom prst="rect">
-            <a:avLst/>
-          </a:prstGeom>
-        </p:spPr>
-      </p:pic>
-      <p:sp>
-        <p:nvSpPr>
-          <p:cNvPr id="6" name="Text 2"/>
-          <p:cNvSpPr/>
-          <p:nvPr/>
-        </p:nvSpPr>
-        <p:spPr>
-          <a:xfrm>
-            <a:off x="507950" y="381000"/>
-            <a:ext cx="8161020" cy="190500"/>
-          </a:xfrm>
-          <a:prstGeom prst="rect">
-            <a:avLst/>
-          </a:prstGeom>
-          <a:noFill/>
-          <a:ln/>
-        </p:spPr>
-        <p:txBody>
-          <a:bodyPr wrap="square" lIns="0" tIns="0" rIns="0" bIns="0" rtlCol="0" anchor="t"/>
-          <a:lstStyle/>
-          <a:p>
-            <a:pPr algn="l" indent="0" marL="0">
-              <a:buNone/>
-            </a:pPr>
-            <a:r>
-              <a:rPr lang="en-US" sz="1250" b="1" dirty="0">
-                <a:solidFill>
-                  <a:srgbClr val="1A7F37"/>
-                </a:solidFill>
-                <a:latin typeface="Arial" pitchFamily="34" charset="0"/>
-                <a:ea typeface="Arial" pitchFamily="34" charset="-122"/>
-                <a:cs typeface="Arial" pitchFamily="34" charset="-120"/>
-              </a:rPr>
-              <a:t>LOCAL OR CLOUD</a:t>
-            </a:r>
-            <a:endParaRPr lang="en-US" sz="1250" dirty="0"/>
-          </a:p>
-        </p:txBody>
-      </p:sp>
-      <p:sp>
-        <p:nvSpPr>
-          <p:cNvPr id="7" name="Text 3"/>
-          <p:cNvSpPr/>
-          <p:nvPr/>
-        </p:nvSpPr>
-        <p:spPr>
-          <a:xfrm>
-            <a:off x="507950" y="622250"/>
-            <a:ext cx="8161020" cy="419100"/>
-          </a:xfrm>
-          <a:prstGeom prst="rect">
-            <a:avLst/>
-          </a:prstGeom>
-          <a:noFill/>
-          <a:ln/>
-        </p:spPr>
-        <p:txBody>
-          <a:bodyPr wrap="square" lIns="0" tIns="0" rIns="0" bIns="0" rtlCol="0" anchor="t"/>
-          <a:lstStyle/>
-          <a:p>
-            <a:pPr algn="l" indent="0" marL="0">
-              <a:lnSpc>
-                <a:spcPts val="3300"/>
-              </a:lnSpc>
-              <a:spcBef>
-                <a:spcPts val="400"/>
-              </a:spcBef>
-              <a:buNone/>
-            </a:pPr>
-            <a:r>
-              <a:rPr lang="en-US" sz="2800" b="1" dirty="0">
-                <a:solidFill>
-                  <a:srgbClr val="1F2328"/>
-                </a:solidFill>
-                <a:latin typeface="Arial" pitchFamily="34" charset="0"/>
-                <a:ea typeface="Arial" pitchFamily="34" charset="-122"/>
-                <a:cs typeface="Arial" pitchFamily="34" charset="-120"/>
-              </a:rPr>
-              <a:t>Move to the cloud only when it is proven</a:t>
-            </a:r>
-            <a:endParaRPr lang="en-US" sz="2800" dirty="0"/>
-          </a:p>
-        </p:txBody>
-      </p:sp>
-      <p:sp>
-        <p:nvSpPr>
-          <p:cNvPr id="8" name="Text 4"/>
-          <p:cNvSpPr/>
-          <p:nvPr/>
-        </p:nvSpPr>
-        <p:spPr>
-          <a:xfrm>
-            <a:off x="507950" y="1104751"/>
-            <a:ext cx="8161020" cy="254050"/>
-          </a:xfrm>
-          <a:prstGeom prst="rect">
-            <a:avLst/>
-          </a:prstGeom>
-          <a:noFill/>
-          <a:ln/>
-        </p:spPr>
-        <p:txBody>
-          <a:bodyPr wrap="square" lIns="0" tIns="0" rIns="0" bIns="0" rtlCol="0" anchor="t"/>
-          <a:lstStyle/>
-          <a:p>
-            <a:pPr algn="l" indent="0" marL="0">
-              <a:lnSpc>
-                <a:spcPts val="2000"/>
-              </a:lnSpc>
-              <a:spcBef>
-                <a:spcPts val="500"/>
-              </a:spcBef>
-              <a:buNone/>
-            </a:pPr>
-            <a:r>
-              <a:rPr lang="en-US" sz="1650" dirty="0">
-                <a:solidFill>
-                  <a:srgbClr val="59636E"/>
-                </a:solidFill>
-                <a:latin typeface="Arial" pitchFamily="34" charset="0"/>
-                <a:ea typeface="Arial" pitchFamily="34" charset="-122"/>
-                <a:cs typeface="Arial" pitchFamily="34" charset="-120"/>
-              </a:rPr>
-              <a:t>Cloud runs on GitHub even when your laptop is closed.</a:t>
-            </a:r>
-            <a:endParaRPr lang="en-US" sz="1650" dirty="0"/>
-          </a:p>
-        </p:txBody>
-      </p:sp>
-      <p:sp>
-        <p:nvSpPr>
-          <p:cNvPr id="9" name="Text 5"/>
-          <p:cNvSpPr/>
-          <p:nvPr/>
-        </p:nvSpPr>
-        <p:spPr>
-          <a:xfrm>
-            <a:off x="511076" y="2212925"/>
-            <a:ext cx="2533650" cy="1720751"/>
-          </a:xfrm>
-          <a:prstGeom prst="roundRect">
-            <a:avLst>
-              <a:gd name="adj" fmla="val 4428"/>
-            </a:avLst>
-          </a:prstGeom>
-          <a:solidFill>
-            <a:srgbClr val="FFFFFF"/>
-          </a:solidFill>
-          <a:ln w="9525">
-            <a:solidFill>
-              <a:srgbClr val="D1D9E0"/>
-            </a:solidFill>
-          </a:ln>
-          <a:effectLst>
-            <a:outerShdw sx="100000" sy="100000" kx="0" ky="0" algn="bl" rotWithShape="0" blurRad="38100" dist="9525" dir="5400000">
-              <a:srgbClr val="1f2328">
-                <a:alpha val="12000"/>
-              </a:srgbClr>
-            </a:outerShdw>
-          </a:effectLst>
-        </p:spPr>
-        <p:txBody>
-          <a:bodyPr wrap="square" rtlCol="0" anchor="ctr"/>
-          <a:lstStyle/>
-          <a:p>
-            <a:pPr indent="0" marL="0">
-              <a:buNone/>
-            </a:pPr>
-            <a:endParaRPr lang="en-US" dirty="0"/>
-          </a:p>
-        </p:txBody>
-      </p:sp>
-      <p:pic>
-        <p:nvPicPr>
-          <p:cNvPr id="10" name="Image 2" descr="Local versus cloud automations">    </p:cNvPr>
-          <p:cNvPicPr>
-            <a:picLocks noChangeAspect="1"/>
-          </p:cNvPicPr>
-          <p:nvPr/>
-        </p:nvPicPr>
-        <p:blipFill>
-          <a:blip r:embed="rId4"/>
-          <a:stretch>
-            <a:fillRect/>
-          </a:stretch>
-        </p:blipFill>
-        <p:spPr>
-          <a:xfrm>
-            <a:off x="558701" y="2260550"/>
-            <a:ext cx="2438400" cy="1625501"/>
-          </a:xfrm>
-          <a:prstGeom prst="rect">
-            <a:avLst/>
-          </a:prstGeom>
-        </p:spPr>
-      </p:pic>
-      <p:sp>
-        <p:nvSpPr>
-          <p:cNvPr id="11" name="Text 6"/>
-          <p:cNvSpPr/>
-          <p:nvPr/>
-        </p:nvSpPr>
-        <p:spPr>
-          <a:xfrm>
-            <a:off x="3251002" y="1574750"/>
-            <a:ext cx="2692598" cy="2142530"/>
-          </a:xfrm>
-          <a:prstGeom prst="roundRect">
-            <a:avLst>
-              <a:gd name="adj" fmla="val 5928"/>
-            </a:avLst>
-          </a:prstGeom>
-          <a:solidFill>
-            <a:srgbClr val="FFFFFF"/>
-          </a:solidFill>
-          <a:ln w="9525">
-            <a:solidFill>
-              <a:srgbClr val="FFC49B"/>
-            </a:solidFill>
-          </a:ln>
-        </p:spPr>
-        <p:txBody>
-          <a:bodyPr wrap="square" rtlCol="0" anchor="ctr"/>
-          <a:lstStyle/>
-          <a:p>
-            <a:pPr indent="0" marL="0">
-              <a:buNone/>
-            </a:pPr>
-            <a:endParaRPr lang="en-US" dirty="0"/>
-          </a:p>
-        </p:txBody>
-      </p:sp>
-      <p:sp>
-        <p:nvSpPr>
-          <p:cNvPr id="12" name="Text 7"/>
-          <p:cNvSpPr/>
-          <p:nvPr/>
-        </p:nvSpPr>
-        <p:spPr>
-          <a:xfrm>
-            <a:off x="3412927" y="1736675"/>
-            <a:ext cx="381000" cy="381000"/>
-          </a:xfrm>
-          <a:prstGeom prst="roundRect">
-            <a:avLst>
-              <a:gd name="adj" fmla="val 23333"/>
-            </a:avLst>
-          </a:prstGeom>
-          <a:solidFill>
-            <a:srgbClr val="FFF1E5"/>
-          </a:solidFill>
-          <a:ln/>
-        </p:spPr>
-        <p:txBody>
-          <a:bodyPr wrap="square" rtlCol="0" anchor="ctr"/>
-          <a:lstStyle/>
-          <a:p>
-            <a:pPr indent="0" marL="0">
-              <a:buNone/>
-            </a:pPr>
-            <a:endParaRPr lang="en-US" dirty="0"/>
-          </a:p>
-        </p:txBody>
-      </p:sp>
-      <p:pic>
-        <p:nvPicPr>
-          <p:cNvPr id="13" name="Image 3" descr="">
-            <a:extLst>
-              <a:ext uri="{C183D7F6-B498-43B3-948B-1728B52AA6E4}">
-                <adec:decorative xmlns:adec="http://schemas.microsoft.com/office/drawing/2017/decorative" val="1"/>
-              </a:ext>
-            </a:extLst>
-          </p:cNvPr>
-          <p:cNvPicPr>
-            <a:picLocks noChangeAspect="1"/>
-          </p:cNvPicPr>
-          <p:nvPr/>
-        </p:nvPicPr>
-        <p:blipFill>
-          <a:blip r:embed="rId5"/>
-          <a:stretch>
-            <a:fillRect/>
-          </a:stretch>
-        </p:blipFill>
-        <p:spPr>
-          <a:xfrm>
-            <a:off x="3495526" y="1819275"/>
-            <a:ext cx="215801" cy="215801"/>
-          </a:xfrm>
-          <a:prstGeom prst="rect">
-            <a:avLst/>
-          </a:prstGeom>
-        </p:spPr>
-      </p:pic>
-      <p:sp>
-        <p:nvSpPr>
-          <p:cNvPr id="14" name="Text 8"/>
-          <p:cNvSpPr/>
-          <p:nvPr/>
-        </p:nvSpPr>
-        <p:spPr>
-          <a:xfrm>
-            <a:off x="3908227" y="1812875"/>
-            <a:ext cx="1282598" cy="228600"/>
-          </a:xfrm>
-          <a:prstGeom prst="rect">
-            <a:avLst/>
-          </a:prstGeom>
-          <a:noFill/>
-          <a:ln/>
-        </p:spPr>
-        <p:txBody>
-          <a:bodyPr wrap="square" lIns="0" tIns="0" rIns="0" bIns="0" rtlCol="0" anchor="t"/>
-          <a:lstStyle/>
-          <a:p>
-            <a:pPr algn="l" indent="0" marL="0">
-              <a:lnSpc>
-                <a:spcPts val="1800"/>
-              </a:lnSpc>
-              <a:buNone/>
-            </a:pPr>
-            <a:r>
-              <a:rPr lang="en-US" sz="1650" b="1" dirty="0">
-                <a:solidFill>
-                  <a:srgbClr val="1F2328"/>
-                </a:solidFill>
-                <a:latin typeface="Arial" pitchFamily="34" charset="0"/>
-                <a:ea typeface="Arial" pitchFamily="34" charset="-122"/>
-                <a:cs typeface="Arial" pitchFamily="34" charset="-120"/>
-              </a:rPr>
-              <a:t>Cloud needs</a:t>
-            </a:r>
-            <a:endParaRPr lang="en-US" sz="1650" dirty="0"/>
-          </a:p>
-        </p:txBody>
-      </p:sp>
-      <p:sp>
-        <p:nvSpPr>
-          <p:cNvPr id="15" name="Text 9"/>
-          <p:cNvSpPr/>
-          <p:nvPr/>
-        </p:nvSpPr>
-        <p:spPr>
-          <a:xfrm>
-            <a:off x="3412927" y="2273796"/>
-            <a:ext cx="57150" cy="57150"/>
-          </a:xfrm>
-          <a:prstGeom prst="roundRect">
-            <a:avLst>
-              <a:gd name="adj" fmla="val 1600000"/>
-            </a:avLst>
-          </a:prstGeom>
-          <a:solidFill>
-            <a:srgbClr val="818B98"/>
-          </a:solidFill>
-          <a:ln/>
-        </p:spPr>
-        <p:txBody>
-          <a:bodyPr wrap="square" rtlCol="0" anchor="ctr"/>
-          <a:lstStyle/>
-          <a:p>
-            <a:pPr indent="0" marL="0">
-              <a:buNone/>
-            </a:pPr>
-            <a:endParaRPr lang="en-US" dirty="0"/>
-          </a:p>
-        </p:txBody>
-      </p:sp>
-      <p:sp>
-        <p:nvSpPr>
-          <p:cNvPr id="16" name="Text 10"/>
-          <p:cNvSpPr/>
-          <p:nvPr/>
-        </p:nvSpPr>
-        <p:spPr>
-          <a:xfrm>
-            <a:off x="3571577" y="2193875"/>
-            <a:ext cx="1673343" cy="207020"/>
-          </a:xfrm>
-          <a:prstGeom prst="rect">
-            <a:avLst/>
-          </a:prstGeom>
-          <a:noFill/>
-          <a:ln/>
-        </p:spPr>
-        <p:txBody>
-          <a:bodyPr wrap="square" lIns="0" tIns="0" rIns="0" bIns="0" rtlCol="0" anchor="t"/>
-          <a:lstStyle/>
-          <a:p>
-            <a:pPr algn="l" indent="0" marL="0">
-              <a:lnSpc>
-                <a:spcPts val="1630"/>
-              </a:lnSpc>
-              <a:buNone/>
-            </a:pPr>
-            <a:r>
-              <a:rPr lang="en-US" sz="1400" dirty="0">
-                <a:solidFill>
-                  <a:srgbClr val="59636E"/>
-                </a:solidFill>
-                <a:latin typeface="Arial" pitchFamily="34" charset="0"/>
-                <a:ea typeface="Arial" pitchFamily="34" charset="-122"/>
-                <a:cs typeface="Arial" pitchFamily="34" charset="-120"/>
-              </a:rPr>
-              <a:t>Cloud agent enabled</a:t>
-            </a:r>
-            <a:endParaRPr lang="en-US" sz="1400" dirty="0"/>
-          </a:p>
-        </p:txBody>
-      </p:sp>
-      <p:sp>
-        <p:nvSpPr>
-          <p:cNvPr id="17" name="Text 11"/>
-          <p:cNvSpPr/>
-          <p:nvPr/>
-        </p:nvSpPr>
-        <p:spPr>
-          <a:xfrm>
-            <a:off x="3412927" y="2544217"/>
-            <a:ext cx="57150" cy="57150"/>
-          </a:xfrm>
-          <a:prstGeom prst="roundRect">
-            <a:avLst>
-              <a:gd name="adj" fmla="val 1600000"/>
-            </a:avLst>
-          </a:prstGeom>
-          <a:solidFill>
-            <a:srgbClr val="818B98"/>
-          </a:solidFill>
-          <a:ln/>
-        </p:spPr>
-        <p:txBody>
-          <a:bodyPr wrap="square" rtlCol="0" anchor="ctr"/>
-          <a:lstStyle/>
-          <a:p>
-            <a:pPr indent="0" marL="0">
-              <a:buNone/>
-            </a:pPr>
-            <a:endParaRPr lang="en-US" dirty="0"/>
-          </a:p>
-        </p:txBody>
-      </p:sp>
-      <p:sp>
-        <p:nvSpPr>
-          <p:cNvPr id="18" name="Text 12"/>
-          <p:cNvSpPr/>
-          <p:nvPr/>
-        </p:nvSpPr>
-        <p:spPr>
-          <a:xfrm>
-            <a:off x="3571577" y="2464296"/>
-            <a:ext cx="1975283" cy="207020"/>
-          </a:xfrm>
-          <a:prstGeom prst="rect">
-            <a:avLst/>
-          </a:prstGeom>
-          <a:noFill/>
-          <a:ln/>
-        </p:spPr>
-        <p:txBody>
-          <a:bodyPr wrap="square" lIns="0" tIns="0" rIns="0" bIns="0" rtlCol="0" anchor="t"/>
-          <a:lstStyle/>
-          <a:p>
-            <a:pPr algn="l" indent="0" marL="0">
-              <a:lnSpc>
-                <a:spcPts val="1630"/>
-              </a:lnSpc>
-              <a:buNone/>
-            </a:pPr>
-            <a:r>
-              <a:rPr lang="en-US" sz="1400" dirty="0">
-                <a:solidFill>
-                  <a:srgbClr val="59636E"/>
-                </a:solidFill>
-                <a:latin typeface="Arial" pitchFamily="34" charset="0"/>
-                <a:ea typeface="Arial" pitchFamily="34" charset="-122"/>
-                <a:cs typeface="Arial" pitchFamily="34" charset="-120"/>
-              </a:rPr>
-              <a:t>A private or internal repo</a:t>
-            </a:r>
-            <a:endParaRPr lang="en-US" sz="1400" dirty="0"/>
-          </a:p>
-        </p:txBody>
-      </p:sp>
-      <p:sp>
-        <p:nvSpPr>
-          <p:cNvPr id="19" name="Text 13"/>
-          <p:cNvSpPr/>
-          <p:nvPr/>
-        </p:nvSpPr>
-        <p:spPr>
-          <a:xfrm>
-            <a:off x="3412927" y="2814638"/>
-            <a:ext cx="57150" cy="57150"/>
-          </a:xfrm>
-          <a:prstGeom prst="roundRect">
-            <a:avLst>
-              <a:gd name="adj" fmla="val 1600000"/>
-            </a:avLst>
-          </a:prstGeom>
-          <a:solidFill>
-            <a:srgbClr val="818B98"/>
-          </a:solidFill>
-          <a:ln/>
-        </p:spPr>
-        <p:txBody>
-          <a:bodyPr wrap="square" rtlCol="0" anchor="ctr"/>
-          <a:lstStyle/>
-          <a:p>
-            <a:pPr indent="0" marL="0">
-              <a:buNone/>
-            </a:pPr>
-            <a:endParaRPr lang="en-US" dirty="0"/>
-          </a:p>
-        </p:txBody>
-      </p:sp>
-      <p:sp>
-        <p:nvSpPr>
-          <p:cNvPr id="20" name="Text 14"/>
-          <p:cNvSpPr/>
-          <p:nvPr/>
-        </p:nvSpPr>
-        <p:spPr>
-          <a:xfrm>
-            <a:off x="3571577" y="2734717"/>
-            <a:ext cx="2254300" cy="414040"/>
-          </a:xfrm>
-          <a:prstGeom prst="rect">
-            <a:avLst/>
-          </a:prstGeom>
-          <a:noFill/>
-          <a:ln/>
-        </p:spPr>
-        <p:txBody>
-          <a:bodyPr wrap="square" lIns="0" tIns="0" rIns="0" bIns="0" rtlCol="0" anchor="t"/>
-          <a:lstStyle/>
-          <a:p>
-            <a:pPr algn="l" indent="0" marL="0">
-              <a:lnSpc>
-                <a:spcPts val="1630"/>
-              </a:lnSpc>
-              <a:buNone/>
-            </a:pPr>
-            <a:r>
-              <a:rPr lang="en-US" sz="1400" dirty="0">
-                <a:solidFill>
-                  <a:srgbClr val="59636E"/>
-                </a:solidFill>
-                <a:latin typeface="Arial" pitchFamily="34" charset="0"/>
-                <a:ea typeface="Arial" pitchFamily="34" charset="-122"/>
-                <a:cs typeface="Arial" pitchFamily="34" charset="-120"/>
-              </a:rPr>
-              <a:t>Actions minutes and AI credits</a:t>
-            </a:r>
-            <a:endParaRPr lang="en-US" sz="1400" dirty="0"/>
-          </a:p>
-        </p:txBody>
-      </p:sp>
-      <p:sp>
-        <p:nvSpPr>
-          <p:cNvPr id="21" name="Text 15"/>
-          <p:cNvSpPr/>
-          <p:nvPr/>
-        </p:nvSpPr>
-        <p:spPr>
-          <a:xfrm>
-            <a:off x="3251002" y="3869680"/>
-            <a:ext cx="2692598" cy="702171"/>
-          </a:xfrm>
-          <a:prstGeom prst="roundRect">
-            <a:avLst>
-              <a:gd name="adj" fmla="val 14469"/>
-            </a:avLst>
-          </a:prstGeom>
-          <a:solidFill>
-            <a:srgbClr val="DAFBE1"/>
-          </a:solidFill>
-          <a:ln w="9525">
-            <a:solidFill>
-              <a:srgbClr val="8CE7A5"/>
-            </a:solidFill>
-          </a:ln>
-        </p:spPr>
-        <p:txBody>
-          <a:bodyPr wrap="square" rtlCol="0" anchor="ctr"/>
-          <a:lstStyle/>
-          <a:p>
-            <a:pPr indent="0" marL="0">
-              <a:buNone/>
-            </a:pPr>
-            <a:endParaRPr lang="en-US" dirty="0"/>
-          </a:p>
-        </p:txBody>
-      </p:sp>
-      <p:pic>
-        <p:nvPicPr>
-          <p:cNvPr id="22" name="Image 4" descr="">
-            <a:extLst>
-              <a:ext uri="{C183D7F6-B498-43B3-948B-1728B52AA6E4}">
-                <adec:decorative xmlns:adec="http://schemas.microsoft.com/office/drawing/2017/decorative" val="1"/>
-              </a:ext>
-            </a:extLst>
-          </p:cNvPr>
-          <p:cNvPicPr>
-            <a:picLocks noChangeAspect="1"/>
-          </p:cNvPicPr>
-          <p:nvPr/>
-        </p:nvPicPr>
-        <p:blipFill>
-          <a:blip r:embed="rId6"/>
-          <a:stretch>
-            <a:fillRect/>
-          </a:stretch>
-        </p:blipFill>
-        <p:spPr>
-          <a:xfrm>
-            <a:off x="3438227" y="4119116"/>
-            <a:ext cx="203150" cy="203150"/>
-          </a:xfrm>
-          <a:prstGeom prst="rect">
-            <a:avLst/>
-          </a:prstGeom>
-        </p:spPr>
-      </p:pic>
-      <p:sp>
-        <p:nvSpPr>
-          <p:cNvPr id="23" name="Text 16"/>
-          <p:cNvSpPr/>
-          <p:nvPr/>
-        </p:nvSpPr>
-        <p:spPr>
-          <a:xfrm>
-            <a:off x="3768328" y="4006155"/>
-            <a:ext cx="2027807" cy="429220"/>
-          </a:xfrm>
-          <a:prstGeom prst="rect">
-            <a:avLst/>
-          </a:prstGeom>
-          <a:noFill/>
-          <a:ln/>
-        </p:spPr>
-        <p:txBody>
-          <a:bodyPr wrap="square" lIns="0" tIns="0" rIns="0" bIns="0" rtlCol="0" anchor="t"/>
-          <a:lstStyle/>
-          <a:p>
-            <a:pPr algn="l" indent="0" marL="0">
-              <a:lnSpc>
-                <a:spcPts val="1690"/>
-              </a:lnSpc>
-              <a:buNone/>
-            </a:pPr>
-            <a:r>
-              <a:rPr lang="en-US" sz="1400" dirty="0">
-                <a:solidFill>
-                  <a:srgbClr val="1F2328"/>
-                </a:solidFill>
-                <a:latin typeface="Arial" pitchFamily="34" charset="0"/>
-                <a:ea typeface="Arial" pitchFamily="34" charset="-122"/>
-                <a:cs typeface="Arial" pitchFamily="34" charset="-120"/>
-              </a:rPr>
-              <a:t>Clear every tool you do not need.</a:t>
-            </a:r>
-            <a:endParaRPr lang="en-US" sz="1400" dirty="0"/>
-          </a:p>
-        </p:txBody>
-      </p:sp>
-      <p:sp>
-        <p:nvSpPr>
-          <p:cNvPr id="24" name="Text 17"/>
-          <p:cNvSpPr/>
-          <p:nvPr/>
-        </p:nvSpPr>
-        <p:spPr>
-          <a:xfrm>
-            <a:off x="6149876" y="1775966"/>
-            <a:ext cx="2482751" cy="2594521"/>
-          </a:xfrm>
-          <a:prstGeom prst="roundRect">
-            <a:avLst>
-              <a:gd name="adj" fmla="val 3069"/>
-            </a:avLst>
-          </a:prstGeom>
-          <a:solidFill>
-            <a:srgbClr val="FFFFFF"/>
-          </a:solidFill>
-          <a:ln w="9525">
-            <a:solidFill>
-              <a:srgbClr val="D1D9E0"/>
-            </a:solidFill>
-          </a:ln>
-          <a:effectLst>
-            <a:outerShdw sx="100000" sy="100000" kx="0" ky="0" algn="bl" rotWithShape="0" blurRad="38100" dist="9525" dir="5400000">
-              <a:srgbClr val="1f2328">
-                <a:alpha val="12000"/>
-              </a:srgbClr>
-            </a:outerShdw>
-          </a:effectLst>
-        </p:spPr>
-        <p:txBody>
-          <a:bodyPr wrap="square" rtlCol="0" anchor="ctr"/>
-          <a:lstStyle/>
-          <a:p>
-            <a:pPr indent="0" marL="0">
-              <a:buNone/>
-            </a:pPr>
-            <a:endParaRPr lang="en-US" dirty="0"/>
-          </a:p>
-        </p:txBody>
-      </p:sp>
-      <p:pic>
-        <p:nvPicPr>
-          <p:cNvPr id="25" name="Image 5" descr="Cloud automation Tools selector with Read PR, List PRs, and Search PRs selected, showing 3 tools selected while write tools such as Create PR are cleared">    </p:cNvPr>
-          <p:cNvPicPr>
-            <a:picLocks noChangeAspect="1"/>
-          </p:cNvPicPr>
-          <p:nvPr/>
-        </p:nvPicPr>
-        <p:blipFill>
-          <a:blip r:embed="rId7"/>
-          <a:stretch>
-            <a:fillRect/>
-          </a:stretch>
-        </p:blipFill>
-        <p:spPr>
-          <a:xfrm>
-            <a:off x="6197501" y="1823591"/>
-            <a:ext cx="2387501" cy="2499271"/>
-          </a:xfrm>
-          <a:prstGeom prst="rect">
-            <a:avLst/>
-          </a:prstGeom>
-        </p:spPr>
-      </p:pic>
-    </p:spTree>
-  </p:cSld>
-  <p:clrMapOvr>
-    <a:masterClrMapping/>
-  </p:clrMapOvr>
-</p:sld>
+<ns0:sld xmlns:ns0="http://schemas.openxmlformats.org/presentationml/2006/main" xmlns:ns1="http://schemas.openxmlformats.org/drawingml/2006/main" xmlns:ns2="http://schemas.microsoft.com/office/drawing/2017/decorative" xmlns:ns3="http://schemas.openxmlformats.org/officeDocument/2006/relationships">
+  <ns0:cSld name="Slide 13">
+    <ns0:bg>
+      <ns0:bgPr>
+        <ns1:solidFill>
+          <ns1:srgbClr val="FFFFFF"/>
+        </ns1:solidFill>
+      </ns0:bgPr>
+    </ns0:bg>
+    <ns0:spTree>
+      <ns0:nvGrpSpPr>
+        <ns0:cNvPr id="1" name=""/>
+        <ns0:cNvGrpSpPr/>
+        <ns0:nvPr/>
+      </ns0:nvGrpSpPr>
+      <ns0:grpSpPr>
+        <ns1:xfrm>
+          <ns1:off x="0" y="0"/>
+          <ns1:ext cx="0" cy="0"/>
+          <ns1:chOff x="0" y="0"/>
+          <ns1:chExt cx="0" cy="0"/>
+        </ns1:xfrm>
+      </ns0:grpSpPr>
+      <ns0:pic>
+        <ns0:nvPicPr>
+          <ns0:cNvPr id="2" name="Image 0" descr="">
+            <ns1:extLst>
+              <ns1:ext uri="{C183D7F6-B498-43B3-948B-1728B52AA6E4}">
+                <ns2:decorative val="1"/>
+              </ns1:ext>
+            </ns1:extLst>
+          </ns0:cNvPr>
+          <ns0:cNvPicPr>
+            <ns1:picLocks noChangeAspect="1"/>
+          </ns0:cNvPicPr>
+          <ns0:nvPr/>
+        </ns0:nvPicPr>
+        <ns0:blipFill>
+          <ns1:blip ns3:embed="rId1"/>
+          <ns1:stretch>
+            <ns1:fillRect/>
+          </ns1:stretch>
+        </ns0:blipFill>
+        <ns0:spPr>
+          <ns1:xfrm>
+            <ns1:off x="6349901" y="0"/>
+            <ns1:ext cx="2793950" cy="1308050"/>
+          </ns1:xfrm>
+          <ns1:prstGeom prst="rect">
+            <ns1:avLst/>
+          </ns1:prstGeom>
+        </ns0:spPr>
+      </ns0:pic>
+      <ns0:sp>
+        <ns0:nvSpPr>
+          <ns0:cNvPr id="3" name="Text 0"/>
+          <ns0:cNvSpPr/>
+          <ns0:nvPr/>
+        </ns0:nvSpPr>
+        <ns0:spPr>
+          <ns1:xfrm>
+            <ns1:off x="7340501" y="177701"/>
+            <ns1:ext cx="1168301" cy="279350"/>
+          </ns1:xfrm>
+          <ns1:prstGeom prst="roundRect">
+            <ns1:avLst>
+              <ns1:gd name="adj" fmla="val 22731"/>
+            </ns1:avLst>
+          </ns1:prstGeom>
+          <ns1:solidFill>
+            <ns1:srgbClr val="1A7F37"/>
+          </ns1:solidFill>
+          <ns1:ln/>
+        </ns0:spPr>
+        <ns0:txBody>
+          <ns1:bodyPr wrap="square" rtlCol="0" anchor="ctr"/>
+          <ns1:lstStyle/>
+          <ns1:p>
+            <ns1:pPr indent="0" marL="0">
+              <ns1:buNone/>
+            </ns1:pPr>
+            <ns1:endParaRPr lang="en-US" dirty="0"/>
+          </ns1:p>
+        </ns0:txBody>
+      </ns0:sp>
+      <ns0:sp>
+        <ns0:nvSpPr>
+          <ns0:cNvPr id="4" name="Text 1"/>
+          <ns0:cNvSpPr/>
+          <ns0:nvPr/>
+        </ns0:nvSpPr>
+        <ns0:spPr>
+          <ns1:xfrm>
+            <ns1:off x="7461041" y="231577"/>
+            <ns1:ext cx="927071" cy="171450"/>
+          </ns1:xfrm>
+          <ns1:prstGeom prst="rect">
+            <ns1:avLst/>
+          </ns1:prstGeom>
+          <ns1:noFill/>
+          <ns1:ln/>
+        </ns0:spPr>
+        <ns0:txBody>
+          <ns1:bodyPr wrap="square" lIns="0" tIns="0" rIns="0" bIns="0" rtlCol="0" anchor="t"/>
+          <ns1:lstStyle/>
+          <ns1:p>
+            <ns1:pPr algn="ctr" indent="0" marL="0">
+              <ns1:buNone/>
+            </ns1:pPr>
+            <ns1:r>
+              <ns1:rPr lang="en-US" sz="1150" b="1" dirty="0">
+                <ns1:solidFill>
+                  <ns1:srgbClr val="FFFFFF"/>
+                </ns1:solidFill>
+                <ns1:latin typeface="Arial" pitchFamily="34" charset="0"/>
+                <ns1:ea typeface="Arial" pitchFamily="34" charset="-122"/>
+                <ns1:cs typeface="Arial" pitchFamily="34" charset="-120"/>
+              </ns1:rPr>
+              <ns1:t>CHAPTER 07</ns1:t>
+            </ns1:r>
+            <ns1:endParaRPr lang="en-US" sz="1150" dirty="0"/>
+          </ns1:p>
+        </ns0:txBody>
+      </ns0:sp>
+      <ns0:pic>
+        <ns0:nvPicPr>
+          <ns0:cNvPr id="5" name="Image 1" descr="Open this chapter on GitHub">
+            <ns1:hlinkClick ns3:id="rId3" tooltip="https://github.com/github/copilot-app-for-beginners/tree/main/07-automations"/>
+          </ns0:cNvPr>
+          <ns0:cNvPicPr>
+            <ns1:picLocks noChangeAspect="1"/>
+          </ns0:cNvPicPr>
+          <ns0:nvPr/>
+        </ns0:nvPicPr>
+        <ns0:blipFill>
+          <ns1:blip ns3:embed="rId2"/>
+          <ns1:stretch>
+            <ns1:fillRect/>
+          </ns1:stretch>
+        </ns0:blipFill>
+        <ns0:spPr>
+          <ns1:xfrm>
+            <ns1:off x="8610600" y="165050"/>
+            <ns1:ext cx="304800" cy="304800"/>
+          </ns1:xfrm>
+          <ns1:prstGeom prst="rect">
+            <ns1:avLst/>
+          </ns1:prstGeom>
+        </ns0:spPr>
+      </ns0:pic>
+      <ns0:sp>
+        <ns0:nvSpPr>
+          <ns0:cNvPr id="6" name="Text 2"/>
+          <ns0:cNvSpPr/>
+          <ns0:nvPr/>
+        </ns0:nvSpPr>
+        <ns0:spPr>
+          <ns1:xfrm>
+            <ns1:off x="507950" y="381000"/>
+            <ns1:ext cx="8161020" cy="190500"/>
+          </ns1:xfrm>
+          <ns1:prstGeom prst="rect">
+            <ns1:avLst/>
+          </ns1:prstGeom>
+          <ns1:noFill/>
+          <ns1:ln/>
+        </ns0:spPr>
+        <ns0:txBody>
+          <ns1:bodyPr wrap="square" lIns="0" tIns="0" rIns="0" bIns="0" rtlCol="0" anchor="t"/>
+          <ns1:lstStyle/>
+          <ns1:p>
+            <ns1:pPr algn="l" indent="0" marL="0">
+              <ns1:buNone/>
+            </ns1:pPr>
+            <ns1:r>
+              <ns1:rPr lang="en-US" sz="1250" b="1" dirty="0">
+                <ns1:solidFill>
+                  <ns1:srgbClr val="1A7F37"/>
+                </ns1:solidFill>
+                <ns1:latin typeface="Arial" pitchFamily="34" charset="0"/>
+                <ns1:ea typeface="Arial" pitchFamily="34" charset="-122"/>
+                <ns1:cs typeface="Arial" pitchFamily="34" charset="-120"/>
+              </ns1:rPr>
+              <ns1:t>LOCAL OR CLOUD</ns1:t>
+            </ns1:r>
+            <ns1:endParaRPr lang="en-US" sz="1250" dirty="0"/>
+          </ns1:p>
+        </ns0:txBody>
+      </ns0:sp>
+      <ns0:sp>
+        <ns0:nvSpPr>
+          <ns0:cNvPr id="7" name="Text 3"/>
+          <ns0:cNvSpPr/>
+          <ns0:nvPr/>
+        </ns0:nvSpPr>
+        <ns0:spPr>
+          <ns1:xfrm>
+            <ns1:off x="507950" y="622250"/>
+            <ns1:ext cx="8161020" cy="419100"/>
+          </ns1:xfrm>
+          <ns1:prstGeom prst="rect">
+            <ns1:avLst/>
+          </ns1:prstGeom>
+          <ns1:noFill/>
+          <ns1:ln/>
+        </ns0:spPr>
+        <ns0:txBody>
+          <ns1:bodyPr wrap="square" lIns="0" tIns="0" rIns="0" bIns="0" rtlCol="0" anchor="t"/>
+          <ns1:lstStyle/>
+          <ns1:p>
+            <ns1:pPr algn="l" indent="0" marL="0">
+              <ns1:lnSpc>
+                <ns1:spcPts val="3300"/>
+              </ns1:lnSpc>
+              <ns1:spcBef>
+                <ns1:spcPts val="400"/>
+              </ns1:spcBef>
+              <ns1:buNone/>
+            </ns1:pPr>
+            <ns1:r>
+              <ns1:rPr lang="en-US" sz="2800" b="1" dirty="0">
+                <ns1:solidFill>
+                  <ns1:srgbClr val="1F2328"/>
+                </ns1:solidFill>
+                <ns1:latin typeface="Arial" pitchFamily="34" charset="0"/>
+                <ns1:ea typeface="Arial" pitchFamily="34" charset="-122"/>
+                <ns1:cs typeface="Arial" pitchFamily="34" charset="-120"/>
+              </ns1:rPr>
+              <ns1:t>Move to the cloud only when it is proven</ns1:t>
+            </ns1:r>
+            <ns1:endParaRPr lang="en-US" sz="2800" dirty="0"/>
+          </ns1:p>
+        </ns0:txBody>
+      </ns0:sp>
+      <ns0:sp>
+        <ns0:nvSpPr>
+          <ns0:cNvPr id="8" name="Text 4"/>
+          <ns0:cNvSpPr/>
+          <ns0:nvPr/>
+        </ns0:nvSpPr>
+        <ns0:spPr>
+          <ns1:xfrm>
+            <ns1:off x="507950" y="1104751"/>
+            <ns1:ext cx="8161020" cy="254050"/>
+          </ns1:xfrm>
+          <ns1:prstGeom prst="rect">
+            <ns1:avLst/>
+          </ns1:prstGeom>
+          <ns1:noFill/>
+          <ns1:ln/>
+        </ns0:spPr>
+        <ns0:txBody>
+          <ns1:bodyPr wrap="square" lIns="0" tIns="0" rIns="0" bIns="0" rtlCol="0" anchor="t"/>
+          <ns1:lstStyle/>
+          <ns1:p>
+            <ns1:pPr algn="l" indent="0" marL="0">
+              <ns1:lnSpc>
+                <ns1:spcPts val="2000"/>
+              </ns1:lnSpc>
+              <ns1:spcBef>
+                <ns1:spcPts val="500"/>
+              </ns1:spcBef>
+              <ns1:buNone/>
+            </ns1:pPr>
+            <ns1:r>
+              <ns1:rPr lang="en-US" sz="1650" dirty="0">
+                <ns1:solidFill>
+                  <ns1:srgbClr val="59636E"/>
+                </ns1:solidFill>
+                <ns1:latin typeface="Arial" pitchFamily="34" charset="0"/>
+                <ns1:ea typeface="Arial" pitchFamily="34" charset="-122"/>
+                <ns1:cs typeface="Arial" pitchFamily="34" charset="-120"/>
+              </ns1:rPr>
+              <ns1:t>Cloud runs on GitHub even when your laptop is closed.</ns1:t>
+            </ns1:r>
+            <ns1:endParaRPr lang="en-US" sz="1650" dirty="0"/>
+          </ns1:p>
+        </ns0:txBody>
+      </ns0:sp>
+      <ns0:sp>
+        <ns0:nvSpPr>
+          <ns0:cNvPr id="9" name="Text 5"/>
+          <ns0:cNvSpPr/>
+          <ns0:nvPr/>
+        </ns0:nvSpPr>
+        <ns0:spPr>
+          <ns1:xfrm>
+            <ns1:off x="511076" y="2212925"/>
+            <ns1:ext cx="2533650" cy="1720751"/>
+          </ns1:xfrm>
+          <ns1:prstGeom prst="roundRect">
+            <ns1:avLst>
+              <ns1:gd name="adj" fmla="val 4428"/>
+            </ns1:avLst>
+          </ns1:prstGeom>
+          <ns1:solidFill>
+            <ns1:srgbClr val="FFFFFF"/>
+          </ns1:solidFill>
+          <ns1:ln w="9525">
+            <ns1:solidFill>
+              <ns1:srgbClr val="D1D9E0"/>
+            </ns1:solidFill>
+          </ns1:ln>
+          <ns1:effectLst>
+            <ns1:outerShdw sx="100000" sy="100000" kx="0" ky="0" algn="bl" rotWithShape="0" blurRad="38100" dist="9525" dir="5400000">
+              <ns1:srgbClr val="1f2328">
+                <ns1:alpha val="12000"/>
+              </ns1:srgbClr>
+            </ns1:outerShdw>
+          </ns1:effectLst>
+        </ns0:spPr>
+        <ns0:txBody>
+          <ns1:bodyPr wrap="square" rtlCol="0" anchor="ctr"/>
+          <ns1:lstStyle/>
+          <ns1:p>
+            <ns1:pPr indent="0" marL="0">
+              <ns1:buNone/>
+            </ns1:pPr>
+            <ns1:endParaRPr lang="en-US" dirty="0"/>
+          </ns1:p>
+        </ns0:txBody>
+      </ns0:sp>
+      <ns0:pic>
+        <ns0:nvPicPr>
+          <ns0:cNvPr id="10" name="Image 2" descr="Local versus cloud automations"/>
+          <ns0:cNvPicPr>
+            <ns1:picLocks noChangeAspect="1"/>
+          </ns0:cNvPicPr>
+          <ns0:nvPr/>
+        </ns0:nvPicPr>
+        <ns0:blipFill>
+          <ns1:blip ns3:embed="rId4"/>
+          <ns1:stretch>
+            <ns1:fillRect/>
+          </ns1:stretch>
+        </ns0:blipFill>
+        <ns0:spPr>
+          <ns1:xfrm>
+            <ns1:off x="558701" y="2260550"/>
+            <ns1:ext cx="2438400" cy="1625501"/>
+          </ns1:xfrm>
+          <ns1:prstGeom prst="rect">
+            <ns1:avLst/>
+          </ns1:prstGeom>
+        </ns0:spPr>
+      </ns0:pic>
+      <ns0:sp>
+        <ns0:nvSpPr>
+          <ns0:cNvPr id="11" name="Text 6"/>
+          <ns0:cNvSpPr/>
+          <ns0:nvPr/>
+        </ns0:nvSpPr>
+        <ns0:spPr>
+          <ns1:xfrm>
+            <ns1:off x="3251002" y="1574750"/>
+            <ns1:ext cx="2692598" cy="2142530"/>
+          </ns1:xfrm>
+          <ns1:prstGeom prst="roundRect">
+            <ns1:avLst>
+              <ns1:gd name="adj" fmla="val 5928"/>
+            </ns1:avLst>
+          </ns1:prstGeom>
+          <ns1:solidFill>
+            <ns1:srgbClr val="FFFFFF"/>
+          </ns1:solidFill>
+          <ns1:ln w="9525">
+            <ns1:solidFill>
+              <ns1:srgbClr val="FFC49B"/>
+            </ns1:solidFill>
+          </ns1:ln>
+        </ns0:spPr>
+        <ns0:txBody>
+          <ns1:bodyPr wrap="square" rtlCol="0" anchor="ctr"/>
+          <ns1:lstStyle/>
+          <ns1:p>
+            <ns1:pPr indent="0" marL="0">
+              <ns1:buNone/>
+            </ns1:pPr>
+            <ns1:endParaRPr lang="en-US" dirty="0"/>
+          </ns1:p>
+        </ns0:txBody>
+      </ns0:sp>
+      <ns0:sp>
+        <ns0:nvSpPr>
+          <ns0:cNvPr id="12" name="Text 7"/>
+          <ns0:cNvSpPr/>
+          <ns0:nvPr/>
+        </ns0:nvSpPr>
+        <ns0:spPr>
+          <ns1:xfrm>
+            <ns1:off x="3412927" y="1736675"/>
+            <ns1:ext cx="381000" cy="381000"/>
+          </ns1:xfrm>
+          <ns1:prstGeom prst="roundRect">
+            <ns1:avLst>
+              <ns1:gd name="adj" fmla="val 23333"/>
+            </ns1:avLst>
+          </ns1:prstGeom>
+          <ns1:solidFill>
+            <ns1:srgbClr val="FFF1E5"/>
+          </ns1:solidFill>
+          <ns1:ln/>
+        </ns0:spPr>
+        <ns0:txBody>
+          <ns1:bodyPr wrap="square" rtlCol="0" anchor="ctr"/>
+          <ns1:lstStyle/>
+          <ns1:p>
+            <ns1:pPr indent="0" marL="0">
+              <ns1:buNone/>
+            </ns1:pPr>
+            <ns1:endParaRPr lang="en-US" dirty="0"/>
+          </ns1:p>
+        </ns0:txBody>
+      </ns0:sp>
+      <ns0:pic>
+        <ns0:nvPicPr>
+          <ns0:cNvPr id="13" name="Image 3" descr="">
+            <ns1:extLst>
+              <ns1:ext uri="{C183D7F6-B498-43B3-948B-1728B52AA6E4}">
+                <ns2:decorative val="1"/>
+              </ns1:ext>
+            </ns1:extLst>
+          </ns0:cNvPr>
+          <ns0:cNvPicPr>
+            <ns1:picLocks noChangeAspect="1"/>
+          </ns0:cNvPicPr>
+          <ns0:nvPr/>
+        </ns0:nvPicPr>
+        <ns0:blipFill>
+          <ns1:blip ns3:embed="rId5"/>
+          <ns1:stretch>
+            <ns1:fillRect/>
+          </ns1:stretch>
+        </ns0:blipFill>
+        <ns0:spPr>
+          <ns1:xfrm>
+            <ns1:off x="3495526" y="1819275"/>
+            <ns1:ext cx="215801" cy="215801"/>
+          </ns1:xfrm>
+          <ns1:prstGeom prst="rect">
+            <ns1:avLst/>
+          </ns1:prstGeom>
+        </ns0:spPr>
+      </ns0:pic>
+      <ns0:sp>
+        <ns0:nvSpPr>
+          <ns0:cNvPr id="14" name="Text 8"/>
+          <ns0:cNvSpPr/>
+          <ns0:nvPr/>
+        </ns0:nvSpPr>
+        <ns0:spPr>
+          <ns1:xfrm>
+            <ns1:off x="3908227" y="1812875"/>
+            <ns1:ext cx="1282598" cy="228600"/>
+          </ns1:xfrm>
+          <ns1:prstGeom prst="rect">
+            <ns1:avLst/>
+          </ns1:prstGeom>
+          <ns1:noFill/>
+          <ns1:ln/>
+        </ns0:spPr>
+        <ns0:txBody>
+          <ns1:bodyPr wrap="square" lIns="0" tIns="0" rIns="0" bIns="0" rtlCol="0" anchor="t"/>
+          <ns1:lstStyle/>
+          <ns1:p>
+            <ns1:pPr algn="l" indent="0" marL="0">
+              <ns1:lnSpc>
+                <ns1:spcPts val="1800"/>
+              </ns1:lnSpc>
+              <ns1:buNone/>
+            </ns1:pPr>
+            <ns1:r>
+              <ns1:rPr lang="en-US" sz="1650" b="1" dirty="0">
+                <ns1:solidFill>
+                  <ns1:srgbClr val="1F2328"/>
+                </ns1:solidFill>
+                <ns1:latin typeface="Arial" pitchFamily="34" charset="0"/>
+                <ns1:ea typeface="Arial" pitchFamily="34" charset="-122"/>
+                <ns1:cs typeface="Arial" pitchFamily="34" charset="-120"/>
+              </ns1:rPr>
+              <ns1:t>Cloud needs</ns1:t>
+            </ns1:r>
+            <ns1:endParaRPr lang="en-US" sz="1650" dirty="0"/>
+          </ns1:p>
+        </ns0:txBody>
+      </ns0:sp>
+      <ns0:sp>
+        <ns0:nvSpPr>
+          <ns0:cNvPr id="15" name="Text 9"/>
+          <ns0:cNvSpPr/>
+          <ns0:nvPr/>
+        </ns0:nvSpPr>
+        <ns0:spPr>
+          <ns1:xfrm>
+            <ns1:off x="3412927" y="2273796"/>
+            <ns1:ext cx="57150" cy="57150"/>
+          </ns1:xfrm>
+          <ns1:prstGeom prst="roundRect">
+            <ns1:avLst>
+              <ns1:gd name="adj" fmla="val 1600000"/>
+            </ns1:avLst>
+          </ns1:prstGeom>
+          <ns1:solidFill>
+            <ns1:srgbClr val="818B98"/>
+          </ns1:solidFill>
+          <ns1:ln/>
+        </ns0:spPr>
+        <ns0:txBody>
+          <ns1:bodyPr wrap="square" rtlCol="0" anchor="ctr"/>
+          <ns1:lstStyle/>
+          <ns1:p>
+            <ns1:pPr indent="0" marL="0">
+              <ns1:buNone/>
+            </ns1:pPr>
+            <ns1:endParaRPr lang="en-US" dirty="0"/>
+          </ns1:p>
+        </ns0:txBody>
+      </ns0:sp>
+      <ns0:sp>
+        <ns0:nvSpPr>
+          <ns0:cNvPr id="16" name="Text 10"/>
+          <ns0:cNvSpPr/>
+          <ns0:nvPr/>
+        </ns0:nvSpPr>
+        <ns0:spPr>
+          <ns1:xfrm>
+            <ns1:off x="3571577" y="2193875"/>
+            <ns1:ext cx="1673343" cy="207020"/>
+          </ns1:xfrm>
+          <ns1:prstGeom prst="rect">
+            <ns1:avLst/>
+          </ns1:prstGeom>
+          <ns1:noFill/>
+          <ns1:ln/>
+        </ns0:spPr>
+        <ns0:txBody>
+          <ns1:bodyPr wrap="square" lIns="0" tIns="0" rIns="0" bIns="0" rtlCol="0" anchor="t"/>
+          <ns1:lstStyle/>
+          <ns1:p>
+            <ns1:pPr algn="l" indent="0" marL="0">
+              <ns1:lnSpc>
+                <ns1:spcPts val="1630"/>
+              </ns1:lnSpc>
+              <ns1:buNone/>
+            </ns1:pPr>
+            <ns1:r>
+              <ns1:rPr lang="en-US" sz="1400" dirty="0">
+                <ns1:solidFill>
+                  <ns1:srgbClr val="59636E"/>
+                </ns1:solidFill>
+                <ns1:latin typeface="Arial" pitchFamily="34" charset="0"/>
+                <ns1:ea typeface="Arial" pitchFamily="34" charset="-122"/>
+                <ns1:cs typeface="Arial" pitchFamily="34" charset="-120"/>
+              </ns1:rPr>
+              <ns1:t>Cloud agent enabled</ns1:t>
+            </ns1:r>
+            <ns1:endParaRPr lang="en-US" sz="1400" dirty="0"/>
+          </ns1:p>
+        </ns0:txBody>
+      </ns0:sp>
+      <ns0:sp>
+        <ns0:nvSpPr>
+          <ns0:cNvPr id="17" name="Text 11"/>
+          <ns0:cNvSpPr/>
+          <ns0:nvPr/>
+        </ns0:nvSpPr>
+        <ns0:spPr>
+          <ns1:xfrm>
+            <ns1:off x="3412927" y="2544217"/>
+            <ns1:ext cx="57150" cy="57150"/>
+          </ns1:xfrm>
+          <ns1:prstGeom prst="roundRect">
+            <ns1:avLst>
+              <ns1:gd name="adj" fmla="val 1600000"/>
+            </ns1:avLst>
+          </ns1:prstGeom>
+          <ns1:solidFill>
+            <ns1:srgbClr val="818B98"/>
+          </ns1:solidFill>
+          <ns1:ln/>
+        </ns0:spPr>
+        <ns0:txBody>
+          <ns1:bodyPr wrap="square" rtlCol="0" anchor="ctr"/>
+          <ns1:lstStyle/>
+          <ns1:p>
+            <ns1:pPr indent="0" marL="0">
+              <ns1:buNone/>
+            </ns1:pPr>
+            <ns1:endParaRPr lang="en-US" dirty="0"/>
+          </ns1:p>
+        </ns0:txBody>
+      </ns0:sp>
+      <ns0:sp>
+        <ns0:nvSpPr>
+          <ns0:cNvPr id="18" name="Text 12"/>
+          <ns0:cNvSpPr/>
+          <ns0:nvPr/>
+        </ns0:nvSpPr>
+        <ns0:spPr>
+          <ns1:xfrm>
+            <ns1:off x="3571577" y="2464296"/>
+            <ns1:ext cx="1975283" cy="207020"/>
+          </ns1:xfrm>
+          <ns1:prstGeom prst="rect">
+            <ns1:avLst/>
+          </ns1:prstGeom>
+          <ns1:noFill/>
+          <ns1:ln/>
+        </ns0:spPr>
+        <ns0:txBody>
+          <ns1:bodyPr wrap="square" lIns="0" tIns="0" rIns="0" bIns="0" rtlCol="0" anchor="t"/>
+          <ns1:lstStyle/>
+          <ns1:p>
+            <ns1:pPr algn="l" indent="0" marL="0">
+              <ns1:lnSpc>
+                <ns1:spcPts val="1630"/>
+              </ns1:lnSpc>
+              <ns1:buNone/>
+            </ns1:pPr>
+            <ns1:r>
+              <ns1:rPr lang="en-US" sz="1400" dirty="0">
+                <ns1:solidFill>
+                  <ns1:srgbClr val="59636E"/>
+                </ns1:solidFill>
+                <ns1:latin typeface="Arial" pitchFamily="34" charset="0"/>
+                <ns1:ea typeface="Arial" pitchFamily="34" charset="-122"/>
+                <ns1:cs typeface="Arial" pitchFamily="34" charset="-120"/>
+              </ns1:rPr>
+              <ns1:t>A private or internal repo</ns1:t>
+            </ns1:r>
+            <ns1:endParaRPr lang="en-US" sz="1400" dirty="0"/>
+          </ns1:p>
+        </ns0:txBody>
+      </ns0:sp>
+      <ns0:sp>
+        <ns0:nvSpPr>
+          <ns0:cNvPr id="19" name="Text 13"/>
+          <ns0:cNvSpPr/>
+          <ns0:nvPr/>
+        </ns0:nvSpPr>
+        <ns0:spPr>
+          <ns1:xfrm>
+            <ns1:off x="3412927" y="2814638"/>
+            <ns1:ext cx="57150" cy="57150"/>
+          </ns1:xfrm>
+          <ns1:prstGeom prst="roundRect">
+            <ns1:avLst>
+              <ns1:gd name="adj" fmla="val 1600000"/>
+            </ns1:avLst>
+          </ns1:prstGeom>
+          <ns1:solidFill>
+            <ns1:srgbClr val="818B98"/>
+          </ns1:solidFill>
+          <ns1:ln/>
+        </ns0:spPr>
+        <ns0:txBody>
+          <ns1:bodyPr wrap="square" rtlCol="0" anchor="ctr"/>
+          <ns1:lstStyle/>
+          <ns1:p>
+            <ns1:pPr indent="0" marL="0">
+              <ns1:buNone/>
+            </ns1:pPr>
+            <ns1:endParaRPr lang="en-US" dirty="0"/>
+          </ns1:p>
+        </ns0:txBody>
+      </ns0:sp>
+      <ns0:sp>
+        <ns0:nvSpPr>
+          <ns0:cNvPr id="20" name="Text 14"/>
+          <ns0:cNvSpPr/>
+          <ns0:nvPr/>
+        </ns0:nvSpPr>
+        <ns0:spPr>
+          <ns1:xfrm>
+            <ns1:off x="3571577" y="2734717"/>
+            <ns1:ext cx="2254300" cy="414040"/>
+          </ns1:xfrm>
+          <ns1:prstGeom prst="rect">
+            <ns1:avLst/>
+          </ns1:prstGeom>
+          <ns1:noFill/>
+          <ns1:ln/>
+        </ns0:spPr>
+        <ns0:txBody>
+          <ns1:bodyPr wrap="square" lIns="0" tIns="0" rIns="0" bIns="0" rtlCol="0" anchor="t"/>
+          <ns1:lstStyle/>
+          <ns1:p>
+            <ns1:pPr algn="l" indent="0" marL="0">
+              <ns1:lnSpc>
+                <ns1:spcPts val="1630"/>
+              </ns1:lnSpc>
+              <ns1:buNone/>
+            </ns1:pPr>
+            <ns1:r>
+              <ns1:rPr lang="en-US" sz="1400" dirty="0">
+                <ns1:solidFill>
+                  <ns1:srgbClr val="59636E"/>
+                </ns1:solidFill>
+                <ns1:latin typeface="Arial" pitchFamily="34" charset="0"/>
+                <ns1:ea typeface="Arial" pitchFamily="34" charset="-122"/>
+                <ns1:cs typeface="Arial" pitchFamily="34" charset="-120"/>
+              </ns1:rPr>
+              <ns1:t>Actions minutes and AI credits</ns1:t>
+            </ns1:r>
+            <ns1:endParaRPr lang="en-US" sz="1400" dirty="0"/>
+          </ns1:p>
+        </ns0:txBody>
+      </ns0:sp>
+      <ns0:sp>
+        <ns0:nvSpPr>
+          <ns0:cNvPr id="21" name="Text 15"/>
+          <ns0:cNvSpPr/>
+          <ns0:nvPr/>
+        </ns0:nvSpPr>
+        <ns0:spPr>
+          <ns1:xfrm>
+            <ns1:off x="3251002" y="3869680"/>
+            <ns1:ext cx="2692598" cy="702171"/>
+          </ns1:xfrm>
+          <ns1:prstGeom prst="roundRect">
+            <ns1:avLst>
+              <ns1:gd name="adj" fmla="val 14469"/>
+            </ns1:avLst>
+          </ns1:prstGeom>
+          <ns1:solidFill>
+            <ns1:srgbClr val="DAFBE1"/>
+          </ns1:solidFill>
+          <ns1:ln w="9525">
+            <ns1:solidFill>
+              <ns1:srgbClr val="8CE7A5"/>
+            </ns1:solidFill>
+          </ns1:ln>
+        </ns0:spPr>
+        <ns0:txBody>
+          <ns1:bodyPr wrap="square" rtlCol="0" anchor="ctr"/>
+          <ns1:lstStyle/>
+          <ns1:p>
+            <ns1:pPr indent="0" marL="0">
+              <ns1:buNone/>
+            </ns1:pPr>
+            <ns1:endParaRPr lang="en-US" dirty="0"/>
+          </ns1:p>
+        </ns0:txBody>
+      </ns0:sp>
+      <ns0:pic>
+        <ns0:nvPicPr>
+          <ns0:cNvPr id="22" name="Image 4" descr="">
+            <ns1:extLst>
+              <ns1:ext uri="{C183D7F6-B498-43B3-948B-1728B52AA6E4}">
+                <ns2:decorative val="1"/>
+              </ns1:ext>
+            </ns1:extLst>
+          </ns0:cNvPr>
+          <ns0:cNvPicPr>
+            <ns1:picLocks noChangeAspect="1"/>
+          </ns0:cNvPicPr>
+          <ns0:nvPr/>
+        </ns0:nvPicPr>
+        <ns0:blipFill>
+          <ns1:blip ns3:embed="rId6"/>
+          <ns1:stretch>
+            <ns1:fillRect/>
+          </ns1:stretch>
+        </ns0:blipFill>
+        <ns0:spPr>
+          <ns1:xfrm>
+            <ns1:off x="3438227" y="4119116"/>
+            <ns1:ext cx="203150" cy="203150"/>
+          </ns1:xfrm>
+          <ns1:prstGeom prst="rect">
+            <ns1:avLst/>
+          </ns1:prstGeom>
+        </ns0:spPr>
+      </ns0:pic>
+      <ns0:sp>
+        <ns0:nvSpPr>
+          <ns0:cNvPr id="23" name="Text 16"/>
+          <ns0:cNvSpPr/>
+          <ns0:nvPr/>
+        </ns0:nvSpPr>
+        <ns0:spPr>
+          <ns1:xfrm>
+            <ns1:off x="3768328" y="4006155"/>
+            <ns1:ext cx="2027807" cy="429220"/>
+          </ns1:xfrm>
+          <ns1:prstGeom prst="rect">
+            <ns1:avLst/>
+          </ns1:prstGeom>
+          <ns1:noFill/>
+          <ns1:ln/>
+        </ns0:spPr>
+        <ns0:txBody>
+          <ns1:bodyPr wrap="square" lIns="0" tIns="0" rIns="0" bIns="0" rtlCol="0" anchor="t"/>
+          <ns1:lstStyle/>
+          <ns1:p>
+            <ns1:pPr algn="l" indent="0" marL="0">
+              <ns1:lnSpc>
+                <ns1:spcPts val="1690"/>
+              </ns1:lnSpc>
+              <ns1:buNone/>
+            </ns1:pPr>
+            <ns1:r>
+              <ns1:rPr lang="en-US" sz="1400" dirty="0">
+                <ns1:solidFill>
+                  <ns1:srgbClr val="1F2328"/>
+                </ns1:solidFill>
+                <ns1:latin typeface="Arial" pitchFamily="34" charset="0"/>
+                <ns1:ea typeface="Arial" pitchFamily="34" charset="-122"/>
+                <ns1:cs typeface="Arial" pitchFamily="34" charset="-120"/>
+              </ns1:rPr>
+              <ns1:t>Select only the tools the task needs.</ns1:t>
+            </ns1:r>
+            <ns1:endParaRPr lang="en-US" sz="1400" dirty="0"/>
+          </ns1:p>
+        </ns0:txBody>
+      </ns0:sp>
+      <ns0:sp>
+        <ns0:nvSpPr>
+          <ns0:cNvPr id="24" name="Text 17"/>
+          <ns0:cNvSpPr/>
+          <ns0:nvPr/>
+        </ns0:nvSpPr>
+        <ns0:spPr>
+          <ns1:xfrm>
+            <ns1:off x="6149876" y="1775966"/>
+            <ns1:ext cx="2482751" cy="2594521"/>
+          </ns1:xfrm>
+          <ns1:prstGeom prst="roundRect">
+            <ns1:avLst>
+              <ns1:gd name="adj" fmla="val 3069"/>
+            </ns1:avLst>
+          </ns1:prstGeom>
+          <ns1:solidFill>
+            <ns1:srgbClr val="FFFFFF"/>
+          </ns1:solidFill>
+          <ns1:ln w="9525">
+            <ns1:solidFill>
+              <ns1:srgbClr val="D1D9E0"/>
+            </ns1:solidFill>
+          </ns1:ln>
+          <ns1:effectLst>
+            <ns1:outerShdw sx="100000" sy="100000" kx="0" ky="0" algn="bl" rotWithShape="0" blurRad="38100" dist="9525" dir="5400000">
+              <ns1:srgbClr val="1f2328">
+                <ns1:alpha val="12000"/>
+              </ns1:srgbClr>
+            </ns1:outerShdw>
+          </ns1:effectLst>
+        </ns0:spPr>
+        <ns0:txBody>
+          <ns1:bodyPr wrap="square" rtlCol="0" anchor="ctr"/>
+          <ns1:lstStyle/>
+          <ns1:p>
+            <ns1:pPr indent="0" marL="0">
+              <ns1:buNone/>
+            </ns1:pPr>
+            <ns1:endParaRPr lang="en-US" dirty="0"/>
+          </ns1:p>
+        </ns0:txBody>
+      </ns0:sp>
+      <ns0:pic>
+        <ns0:nvPicPr>
+          <ns0:cNvPr id="25" name="Image 5" descr="Cloud automation Tools selector with Read PR, List PRs, and Search PRs selected, showing 3 tools selected while write tools such as Create PR are cleared"/>
+          <ns0:cNvPicPr>
+            <ns1:picLocks noChangeAspect="1"/>
+          </ns0:cNvPicPr>
+          <ns0:nvPr/>
+        </ns0:nvPicPr>
+        <ns0:blipFill>
+          <ns1:blip ns3:embed="rId7"/>
+          <ns1:stretch>
+            <ns1:fillRect/>
+          </ns1:stretch>
+        </ns0:blipFill>
+        <ns0:spPr>
+          <ns1:xfrm>
+            <ns1:off x="6197501" y="1823591"/>
+            <ns1:ext cx="2387501" cy="2499271"/>
+          </ns1:xfrm>
+          <ns1:prstGeom prst="rect">
+            <ns1:avLst/>
+          </ns1:prstGeom>
+        </ns0:spPr>
+      </ns0:pic>
+    </ns0:spTree>
+  </ns0:cSld>
+  <ns0:clrMapOvr>
+    <ns1:masterClrMapping/>
+  </ns0:clrMapOvr>
+</ns0:sld>
 </file>
 
 <file path=ppt/slides/slide14.xml><?xml version="1.0" encoding="utf-8"?>
@@ -10810,7 +10810,7 @@
       </p:sp>
       <p:pic>
         <p:nvPicPr>
-          <p:cNvPr id="10" name="Image 2" descr="Sequencer analogy for automations">    </p:cNvPr>
+          <p:cNvPr id="10" name="Image 2" descr="Sequencer analogy for automations"/>
           <p:cNvPicPr>
             <a:picLocks noChangeAspect="1"/>
           </p:cNvPicPr>
@@ -11698,7 +11698,7 @@
       </p:sp>
       <p:pic>
         <p:nvPicPr>
-          <p:cNvPr id="9" name="Image 2" descr="Automation trigger to agent run">    </p:cNvPr>
+          <p:cNvPr id="9" name="Image 2" descr="Automation trigger to agent run"/>
           <p:cNvPicPr>
             <a:picLocks noChangeAspect="1"/>
           </p:cNvPicPr>
@@ -12625,7 +12625,7 @@
       </p:sp>
       <p:pic>
         <p:nvPicPr>
-          <p:cNvPr id="10" name="Image 2" descr="Start manual, then expand automations">    </p:cNvPr>
+          <p:cNvPr id="10" name="Image 2" descr="Start manual, then expand automations"/>
           <p:cNvPicPr>
             <a:picLocks noChangeAspect="1"/>
           </p:cNvPicPr>
@@ -13439,1132 +13439,1132 @@
 </file>
 
 <file path=ppt/slides/slide8.xml><?xml version="1.0" encoding="utf-8"?>
-<p:sld xmlns:a="http://schemas.openxmlformats.org/drawingml/2006/main" xmlns:r="http://schemas.openxmlformats.org/officeDocument/2006/relationships" xmlns:p="http://schemas.openxmlformats.org/presentationml/2006/main">
-  <p:cSld name="Slide 8">
-    <p:bg>
-      <p:bgPr>
-        <a:solidFill>
-          <a:srgbClr val="FFFFFF"/>
-        </a:solidFill>
-      </p:bgPr>
-    </p:bg>
-    <p:spTree>
-      <p:nvGrpSpPr>
-        <p:cNvPr id="1" name=""/>
-        <p:cNvGrpSpPr/>
-        <p:nvPr/>
-      </p:nvGrpSpPr>
-      <p:grpSpPr>
-        <a:xfrm>
-          <a:off x="0" y="0"/>
-          <a:ext cx="0" cy="0"/>
-          <a:chOff x="0" y="0"/>
-          <a:chExt cx="0" cy="0"/>
-        </a:xfrm>
-      </p:grpSpPr>
-      <p:pic>
-        <p:nvPicPr>
-          <p:cNvPr id="2" name="Image 0" descr="">
-            <a:extLst>
-              <a:ext uri="{C183D7F6-B498-43B3-948B-1728B52AA6E4}">
-                <adec:decorative xmlns:adec="http://schemas.microsoft.com/office/drawing/2017/decorative" val="1"/>
-              </a:ext>
-            </a:extLst>
-          </p:cNvPr>
-          <p:cNvPicPr>
-            <a:picLocks noChangeAspect="1"/>
-          </p:cNvPicPr>
-          <p:nvPr/>
-        </p:nvPicPr>
-        <p:blipFill>
-          <a:blip r:embed="rId1"/>
-          <a:stretch>
-            <a:fillRect/>
-          </a:stretch>
-        </p:blipFill>
-        <p:spPr>
-          <a:xfrm>
-            <a:off x="6349901" y="0"/>
-            <a:ext cx="2793950" cy="1308050"/>
-          </a:xfrm>
-          <a:prstGeom prst="rect">
-            <a:avLst/>
-          </a:prstGeom>
-        </p:spPr>
-      </p:pic>
-      <p:sp>
-        <p:nvSpPr>
-          <p:cNvPr id="3" name="Text 0"/>
-          <p:cNvSpPr/>
-          <p:nvPr/>
-        </p:nvSpPr>
-        <p:spPr>
-          <a:xfrm>
-            <a:off x="7340501" y="177701"/>
-            <a:ext cx="1168301" cy="279350"/>
-          </a:xfrm>
-          <a:prstGeom prst="roundRect">
-            <a:avLst>
-              <a:gd name="adj" fmla="val 22731"/>
-            </a:avLst>
-          </a:prstGeom>
-          <a:solidFill>
-            <a:srgbClr val="1A7F37"/>
-          </a:solidFill>
-          <a:ln/>
-        </p:spPr>
-        <p:txBody>
-          <a:bodyPr wrap="square" rtlCol="0" anchor="ctr"/>
-          <a:lstStyle/>
-          <a:p>
-            <a:pPr indent="0" marL="0">
-              <a:buNone/>
-            </a:pPr>
-            <a:endParaRPr lang="en-US" dirty="0"/>
-          </a:p>
-        </p:txBody>
-      </p:sp>
-      <p:sp>
-        <p:nvSpPr>
-          <p:cNvPr id="4" name="Text 1"/>
-          <p:cNvSpPr/>
-          <p:nvPr/>
-        </p:nvSpPr>
-        <p:spPr>
-          <a:xfrm>
-            <a:off x="7461041" y="231577"/>
-            <a:ext cx="927071" cy="171450"/>
-          </a:xfrm>
-          <a:prstGeom prst="rect">
-            <a:avLst/>
-          </a:prstGeom>
-          <a:noFill/>
-          <a:ln/>
-        </p:spPr>
-        <p:txBody>
-          <a:bodyPr wrap="square" lIns="0" tIns="0" rIns="0" bIns="0" rtlCol="0" anchor="t"/>
-          <a:lstStyle/>
-          <a:p>
-            <a:pPr algn="ctr" indent="0" marL="0">
-              <a:buNone/>
-            </a:pPr>
-            <a:r>
-              <a:rPr lang="en-US" sz="1150" b="1" dirty="0">
-                <a:solidFill>
-                  <a:srgbClr val="FFFFFF"/>
-                </a:solidFill>
-                <a:latin typeface="Arial" pitchFamily="34" charset="0"/>
-                <a:ea typeface="Arial" pitchFamily="34" charset="-122"/>
-                <a:cs typeface="Arial" pitchFamily="34" charset="-120"/>
-              </a:rPr>
-              <a:t>CHAPTER 07</a:t>
-            </a:r>
-            <a:endParaRPr lang="en-US" sz="1150" dirty="0"/>
-          </a:p>
-        </p:txBody>
-      </p:sp>
-      <p:pic>
-        <p:nvPicPr>
-          <p:cNvPr id="5" name="Image 1" descr="Open this chapter on GitHub">
-            <a:hlinkClick r:id="rId3" tooltip="https://github.com/github/copilot-app-for-beginners/tree/main/07-automations"/>
-          </p:cNvPr>
-          <p:cNvPicPr>
-            <a:picLocks noChangeAspect="1"/>
-          </p:cNvPicPr>
-          <p:nvPr/>
-        </p:nvPicPr>
-        <p:blipFill>
-          <a:blip r:embed="rId2"/>
-          <a:stretch>
-            <a:fillRect/>
-          </a:stretch>
-        </p:blipFill>
-        <p:spPr>
-          <a:xfrm>
-            <a:off x="8610600" y="165050"/>
-            <a:ext cx="304800" cy="304800"/>
-          </a:xfrm>
-          <a:prstGeom prst="rect">
-            <a:avLst/>
-          </a:prstGeom>
-        </p:spPr>
-      </p:pic>
-      <p:sp>
-        <p:nvSpPr>
-          <p:cNvPr id="6" name="Text 2"/>
-          <p:cNvSpPr/>
-          <p:nvPr/>
-        </p:nvSpPr>
-        <p:spPr>
-          <a:xfrm>
-            <a:off x="507950" y="381000"/>
-            <a:ext cx="8161020" cy="190500"/>
-          </a:xfrm>
-          <a:prstGeom prst="rect">
-            <a:avLst/>
-          </a:prstGeom>
-          <a:noFill/>
-          <a:ln/>
-        </p:spPr>
-        <p:txBody>
-          <a:bodyPr wrap="square" lIns="0" tIns="0" rIns="0" bIns="0" rtlCol="0" anchor="t"/>
-          <a:lstStyle/>
-          <a:p>
-            <a:pPr algn="l" indent="0" marL="0">
-              <a:buNone/>
-            </a:pPr>
-            <a:r>
-              <a:rPr lang="en-US" sz="1250" b="1" dirty="0">
-                <a:solidFill>
-                  <a:srgbClr val="8250DF"/>
-                </a:solidFill>
-                <a:latin typeface="Arial" pitchFamily="34" charset="0"/>
-                <a:ea typeface="Arial" pitchFamily="34" charset="-122"/>
-                <a:cs typeface="Arial" pitchFamily="34" charset="-120"/>
-              </a:rPr>
-              <a:t>EXERCISE</a:t>
-            </a:r>
-            <a:endParaRPr lang="en-US" sz="1250" dirty="0"/>
-          </a:p>
-        </p:txBody>
-      </p:sp>
-      <p:sp>
-        <p:nvSpPr>
-          <p:cNvPr id="7" name="Text 3"/>
-          <p:cNvSpPr/>
-          <p:nvPr/>
-        </p:nvSpPr>
-        <p:spPr>
-          <a:xfrm>
-            <a:off x="507950" y="622250"/>
-            <a:ext cx="8161020" cy="419100"/>
-          </a:xfrm>
-          <a:prstGeom prst="rect">
-            <a:avLst/>
-          </a:prstGeom>
-          <a:noFill/>
-          <a:ln/>
-        </p:spPr>
-        <p:txBody>
-          <a:bodyPr wrap="square" lIns="0" tIns="0" rIns="0" bIns="0" rtlCol="0" anchor="t"/>
-          <a:lstStyle/>
-          <a:p>
-            <a:pPr algn="l" indent="0" marL="0">
-              <a:lnSpc>
-                <a:spcPts val="3300"/>
-              </a:lnSpc>
-              <a:spcBef>
-                <a:spcPts val="400"/>
-              </a:spcBef>
-              <a:buNone/>
-            </a:pPr>
-            <a:r>
-              <a:rPr lang="en-US" sz="2800" b="1" dirty="0">
-                <a:solidFill>
-                  <a:srgbClr val="1F2328"/>
-                </a:solidFill>
-                <a:latin typeface="Arial" pitchFamily="34" charset="0"/>
-                <a:ea typeface="Arial" pitchFamily="34" charset="-122"/>
-                <a:cs typeface="Arial" pitchFamily="34" charset="-120"/>
-              </a:rPr>
-              <a:t>Create a manual readiness report</a:t>
-            </a:r>
-            <a:endParaRPr lang="en-US" sz="2800" dirty="0"/>
-          </a:p>
-        </p:txBody>
-      </p:sp>
-      <p:sp>
-        <p:nvSpPr>
-          <p:cNvPr id="8" name="Text 4"/>
-          <p:cNvSpPr/>
-          <p:nvPr/>
-        </p:nvSpPr>
-        <p:spPr>
-          <a:xfrm>
-            <a:off x="507950" y="1104751"/>
-            <a:ext cx="8161020" cy="254050"/>
-          </a:xfrm>
-          <a:prstGeom prst="rect">
-            <a:avLst/>
-          </a:prstGeom>
-          <a:noFill/>
-          <a:ln/>
-        </p:spPr>
-        <p:txBody>
-          <a:bodyPr wrap="square" lIns="0" tIns="0" rIns="0" bIns="0" rtlCol="0" anchor="t"/>
-          <a:lstStyle/>
-          <a:p>
-            <a:pPr algn="l" indent="0" marL="0">
-              <a:lnSpc>
-                <a:spcPts val="2000"/>
-              </a:lnSpc>
-              <a:spcBef>
-                <a:spcPts val="500"/>
-              </a:spcBef>
-              <a:buNone/>
-            </a:pPr>
-            <a:r>
-              <a:rPr lang="en-US" sz="1650" dirty="0">
-                <a:solidFill>
-                  <a:srgbClr val="59636E"/>
-                </a:solidFill>
-                <a:latin typeface="Arial" pitchFamily="34" charset="0"/>
-                <a:ea typeface="Arial" pitchFamily="34" charset="-122"/>
-                <a:cs typeface="Arial" pitchFamily="34" charset="-120"/>
-              </a:rPr>
-              <a:t>Automations &gt; </a:t>
-            </a:r>
-            <a:pPr algn="l" indent="0" marL="0">
-              <a:lnSpc>
-                <a:spcPts val="2000"/>
-              </a:lnSpc>
-              <a:spcBef>
-                <a:spcPts val="500"/>
-              </a:spcBef>
-              <a:buNone/>
-            </a:pPr>
-            <a:r>
-              <a:rPr lang="en-US" sz="1650" b="1" dirty="0">
-                <a:solidFill>
-                  <a:srgbClr val="59636E"/>
-                </a:solidFill>
-                <a:latin typeface="Arial" pitchFamily="34" charset="0"/>
-                <a:ea typeface="Arial" pitchFamily="34" charset="-122"/>
-                <a:cs typeface="Arial" pitchFamily="34" charset="-120"/>
-              </a:rPr>
-              <a:t>New automation</a:t>
-            </a:r>
-            <a:pPr algn="l" indent="0" marL="0">
-              <a:lnSpc>
-                <a:spcPts val="2000"/>
-              </a:lnSpc>
-              <a:spcBef>
-                <a:spcPts val="500"/>
-              </a:spcBef>
-              <a:buNone/>
-            </a:pPr>
-            <a:r>
-              <a:rPr lang="en-US" sz="1650" dirty="0">
-                <a:solidFill>
-                  <a:srgbClr val="59636E"/>
-                </a:solidFill>
-                <a:latin typeface="Arial" pitchFamily="34" charset="0"/>
-                <a:ea typeface="Arial" pitchFamily="34" charset="-122"/>
-                <a:cs typeface="Arial" pitchFamily="34" charset="-120"/>
-              </a:rPr>
-              <a:t>. Set </a:t>
-            </a:r>
-            <a:pPr algn="l" indent="0" marL="0">
-              <a:lnSpc>
-                <a:spcPts val="2000"/>
-              </a:lnSpc>
-              <a:spcBef>
-                <a:spcPts val="500"/>
-              </a:spcBef>
-              <a:buNone/>
-            </a:pPr>
-            <a:r>
-              <a:rPr lang="en-US" sz="1650" b="1" dirty="0">
-                <a:solidFill>
-                  <a:srgbClr val="59636E"/>
-                </a:solidFill>
-                <a:latin typeface="Arial" pitchFamily="34" charset="0"/>
-                <a:ea typeface="Arial" pitchFamily="34" charset="-122"/>
-                <a:cs typeface="Arial" pitchFamily="34" charset="-120"/>
-              </a:rPr>
-              <a:t>Trigger</a:t>
-            </a:r>
-            <a:pPr algn="l" indent="0" marL="0">
-              <a:lnSpc>
-                <a:spcPts val="2000"/>
-              </a:lnSpc>
-              <a:spcBef>
-                <a:spcPts val="500"/>
-              </a:spcBef>
-              <a:buNone/>
-            </a:pPr>
-            <a:r>
-              <a:rPr lang="en-US" sz="1650" dirty="0">
-                <a:solidFill>
-                  <a:srgbClr val="59636E"/>
-                </a:solidFill>
-                <a:latin typeface="Arial" pitchFamily="34" charset="0"/>
-                <a:ea typeface="Arial" pitchFamily="34" charset="-122"/>
-                <a:cs typeface="Arial" pitchFamily="34" charset="-120"/>
-              </a:rPr>
-              <a:t> to </a:t>
-            </a:r>
-            <a:pPr algn="l" indent="0" marL="0">
-              <a:lnSpc>
-                <a:spcPts val="2000"/>
-              </a:lnSpc>
-              <a:spcBef>
-                <a:spcPts val="500"/>
-              </a:spcBef>
-              <a:buNone/>
-            </a:pPr>
-            <a:r>
-              <a:rPr lang="en-US" sz="1650" b="1" dirty="0">
-                <a:solidFill>
-                  <a:srgbClr val="59636E"/>
-                </a:solidFill>
-                <a:latin typeface="Arial" pitchFamily="34" charset="0"/>
-                <a:ea typeface="Arial" pitchFamily="34" charset="-122"/>
-                <a:cs typeface="Arial" pitchFamily="34" charset="-120"/>
-              </a:rPr>
-              <a:t>Manual</a:t>
-            </a:r>
-            <a:pPr algn="l" indent="0" marL="0">
-              <a:lnSpc>
-                <a:spcPts val="2000"/>
-              </a:lnSpc>
-              <a:spcBef>
-                <a:spcPts val="500"/>
-              </a:spcBef>
-              <a:buNone/>
-            </a:pPr>
-            <a:r>
-              <a:rPr lang="en-US" sz="1650" dirty="0">
-                <a:solidFill>
-                  <a:srgbClr val="59636E"/>
-                </a:solidFill>
-                <a:latin typeface="Arial" pitchFamily="34" charset="0"/>
-                <a:ea typeface="Arial" pitchFamily="34" charset="-122"/>
-                <a:cs typeface="Arial" pitchFamily="34" charset="-120"/>
-              </a:rPr>
-              <a:t>.</a:t>
-            </a:r>
-            <a:endParaRPr lang="en-US" sz="1650" dirty="0"/>
-          </a:p>
-        </p:txBody>
-      </p:sp>
-      <p:sp>
-        <p:nvSpPr>
-          <p:cNvPr id="9" name="Text 5"/>
-          <p:cNvSpPr/>
-          <p:nvPr/>
-        </p:nvSpPr>
-        <p:spPr>
-          <a:xfrm>
-            <a:off x="551706" y="1577876"/>
-            <a:ext cx="4230291" cy="2990850"/>
-          </a:xfrm>
-          <a:prstGeom prst="roundRect">
-            <a:avLst>
-              <a:gd name="adj" fmla="val 2548"/>
-            </a:avLst>
-          </a:prstGeom>
-          <a:solidFill>
-            <a:srgbClr val="FFFFFF"/>
-          </a:solidFill>
-          <a:ln w="9525">
-            <a:solidFill>
-              <a:srgbClr val="D1D9E0"/>
-            </a:solidFill>
-          </a:ln>
-          <a:effectLst>
-            <a:outerShdw sx="100000" sy="100000" kx="0" ky="0" algn="bl" rotWithShape="0" blurRad="38100" dist="9525" dir="5400000">
-              <a:srgbClr val="1f2328">
-                <a:alpha val="12000"/>
-              </a:srgbClr>
-            </a:outerShdw>
-          </a:effectLst>
-        </p:spPr>
-        <p:txBody>
-          <a:bodyPr wrap="square" rtlCol="0" anchor="ctr"/>
-          <a:lstStyle/>
-          <a:p>
-            <a:pPr indent="0" marL="0">
-              <a:buNone/>
-            </a:pPr>
-            <a:endParaRPr lang="en-US" dirty="0"/>
-          </a:p>
-        </p:txBody>
-      </p:sp>
-      <p:pic>
-        <p:nvPicPr>
-          <p:cNvPr id="10" name="Image 2" descr="New automation form with the Manual trigger, Run in the cloud off, the course project, Current checkout, and the Create and run option open">    </p:cNvPr>
-          <p:cNvPicPr>
-            <a:picLocks noChangeAspect="1"/>
-          </p:cNvPicPr>
-          <p:nvPr/>
-        </p:nvPicPr>
-        <p:blipFill>
-          <a:blip r:embed="rId4"/>
-          <a:stretch>
-            <a:fillRect/>
-          </a:stretch>
-        </p:blipFill>
-        <p:spPr>
-          <a:xfrm>
-            <a:off x="599331" y="1625501"/>
-            <a:ext cx="4135041" cy="2895600"/>
-          </a:xfrm>
-          <a:prstGeom prst="rect">
-            <a:avLst/>
-          </a:prstGeom>
-        </p:spPr>
-      </p:pic>
-      <p:sp>
-        <p:nvSpPr>
-          <p:cNvPr id="11" name="Text 6"/>
-          <p:cNvSpPr/>
-          <p:nvPr/>
-        </p:nvSpPr>
-        <p:spPr>
-          <a:xfrm>
-            <a:off x="5079802" y="1811685"/>
-            <a:ext cx="279350" cy="279350"/>
-          </a:xfrm>
-          <a:prstGeom prst="roundRect">
-            <a:avLst>
-              <a:gd name="adj" fmla="val 327331"/>
-            </a:avLst>
-          </a:prstGeom>
-          <a:solidFill>
-            <a:srgbClr val="8250DF"/>
-          </a:solidFill>
-          <a:ln/>
-        </p:spPr>
-        <p:txBody>
-          <a:bodyPr wrap="square" rtlCol="0" anchor="ctr"/>
-          <a:lstStyle/>
-          <a:p>
-            <a:pPr indent="0" marL="0">
-              <a:buNone/>
-            </a:pPr>
-            <a:endParaRPr lang="en-US" dirty="0"/>
-          </a:p>
-        </p:txBody>
-      </p:sp>
-      <p:sp>
-        <p:nvSpPr>
-          <p:cNvPr id="12" name="Text 7"/>
-          <p:cNvSpPr/>
-          <p:nvPr/>
-        </p:nvSpPr>
-        <p:spPr>
-          <a:xfrm>
-            <a:off x="5174467" y="1856036"/>
-            <a:ext cx="90020" cy="190500"/>
-          </a:xfrm>
-          <a:prstGeom prst="rect">
-            <a:avLst/>
-          </a:prstGeom>
-          <a:noFill/>
-          <a:ln/>
-        </p:spPr>
-        <p:txBody>
-          <a:bodyPr wrap="square" lIns="0" tIns="0" rIns="0" bIns="0" rtlCol="0" anchor="t"/>
-          <a:lstStyle/>
-          <a:p>
-            <a:pPr algn="ctr" indent="0" marL="0">
-              <a:buNone/>
-            </a:pPr>
-            <a:r>
-              <a:rPr lang="en-US" sz="1250" b="1" dirty="0">
-                <a:solidFill>
-                  <a:srgbClr val="FFFFFF"/>
-                </a:solidFill>
-                <a:latin typeface="Arial" pitchFamily="34" charset="0"/>
-                <a:ea typeface="Arial" pitchFamily="34" charset="-122"/>
-                <a:cs typeface="Arial" pitchFamily="34" charset="-120"/>
-              </a:rPr>
-              <a:t>1</a:t>
-            </a:r>
-            <a:endParaRPr lang="en-US" sz="1250" dirty="0"/>
-          </a:p>
-        </p:txBody>
-      </p:sp>
-      <p:sp>
-        <p:nvSpPr>
-          <p:cNvPr id="13" name="Text 8"/>
-          <p:cNvSpPr/>
-          <p:nvPr/>
-        </p:nvSpPr>
-        <p:spPr>
-          <a:xfrm>
-            <a:off x="5511552" y="1811685"/>
-            <a:ext cx="2728689" cy="222200"/>
-          </a:xfrm>
-          <a:prstGeom prst="rect">
-            <a:avLst/>
-          </a:prstGeom>
-          <a:noFill/>
-          <a:ln/>
-        </p:spPr>
-        <p:txBody>
-          <a:bodyPr wrap="square" lIns="0" tIns="0" rIns="0" bIns="0" rtlCol="0" anchor="t"/>
-          <a:lstStyle/>
-          <a:p>
-            <a:pPr algn="l" indent="0" marL="0">
-              <a:lnSpc>
-                <a:spcPts val="1750"/>
-              </a:lnSpc>
-              <a:buNone/>
-            </a:pPr>
-            <a:r>
-              <a:rPr lang="en-US" sz="1550" b="1" dirty="0">
-                <a:solidFill>
-                  <a:srgbClr val="1F2328"/>
-                </a:solidFill>
-                <a:latin typeface="Arial" pitchFamily="34" charset="0"/>
-                <a:ea typeface="Arial" pitchFamily="34" charset="-122"/>
-                <a:cs typeface="Arial" pitchFamily="34" charset="-120"/>
-              </a:rPr>
-              <a:t>Name it</a:t>
-            </a:r>
-            <a:endParaRPr lang="en-US" sz="1550" dirty="0"/>
-          </a:p>
-        </p:txBody>
-      </p:sp>
-      <p:sp>
-        <p:nvSpPr>
-          <p:cNvPr id="14" name="Text 9"/>
-          <p:cNvSpPr/>
-          <p:nvPr/>
-        </p:nvSpPr>
-        <p:spPr>
-          <a:xfrm>
-            <a:off x="5511552" y="2059186"/>
-            <a:ext cx="2728689" cy="207615"/>
-          </a:xfrm>
-          <a:prstGeom prst="rect">
-            <a:avLst/>
-          </a:prstGeom>
-          <a:noFill/>
-          <a:ln/>
-        </p:spPr>
-        <p:txBody>
-          <a:bodyPr wrap="square" lIns="0" tIns="0" rIns="0" bIns="0" rtlCol="0" anchor="t"/>
-          <a:lstStyle/>
-          <a:p>
-            <a:pPr algn="l" indent="0" marL="0">
-              <a:lnSpc>
-                <a:spcPts val="1560"/>
-              </a:lnSpc>
-              <a:buNone/>
-            </a:pPr>
-            <a:r>
-              <a:rPr lang="en-US" sz="1350" b="1" dirty="0">
-                <a:solidFill>
-                  <a:srgbClr val="0550AE"/>
-                </a:solidFill>
-                <a:latin typeface="Courier New" pitchFamily="34" charset="0"/>
-                <a:ea typeface="Courier New" pitchFamily="34" charset="-122"/>
-                <a:cs typeface="Courier New" pitchFamily="34" charset="-120"/>
-              </a:rPr>
-              <a:t>PR review readiness report</a:t>
-            </a:r>
-            <a:endParaRPr lang="en-US" sz="1350" dirty="0"/>
-          </a:p>
-        </p:txBody>
-      </p:sp>
-      <p:sp>
-        <p:nvSpPr>
-          <p:cNvPr id="15" name="Text 10"/>
-          <p:cNvSpPr/>
-          <p:nvPr/>
-        </p:nvSpPr>
-        <p:spPr>
-          <a:xfrm>
-            <a:off x="5079802" y="2444502"/>
-            <a:ext cx="279350" cy="279350"/>
-          </a:xfrm>
-          <a:prstGeom prst="roundRect">
-            <a:avLst>
-              <a:gd name="adj" fmla="val 327331"/>
-            </a:avLst>
-          </a:prstGeom>
-          <a:solidFill>
-            <a:srgbClr val="8250DF"/>
-          </a:solidFill>
-          <a:ln/>
-        </p:spPr>
-        <p:txBody>
-          <a:bodyPr wrap="square" rtlCol="0" anchor="ctr"/>
-          <a:lstStyle/>
-          <a:p>
-            <a:pPr indent="0" marL="0">
-              <a:buNone/>
-            </a:pPr>
-            <a:endParaRPr lang="en-US" dirty="0"/>
-          </a:p>
-        </p:txBody>
-      </p:sp>
-      <p:sp>
-        <p:nvSpPr>
-          <p:cNvPr id="16" name="Text 11"/>
-          <p:cNvSpPr/>
-          <p:nvPr/>
-        </p:nvSpPr>
-        <p:spPr>
-          <a:xfrm>
-            <a:off x="5174467" y="2488853"/>
-            <a:ext cx="90020" cy="190500"/>
-          </a:xfrm>
-          <a:prstGeom prst="rect">
-            <a:avLst/>
-          </a:prstGeom>
-          <a:noFill/>
-          <a:ln/>
-        </p:spPr>
-        <p:txBody>
-          <a:bodyPr wrap="square" lIns="0" tIns="0" rIns="0" bIns="0" rtlCol="0" anchor="t"/>
-          <a:lstStyle/>
-          <a:p>
-            <a:pPr algn="ctr" indent="0" marL="0">
-              <a:buNone/>
-            </a:pPr>
-            <a:r>
-              <a:rPr lang="en-US" sz="1250" b="1" dirty="0">
-                <a:solidFill>
-                  <a:srgbClr val="FFFFFF"/>
-                </a:solidFill>
-                <a:latin typeface="Arial" pitchFamily="34" charset="0"/>
-                <a:ea typeface="Arial" pitchFamily="34" charset="-122"/>
-                <a:cs typeface="Arial" pitchFamily="34" charset="-120"/>
-              </a:rPr>
-              <a:t>2</a:t>
-            </a:r>
-            <a:endParaRPr lang="en-US" sz="1250" dirty="0"/>
-          </a:p>
-        </p:txBody>
-      </p:sp>
-      <p:sp>
-        <p:nvSpPr>
-          <p:cNvPr id="17" name="Text 12"/>
-          <p:cNvSpPr/>
-          <p:nvPr/>
-        </p:nvSpPr>
-        <p:spPr>
-          <a:xfrm>
-            <a:off x="5511552" y="2444502"/>
-            <a:ext cx="3186836" cy="222200"/>
-          </a:xfrm>
-          <a:prstGeom prst="rect">
-            <a:avLst/>
-          </a:prstGeom>
-          <a:noFill/>
-          <a:ln/>
-        </p:spPr>
-        <p:txBody>
-          <a:bodyPr wrap="square" lIns="0" tIns="0" rIns="0" bIns="0" rtlCol="0" anchor="t"/>
-          <a:lstStyle/>
-          <a:p>
-            <a:pPr algn="l" indent="0" marL="0">
-              <a:lnSpc>
-                <a:spcPts val="1750"/>
-              </a:lnSpc>
-              <a:buNone/>
-            </a:pPr>
-            <a:r>
-              <a:rPr lang="en-US" sz="1550" b="1" dirty="0">
-                <a:solidFill>
-                  <a:srgbClr val="1F2328"/>
-                </a:solidFill>
-                <a:latin typeface="Arial" pitchFamily="34" charset="0"/>
-                <a:ea typeface="Arial" pitchFamily="34" charset="-122"/>
-                <a:cs typeface="Arial" pitchFamily="34" charset="-120"/>
-              </a:rPr>
-              <a:t>Paste the read-only prompt</a:t>
-            </a:r>
-            <a:endParaRPr lang="en-US" sz="1550" dirty="0"/>
-          </a:p>
-        </p:txBody>
-      </p:sp>
-      <p:sp>
-        <p:nvSpPr>
-          <p:cNvPr id="18" name="Text 13"/>
-          <p:cNvSpPr/>
-          <p:nvPr/>
-        </p:nvSpPr>
-        <p:spPr>
-          <a:xfrm>
-            <a:off x="5511552" y="2692003"/>
-            <a:ext cx="3186836" cy="396180"/>
-          </a:xfrm>
-          <a:prstGeom prst="rect">
-            <a:avLst/>
-          </a:prstGeom>
-          <a:noFill/>
-          <a:ln/>
-        </p:spPr>
-        <p:txBody>
-          <a:bodyPr wrap="square" lIns="0" tIns="0" rIns="0" bIns="0" rtlCol="0" anchor="t"/>
-          <a:lstStyle/>
-          <a:p>
-            <a:pPr algn="l" indent="0" marL="0">
-              <a:lnSpc>
-                <a:spcPts val="1560"/>
-              </a:lnSpc>
-              <a:buNone/>
-            </a:pPr>
-            <a:r>
-              <a:rPr lang="en-US" sz="1350" dirty="0">
-                <a:solidFill>
-                  <a:srgbClr val="59636E"/>
-                </a:solidFill>
-                <a:latin typeface="Arial" pitchFamily="34" charset="0"/>
-                <a:ea typeface="Arial" pitchFamily="34" charset="-122"/>
-                <a:cs typeface="Arial" pitchFamily="34" charset="-120"/>
-              </a:rPr>
-              <a:t>CI, comments, and the next action per PR.</a:t>
-            </a:r>
-            <a:endParaRPr lang="en-US" sz="1350" dirty="0"/>
-          </a:p>
-        </p:txBody>
-      </p:sp>
-      <p:sp>
-        <p:nvSpPr>
-          <p:cNvPr id="19" name="Text 14"/>
-          <p:cNvSpPr/>
-          <p:nvPr/>
-        </p:nvSpPr>
-        <p:spPr>
-          <a:xfrm>
-            <a:off x="5079802" y="3265884"/>
-            <a:ext cx="279350" cy="279350"/>
-          </a:xfrm>
-          <a:prstGeom prst="roundRect">
-            <a:avLst>
-              <a:gd name="adj" fmla="val 327331"/>
-            </a:avLst>
-          </a:prstGeom>
-          <a:solidFill>
-            <a:srgbClr val="8250DF"/>
-          </a:solidFill>
-          <a:ln/>
-        </p:spPr>
-        <p:txBody>
-          <a:bodyPr wrap="square" rtlCol="0" anchor="ctr"/>
-          <a:lstStyle/>
-          <a:p>
-            <a:pPr indent="0" marL="0">
-              <a:buNone/>
-            </a:pPr>
-            <a:endParaRPr lang="en-US" dirty="0"/>
-          </a:p>
-        </p:txBody>
-      </p:sp>
-      <p:sp>
-        <p:nvSpPr>
-          <p:cNvPr id="20" name="Text 15"/>
-          <p:cNvSpPr/>
-          <p:nvPr/>
-        </p:nvSpPr>
-        <p:spPr>
-          <a:xfrm>
-            <a:off x="5174467" y="3310235"/>
-            <a:ext cx="90020" cy="190500"/>
-          </a:xfrm>
-          <a:prstGeom prst="rect">
-            <a:avLst/>
-          </a:prstGeom>
-          <a:noFill/>
-          <a:ln/>
-        </p:spPr>
-        <p:txBody>
-          <a:bodyPr wrap="square" lIns="0" tIns="0" rIns="0" bIns="0" rtlCol="0" anchor="t"/>
-          <a:lstStyle/>
-          <a:p>
-            <a:pPr algn="ctr" indent="0" marL="0">
-              <a:buNone/>
-            </a:pPr>
-            <a:r>
-              <a:rPr lang="en-US" sz="1250" b="1" dirty="0">
-                <a:solidFill>
-                  <a:srgbClr val="FFFFFF"/>
-                </a:solidFill>
-                <a:latin typeface="Arial" pitchFamily="34" charset="0"/>
-                <a:ea typeface="Arial" pitchFamily="34" charset="-122"/>
-                <a:cs typeface="Arial" pitchFamily="34" charset="-120"/>
-              </a:rPr>
-              <a:t>3</a:t>
-            </a:r>
-            <a:endParaRPr lang="en-US" sz="1250" dirty="0"/>
-          </a:p>
-        </p:txBody>
-      </p:sp>
-      <p:sp>
-        <p:nvSpPr>
-          <p:cNvPr id="21" name="Text 16"/>
-          <p:cNvSpPr/>
-          <p:nvPr/>
-        </p:nvSpPr>
-        <p:spPr>
-          <a:xfrm>
-            <a:off x="5511552" y="3265884"/>
-            <a:ext cx="2654001" cy="222200"/>
-          </a:xfrm>
-          <a:prstGeom prst="rect">
-            <a:avLst/>
-          </a:prstGeom>
-          <a:noFill/>
-          <a:ln/>
-        </p:spPr>
-        <p:txBody>
-          <a:bodyPr wrap="square" lIns="0" tIns="0" rIns="0" bIns="0" rtlCol="0" anchor="t"/>
-          <a:lstStyle/>
-          <a:p>
-            <a:pPr algn="l" indent="0" marL="0">
-              <a:lnSpc>
-                <a:spcPts val="1750"/>
-              </a:lnSpc>
-              <a:buNone/>
-            </a:pPr>
-            <a:r>
-              <a:rPr lang="en-US" sz="1550" b="1" dirty="0">
-                <a:solidFill>
-                  <a:srgbClr val="1F2328"/>
-                </a:solidFill>
-                <a:latin typeface="Arial" pitchFamily="34" charset="0"/>
-                <a:ea typeface="Arial" pitchFamily="34" charset="-122"/>
-                <a:cs typeface="Arial" pitchFamily="34" charset="-120"/>
-              </a:rPr>
-              <a:t>Cloud off, Current checkout</a:t>
-            </a:r>
-            <a:endParaRPr lang="en-US" sz="1550" dirty="0"/>
-          </a:p>
-        </p:txBody>
-      </p:sp>
-      <p:sp>
-        <p:nvSpPr>
-          <p:cNvPr id="22" name="Text 17"/>
-          <p:cNvSpPr/>
-          <p:nvPr/>
-        </p:nvSpPr>
-        <p:spPr>
-          <a:xfrm>
-            <a:off x="5511552" y="3513386"/>
-            <a:ext cx="2654001" cy="198090"/>
-          </a:xfrm>
-          <a:prstGeom prst="rect">
-            <a:avLst/>
-          </a:prstGeom>
-          <a:noFill/>
-          <a:ln/>
-        </p:spPr>
-        <p:txBody>
-          <a:bodyPr wrap="square" lIns="0" tIns="0" rIns="0" bIns="0" rtlCol="0" anchor="t"/>
-          <a:lstStyle/>
-          <a:p>
-            <a:pPr algn="l" indent="0" marL="0">
-              <a:lnSpc>
-                <a:spcPts val="1560"/>
-              </a:lnSpc>
-              <a:buNone/>
-            </a:pPr>
-            <a:r>
-              <a:rPr lang="en-US" sz="1350" dirty="0">
-                <a:solidFill>
-                  <a:srgbClr val="59636E"/>
-                </a:solidFill>
-                <a:latin typeface="Arial" pitchFamily="34" charset="0"/>
-                <a:ea typeface="Arial" pitchFamily="34" charset="-122"/>
-                <a:cs typeface="Arial" pitchFamily="34" charset="-120"/>
-              </a:rPr>
-              <a:t>Runs locally. It only reads data.</a:t>
-            </a:r>
-            <a:endParaRPr lang="en-US" sz="1350" dirty="0"/>
-          </a:p>
-        </p:txBody>
-      </p:sp>
-      <p:sp>
-        <p:nvSpPr>
-          <p:cNvPr id="23" name="Text 18"/>
-          <p:cNvSpPr/>
-          <p:nvPr/>
-        </p:nvSpPr>
-        <p:spPr>
-          <a:xfrm>
-            <a:off x="5079802" y="3889177"/>
-            <a:ext cx="279350" cy="279350"/>
-          </a:xfrm>
-          <a:prstGeom prst="roundRect">
-            <a:avLst>
-              <a:gd name="adj" fmla="val 327331"/>
-            </a:avLst>
-          </a:prstGeom>
-          <a:solidFill>
-            <a:srgbClr val="8250DF"/>
-          </a:solidFill>
-          <a:ln/>
-        </p:spPr>
-        <p:txBody>
-          <a:bodyPr wrap="square" rtlCol="0" anchor="ctr"/>
-          <a:lstStyle/>
-          <a:p>
-            <a:pPr indent="0" marL="0">
-              <a:buNone/>
-            </a:pPr>
-            <a:endParaRPr lang="en-US" dirty="0"/>
-          </a:p>
-        </p:txBody>
-      </p:sp>
-      <p:sp>
-        <p:nvSpPr>
-          <p:cNvPr id="24" name="Text 19"/>
-          <p:cNvSpPr/>
-          <p:nvPr/>
-        </p:nvSpPr>
-        <p:spPr>
-          <a:xfrm>
-            <a:off x="5174467" y="3933527"/>
-            <a:ext cx="90020" cy="190500"/>
-          </a:xfrm>
-          <a:prstGeom prst="rect">
-            <a:avLst/>
-          </a:prstGeom>
-          <a:noFill/>
-          <a:ln/>
-        </p:spPr>
-        <p:txBody>
-          <a:bodyPr wrap="square" lIns="0" tIns="0" rIns="0" bIns="0" rtlCol="0" anchor="t"/>
-          <a:lstStyle/>
-          <a:p>
-            <a:pPr algn="ctr" indent="0" marL="0">
-              <a:buNone/>
-            </a:pPr>
-            <a:r>
-              <a:rPr lang="en-US" sz="1250" b="1" dirty="0">
-                <a:solidFill>
-                  <a:srgbClr val="FFFFFF"/>
-                </a:solidFill>
-                <a:latin typeface="Arial" pitchFamily="34" charset="0"/>
-                <a:ea typeface="Arial" pitchFamily="34" charset="-122"/>
-                <a:cs typeface="Arial" pitchFamily="34" charset="-120"/>
-              </a:rPr>
-              <a:t>4</a:t>
-            </a:r>
-            <a:endParaRPr lang="en-US" sz="1250" dirty="0"/>
-          </a:p>
-        </p:txBody>
-      </p:sp>
-      <p:sp>
-        <p:nvSpPr>
-          <p:cNvPr id="25" name="Text 20"/>
-          <p:cNvSpPr/>
-          <p:nvPr/>
-        </p:nvSpPr>
-        <p:spPr>
-          <a:xfrm>
-            <a:off x="5511552" y="3889177"/>
-            <a:ext cx="2400943" cy="222200"/>
-          </a:xfrm>
-          <a:prstGeom prst="rect">
-            <a:avLst/>
-          </a:prstGeom>
-          <a:noFill/>
-          <a:ln/>
-        </p:spPr>
-        <p:txBody>
-          <a:bodyPr wrap="square" lIns="0" tIns="0" rIns="0" bIns="0" rtlCol="0" anchor="t"/>
-          <a:lstStyle/>
-          <a:p>
-            <a:pPr algn="l" indent="0" marL="0">
-              <a:lnSpc>
-                <a:spcPts val="1750"/>
-              </a:lnSpc>
-              <a:buNone/>
-            </a:pPr>
-            <a:r>
-              <a:rPr lang="en-US" sz="1550" b="1" dirty="0">
-                <a:solidFill>
-                  <a:srgbClr val="1F2328"/>
-                </a:solidFill>
-                <a:latin typeface="Arial" pitchFamily="34" charset="0"/>
-                <a:ea typeface="Arial" pitchFamily="34" charset="-122"/>
-                <a:cs typeface="Arial" pitchFamily="34" charset="-120"/>
-              </a:rPr>
-              <a:t>Create and run</a:t>
-            </a:r>
-            <a:endParaRPr lang="en-US" sz="1550" dirty="0"/>
-          </a:p>
-        </p:txBody>
-      </p:sp>
-      <p:sp>
-        <p:nvSpPr>
-          <p:cNvPr id="26" name="Text 21"/>
-          <p:cNvSpPr/>
-          <p:nvPr/>
-        </p:nvSpPr>
-        <p:spPr>
-          <a:xfrm>
-            <a:off x="5511552" y="4136678"/>
-            <a:ext cx="2400943" cy="198090"/>
-          </a:xfrm>
-          <a:prstGeom prst="rect">
-            <a:avLst/>
-          </a:prstGeom>
-          <a:noFill/>
-          <a:ln/>
-        </p:spPr>
-        <p:txBody>
-          <a:bodyPr wrap="square" lIns="0" tIns="0" rIns="0" bIns="0" rtlCol="0" anchor="t"/>
-          <a:lstStyle/>
-          <a:p>
-            <a:pPr algn="l" indent="0" marL="0">
-              <a:lnSpc>
-                <a:spcPts val="1560"/>
-              </a:lnSpc>
-              <a:buNone/>
-            </a:pPr>
-            <a:r>
-              <a:rPr lang="en-US" sz="1350" dirty="0">
-                <a:solidFill>
-                  <a:srgbClr val="59636E"/>
-                </a:solidFill>
-                <a:latin typeface="Arial" pitchFamily="34" charset="0"/>
-                <a:ea typeface="Arial" pitchFamily="34" charset="-122"/>
-                <a:cs typeface="Arial" pitchFamily="34" charset="-120"/>
-              </a:rPr>
-              <a:t>From the arrow next to </a:t>
-            </a:r>
-            <a:pPr algn="l" indent="0" marL="0">
-              <a:lnSpc>
-                <a:spcPts val="1560"/>
-              </a:lnSpc>
-              <a:buNone/>
-            </a:pPr>
-            <a:r>
-              <a:rPr lang="en-US" sz="1350" b="1" dirty="0">
-                <a:solidFill>
-                  <a:srgbClr val="59636E"/>
-                </a:solidFill>
-                <a:latin typeface="Arial" pitchFamily="34" charset="0"/>
-                <a:ea typeface="Arial" pitchFamily="34" charset="-122"/>
-                <a:cs typeface="Arial" pitchFamily="34" charset="-120"/>
-              </a:rPr>
-              <a:t>Create</a:t>
-            </a:r>
-            <a:pPr algn="l" indent="0" marL="0">
-              <a:lnSpc>
-                <a:spcPts val="1560"/>
-              </a:lnSpc>
-              <a:buNone/>
-            </a:pPr>
-            <a:r>
-              <a:rPr lang="en-US" sz="1350" dirty="0">
-                <a:solidFill>
-                  <a:srgbClr val="59636E"/>
-                </a:solidFill>
-                <a:latin typeface="Arial" pitchFamily="34" charset="0"/>
-                <a:ea typeface="Arial" pitchFamily="34" charset="-122"/>
-                <a:cs typeface="Arial" pitchFamily="34" charset="-120"/>
-              </a:rPr>
-              <a:t>.</a:t>
-            </a:r>
-            <a:endParaRPr lang="en-US" sz="1350" dirty="0"/>
-          </a:p>
-        </p:txBody>
-      </p:sp>
-    </p:spTree>
-  </p:cSld>
-  <p:clrMapOvr>
-    <a:masterClrMapping/>
-  </p:clrMapOvr>
-</p:sld>
+<ns0:sld xmlns:ns0="http://schemas.openxmlformats.org/presentationml/2006/main" xmlns:ns1="http://schemas.openxmlformats.org/drawingml/2006/main" xmlns:ns2="http://schemas.microsoft.com/office/drawing/2017/decorative" xmlns:ns3="http://schemas.openxmlformats.org/officeDocument/2006/relationships">
+  <ns0:cSld name="Slide 8">
+    <ns0:bg>
+      <ns0:bgPr>
+        <ns1:solidFill>
+          <ns1:srgbClr val="FFFFFF"/>
+        </ns1:solidFill>
+      </ns0:bgPr>
+    </ns0:bg>
+    <ns0:spTree>
+      <ns0:nvGrpSpPr>
+        <ns0:cNvPr id="1" name=""/>
+        <ns0:cNvGrpSpPr/>
+        <ns0:nvPr/>
+      </ns0:nvGrpSpPr>
+      <ns0:grpSpPr>
+        <ns1:xfrm>
+          <ns1:off x="0" y="0"/>
+          <ns1:ext cx="0" cy="0"/>
+          <ns1:chOff x="0" y="0"/>
+          <ns1:chExt cx="0" cy="0"/>
+        </ns1:xfrm>
+      </ns0:grpSpPr>
+      <ns0:pic>
+        <ns0:nvPicPr>
+          <ns0:cNvPr id="2" name="Image 0" descr="">
+            <ns1:extLst>
+              <ns1:ext uri="{C183D7F6-B498-43B3-948B-1728B52AA6E4}">
+                <ns2:decorative val="1"/>
+              </ns1:ext>
+            </ns1:extLst>
+          </ns0:cNvPr>
+          <ns0:cNvPicPr>
+            <ns1:picLocks noChangeAspect="1"/>
+          </ns0:cNvPicPr>
+          <ns0:nvPr/>
+        </ns0:nvPicPr>
+        <ns0:blipFill>
+          <ns1:blip ns3:embed="rId1"/>
+          <ns1:stretch>
+            <ns1:fillRect/>
+          </ns1:stretch>
+        </ns0:blipFill>
+        <ns0:spPr>
+          <ns1:xfrm>
+            <ns1:off x="6349901" y="0"/>
+            <ns1:ext cx="2793950" cy="1308050"/>
+          </ns1:xfrm>
+          <ns1:prstGeom prst="rect">
+            <ns1:avLst/>
+          </ns1:prstGeom>
+        </ns0:spPr>
+      </ns0:pic>
+      <ns0:sp>
+        <ns0:nvSpPr>
+          <ns0:cNvPr id="3" name="Text 0"/>
+          <ns0:cNvSpPr/>
+          <ns0:nvPr/>
+        </ns0:nvSpPr>
+        <ns0:spPr>
+          <ns1:xfrm>
+            <ns1:off x="7340501" y="177701"/>
+            <ns1:ext cx="1168301" cy="279350"/>
+          </ns1:xfrm>
+          <ns1:prstGeom prst="roundRect">
+            <ns1:avLst>
+              <ns1:gd name="adj" fmla="val 22731"/>
+            </ns1:avLst>
+          </ns1:prstGeom>
+          <ns1:solidFill>
+            <ns1:srgbClr val="1A7F37"/>
+          </ns1:solidFill>
+          <ns1:ln/>
+        </ns0:spPr>
+        <ns0:txBody>
+          <ns1:bodyPr wrap="square" rtlCol="0" anchor="ctr"/>
+          <ns1:lstStyle/>
+          <ns1:p>
+            <ns1:pPr indent="0" marL="0">
+              <ns1:buNone/>
+            </ns1:pPr>
+            <ns1:endParaRPr lang="en-US" dirty="0"/>
+          </ns1:p>
+        </ns0:txBody>
+      </ns0:sp>
+      <ns0:sp>
+        <ns0:nvSpPr>
+          <ns0:cNvPr id="4" name="Text 1"/>
+          <ns0:cNvSpPr/>
+          <ns0:nvPr/>
+        </ns0:nvSpPr>
+        <ns0:spPr>
+          <ns1:xfrm>
+            <ns1:off x="7461041" y="231577"/>
+            <ns1:ext cx="927071" cy="171450"/>
+          </ns1:xfrm>
+          <ns1:prstGeom prst="rect">
+            <ns1:avLst/>
+          </ns1:prstGeom>
+          <ns1:noFill/>
+          <ns1:ln/>
+        </ns0:spPr>
+        <ns0:txBody>
+          <ns1:bodyPr wrap="square" lIns="0" tIns="0" rIns="0" bIns="0" rtlCol="0" anchor="t"/>
+          <ns1:lstStyle/>
+          <ns1:p>
+            <ns1:pPr algn="ctr" indent="0" marL="0">
+              <ns1:buNone/>
+            </ns1:pPr>
+            <ns1:r>
+              <ns1:rPr lang="en-US" sz="1150" b="1" dirty="0">
+                <ns1:solidFill>
+                  <ns1:srgbClr val="FFFFFF"/>
+                </ns1:solidFill>
+                <ns1:latin typeface="Arial" pitchFamily="34" charset="0"/>
+                <ns1:ea typeface="Arial" pitchFamily="34" charset="-122"/>
+                <ns1:cs typeface="Arial" pitchFamily="34" charset="-120"/>
+              </ns1:rPr>
+              <ns1:t>CHAPTER 07</ns1:t>
+            </ns1:r>
+            <ns1:endParaRPr lang="en-US" sz="1150" dirty="0"/>
+          </ns1:p>
+        </ns0:txBody>
+      </ns0:sp>
+      <ns0:pic>
+        <ns0:nvPicPr>
+          <ns0:cNvPr id="5" name="Image 1" descr="Open this chapter on GitHub">
+            <ns1:hlinkClick ns3:id="rId3" tooltip="https://github.com/github/copilot-app-for-beginners/tree/main/07-automations"/>
+          </ns0:cNvPr>
+          <ns0:cNvPicPr>
+            <ns1:picLocks noChangeAspect="1"/>
+          </ns0:cNvPicPr>
+          <ns0:nvPr/>
+        </ns0:nvPicPr>
+        <ns0:blipFill>
+          <ns1:blip ns3:embed="rId2"/>
+          <ns1:stretch>
+            <ns1:fillRect/>
+          </ns1:stretch>
+        </ns0:blipFill>
+        <ns0:spPr>
+          <ns1:xfrm>
+            <ns1:off x="8610600" y="165050"/>
+            <ns1:ext cx="304800" cy="304800"/>
+          </ns1:xfrm>
+          <ns1:prstGeom prst="rect">
+            <ns1:avLst/>
+          </ns1:prstGeom>
+        </ns0:spPr>
+      </ns0:pic>
+      <ns0:sp>
+        <ns0:nvSpPr>
+          <ns0:cNvPr id="6" name="Text 2"/>
+          <ns0:cNvSpPr/>
+          <ns0:nvPr/>
+        </ns0:nvSpPr>
+        <ns0:spPr>
+          <ns1:xfrm>
+            <ns1:off x="507950" y="381000"/>
+            <ns1:ext cx="8161020" cy="190500"/>
+          </ns1:xfrm>
+          <ns1:prstGeom prst="rect">
+            <ns1:avLst/>
+          </ns1:prstGeom>
+          <ns1:noFill/>
+          <ns1:ln/>
+        </ns0:spPr>
+        <ns0:txBody>
+          <ns1:bodyPr wrap="square" lIns="0" tIns="0" rIns="0" bIns="0" rtlCol="0" anchor="t"/>
+          <ns1:lstStyle/>
+          <ns1:p>
+            <ns1:pPr algn="l" indent="0" marL="0">
+              <ns1:buNone/>
+            </ns1:pPr>
+            <ns1:r>
+              <ns1:rPr lang="en-US" sz="1250" b="1" dirty="0">
+                <ns1:solidFill>
+                  <ns1:srgbClr val="8250DF"/>
+                </ns1:solidFill>
+                <ns1:latin typeface="Arial" pitchFamily="34" charset="0"/>
+                <ns1:ea typeface="Arial" pitchFamily="34" charset="-122"/>
+                <ns1:cs typeface="Arial" pitchFamily="34" charset="-120"/>
+              </ns1:rPr>
+              <ns1:t>EXERCISE</ns1:t>
+            </ns1:r>
+            <ns1:endParaRPr lang="en-US" sz="1250" dirty="0"/>
+          </ns1:p>
+        </ns0:txBody>
+      </ns0:sp>
+      <ns0:sp>
+        <ns0:nvSpPr>
+          <ns0:cNvPr id="7" name="Text 3"/>
+          <ns0:cNvSpPr/>
+          <ns0:nvPr/>
+        </ns0:nvSpPr>
+        <ns0:spPr>
+          <ns1:xfrm>
+            <ns1:off x="507950" y="622250"/>
+            <ns1:ext cx="8161020" cy="419100"/>
+          </ns1:xfrm>
+          <ns1:prstGeom prst="rect">
+            <ns1:avLst/>
+          </ns1:prstGeom>
+          <ns1:noFill/>
+          <ns1:ln/>
+        </ns0:spPr>
+        <ns0:txBody>
+          <ns1:bodyPr wrap="square" lIns="0" tIns="0" rIns="0" bIns="0" rtlCol="0" anchor="t"/>
+          <ns1:lstStyle/>
+          <ns1:p>
+            <ns1:pPr algn="l" indent="0" marL="0">
+              <ns1:lnSpc>
+                <ns1:spcPts val="3300"/>
+              </ns1:lnSpc>
+              <ns1:spcBef>
+                <ns1:spcPts val="400"/>
+              </ns1:spcBef>
+              <ns1:buNone/>
+            </ns1:pPr>
+            <ns1:r>
+              <ns1:rPr lang="en-US" sz="2800" b="1" dirty="0">
+                <ns1:solidFill>
+                  <ns1:srgbClr val="1F2328"/>
+                </ns1:solidFill>
+                <ns1:latin typeface="Arial" pitchFamily="34" charset="0"/>
+                <ns1:ea typeface="Arial" pitchFamily="34" charset="-122"/>
+                <ns1:cs typeface="Arial" pitchFamily="34" charset="-120"/>
+              </ns1:rPr>
+              <ns1:t>Create a manual readiness report</ns1:t>
+            </ns1:r>
+            <ns1:endParaRPr lang="en-US" sz="2800" dirty="0"/>
+          </ns1:p>
+        </ns0:txBody>
+      </ns0:sp>
+      <ns0:sp>
+        <ns0:nvSpPr>
+          <ns0:cNvPr id="8" name="Text 4"/>
+          <ns0:cNvSpPr/>
+          <ns0:nvPr/>
+        </ns0:nvSpPr>
+        <ns0:spPr>
+          <ns1:xfrm>
+            <ns1:off x="507950" y="1104751"/>
+            <ns1:ext cx="8161020" cy="254050"/>
+          </ns1:xfrm>
+          <ns1:prstGeom prst="rect">
+            <ns1:avLst/>
+          </ns1:prstGeom>
+          <ns1:noFill/>
+          <ns1:ln/>
+        </ns0:spPr>
+        <ns0:txBody>
+          <ns1:bodyPr wrap="square" lIns="0" tIns="0" rIns="0" bIns="0" rtlCol="0" anchor="t"/>
+          <ns1:lstStyle/>
+          <ns1:p>
+            <ns1:pPr algn="l" indent="0" marL="0">
+              <ns1:lnSpc>
+                <ns1:spcPts val="2000"/>
+              </ns1:lnSpc>
+              <ns1:spcBef>
+                <ns1:spcPts val="500"/>
+              </ns1:spcBef>
+              <ns1:buNone/>
+            </ns1:pPr>
+            <ns1:r>
+              <ns1:rPr lang="en-US" sz="1650" dirty="0">
+                <ns1:solidFill>
+                  <ns1:srgbClr val="59636E"/>
+                </ns1:solidFill>
+                <ns1:latin typeface="Arial" pitchFamily="34" charset="0"/>
+                <ns1:ea typeface="Arial" pitchFamily="34" charset="-122"/>
+                <ns1:cs typeface="Arial" pitchFamily="34" charset="-120"/>
+              </ns1:rPr>
+              <ns1:t>Automations &gt; </ns1:t>
+            </ns1:r>
+            <ns1:pPr algn="l" indent="0" marL="0">
+              <ns1:lnSpc>
+                <ns1:spcPts val="2000"/>
+              </ns1:lnSpc>
+              <ns1:spcBef>
+                <ns1:spcPts val="500"/>
+              </ns1:spcBef>
+              <ns1:buNone/>
+            </ns1:pPr>
+            <ns1:r>
+              <ns1:rPr lang="en-US" sz="1650" b="1" dirty="0">
+                <ns1:solidFill>
+                  <ns1:srgbClr val="59636E"/>
+                </ns1:solidFill>
+                <ns1:latin typeface="Arial" pitchFamily="34" charset="0"/>
+                <ns1:ea typeface="Arial" pitchFamily="34" charset="-122"/>
+                <ns1:cs typeface="Arial" pitchFamily="34" charset="-120"/>
+              </ns1:rPr>
+              <ns1:t>New automation</ns1:t>
+            </ns1:r>
+            <ns1:pPr algn="l" indent="0" marL="0">
+              <ns1:lnSpc>
+                <ns1:spcPts val="2000"/>
+              </ns1:lnSpc>
+              <ns1:spcBef>
+                <ns1:spcPts val="500"/>
+              </ns1:spcBef>
+              <ns1:buNone/>
+            </ns1:pPr>
+            <ns1:r>
+              <ns1:rPr lang="en-US" sz="1650" dirty="0">
+                <ns1:solidFill>
+                  <ns1:srgbClr val="59636E"/>
+                </ns1:solidFill>
+                <ns1:latin typeface="Arial" pitchFamily="34" charset="0"/>
+                <ns1:ea typeface="Arial" pitchFamily="34" charset="-122"/>
+                <ns1:cs typeface="Arial" pitchFamily="34" charset="-120"/>
+              </ns1:rPr>
+              <ns1:t>. Set </ns1:t>
+            </ns1:r>
+            <ns1:pPr algn="l" indent="0" marL="0">
+              <ns1:lnSpc>
+                <ns1:spcPts val="2000"/>
+              </ns1:lnSpc>
+              <ns1:spcBef>
+                <ns1:spcPts val="500"/>
+              </ns1:spcBef>
+              <ns1:buNone/>
+            </ns1:pPr>
+            <ns1:r>
+              <ns1:rPr lang="en-US" sz="1650" b="1" dirty="0">
+                <ns1:solidFill>
+                  <ns1:srgbClr val="59636E"/>
+                </ns1:solidFill>
+                <ns1:latin typeface="Arial" pitchFamily="34" charset="0"/>
+                <ns1:ea typeface="Arial" pitchFamily="34" charset="-122"/>
+                <ns1:cs typeface="Arial" pitchFamily="34" charset="-120"/>
+              </ns1:rPr>
+              <ns1:t>Trigger</ns1:t>
+            </ns1:r>
+            <ns1:pPr algn="l" indent="0" marL="0">
+              <ns1:lnSpc>
+                <ns1:spcPts val="2000"/>
+              </ns1:lnSpc>
+              <ns1:spcBef>
+                <ns1:spcPts val="500"/>
+              </ns1:spcBef>
+              <ns1:buNone/>
+            </ns1:pPr>
+            <ns1:r>
+              <ns1:rPr lang="en-US" sz="1650" dirty="0">
+                <ns1:solidFill>
+                  <ns1:srgbClr val="59636E"/>
+                </ns1:solidFill>
+                <ns1:latin typeface="Arial" pitchFamily="34" charset="0"/>
+                <ns1:ea typeface="Arial" pitchFamily="34" charset="-122"/>
+                <ns1:cs typeface="Arial" pitchFamily="34" charset="-120"/>
+              </ns1:rPr>
+              <ns1:t> to </ns1:t>
+            </ns1:r>
+            <ns1:pPr algn="l" indent="0" marL="0">
+              <ns1:lnSpc>
+                <ns1:spcPts val="2000"/>
+              </ns1:lnSpc>
+              <ns1:spcBef>
+                <ns1:spcPts val="500"/>
+              </ns1:spcBef>
+              <ns1:buNone/>
+            </ns1:pPr>
+            <ns1:r>
+              <ns1:rPr lang="en-US" sz="1650" b="1" dirty="0">
+                <ns1:solidFill>
+                  <ns1:srgbClr val="59636E"/>
+                </ns1:solidFill>
+                <ns1:latin typeface="Arial" pitchFamily="34" charset="0"/>
+                <ns1:ea typeface="Arial" pitchFamily="34" charset="-122"/>
+                <ns1:cs typeface="Arial" pitchFamily="34" charset="-120"/>
+              </ns1:rPr>
+              <ns1:t>Manual</ns1:t>
+            </ns1:r>
+            <ns1:pPr algn="l" indent="0" marL="0">
+              <ns1:lnSpc>
+                <ns1:spcPts val="2000"/>
+              </ns1:lnSpc>
+              <ns1:spcBef>
+                <ns1:spcPts val="500"/>
+              </ns1:spcBef>
+              <ns1:buNone/>
+            </ns1:pPr>
+            <ns1:r>
+              <ns1:rPr lang="en-US" sz="1650" dirty="0">
+                <ns1:solidFill>
+                  <ns1:srgbClr val="59636E"/>
+                </ns1:solidFill>
+                <ns1:latin typeface="Arial" pitchFamily="34" charset="0"/>
+                <ns1:ea typeface="Arial" pitchFamily="34" charset="-122"/>
+                <ns1:cs typeface="Arial" pitchFamily="34" charset="-120"/>
+              </ns1:rPr>
+              <ns1:t>.</ns1:t>
+            </ns1:r>
+            <ns1:endParaRPr lang="en-US" sz="1650" dirty="0"/>
+          </ns1:p>
+        </ns0:txBody>
+      </ns0:sp>
+      <ns0:sp>
+        <ns0:nvSpPr>
+          <ns0:cNvPr id="9" name="Text 5"/>
+          <ns0:cNvSpPr/>
+          <ns0:nvPr/>
+        </ns0:nvSpPr>
+        <ns0:spPr>
+          <ns1:xfrm>
+            <ns1:off x="551706" y="1577876"/>
+            <ns1:ext cx="4230291" cy="2990850"/>
+          </ns1:xfrm>
+          <ns1:prstGeom prst="roundRect">
+            <ns1:avLst>
+              <ns1:gd name="adj" fmla="val 2548"/>
+            </ns1:avLst>
+          </ns1:prstGeom>
+          <ns1:solidFill>
+            <ns1:srgbClr val="FFFFFF"/>
+          </ns1:solidFill>
+          <ns1:ln w="9525">
+            <ns1:solidFill>
+              <ns1:srgbClr val="D1D9E0"/>
+            </ns1:solidFill>
+          </ns1:ln>
+          <ns1:effectLst>
+            <ns1:outerShdw sx="100000" sy="100000" kx="0" ky="0" algn="bl" rotWithShape="0" blurRad="38100" dist="9525" dir="5400000">
+              <ns1:srgbClr val="1f2328">
+                <ns1:alpha val="12000"/>
+              </ns1:srgbClr>
+            </ns1:outerShdw>
+          </ns1:effectLst>
+        </ns0:spPr>
+        <ns0:txBody>
+          <ns1:bodyPr wrap="square" rtlCol="0" anchor="ctr"/>
+          <ns1:lstStyle/>
+          <ns1:p>
+            <ns1:pPr indent="0" marL="0">
+              <ns1:buNone/>
+            </ns1:pPr>
+            <ns1:endParaRPr lang="en-US" dirty="0"/>
+          </ns1:p>
+        </ns0:txBody>
+      </ns0:sp>
+      <ns0:pic>
+        <ns0:nvPicPr>
+          <ns0:cNvPr id="10" name="Image 2" descr="New automation form with Manual trigger, cloud off, selected repository, Current checkout, and Create and run"/>
+          <ns0:cNvPicPr>
+            <ns1:picLocks noChangeAspect="1"/>
+          </ns0:cNvPicPr>
+          <ns0:nvPr/>
+        </ns0:nvPicPr>
+        <ns0:blipFill>
+          <ns1:blip ns3:embed="rId4"/>
+          <ns1:stretch>
+            <ns1:fillRect/>
+          </ns1:stretch>
+        </ns0:blipFill>
+        <ns0:spPr>
+          <ns1:xfrm>
+            <ns1:off x="599331" y="1625501"/>
+            <ns1:ext cx="4135041" cy="2895600"/>
+          </ns1:xfrm>
+          <ns1:prstGeom prst="rect">
+            <ns1:avLst/>
+          </ns1:prstGeom>
+        </ns0:spPr>
+      </ns0:pic>
+      <ns0:sp>
+        <ns0:nvSpPr>
+          <ns0:cNvPr id="11" name="Text 6"/>
+          <ns0:cNvSpPr/>
+          <ns0:nvPr/>
+        </ns0:nvSpPr>
+        <ns0:spPr>
+          <ns1:xfrm>
+            <ns1:off x="5079802" y="1811685"/>
+            <ns1:ext cx="279350" cy="279350"/>
+          </ns1:xfrm>
+          <ns1:prstGeom prst="roundRect">
+            <ns1:avLst>
+              <ns1:gd name="adj" fmla="val 327331"/>
+            </ns1:avLst>
+          </ns1:prstGeom>
+          <ns1:solidFill>
+            <ns1:srgbClr val="8250DF"/>
+          </ns1:solidFill>
+          <ns1:ln/>
+        </ns0:spPr>
+        <ns0:txBody>
+          <ns1:bodyPr wrap="square" rtlCol="0" anchor="ctr"/>
+          <ns1:lstStyle/>
+          <ns1:p>
+            <ns1:pPr indent="0" marL="0">
+              <ns1:buNone/>
+            </ns1:pPr>
+            <ns1:endParaRPr lang="en-US" dirty="0"/>
+          </ns1:p>
+        </ns0:txBody>
+      </ns0:sp>
+      <ns0:sp>
+        <ns0:nvSpPr>
+          <ns0:cNvPr id="12" name="Text 7"/>
+          <ns0:cNvSpPr/>
+          <ns0:nvPr/>
+        </ns0:nvSpPr>
+        <ns0:spPr>
+          <ns1:xfrm>
+            <ns1:off x="5174467" y="1856036"/>
+            <ns1:ext cx="90020" cy="190500"/>
+          </ns1:xfrm>
+          <ns1:prstGeom prst="rect">
+            <ns1:avLst/>
+          </ns1:prstGeom>
+          <ns1:noFill/>
+          <ns1:ln/>
+        </ns0:spPr>
+        <ns0:txBody>
+          <ns1:bodyPr wrap="square" lIns="0" tIns="0" rIns="0" bIns="0" rtlCol="0" anchor="t"/>
+          <ns1:lstStyle/>
+          <ns1:p>
+            <ns1:pPr algn="ctr" indent="0" marL="0">
+              <ns1:buNone/>
+            </ns1:pPr>
+            <ns1:r>
+              <ns1:rPr lang="en-US" sz="1250" b="1" dirty="0">
+                <ns1:solidFill>
+                  <ns1:srgbClr val="FFFFFF"/>
+                </ns1:solidFill>
+                <ns1:latin typeface="Arial" pitchFamily="34" charset="0"/>
+                <ns1:ea typeface="Arial" pitchFamily="34" charset="-122"/>
+                <ns1:cs typeface="Arial" pitchFamily="34" charset="-120"/>
+              </ns1:rPr>
+              <ns1:t>1</ns1:t>
+            </ns1:r>
+            <ns1:endParaRPr lang="en-US" sz="1250" dirty="0"/>
+          </ns1:p>
+        </ns0:txBody>
+      </ns0:sp>
+      <ns0:sp>
+        <ns0:nvSpPr>
+          <ns0:cNvPr id="13" name="Text 8"/>
+          <ns0:cNvSpPr/>
+          <ns0:nvPr/>
+        </ns0:nvSpPr>
+        <ns0:spPr>
+          <ns1:xfrm>
+            <ns1:off x="5511552" y="1811685"/>
+            <ns1:ext cx="2728689" cy="222200"/>
+          </ns1:xfrm>
+          <ns1:prstGeom prst="rect">
+            <ns1:avLst/>
+          </ns1:prstGeom>
+          <ns1:noFill/>
+          <ns1:ln/>
+        </ns0:spPr>
+        <ns0:txBody>
+          <ns1:bodyPr wrap="square" lIns="0" tIns="0" rIns="0" bIns="0" rtlCol="0" anchor="t"/>
+          <ns1:lstStyle/>
+          <ns1:p>
+            <ns1:pPr algn="l" indent="0" marL="0">
+              <ns1:lnSpc>
+                <ns1:spcPts val="1750"/>
+              </ns1:lnSpc>
+              <ns1:buNone/>
+            </ns1:pPr>
+            <ns1:r>
+              <ns1:rPr lang="en-US" sz="1550" b="1" dirty="0">
+                <ns1:solidFill>
+                  <ns1:srgbClr val="1F2328"/>
+                </ns1:solidFill>
+                <ns1:latin typeface="Arial" pitchFamily="34" charset="0"/>
+                <ns1:ea typeface="Arial" pitchFamily="34" charset="-122"/>
+                <ns1:cs typeface="Arial" pitchFamily="34" charset="-120"/>
+              </ns1:rPr>
+              <ns1:t>Name it</ns1:t>
+            </ns1:r>
+            <ns1:endParaRPr lang="en-US" sz="1550" dirty="0"/>
+          </ns1:p>
+        </ns0:txBody>
+      </ns0:sp>
+      <ns0:sp>
+        <ns0:nvSpPr>
+          <ns0:cNvPr id="14" name="Text 9"/>
+          <ns0:cNvSpPr/>
+          <ns0:nvPr/>
+        </ns0:nvSpPr>
+        <ns0:spPr>
+          <ns1:xfrm>
+            <ns1:off x="5511552" y="2059186"/>
+            <ns1:ext cx="2728689" cy="207615"/>
+          </ns1:xfrm>
+          <ns1:prstGeom prst="rect">
+            <ns1:avLst/>
+          </ns1:prstGeom>
+          <ns1:noFill/>
+          <ns1:ln/>
+        </ns0:spPr>
+        <ns0:txBody>
+          <ns1:bodyPr wrap="square" lIns="0" tIns="0" rIns="0" bIns="0" rtlCol="0" anchor="t"/>
+          <ns1:lstStyle/>
+          <ns1:p>
+            <ns1:pPr algn="l" indent="0" marL="0">
+              <ns1:lnSpc>
+                <ns1:spcPts val="1560"/>
+              </ns1:lnSpc>
+              <ns1:buNone/>
+            </ns1:pPr>
+            <ns1:r>
+              <ns1:rPr lang="en-US" sz="1350" b="1" dirty="0">
+                <ns1:solidFill>
+                  <ns1:srgbClr val="0550AE"/>
+                </ns1:solidFill>
+                <ns1:latin typeface="Courier New" pitchFamily="34" charset="0"/>
+                <ns1:ea typeface="Courier New" pitchFamily="34" charset="-122"/>
+                <ns1:cs typeface="Courier New" pitchFamily="34" charset="-120"/>
+              </ns1:rPr>
+              <ns1:t>PR review readiness report</ns1:t>
+            </ns1:r>
+            <ns1:endParaRPr lang="en-US" sz="1350" dirty="0"/>
+          </ns1:p>
+        </ns0:txBody>
+      </ns0:sp>
+      <ns0:sp>
+        <ns0:nvSpPr>
+          <ns0:cNvPr id="15" name="Text 10"/>
+          <ns0:cNvSpPr/>
+          <ns0:nvPr/>
+        </ns0:nvSpPr>
+        <ns0:spPr>
+          <ns1:xfrm>
+            <ns1:off x="5079802" y="2444502"/>
+            <ns1:ext cx="279350" cy="279350"/>
+          </ns1:xfrm>
+          <ns1:prstGeom prst="roundRect">
+            <ns1:avLst>
+              <ns1:gd name="adj" fmla="val 327331"/>
+            </ns1:avLst>
+          </ns1:prstGeom>
+          <ns1:solidFill>
+            <ns1:srgbClr val="8250DF"/>
+          </ns1:solidFill>
+          <ns1:ln/>
+        </ns0:spPr>
+        <ns0:txBody>
+          <ns1:bodyPr wrap="square" rtlCol="0" anchor="ctr"/>
+          <ns1:lstStyle/>
+          <ns1:p>
+            <ns1:pPr indent="0" marL="0">
+              <ns1:buNone/>
+            </ns1:pPr>
+            <ns1:endParaRPr lang="en-US" dirty="0"/>
+          </ns1:p>
+        </ns0:txBody>
+      </ns0:sp>
+      <ns0:sp>
+        <ns0:nvSpPr>
+          <ns0:cNvPr id="16" name="Text 11"/>
+          <ns0:cNvSpPr/>
+          <ns0:nvPr/>
+        </ns0:nvSpPr>
+        <ns0:spPr>
+          <ns1:xfrm>
+            <ns1:off x="5174467" y="2488853"/>
+            <ns1:ext cx="90020" cy="190500"/>
+          </ns1:xfrm>
+          <ns1:prstGeom prst="rect">
+            <ns1:avLst/>
+          </ns1:prstGeom>
+          <ns1:noFill/>
+          <ns1:ln/>
+        </ns0:spPr>
+        <ns0:txBody>
+          <ns1:bodyPr wrap="square" lIns="0" tIns="0" rIns="0" bIns="0" rtlCol="0" anchor="t"/>
+          <ns1:lstStyle/>
+          <ns1:p>
+            <ns1:pPr algn="ctr" indent="0" marL="0">
+              <ns1:buNone/>
+            </ns1:pPr>
+            <ns1:r>
+              <ns1:rPr lang="en-US" sz="1250" b="1" dirty="0">
+                <ns1:solidFill>
+                  <ns1:srgbClr val="FFFFFF"/>
+                </ns1:solidFill>
+                <ns1:latin typeface="Arial" pitchFamily="34" charset="0"/>
+                <ns1:ea typeface="Arial" pitchFamily="34" charset="-122"/>
+                <ns1:cs typeface="Arial" pitchFamily="34" charset="-120"/>
+              </ns1:rPr>
+              <ns1:t>2</ns1:t>
+            </ns1:r>
+            <ns1:endParaRPr lang="en-US" sz="1250" dirty="0"/>
+          </ns1:p>
+        </ns0:txBody>
+      </ns0:sp>
+      <ns0:sp>
+        <ns0:nvSpPr>
+          <ns0:cNvPr id="17" name="Text 12"/>
+          <ns0:cNvSpPr/>
+          <ns0:nvPr/>
+        </ns0:nvSpPr>
+        <ns0:spPr>
+          <ns1:xfrm>
+            <ns1:off x="5511552" y="2444502"/>
+            <ns1:ext cx="3186836" cy="222200"/>
+          </ns1:xfrm>
+          <ns1:prstGeom prst="rect">
+            <ns1:avLst/>
+          </ns1:prstGeom>
+          <ns1:noFill/>
+          <ns1:ln/>
+        </ns0:spPr>
+        <ns0:txBody>
+          <ns1:bodyPr wrap="square" lIns="0" tIns="0" rIns="0" bIns="0" rtlCol="0" anchor="t"/>
+          <ns1:lstStyle/>
+          <ns1:p>
+            <ns1:pPr algn="l" indent="0" marL="0">
+              <ns1:lnSpc>
+                <ns1:spcPts val="1750"/>
+              </ns1:lnSpc>
+              <ns1:buNone/>
+            </ns1:pPr>
+            <ns1:r>
+              <ns1:rPr lang="en-US" sz="1550" b="1" dirty="0">
+                <ns1:solidFill>
+                  <ns1:srgbClr val="1F2328"/>
+                </ns1:solidFill>
+                <ns1:latin typeface="Arial" pitchFamily="34" charset="0"/>
+                <ns1:ea typeface="Arial" pitchFamily="34" charset="-122"/>
+                <ns1:cs typeface="Arial" pitchFamily="34" charset="-120"/>
+              </ns1:rPr>
+              <ns1:t>Paste the read-only prompt</ns1:t>
+            </ns1:r>
+            <ns1:endParaRPr lang="en-US" sz="1550" dirty="0"/>
+          </ns1:p>
+        </ns0:txBody>
+      </ns0:sp>
+      <ns0:sp>
+        <ns0:nvSpPr>
+          <ns0:cNvPr id="18" name="Text 13"/>
+          <ns0:cNvSpPr/>
+          <ns0:nvPr/>
+        </ns0:nvSpPr>
+        <ns0:spPr>
+          <ns1:xfrm>
+            <ns1:off x="5511552" y="2692003"/>
+            <ns1:ext cx="3186836" cy="396180"/>
+          </ns1:xfrm>
+          <ns1:prstGeom prst="rect">
+            <ns1:avLst/>
+          </ns1:prstGeom>
+          <ns1:noFill/>
+          <ns1:ln/>
+        </ns0:spPr>
+        <ns0:txBody>
+          <ns1:bodyPr wrap="square" lIns="0" tIns="0" rIns="0" bIns="0" rtlCol="0" anchor="t"/>
+          <ns1:lstStyle/>
+          <ns1:p>
+            <ns1:pPr algn="l" indent="0" marL="0">
+              <ns1:lnSpc>
+                <ns1:spcPts val="1560"/>
+              </ns1:lnSpc>
+              <ns1:buNone/>
+            </ns1:pPr>
+            <ns1:r>
+              <ns1:rPr lang="en-US" sz="1350" dirty="0">
+                <ns1:solidFill>
+                  <ns1:srgbClr val="59636E"/>
+                </ns1:solidFill>
+                <ns1:latin typeface="Arial" pitchFamily="34" charset="0"/>
+                <ns1:ea typeface="Arial" pitchFamily="34" charset="-122"/>
+                <ns1:cs typeface="Arial" pitchFamily="34" charset="-120"/>
+              </ns1:rPr>
+              <ns1:t>CI, comments, and the next action per PR.</ns1:t>
+            </ns1:r>
+            <ns1:endParaRPr lang="en-US" sz="1350" dirty="0"/>
+          </ns1:p>
+        </ns0:txBody>
+      </ns0:sp>
+      <ns0:sp>
+        <ns0:nvSpPr>
+          <ns0:cNvPr id="19" name="Text 14"/>
+          <ns0:cNvSpPr/>
+          <ns0:nvPr/>
+        </ns0:nvSpPr>
+        <ns0:spPr>
+          <ns1:xfrm>
+            <ns1:off x="5079802" y="3265884"/>
+            <ns1:ext cx="279350" cy="279350"/>
+          </ns1:xfrm>
+          <ns1:prstGeom prst="roundRect">
+            <ns1:avLst>
+              <ns1:gd name="adj" fmla="val 327331"/>
+            </ns1:avLst>
+          </ns1:prstGeom>
+          <ns1:solidFill>
+            <ns1:srgbClr val="8250DF"/>
+          </ns1:solidFill>
+          <ns1:ln/>
+        </ns0:spPr>
+        <ns0:txBody>
+          <ns1:bodyPr wrap="square" rtlCol="0" anchor="ctr"/>
+          <ns1:lstStyle/>
+          <ns1:p>
+            <ns1:pPr indent="0" marL="0">
+              <ns1:buNone/>
+            </ns1:pPr>
+            <ns1:endParaRPr lang="en-US" dirty="0"/>
+          </ns1:p>
+        </ns0:txBody>
+      </ns0:sp>
+      <ns0:sp>
+        <ns0:nvSpPr>
+          <ns0:cNvPr id="20" name="Text 15"/>
+          <ns0:cNvSpPr/>
+          <ns0:nvPr/>
+        </ns0:nvSpPr>
+        <ns0:spPr>
+          <ns1:xfrm>
+            <ns1:off x="5174467" y="3310235"/>
+            <ns1:ext cx="90020" cy="190500"/>
+          </ns1:xfrm>
+          <ns1:prstGeom prst="rect">
+            <ns1:avLst/>
+          </ns1:prstGeom>
+          <ns1:noFill/>
+          <ns1:ln/>
+        </ns0:spPr>
+        <ns0:txBody>
+          <ns1:bodyPr wrap="square" lIns="0" tIns="0" rIns="0" bIns="0" rtlCol="0" anchor="t"/>
+          <ns1:lstStyle/>
+          <ns1:p>
+            <ns1:pPr algn="ctr" indent="0" marL="0">
+              <ns1:buNone/>
+            </ns1:pPr>
+            <ns1:r>
+              <ns1:rPr lang="en-US" sz="1250" b="1" dirty="0">
+                <ns1:solidFill>
+                  <ns1:srgbClr val="FFFFFF"/>
+                </ns1:solidFill>
+                <ns1:latin typeface="Arial" pitchFamily="34" charset="0"/>
+                <ns1:ea typeface="Arial" pitchFamily="34" charset="-122"/>
+                <ns1:cs typeface="Arial" pitchFamily="34" charset="-120"/>
+              </ns1:rPr>
+              <ns1:t>3</ns1:t>
+            </ns1:r>
+            <ns1:endParaRPr lang="en-US" sz="1250" dirty="0"/>
+          </ns1:p>
+        </ns0:txBody>
+      </ns0:sp>
+      <ns0:sp>
+        <ns0:nvSpPr>
+          <ns0:cNvPr id="21" name="Text 16"/>
+          <ns0:cNvSpPr/>
+          <ns0:nvPr/>
+        </ns0:nvSpPr>
+        <ns0:spPr>
+          <ns1:xfrm>
+            <ns1:off x="5511552" y="3265884"/>
+            <ns1:ext cx="2654001" cy="222200"/>
+          </ns1:xfrm>
+          <ns1:prstGeom prst="rect">
+            <ns1:avLst/>
+          </ns1:prstGeom>
+          <ns1:noFill/>
+          <ns1:ln/>
+        </ns0:spPr>
+        <ns0:txBody>
+          <ns1:bodyPr wrap="square" lIns="0" tIns="0" rIns="0" bIns="0" rtlCol="0" anchor="t"/>
+          <ns1:lstStyle/>
+          <ns1:p>
+            <ns1:pPr algn="l" indent="0" marL="0">
+              <ns1:lnSpc>
+                <ns1:spcPts val="1750"/>
+              </ns1:lnSpc>
+              <ns1:buNone/>
+            </ns1:pPr>
+            <ns1:r>
+              <ns1:rPr lang="en-US" sz="1550" b="1" dirty="0">
+                <ns1:solidFill>
+                  <ns1:srgbClr val="1F2328"/>
+                </ns1:solidFill>
+                <ns1:latin typeface="Arial" pitchFamily="34" charset="0"/>
+                <ns1:ea typeface="Arial" pitchFamily="34" charset="-122"/>
+                <ns1:cs typeface="Arial" pitchFamily="34" charset="-120"/>
+              </ns1:rPr>
+              <ns1:t>Cloud off, Current checkout</ns1:t>
+            </ns1:r>
+            <ns1:endParaRPr lang="en-US" sz="1550" dirty="0"/>
+          </ns1:p>
+        </ns0:txBody>
+      </ns0:sp>
+      <ns0:sp>
+        <ns0:nvSpPr>
+          <ns0:cNvPr id="22" name="Text 17"/>
+          <ns0:cNvSpPr/>
+          <ns0:nvPr/>
+        </ns0:nvSpPr>
+        <ns0:spPr>
+          <ns1:xfrm>
+            <ns1:off x="5511552" y="3513386"/>
+            <ns1:ext cx="2654001" cy="198090"/>
+          </ns1:xfrm>
+          <ns1:prstGeom prst="rect">
+            <ns1:avLst/>
+          </ns1:prstGeom>
+          <ns1:noFill/>
+          <ns1:ln/>
+        </ns0:spPr>
+        <ns0:txBody>
+          <ns1:bodyPr wrap="square" lIns="0" tIns="0" rIns="0" bIns="0" rtlCol="0" anchor="t"/>
+          <ns1:lstStyle/>
+          <ns1:p>
+            <ns1:pPr algn="l" indent="0" marL="0">
+              <ns1:lnSpc>
+                <ns1:spcPts val="1560"/>
+              </ns1:lnSpc>
+              <ns1:buNone/>
+            </ns1:pPr>
+            <ns1:r>
+              <ns1:rPr lang="en-US" sz="1350" dirty="0">
+                <ns1:solidFill>
+                  <ns1:srgbClr val="59636E"/>
+                </ns1:solidFill>
+                <ns1:latin typeface="Arial" pitchFamily="34" charset="0"/>
+                <ns1:ea typeface="Arial" pitchFamily="34" charset="-122"/>
+                <ns1:cs typeface="Arial" pitchFamily="34" charset="-120"/>
+              </ns1:rPr>
+              <ns1:t>Runs locally. It only reads data.</ns1:t>
+            </ns1:r>
+            <ns1:endParaRPr lang="en-US" sz="1350" dirty="0"/>
+          </ns1:p>
+        </ns0:txBody>
+      </ns0:sp>
+      <ns0:sp>
+        <ns0:nvSpPr>
+          <ns0:cNvPr id="23" name="Text 18"/>
+          <ns0:cNvSpPr/>
+          <ns0:nvPr/>
+        </ns0:nvSpPr>
+        <ns0:spPr>
+          <ns1:xfrm>
+            <ns1:off x="5079802" y="3889177"/>
+            <ns1:ext cx="279350" cy="279350"/>
+          </ns1:xfrm>
+          <ns1:prstGeom prst="roundRect">
+            <ns1:avLst>
+              <ns1:gd name="adj" fmla="val 327331"/>
+            </ns1:avLst>
+          </ns1:prstGeom>
+          <ns1:solidFill>
+            <ns1:srgbClr val="8250DF"/>
+          </ns1:solidFill>
+          <ns1:ln/>
+        </ns0:spPr>
+        <ns0:txBody>
+          <ns1:bodyPr wrap="square" rtlCol="0" anchor="ctr"/>
+          <ns1:lstStyle/>
+          <ns1:p>
+            <ns1:pPr indent="0" marL="0">
+              <ns1:buNone/>
+            </ns1:pPr>
+            <ns1:endParaRPr lang="en-US" dirty="0"/>
+          </ns1:p>
+        </ns0:txBody>
+      </ns0:sp>
+      <ns0:sp>
+        <ns0:nvSpPr>
+          <ns0:cNvPr id="24" name="Text 19"/>
+          <ns0:cNvSpPr/>
+          <ns0:nvPr/>
+        </ns0:nvSpPr>
+        <ns0:spPr>
+          <ns1:xfrm>
+            <ns1:off x="5174467" y="3933527"/>
+            <ns1:ext cx="90020" cy="190500"/>
+          </ns1:xfrm>
+          <ns1:prstGeom prst="rect">
+            <ns1:avLst/>
+          </ns1:prstGeom>
+          <ns1:noFill/>
+          <ns1:ln/>
+        </ns0:spPr>
+        <ns0:txBody>
+          <ns1:bodyPr wrap="square" lIns="0" tIns="0" rIns="0" bIns="0" rtlCol="0" anchor="t"/>
+          <ns1:lstStyle/>
+          <ns1:p>
+            <ns1:pPr algn="ctr" indent="0" marL="0">
+              <ns1:buNone/>
+            </ns1:pPr>
+            <ns1:r>
+              <ns1:rPr lang="en-US" sz="1250" b="1" dirty="0">
+                <ns1:solidFill>
+                  <ns1:srgbClr val="FFFFFF"/>
+                </ns1:solidFill>
+                <ns1:latin typeface="Arial" pitchFamily="34" charset="0"/>
+                <ns1:ea typeface="Arial" pitchFamily="34" charset="-122"/>
+                <ns1:cs typeface="Arial" pitchFamily="34" charset="-120"/>
+              </ns1:rPr>
+              <ns1:t>4</ns1:t>
+            </ns1:r>
+            <ns1:endParaRPr lang="en-US" sz="1250" dirty="0"/>
+          </ns1:p>
+        </ns0:txBody>
+      </ns0:sp>
+      <ns0:sp>
+        <ns0:nvSpPr>
+          <ns0:cNvPr id="25" name="Text 20"/>
+          <ns0:cNvSpPr/>
+          <ns0:nvPr/>
+        </ns0:nvSpPr>
+        <ns0:spPr>
+          <ns1:xfrm>
+            <ns1:off x="5511552" y="3889177"/>
+            <ns1:ext cx="2400943" cy="222200"/>
+          </ns1:xfrm>
+          <ns1:prstGeom prst="rect">
+            <ns1:avLst/>
+          </ns1:prstGeom>
+          <ns1:noFill/>
+          <ns1:ln/>
+        </ns0:spPr>
+        <ns0:txBody>
+          <ns1:bodyPr wrap="square" lIns="0" tIns="0" rIns="0" bIns="0" rtlCol="0" anchor="t"/>
+          <ns1:lstStyle/>
+          <ns1:p>
+            <ns1:pPr algn="l" indent="0" marL="0">
+              <ns1:lnSpc>
+                <ns1:spcPts val="1750"/>
+              </ns1:lnSpc>
+              <ns1:buNone/>
+            </ns1:pPr>
+            <ns1:r>
+              <ns1:rPr lang="en-US" sz="1550" b="1" dirty="0">
+                <ns1:solidFill>
+                  <ns1:srgbClr val="1F2328"/>
+                </ns1:solidFill>
+                <ns1:latin typeface="Arial" pitchFamily="34" charset="0"/>
+                <ns1:ea typeface="Arial" pitchFamily="34" charset="-122"/>
+                <ns1:cs typeface="Arial" pitchFamily="34" charset="-120"/>
+              </ns1:rPr>
+              <ns1:t>Create and run</ns1:t>
+            </ns1:r>
+            <ns1:endParaRPr lang="en-US" sz="1550" dirty="0"/>
+          </ns1:p>
+        </ns0:txBody>
+      </ns0:sp>
+      <ns0:sp>
+        <ns0:nvSpPr>
+          <ns0:cNvPr id="26" name="Text 21"/>
+          <ns0:cNvSpPr/>
+          <ns0:nvPr/>
+        </ns0:nvSpPr>
+        <ns0:spPr>
+          <ns1:xfrm>
+            <ns1:off x="5511552" y="4136678"/>
+            <ns1:ext cx="2400943" cy="198090"/>
+          </ns1:xfrm>
+          <ns1:prstGeom prst="rect">
+            <ns1:avLst/>
+          </ns1:prstGeom>
+          <ns1:noFill/>
+          <ns1:ln/>
+        </ns0:spPr>
+        <ns0:txBody>
+          <ns1:bodyPr wrap="square" lIns="0" tIns="0" rIns="0" bIns="0" rtlCol="0" anchor="t"/>
+          <ns1:lstStyle/>
+          <ns1:p>
+            <ns1:pPr algn="l" indent="0" marL="0">
+              <ns1:lnSpc>
+                <ns1:spcPts val="1560"/>
+              </ns1:lnSpc>
+              <ns1:buNone/>
+            </ns1:pPr>
+            <ns1:r>
+              <ns1:rPr lang="en-US" sz="1350" dirty="0">
+                <ns1:solidFill>
+                  <ns1:srgbClr val="59636E"/>
+                </ns1:solidFill>
+                <ns1:latin typeface="Arial" pitchFamily="34" charset="0"/>
+                <ns1:ea typeface="Arial" pitchFamily="34" charset="-122"/>
+                <ns1:cs typeface="Arial" pitchFamily="34" charset="-120"/>
+              </ns1:rPr>
+              <ns1:t>From the arrow next to </ns1:t>
+            </ns1:r>
+            <ns1:pPr algn="l" indent="0" marL="0">
+              <ns1:lnSpc>
+                <ns1:spcPts val="1560"/>
+              </ns1:lnSpc>
+              <ns1:buNone/>
+            </ns1:pPr>
+            <ns1:r>
+              <ns1:rPr lang="en-US" sz="1350" b="1" dirty="0">
+                <ns1:solidFill>
+                  <ns1:srgbClr val="59636E"/>
+                </ns1:solidFill>
+                <ns1:latin typeface="Arial" pitchFamily="34" charset="0"/>
+                <ns1:ea typeface="Arial" pitchFamily="34" charset="-122"/>
+                <ns1:cs typeface="Arial" pitchFamily="34" charset="-120"/>
+              </ns1:rPr>
+              <ns1:t>Create</ns1:t>
+            </ns1:r>
+            <ns1:pPr algn="l" indent="0" marL="0">
+              <ns1:lnSpc>
+                <ns1:spcPts val="1560"/>
+              </ns1:lnSpc>
+              <ns1:buNone/>
+            </ns1:pPr>
+            <ns1:r>
+              <ns1:rPr lang="en-US" sz="1350" dirty="0">
+                <ns1:solidFill>
+                  <ns1:srgbClr val="59636E"/>
+                </ns1:solidFill>
+                <ns1:latin typeface="Arial" pitchFamily="34" charset="0"/>
+                <ns1:ea typeface="Arial" pitchFamily="34" charset="-122"/>
+                <ns1:cs typeface="Arial" pitchFamily="34" charset="-120"/>
+              </ns1:rPr>
+              <ns1:t>.</ns1:t>
+            </ns1:r>
+            <ns1:endParaRPr lang="en-US" sz="1350" dirty="0"/>
+          </ns1:p>
+        </ns0:txBody>
+      </ns0:sp>
+    </ns0:spTree>
+  </ns0:cSld>
+  <ns0:clrMapOvr>
+    <ns1:masterClrMapping/>
+  </ns0:clrMapOvr>
+</ns0:sld>
 </file>
 
 <file path=ppt/slides/slide9.xml><?xml version="1.0" encoding="utf-8"?>

--- a/slides/07-automations.pptx
+++ b/slides/07-automations.pptx
@@ -1045,7 +1045,7 @@
           <a:p>
             <a:r>
               <a:rPr lang="en-US" dirty="0"/>
-              <a:t>You went from setup through sessions and worktrees, context, the development and GitHub loops, skills and custom agents, MCP servers and plugins, canvases, and automations. The constant was keeping a human in control: before implementation starts, before a pull request opens, and before any merge automation is enabled. The link returns to the course home.</a:t>
+              <a:t>You went from setup through sessions and worktrees, context, the development and GitHub loops, skills and custom agents, MCP servers and plugins, canvases, and automations. The constant was keeping a human in control: before implementation starts, before a pull request opens, and before any merge automation is enabled.</a:t>
             </a:r>
             <a:endParaRPr lang="en-US" dirty="0"/>
           </a:p>
@@ -3813,7 +3813,7 @@
         </p:nvSpPr>
         <p:spPr>
           <a:xfrm>
-            <a:off x="711101" y="1571774"/>
+            <a:off x="711101" y="1937534"/>
             <a:ext cx="5570169" cy="209550"/>
           </a:xfrm>
           <a:prstGeom prst="rect">
@@ -3852,7 +3852,7 @@
         </p:nvSpPr>
         <p:spPr>
           <a:xfrm>
-            <a:off x="711101" y="1882825"/>
+            <a:off x="711101" y="2248585"/>
             <a:ext cx="5570169" cy="584150"/>
           </a:xfrm>
           <a:prstGeom prst="rect">
@@ -3897,7 +3897,7 @@
         </p:nvSpPr>
         <p:spPr>
           <a:xfrm>
-            <a:off x="711101" y="2670125"/>
+            <a:off x="711101" y="3035885"/>
             <a:ext cx="609600" cy="63401"/>
           </a:xfrm>
           <a:prstGeom prst="roundRect">
@@ -3918,48 +3918,6 @@
               <a:buNone/>
             </a:pPr>
             <a:endParaRPr lang="en-US" dirty="0"/>
-          </a:p>
-        </p:txBody>
-      </p:sp>
-      <p:sp>
-        <p:nvSpPr>
-          <p:cNvPr id="12" name="Text 8"/>
-          <p:cNvSpPr/>
-          <p:nvPr/>
-        </p:nvSpPr>
-        <p:spPr>
-          <a:xfrm>
-            <a:off x="711101" y="2936677"/>
-            <a:ext cx="5570169" cy="634901"/>
-          </a:xfrm>
-          <a:prstGeom prst="rect">
-            <a:avLst/>
-          </a:prstGeom>
-          <a:noFill/>
-          <a:ln/>
-        </p:spPr>
-        <p:txBody>
-          <a:bodyPr wrap="square" lIns="0" tIns="0" rIns="0" bIns="0" rtlCol="0" anchor="t"/>
-          <a:lstStyle/>
-          <a:p>
-            <a:pPr algn="l" indent="0" marL="0">
-              <a:lnSpc>
-                <a:spcPts val="2500"/>
-              </a:lnSpc>
-              <a:buNone/>
-            </a:pPr>
-            <a:r>
-              <a:rPr lang="en-US" sz="1900" dirty="0">
-                <a:solidFill>
-                  <a:srgbClr val="59636E"/>
-                </a:solidFill>
-                <a:latin typeface="Arial" pitchFamily="34" charset="0"/>
-                <a:ea typeface="Arial" pitchFamily="34" charset="-122"/>
-                <a:cs typeface="Arial" pitchFamily="34" charset="-120"/>
-              </a:rPr>
-              <a:t>Optional. React to repository events, or run while your laptop is closed.</a:t>
-            </a:r>
-            <a:endParaRPr lang="en-US" sz="1900" dirty="0"/>
           </a:p>
         </p:txBody>
       </p:sp>
@@ -5414,8 +5372,8 @@
         </ns0:nvSpPr>
         <ns0:spPr>
           <ns1:xfrm>
-            <ns1:off x="511076" y="2212925"/>
-            <ns1:ext cx="2533650" cy="1720751"/>
+            <ns1:off x="512064" y="1600200"/>
+            <ns1:ext cx="3593592" cy="2432304"/>
           </ns1:xfrm>
           <ns1:prstGeom prst="roundRect">
             <ns1:avLst>
@@ -5465,8 +5423,8 @@
         </ns0:blipFill>
         <ns0:spPr>
           <ns1:xfrm>
-            <ns1:off x="558701" y="2260550"/>
-            <ns1:ext cx="2438400" cy="1625501"/>
+            <ns1:off x="557784" y="1645920"/>
+            <ns1:ext cx="3502152" cy="2331720"/>
           </ns1:xfrm>
           <ns1:prstGeom prst="rect">
             <ns1:avLst/>
@@ -5481,8 +5439,8 @@
         </ns0:nvSpPr>
         <ns0:spPr>
           <ns1:xfrm>
-            <ns1:off x="3251002" y="1574750"/>
-            <ns1:ext cx="2692598" cy="2142530"/>
+            <ns1:off x="4329994" y="1602182"/>
+            <ns1:ext cx="4343400" cy="1572768"/>
           </ns1:xfrm>
           <ns1:prstGeom prst="roundRect">
             <ns1:avLst>
@@ -5517,7 +5475,7 @@
         </ns0:nvSpPr>
         <ns0:spPr>
           <ns1:xfrm>
-            <ns1:off x="3412927" y="1736675"/>
+            <ns1:off x="4491919" y="1764107"/>
             <ns1:ext cx="381000" cy="381000"/>
           </ns1:xfrm>
           <ns1:prstGeom prst="roundRect">
@@ -5563,7 +5521,7 @@
         </ns0:blipFill>
         <ns0:spPr>
           <ns1:xfrm>
-            <ns1:off x="3495526" y="1819275"/>
+            <ns1:off x="4574518" y="1846707"/>
             <ns1:ext cx="215801" cy="215801"/>
           </ns1:xfrm>
           <ns1:prstGeom prst="rect">
@@ -5579,7 +5537,7 @@
         </ns0:nvSpPr>
         <ns0:spPr>
           <ns1:xfrm>
-            <ns1:off x="3908227" y="1812875"/>
+            <ns1:off x="4987219" y="1840307"/>
             <ns1:ext cx="1282598" cy="228600"/>
           </ns1:xfrm>
           <ns1:prstGeom prst="rect">
@@ -5621,7 +5579,7 @@
         </ns0:nvSpPr>
         <ns0:spPr>
           <ns1:xfrm>
-            <ns1:off x="3412927" y="2273796"/>
+            <ns1:off x="4491919" y="2301228"/>
             <ns1:ext cx="57150" cy="57150"/>
           </ns1:xfrm>
           <ns1:prstGeom prst="roundRect">
@@ -5653,7 +5611,7 @@
         </ns0:nvSpPr>
         <ns0:spPr>
           <ns1:xfrm>
-            <ns1:off x="3571577" y="2193875"/>
+            <ns1:off x="4650569" y="2221307"/>
             <ns1:ext cx="1673343" cy="207020"/>
           </ns1:xfrm>
           <ns1:prstGeom prst="rect">
@@ -5695,7 +5653,7 @@
         </ns0:nvSpPr>
         <ns0:spPr>
           <ns1:xfrm>
-            <ns1:off x="3412927" y="2544217"/>
+            <ns1:off x="4491919" y="2571649"/>
             <ns1:ext cx="57150" cy="57150"/>
           </ns1:xfrm>
           <ns1:prstGeom prst="roundRect">
@@ -5727,7 +5685,7 @@
         </ns0:nvSpPr>
         <ns0:spPr>
           <ns1:xfrm>
-            <ns1:off x="3571577" y="2464296"/>
+            <ns1:off x="4650569" y="2491728"/>
             <ns1:ext cx="1975283" cy="207020"/>
           </ns1:xfrm>
           <ns1:prstGeom prst="rect">
@@ -5769,7 +5727,7 @@
         </ns0:nvSpPr>
         <ns0:spPr>
           <ns1:xfrm>
-            <ns1:off x="3412927" y="2814638"/>
+            <ns1:off x="4491919" y="2842070"/>
             <ns1:ext cx="57150" cy="57150"/>
           </ns1:xfrm>
           <ns1:prstGeom prst="roundRect">
@@ -5801,8 +5759,8 @@
         </ns0:nvSpPr>
         <ns0:spPr>
           <ns1:xfrm>
-            <ns1:off x="3571577" y="2734717"/>
-            <ns1:ext cx="2254300" cy="414040"/>
+            <ns1:off x="4650569" y="2762149"/>
+            <ns1:ext cx="3657600" cy="210312"/>
           </ns1:xfrm>
           <ns1:prstGeom prst="rect">
             <ns1:avLst/>
@@ -5843,8 +5801,8 @@
         </ns0:nvSpPr>
         <ns0:spPr>
           <ns1:xfrm>
-            <ns1:off x="3251002" y="3869680"/>
-            <ns1:ext cx="2692598" cy="702171"/>
+            <ns1:off x="4329994" y="3330184"/>
+            <ns1:ext cx="4343400" cy="702171"/>
           </ns1:xfrm>
           <ns1:prstGeom prst="roundRect">
             <ns1:avLst>
@@ -5893,7 +5851,7 @@
         </ns0:blipFill>
         <ns0:spPr>
           <ns1:xfrm>
-            <ns1:off x="3438227" y="4119116"/>
+            <ns1:off x="4517219" y="3579620"/>
             <ns1:ext cx="203150" cy="203150"/>
           </ns1:xfrm>
           <ns1:prstGeom prst="rect">
@@ -5909,8 +5867,8 @@
         </ns0:nvSpPr>
         <ns0:spPr>
           <ns1:xfrm>
-            <ns1:off x="3768328" y="4006155"/>
-            <ns1:ext cx="2027807" cy="429220"/>
+            <ns1:off x="4847320" y="3466659"/>
+            <ns1:ext cx="3657600" cy="429220"/>
           </ns1:xfrm>
           <ns1:prstGeom prst="rect">
             <ns1:avLst/>
@@ -5919,7 +5877,7 @@
           <ns1:ln/>
         </ns0:spPr>
         <ns0:txBody>
-          <ns1:bodyPr wrap="square" lIns="0" tIns="0" rIns="0" bIns="0" rtlCol="0" anchor="t"/>
+          <ns1:bodyPr wrap="square" lIns="0" tIns="0" rIns="0" bIns="0" rtlCol="0" anchor="ctr"/>
           <ns1:lstStyle/>
           <ns1:p>
             <ns1:pPr algn="l" indent="0" marL="0">
@@ -5943,73 +5901,6 @@
           </ns1:p>
         </ns0:txBody>
       </ns0:sp>
-      <ns0:sp>
-        <ns0:nvSpPr>
-          <ns0:cNvPr id="24" name="Text 17"/>
-          <ns0:cNvSpPr/>
-          <ns0:nvPr/>
-        </ns0:nvSpPr>
-        <ns0:spPr>
-          <ns1:xfrm>
-            <ns1:off x="6149876" y="1775966"/>
-            <ns1:ext cx="2482751" cy="2594521"/>
-          </ns1:xfrm>
-          <ns1:prstGeom prst="roundRect">
-            <ns1:avLst>
-              <ns1:gd name="adj" fmla="val 3069"/>
-            </ns1:avLst>
-          </ns1:prstGeom>
-          <ns1:solidFill>
-            <ns1:srgbClr val="FFFFFF"/>
-          </ns1:solidFill>
-          <ns1:ln w="9525">
-            <ns1:solidFill>
-              <ns1:srgbClr val="D1D9E0"/>
-            </ns1:solidFill>
-          </ns1:ln>
-          <ns1:effectLst>
-            <ns1:outerShdw sx="100000" sy="100000" kx="0" ky="0" algn="bl" rotWithShape="0" blurRad="38100" dist="9525" dir="5400000">
-              <ns1:srgbClr val="1f2328">
-                <ns1:alpha val="12000"/>
-              </ns1:srgbClr>
-            </ns1:outerShdw>
-          </ns1:effectLst>
-        </ns0:spPr>
-        <ns0:txBody>
-          <ns1:bodyPr wrap="square" rtlCol="0" anchor="ctr"/>
-          <ns1:lstStyle/>
-          <ns1:p>
-            <ns1:pPr indent="0" marL="0">
-              <ns1:buNone/>
-            </ns1:pPr>
-            <ns1:endParaRPr lang="en-US" dirty="0"/>
-          </ns1:p>
-        </ns0:txBody>
-      </ns0:sp>
-      <ns0:pic>
-        <ns0:nvPicPr>
-          <ns0:cNvPr id="25" name="Image 5" descr="Cloud automation Tools selector with Read PR, List PRs, and Search PRs selected, showing 3 tools selected while write tools such as Create PR are cleared"/>
-          <ns0:cNvPicPr>
-            <ns1:picLocks noChangeAspect="1"/>
-          </ns0:cNvPicPr>
-          <ns0:nvPr/>
-        </ns0:nvPicPr>
-        <ns0:blipFill>
-          <ns1:blip ns3:embed="rId7"/>
-          <ns1:stretch>
-            <ns1:fillRect/>
-          </ns1:stretch>
-        </ns0:blipFill>
-        <ns0:spPr>
-          <ns1:xfrm>
-            <ns1:off x="6197501" y="1823591"/>
-            <ns1:ext cx="2387501" cy="2499271"/>
-          </ns1:xfrm>
-          <ns1:prstGeom prst="rect">
-            <ns1:avLst/>
-          </ns1:prstGeom>
-        </ns0:spPr>
-      </ns0:pic>
     </ns0:spTree>
   </ns0:cSld>
   <ns0:clrMapOvr>
@@ -7456,7 +7347,7 @@
         </p:nvSpPr>
         <p:spPr>
           <a:xfrm>
-            <a:off x="507950" y="1924050"/>
+            <a:off x="507950" y="2061210"/>
             <a:ext cx="2590800" cy="1060252"/>
           </a:xfrm>
           <a:prstGeom prst="roundRect">
@@ -7492,7 +7383,7 @@
         </p:nvSpPr>
         <p:spPr>
           <a:xfrm>
-            <a:off x="695176" y="2263676"/>
+            <a:off x="695176" y="2395728"/>
             <a:ext cx="381000" cy="381000"/>
           </a:xfrm>
           <a:prstGeom prst="roundRect">
@@ -7538,7 +7429,7 @@
         </p:blipFill>
         <p:spPr>
           <a:xfrm>
-            <a:off x="777776" y="2346275"/>
+            <a:off x="777776" y="2478024"/>
             <a:ext cx="215801" cy="215801"/>
           </a:xfrm>
           <a:prstGeom prst="rect">
@@ -7554,8 +7445,8 @@
         </p:nvSpPr>
         <p:spPr>
           <a:xfrm>
-            <a:off x="1190476" y="2111276"/>
-            <a:ext cx="1755469" cy="685800"/>
+            <a:off x="1190476" y="2167128"/>
+            <a:ext cx="1755469" cy="841248"/>
           </a:xfrm>
           <a:prstGeom prst="rect">
             <a:avLst/>
@@ -7564,7 +7455,7 @@
           <a:ln/>
         </p:spPr>
         <p:txBody>
-          <a:bodyPr wrap="square" lIns="0" tIns="0" rIns="0" bIns="0" rtlCol="0" anchor="t"/>
+          <a:bodyPr wrap="square" lIns="0" tIns="0" rIns="0" bIns="0" rtlCol="0" anchor="ctr"/>
           <a:lstStyle/>
           <a:p>
             <a:pPr algn="l" indent="0" marL="0">
@@ -7582,7 +7473,7 @@
                 <a:ea typeface="Arial" pitchFamily="34" charset="-122"/>
                 <a:cs typeface="Arial" pitchFamily="34" charset="-120"/>
               </a:rPr>
-              <a:t>Before implementation starts</a:t>
+              <a:t>Before implementation</a:t>
             </a:r>
             <a:endParaRPr lang="en-US" sz="1650" dirty="0"/>
           </a:p>
@@ -7596,7 +7487,7 @@
         </p:nvSpPr>
         <p:spPr>
           <a:xfrm>
-            <a:off x="3276451" y="1924050"/>
+            <a:off x="3276451" y="2061210"/>
             <a:ext cx="2590949" cy="1060252"/>
           </a:xfrm>
           <a:prstGeom prst="roundRect">
@@ -7632,7 +7523,7 @@
         </p:nvSpPr>
         <p:spPr>
           <a:xfrm>
-            <a:off x="3463677" y="2149376"/>
+            <a:off x="3463677" y="2395728"/>
             <a:ext cx="381000" cy="381000"/>
           </a:xfrm>
           <a:prstGeom prst="roundRect">
@@ -7678,7 +7569,7 @@
         </p:blipFill>
         <p:spPr>
           <a:xfrm>
-            <a:off x="3546277" y="2231975"/>
+            <a:off x="3546277" y="2478024"/>
             <a:ext cx="215801" cy="215801"/>
           </a:xfrm>
           <a:prstGeom prst="rect">
@@ -7694,8 +7585,8 @@
         </p:nvSpPr>
         <p:spPr>
           <a:xfrm>
-            <a:off x="3958977" y="2111276"/>
-            <a:ext cx="1755621" cy="457200"/>
+            <a:off x="3958977" y="2167128"/>
+            <a:ext cx="1755621" cy="841248"/>
           </a:xfrm>
           <a:prstGeom prst="rect">
             <a:avLst/>
@@ -7704,7 +7595,7 @@
           <a:ln/>
         </p:spPr>
         <p:txBody>
-          <a:bodyPr wrap="square" lIns="0" tIns="0" rIns="0" bIns="0" rtlCol="0" anchor="t"/>
+          <a:bodyPr wrap="square" lIns="0" tIns="0" rIns="0" bIns="0" rtlCol="0" anchor="ctr"/>
           <a:lstStyle/>
           <a:p>
             <a:pPr algn="l" indent="0" marL="0">
@@ -7736,7 +7627,7 @@
         </p:nvSpPr>
         <p:spPr>
           <a:xfrm>
-            <a:off x="6045101" y="1924050"/>
+            <a:off x="6045101" y="2061210"/>
             <a:ext cx="2590800" cy="1060252"/>
           </a:xfrm>
           <a:prstGeom prst="roundRect">
@@ -7772,7 +7663,7 @@
         </p:nvSpPr>
         <p:spPr>
           <a:xfrm>
-            <a:off x="6232327" y="2263676"/>
+            <a:off x="6232327" y="2395728"/>
             <a:ext cx="381000" cy="381000"/>
           </a:xfrm>
           <a:prstGeom prst="roundRect">
@@ -7818,7 +7709,7 @@
         </p:blipFill>
         <p:spPr>
           <a:xfrm>
-            <a:off x="6314926" y="2346275"/>
+            <a:off x="6314926" y="2478024"/>
             <a:ext cx="215801" cy="215801"/>
           </a:xfrm>
           <a:prstGeom prst="rect">
@@ -7834,8 +7725,8 @@
         </p:nvSpPr>
         <p:spPr>
           <a:xfrm>
-            <a:off x="6727627" y="2111276"/>
-            <a:ext cx="1755469" cy="685800"/>
+            <a:off x="6727627" y="2167128"/>
+            <a:ext cx="1755469" cy="841248"/>
           </a:xfrm>
           <a:prstGeom prst="rect">
             <a:avLst/>
@@ -7844,7 +7735,7 @@
           <a:ln/>
         </p:spPr>
         <p:txBody>
-          <a:bodyPr wrap="square" lIns="0" tIns="0" rIns="0" bIns="0" rtlCol="0" anchor="t"/>
+          <a:bodyPr wrap="square" lIns="0" tIns="0" rIns="0" bIns="0" rtlCol="0" anchor="ctr"/>
           <a:lstStyle/>
           <a:p>
             <a:pPr algn="l" indent="0" marL="0">
@@ -7862,7 +7753,7 @@
                 <a:ea typeface="Arial" pitchFamily="34" charset="-122"/>
                 <a:cs typeface="Arial" pitchFamily="34" charset="-120"/>
               </a:rPr>
-              <a:t>Before any merge automation</a:t>
+              <a:t>Before merge automation</a:t>
             </a:r>
             <a:endParaRPr lang="en-US" sz="1650" dirty="0"/>
           </a:p>
@@ -7876,7 +7767,7 @@
         </p:nvSpPr>
         <p:spPr>
           <a:xfrm>
-            <a:off x="507950" y="3263652"/>
+            <a:off x="507950" y="3473964"/>
             <a:ext cx="8290509" cy="515541"/>
           </a:xfrm>
           <a:prstGeom prst="rect">
@@ -7907,72 +7798,6 @@
               <a:t>Practice on small, real issues first. Add advanced workflows as the work stays validated and reviewable.</a:t>
             </a:r>
             <a:endParaRPr lang="en-US" sz="1650" dirty="0"/>
-          </a:p>
-        </p:txBody>
-      </p:sp>
-      <p:sp>
-        <p:nvSpPr>
-          <p:cNvPr id="22" name="Text 15"/>
-          <p:cNvSpPr/>
-          <p:nvPr/>
-        </p:nvSpPr>
-        <p:spPr>
-          <a:xfrm>
-            <a:off x="507950" y="4058543"/>
-            <a:ext cx="8290509" cy="240060"/>
-          </a:xfrm>
-          <a:prstGeom prst="rect">
-            <a:avLst/>
-          </a:prstGeom>
-          <a:noFill/>
-          <a:ln/>
-        </p:spPr>
-        <p:txBody>
-          <a:bodyPr wrap="square" lIns="0" tIns="0" rIns="0" bIns="0" rtlCol="0" anchor="t"/>
-          <a:lstStyle/>
-          <a:p>
-            <a:pPr algn="l" indent="0" marL="0">
-              <a:lnSpc>
-                <a:spcPts val="1890"/>
-              </a:lnSpc>
-              <a:buNone/>
-            </a:pPr>
-            <a:r>
-              <a:rPr lang="en-US" sz="1550" dirty="0">
-                <a:solidFill>
-                  <a:srgbClr val="59636E"/>
-                </a:solidFill>
-                <a:latin typeface="Arial" pitchFamily="34" charset="0"/>
-                <a:ea typeface="Arial" pitchFamily="34" charset="-122"/>
-                <a:cs typeface="Arial" pitchFamily="34" charset="-120"/>
-              </a:rPr>
-              <a:t>Keep learning: </a:t>
-            </a:r>
-            <a:pPr algn="l" indent="0" marL="0">
-              <a:lnSpc>
-                <a:spcPts val="1890"/>
-              </a:lnSpc>
-              <a:buNone/>
-            </a:pPr>
-            <a:r>
-              <a:rPr lang="en-US" sz="1550" b="1" u="sng" dirty="0">
-                <a:solidFill>
-                  <a:srgbClr val="0969DA"/>
-                </a:solidFill>
-                <a:latin typeface="Arial" pitchFamily="34" charset="0"/>
-                <a:ea typeface="Arial" pitchFamily="34" charset="-122"/>
-                <a:cs typeface="Arial" pitchFamily="34" charset="-120"/>
-                <a:hlinkClick r:id="rId7" invalidUrl="" action="" tgtFrame="" tooltip="https://github.com/github/copilot-app-for-beginners" history="1" highlightClick="0" endSnd="0">
-                  <a:extLst>
-                    <a:ext uri="{A12FA001-AC4F-418D-AE19-62706E023703}">
-                      <ahyp:hlinkClr xmlns:ahyp="http://schemas.microsoft.com/office/drawing/2018/hyperlinkcolor" val="tx"/>
-                    </a:ext>
-                  </a:extLst>
-                </a:hlinkClick>
-              </a:rPr>
-              <a:t>github.com/github/copilot-app-for-beginners</a:t>
-            </a:r>
-            <a:endParaRPr lang="en-US" sz="1550" dirty="0"/>
           </a:p>
         </p:txBody>
       </p:sp>
@@ -10327,7 +10152,7 @@
         </p:nvSpPr>
         <p:spPr>
           <a:xfrm>
-            <a:off x="711101" y="1279773"/>
+            <a:off x="711101" y="1645533"/>
             <a:ext cx="5570169" cy="209550"/>
           </a:xfrm>
           <a:prstGeom prst="rect">
@@ -10366,7 +10191,7 @@
         </p:nvSpPr>
         <p:spPr>
           <a:xfrm>
-            <a:off x="711101" y="1590824"/>
+            <a:off x="711101" y="1956584"/>
             <a:ext cx="5570169" cy="1168301"/>
           </a:xfrm>
           <a:prstGeom prst="rect">
@@ -10411,7 +10236,7 @@
         </p:nvSpPr>
         <p:spPr>
           <a:xfrm>
-            <a:off x="711101" y="2962275"/>
+            <a:off x="711101" y="3328035"/>
             <a:ext cx="609600" cy="63401"/>
           </a:xfrm>
           <a:prstGeom prst="roundRect">
@@ -10432,48 +10257,6 @@
               <a:buNone/>
             </a:pPr>
             <a:endParaRPr lang="en-US" dirty="0"/>
-          </a:p>
-        </p:txBody>
-      </p:sp>
-      <p:sp>
-        <p:nvSpPr>
-          <p:cNvPr id="12" name="Text 8"/>
-          <p:cNvSpPr/>
-          <p:nvPr/>
-        </p:nvSpPr>
-        <p:spPr>
-          <a:xfrm>
-            <a:off x="711101" y="3228826"/>
-            <a:ext cx="5570169" cy="634901"/>
-          </a:xfrm>
-          <a:prstGeom prst="rect">
-            <a:avLst/>
-          </a:prstGeom>
-          <a:noFill/>
-          <a:ln/>
-        </p:spPr>
-        <p:txBody>
-          <a:bodyPr wrap="square" lIns="0" tIns="0" rIns="0" bIns="0" rtlCol="0" anchor="t"/>
-          <a:lstStyle/>
-          <a:p>
-            <a:pPr algn="l" indent="0" marL="0">
-              <a:lnSpc>
-                <a:spcPts val="2500"/>
-              </a:lnSpc>
-              <a:buNone/>
-            </a:pPr>
-            <a:r>
-              <a:rPr lang="en-US" sz="1900" dirty="0">
-                <a:solidFill>
-                  <a:srgbClr val="59636E"/>
-                </a:solidFill>
-                <a:latin typeface="Arial" pitchFamily="34" charset="0"/>
-                <a:ea typeface="Arial" pitchFamily="34" charset="-122"/>
-                <a:cs typeface="Arial" pitchFamily="34" charset="-120"/>
-              </a:rPr>
-              <a:t>Every automation is a saved prompt with a trigger, tools, and a place to review it.</a:t>
-            </a:r>
-            <a:endParaRPr lang="en-US" sz="1900" dirty="0"/>
           </a:p>
         </p:txBody>
       </p:sp>
@@ -13280,7 +13063,7 @@
         </p:nvSpPr>
         <p:spPr>
           <a:xfrm>
-            <a:off x="711101" y="1279773"/>
+            <a:off x="711101" y="1645533"/>
             <a:ext cx="5570169" cy="209550"/>
           </a:xfrm>
           <a:prstGeom prst="rect">
@@ -13319,7 +13102,7 @@
         </p:nvSpPr>
         <p:spPr>
           <a:xfrm>
-            <a:off x="711101" y="1590824"/>
+            <a:off x="711101" y="1956584"/>
             <a:ext cx="5570169" cy="1168301"/>
           </a:xfrm>
           <a:prstGeom prst="rect">
@@ -13364,7 +13147,7 @@
         </p:nvSpPr>
         <p:spPr>
           <a:xfrm>
-            <a:off x="711101" y="2962275"/>
+            <a:off x="711101" y="3328035"/>
             <a:ext cx="609600" cy="63401"/>
           </a:xfrm>
           <a:prstGeom prst="roundRect">
@@ -13385,48 +13168,6 @@
               <a:buNone/>
             </a:pPr>
             <a:endParaRPr lang="en-US" dirty="0"/>
-          </a:p>
-        </p:txBody>
-      </p:sp>
-      <p:sp>
-        <p:nvSpPr>
-          <p:cNvPr id="12" name="Text 8"/>
-          <p:cNvSpPr/>
-          <p:nvPr/>
-        </p:nvSpPr>
-        <p:spPr>
-          <a:xfrm>
-            <a:off x="711101" y="3228826"/>
-            <a:ext cx="5570169" cy="634901"/>
-          </a:xfrm>
-          <a:prstGeom prst="rect">
-            <a:avLst/>
-          </a:prstGeom>
-          <a:noFill/>
-          <a:ln/>
-        </p:spPr>
-        <p:txBody>
-          <a:bodyPr wrap="square" lIns="0" tIns="0" rIns="0" bIns="0" rtlCol="0" anchor="t"/>
-          <a:lstStyle/>
-          <a:p>
-            <a:pPr algn="l" indent="0" marL="0">
-              <a:lnSpc>
-                <a:spcPts val="2500"/>
-              </a:lnSpc>
-              <a:buNone/>
-            </a:pPr>
-            <a:r>
-              <a:rPr lang="en-US" sz="1900" dirty="0">
-                <a:solidFill>
-                  <a:srgbClr val="59636E"/>
-                </a:solidFill>
-                <a:latin typeface="Arial" pitchFamily="34" charset="0"/>
-                <a:ea typeface="Arial" pitchFamily="34" charset="-122"/>
-                <a:cs typeface="Arial" pitchFamily="34" charset="-120"/>
-              </a:rPr>
-              <a:t>Which PRs are ready to merge, and what is blocking the rest?</a:t>
-            </a:r>
-            <a:endParaRPr lang="en-US" sz="1900" dirty="0"/>
           </a:p>
         </p:txBody>
       </p:sp>

--- a/slides/07-automations.pptx
+++ b/slides/07-automations.pptx
@@ -605,7 +605,7 @@
           <ns1:p>
             <ns1:r>
               <ns1:rPr lang="en-US" dirty="0"/>
-              <ns1:t>A manual automation answers what is the status right now. A scheduled one answers what changed since yesterday. This automation is local, so it runs only when your computer is awake and the app is running. Open it, select Edit, change the trigger to Daily, and choose 08:00 in Hours. Hours can have more than one time selected. Clear any other selected hours, including the default 09:00, so only 08:00 remains. Keep Minute at 00, confirm the repository, and save. Check the Daily label, schedule, and Next run time. The app also supports Hourly, Weekly, and CRON.</ns1:t>
+              <ns1:t>A daily schedule runs the saved prompt automatically. To compare with a previous run, include that request in the prompt. This automation is local, so it runs only when your computer is awake and the app is running. Open it, select Edit, change the trigger to Daily, and choose 08:00 in Hours. Hours can have more than one time selected. Clear any other selected hours, including the default 09:00, so only 08:00 remains. Keep Minute at 00, confirm the repository, and save. Check the Daily label, schedule, and Next run time. The app also supports Hourly, Weekly, and CRON.</ns1:t>
             </ns1:r>
             <ns1:endParaRPr lang="en-US" dirty="0"/>
           </ns1:p>
@@ -2751,8 +2751,8 @@
         </ns0:nvSpPr>
         <ns0:spPr>
           <ns1:xfrm>
-            <ns1:off x="1302395" y="1450777"/>
-            <ns1:ext cx="2221111" cy="2990850"/>
+            <ns1:off x="557784" y="1892808"/>
+            <ns1:ext cx="3794760" cy="1806085"/>
           </ns1:xfrm>
           <ns1:prstGeom prst="roundRect">
             <ns1:avLst>
@@ -2788,22 +2788,22 @@
       </ns0:sp>
       <ns0:pic>
         <ns0:nvPicPr>
-          <ns0:cNvPr id="9" name="Image 2" descr="Automation trigger options in the new-automation form"/>
+          <ns0:cNvPr id="9" name="Image 2" descr="Saved automation details showing Daily at 8:00 AM and the next run time."/>
           <ns0:cNvPicPr>
             <ns1:picLocks noChangeAspect="1"/>
           </ns0:cNvPicPr>
           <ns0:nvPr/>
         </ns0:nvPicPr>
         <ns0:blipFill>
-          <ns1:blip ns3:embed="rId4"/>
+          <ns1:blip ns3:embed="rId7"/>
           <ns1:stretch>
             <ns1:fillRect/>
           </ns1:stretch>
         </ns0:blipFill>
         <ns0:spPr>
           <ns1:xfrm>
-            <ns1:off x="1350020" y="1498402"/>
-            <ns1:ext cx="2125861" cy="2895600"/>
+            <ns1:off x="603504" y="1938528"/>
+            <ns1:ext cx="3703320" cy="1714645"/>
           </ns1:xfrm>
           <ns1:prstGeom prst="rect">
             <ns1:avLst/>
@@ -2818,8 +2818,8 @@
         </ns0:nvSpPr>
         <ns0:spPr>
           <ns1:xfrm>
-            <ns1:off x="4571851" y="1522214"/>
-            <ns1:ext cx="1968550" cy="901601"/>
+            <ns1:off x="4572000" y="1481328"/>
+            <ns1:ext cx="4059936" cy="859536"/>
           </ns1:xfrm>
           <ns1:prstGeom prst="roundRect">
             <ns1:avLst>
@@ -2854,8 +2854,8 @@
         </ns0:nvSpPr>
         <ns0:spPr>
           <ns1:xfrm>
-            <ns1:off x="4733776" y="1658689"/>
-            <ns1:ext cx="1677594" cy="419100"/>
+            <ns1:off x="4736592" y="1636776"/>
+            <ns1:ext cx="3712464" cy="548640"/>
           </ns1:xfrm>
           <ns1:prstGeom prst="rect">
             <ns1:avLst/>
@@ -2871,7 +2871,7 @@
               <ns1:buNone/>
             </ns1:pPr>
             <ns1:r>
-              <ns1:rPr lang="en-US" sz="1450" b="1" dirty="0">
+              <ns1:rPr lang="en-US" sz="1650" b="1" dirty="0">
                 <ns1:solidFill>
                   <ns1:srgbClr val="1F2328"/>
                 </ns1:solidFill>
@@ -2879,82 +2879,7 @@
                 <ns1:ea typeface="Arial" pitchFamily="34" charset="-122"/>
                 <ns1:cs typeface="Arial" pitchFamily="34" charset="-120"/>
               </ns1:rPr>
-              <ns1:t>Manual: "What is the status now?"</ns1:t>
-            </ns1:r>
-            <ns1:endParaRPr lang="en-US" sz="1450" dirty="0"/>
-          </ns1:p>
-        </ns0:txBody>
-      </ns0:sp>
-      <ns0:sp>
-        <ns0:nvSpPr>
-          <ns0:cNvPr id="12" name="Text 7"/>
-          <ns0:cNvSpPr/>
-          <ns0:nvPr/>
-        </ns0:nvSpPr>
-        <ns0:spPr>
-          <ns1:xfrm>
-            <ns1:off x="6667351" y="1522214"/>
-            <ns1:ext cx="1968550" cy="901601"/>
-          </ns1:xfrm>
-          <ns1:prstGeom prst="roundRect">
-            <ns1:avLst>
-              <ns1:gd name="adj" fmla="val 14086"/>
-            </ns1:avLst>
-          </ns1:prstGeom>
-          <ns1:solidFill>
-            <ns1:srgbClr val="DAFBE1"/>
-          </ns1:solidFill>
-          <ns1:ln w="9525">
-            <ns1:solidFill>
-              <ns1:srgbClr val="8CE7A5"/>
-            </ns1:solidFill>
-          </ns1:ln>
-        </ns0:spPr>
-        <ns0:txBody>
-          <ns1:bodyPr wrap="square" rtlCol="0" anchor="ctr"/>
-          <ns1:lstStyle/>
-          <ns1:p>
-            <ns1:pPr indent="0" marL="0">
-              <ns1:buNone/>
-            </ns1:pPr>
-            <ns1:endParaRPr lang="en-US" dirty="0"/>
-          </ns1:p>
-        </ns0:txBody>
-      </ns0:sp>
-      <ns0:sp>
-        <ns0:nvSpPr>
-          <ns0:cNvPr id="13" name="Text 8"/>
-          <ns0:cNvSpPr/>
-          <ns0:nvPr/>
-        </ns0:nvSpPr>
-        <ns0:spPr>
-          <ns1:xfrm>
-            <ns1:off x="6829276" y="1658689"/>
-            <ns1:ext cx="1677594" cy="628650"/>
-          </ns1:xfrm>
-          <ns1:prstGeom prst="rect">
-            <ns1:avLst/>
-          </ns1:prstGeom>
-          <ns1:noFill/>
-          <ns1:ln/>
-        </ns0:spPr>
-        <ns0:txBody>
-          <ns1:bodyPr wrap="square" lIns="0" tIns="0" rIns="0" bIns="0" rtlCol="0" anchor="t"/>
-          <ns1:lstStyle/>
-          <ns1:p>
-            <ns1:pPr algn="l" indent="0" marL="0">
-              <ns1:buNone/>
-            </ns1:pPr>
-            <ns1:r>
-              <ns1:rPr lang="en-US" sz="1450" b="1" dirty="0">
-                <ns1:solidFill>
-                  <ns1:srgbClr val="1F2328"/>
-                </ns1:solidFill>
-                <ns1:latin typeface="Arial" pitchFamily="34" charset="0"/>
-                <ns1:ea typeface="Arial" pitchFamily="34" charset="-122"/>
-                <ns1:cs typeface="Arial" pitchFamily="34" charset="-120"/>
-              </ns1:rPr>
-              <ns1:t>Daily: "What changed since yesterday?"</ns1:t>
+              <ns1:t>Select only 08:00. Clear other selected hours.</ns1:t>
             </ns1:r>
             <ns1:endParaRPr lang="en-US" sz="1450" dirty="0"/>
           </ns1:p>
@@ -3081,8 +3006,8 @@
         </ns0:nvSpPr>
         <ns0:spPr>
           <ns1:xfrm>
-            <ns1:off x="5003602" y="2874466"/>
-            <ns1:ext cx="2051337" cy="198090"/>
+            <ns1:off x="5001768" y="2871216"/>
+            <ns1:ext cx="3474720" cy="274320"/>
           </ns1:xfrm>
           <ns1:prstGeom prst="rect">
             <ns1:avLst/>
@@ -11430,7 +11355,7 @@
                 <a:ea typeface="Arial" pitchFamily="34" charset="-122"/>
                 <a:cs typeface="Arial" pitchFamily="34" charset="-120"/>
               </a:rPr>
-              <a:t>Four parts of an automation</a:t>
+              <a:t>How an automation runs</a:t>
             </a:r>
             <a:endParaRPr lang="en-US" sz="2800" dirty="0"/>
           </a:p>
@@ -11444,8 +11369,8 @@
         </p:nvSpPr>
         <p:spPr>
           <a:xfrm>
-            <a:off x="511076" y="1633091"/>
-            <a:ext cx="3549551" cy="2397621"/>
+            <a:off x="2023110" y="1234440"/>
+            <a:ext cx="5097780" cy="3429000"/>
           </a:xfrm>
           <a:prstGeom prst="roundRect">
             <a:avLst>
@@ -11495,586 +11420,14 @@
         </p:blipFill>
         <p:spPr>
           <a:xfrm>
-            <a:off x="558701" y="1680716"/>
-            <a:ext cx="3454301" cy="2302371"/>
+            <a:off x="2068830" y="1280160"/>
+            <a:ext cx="5006340" cy="3337560"/>
           </a:xfrm>
           <a:prstGeom prst="rect">
             <a:avLst/>
           </a:prstGeom>
         </p:spPr>
       </p:pic>
-      <p:sp>
-        <p:nvSpPr>
-          <p:cNvPr id="10" name="Text 5"/>
-          <p:cNvSpPr/>
-          <p:nvPr/>
-        </p:nvSpPr>
-        <p:spPr>
-          <a:xfrm>
-            <a:off x="4419451" y="1734889"/>
-            <a:ext cx="381000" cy="381000"/>
-          </a:xfrm>
-          <a:prstGeom prst="roundRect">
-            <a:avLst>
-              <a:gd name="adj" fmla="val 23333"/>
-            </a:avLst>
-          </a:prstGeom>
-          <a:solidFill>
-            <a:srgbClr val="DDF4FF"/>
-          </a:solidFill>
-          <a:ln/>
-        </p:spPr>
-        <p:txBody>
-          <a:bodyPr wrap="square" rtlCol="0" anchor="ctr"/>
-          <a:lstStyle/>
-          <a:p>
-            <a:pPr indent="0" marL="0">
-              <a:buNone/>
-            </a:pPr>
-            <a:endParaRPr lang="en-US" dirty="0"/>
-          </a:p>
-        </p:txBody>
-      </p:sp>
-      <p:pic>
-        <p:nvPicPr>
-          <p:cNvPr id="11" name="Image 3" descr="">
-            <a:extLst>
-              <a:ext uri="{C183D7F6-B498-43B3-948B-1728B52AA6E4}">
-                <adec:decorative xmlns:adec="http://schemas.microsoft.com/office/drawing/2017/decorative" val="1"/>
-              </a:ext>
-            </a:extLst>
-          </p:cNvPr>
-          <p:cNvPicPr>
-            <a:picLocks noChangeAspect="1"/>
-          </p:cNvPicPr>
-          <p:nvPr/>
-        </p:nvPicPr>
-        <p:blipFill>
-          <a:blip r:embed="rId5"/>
-          <a:stretch>
-            <a:fillRect/>
-          </a:stretch>
-        </p:blipFill>
-        <p:spPr>
-          <a:xfrm>
-            <a:off x="4502051" y="1817489"/>
-            <a:ext cx="215801" cy="215801"/>
-          </a:xfrm>
-          <a:prstGeom prst="rect">
-            <a:avLst/>
-          </a:prstGeom>
-        </p:spPr>
-      </p:pic>
-      <p:sp>
-        <p:nvSpPr>
-          <p:cNvPr id="12" name="Text 6"/>
-          <p:cNvSpPr/>
-          <p:nvPr/>
-        </p:nvSpPr>
-        <p:spPr>
-          <a:xfrm>
-            <a:off x="4952851" y="1699468"/>
-            <a:ext cx="1117586" cy="228600"/>
-          </a:xfrm>
-          <a:prstGeom prst="rect">
-            <a:avLst/>
-          </a:prstGeom>
-          <a:noFill/>
-          <a:ln/>
-        </p:spPr>
-        <p:txBody>
-          <a:bodyPr wrap="square" lIns="0" tIns="0" rIns="0" bIns="0" rtlCol="0" anchor="t"/>
-          <a:lstStyle/>
-          <a:p>
-            <a:pPr algn="l" indent="0" marL="0">
-              <a:buNone/>
-            </a:pPr>
-            <a:r>
-              <a:rPr lang="en-US" sz="1550" b="1" dirty="0">
-                <a:solidFill>
-                  <a:srgbClr val="1F2328"/>
-                </a:solidFill>
-                <a:latin typeface="Arial" pitchFamily="34" charset="0"/>
-                <a:ea typeface="Arial" pitchFamily="34" charset="-122"/>
-                <a:cs typeface="Arial" pitchFamily="34" charset="-120"/>
-              </a:rPr>
-              <a:t>Trigger</a:t>
-            </a:r>
-            <a:endParaRPr lang="en-US" sz="1550" dirty="0"/>
-          </a:p>
-        </p:txBody>
-      </p:sp>
-      <p:sp>
-        <p:nvSpPr>
-          <p:cNvPr id="13" name="Text 7"/>
-          <p:cNvSpPr/>
-          <p:nvPr/>
-        </p:nvSpPr>
-        <p:spPr>
-          <a:xfrm>
-            <a:off x="4952851" y="1953369"/>
-            <a:ext cx="1117586" cy="198090"/>
-          </a:xfrm>
-          <a:prstGeom prst="rect">
-            <a:avLst/>
-          </a:prstGeom>
-          <a:noFill/>
-          <a:ln/>
-        </p:spPr>
-        <p:txBody>
-          <a:bodyPr wrap="square" lIns="0" tIns="0" rIns="0" bIns="0" rtlCol="0" anchor="t"/>
-          <a:lstStyle/>
-          <a:p>
-            <a:pPr algn="l" indent="0" marL="0">
-              <a:lnSpc>
-                <a:spcPts val="1560"/>
-              </a:lnSpc>
-              <a:buNone/>
-            </a:pPr>
-            <a:r>
-              <a:rPr lang="en-US" sz="1350" dirty="0">
-                <a:solidFill>
-                  <a:srgbClr val="59636E"/>
-                </a:solidFill>
-                <a:latin typeface="Arial" pitchFamily="34" charset="0"/>
-                <a:ea typeface="Arial" pitchFamily="34" charset="-122"/>
-                <a:cs typeface="Arial" pitchFamily="34" charset="-120"/>
-              </a:rPr>
-              <a:t>What starts it?</a:t>
-            </a:r>
-            <a:endParaRPr lang="en-US" sz="1350" dirty="0"/>
-          </a:p>
-        </p:txBody>
-      </p:sp>
-      <p:sp>
-        <p:nvSpPr>
-          <p:cNvPr id="14" name="Text 8"/>
-          <p:cNvSpPr/>
-          <p:nvPr/>
-        </p:nvSpPr>
-        <p:spPr>
-          <a:xfrm>
-            <a:off x="4419451" y="2390031"/>
-            <a:ext cx="381000" cy="381000"/>
-          </a:xfrm>
-          <a:prstGeom prst="roundRect">
-            <a:avLst>
-              <a:gd name="adj" fmla="val 23333"/>
-            </a:avLst>
-          </a:prstGeom>
-          <a:solidFill>
-            <a:srgbClr val="DDF4FF"/>
-          </a:solidFill>
-          <a:ln/>
-        </p:spPr>
-        <p:txBody>
-          <a:bodyPr wrap="square" rtlCol="0" anchor="ctr"/>
-          <a:lstStyle/>
-          <a:p>
-            <a:pPr indent="0" marL="0">
-              <a:buNone/>
-            </a:pPr>
-            <a:endParaRPr lang="en-US" dirty="0"/>
-          </a:p>
-        </p:txBody>
-      </p:sp>
-      <p:pic>
-        <p:nvPicPr>
-          <p:cNvPr id="15" name="Image 4" descr="">
-            <a:extLst>
-              <a:ext uri="{C183D7F6-B498-43B3-948B-1728B52AA6E4}">
-                <adec:decorative xmlns:adec="http://schemas.microsoft.com/office/drawing/2017/decorative" val="1"/>
-              </a:ext>
-            </a:extLst>
-          </p:cNvPr>
-          <p:cNvPicPr>
-            <a:picLocks noChangeAspect="1"/>
-          </p:cNvPicPr>
-          <p:nvPr/>
-        </p:nvPicPr>
-        <p:blipFill>
-          <a:blip r:embed="rId6"/>
-          <a:stretch>
-            <a:fillRect/>
-          </a:stretch>
-        </p:blipFill>
-        <p:spPr>
-          <a:xfrm>
-            <a:off x="4502051" y="2472630"/>
-            <a:ext cx="215801" cy="215801"/>
-          </a:xfrm>
-          <a:prstGeom prst="rect">
-            <a:avLst/>
-          </a:prstGeom>
-        </p:spPr>
-      </p:pic>
-      <p:sp>
-        <p:nvSpPr>
-          <p:cNvPr id="16" name="Text 9"/>
-          <p:cNvSpPr/>
-          <p:nvPr/>
-        </p:nvSpPr>
-        <p:spPr>
-          <a:xfrm>
-            <a:off x="4952851" y="2354610"/>
-            <a:ext cx="2090351" cy="228600"/>
-          </a:xfrm>
-          <a:prstGeom prst="rect">
-            <a:avLst/>
-          </a:prstGeom>
-          <a:noFill/>
-          <a:ln/>
-        </p:spPr>
-        <p:txBody>
-          <a:bodyPr wrap="square" lIns="0" tIns="0" rIns="0" bIns="0" rtlCol="0" anchor="t"/>
-          <a:lstStyle/>
-          <a:p>
-            <a:pPr algn="l" indent="0" marL="0">
-              <a:buNone/>
-            </a:pPr>
-            <a:r>
-              <a:rPr lang="en-US" sz="1550" b="1" dirty="0">
-                <a:solidFill>
-                  <a:srgbClr val="1F2328"/>
-                </a:solidFill>
-                <a:latin typeface="Arial" pitchFamily="34" charset="0"/>
-                <a:ea typeface="Arial" pitchFamily="34" charset="-122"/>
-                <a:cs typeface="Arial" pitchFamily="34" charset="-120"/>
-              </a:rPr>
-              <a:t>Prompt</a:t>
-            </a:r>
-            <a:endParaRPr lang="en-US" sz="1550" dirty="0"/>
-          </a:p>
-        </p:txBody>
-      </p:sp>
-      <p:sp>
-        <p:nvSpPr>
-          <p:cNvPr id="17" name="Text 10"/>
-          <p:cNvSpPr/>
-          <p:nvPr/>
-        </p:nvSpPr>
-        <p:spPr>
-          <a:xfrm>
-            <a:off x="4952851" y="2608511"/>
-            <a:ext cx="2090351" cy="198090"/>
-          </a:xfrm>
-          <a:prstGeom prst="rect">
-            <a:avLst/>
-          </a:prstGeom>
-          <a:noFill/>
-          <a:ln/>
-        </p:spPr>
-        <p:txBody>
-          <a:bodyPr wrap="square" lIns="0" tIns="0" rIns="0" bIns="0" rtlCol="0" anchor="t"/>
-          <a:lstStyle/>
-          <a:p>
-            <a:pPr algn="l" indent="0" marL="0">
-              <a:lnSpc>
-                <a:spcPts val="1560"/>
-              </a:lnSpc>
-              <a:buNone/>
-            </a:pPr>
-            <a:r>
-              <a:rPr lang="en-US" sz="1350" dirty="0">
-                <a:solidFill>
-                  <a:srgbClr val="59636E"/>
-                </a:solidFill>
-                <a:latin typeface="Arial" pitchFamily="34" charset="0"/>
-                <a:ea typeface="Arial" pitchFamily="34" charset="-122"/>
-                <a:cs typeface="Arial" pitchFamily="34" charset="-120"/>
-              </a:rPr>
-              <a:t>What should the agent do?</a:t>
-            </a:r>
-            <a:endParaRPr lang="en-US" sz="1350" dirty="0"/>
-          </a:p>
-        </p:txBody>
-      </p:sp>
-      <p:sp>
-        <p:nvSpPr>
-          <p:cNvPr id="18" name="Text 11"/>
-          <p:cNvSpPr/>
-          <p:nvPr/>
-        </p:nvSpPr>
-        <p:spPr>
-          <a:xfrm>
-            <a:off x="4419451" y="3045172"/>
-            <a:ext cx="381000" cy="381000"/>
-          </a:xfrm>
-          <a:prstGeom prst="roundRect">
-            <a:avLst>
-              <a:gd name="adj" fmla="val 23333"/>
-            </a:avLst>
-          </a:prstGeom>
-          <a:solidFill>
-            <a:srgbClr val="DDF4FF"/>
-          </a:solidFill>
-          <a:ln/>
-        </p:spPr>
-        <p:txBody>
-          <a:bodyPr wrap="square" rtlCol="0" anchor="ctr"/>
-          <a:lstStyle/>
-          <a:p>
-            <a:pPr indent="0" marL="0">
-              <a:buNone/>
-            </a:pPr>
-            <a:endParaRPr lang="en-US" dirty="0"/>
-          </a:p>
-        </p:txBody>
-      </p:sp>
-      <p:pic>
-        <p:nvPicPr>
-          <p:cNvPr id="19" name="Image 5" descr="">
-            <a:extLst>
-              <a:ext uri="{C183D7F6-B498-43B3-948B-1728B52AA6E4}">
-                <adec:decorative xmlns:adec="http://schemas.microsoft.com/office/drawing/2017/decorative" val="1"/>
-              </a:ext>
-            </a:extLst>
-          </p:cNvPr>
-          <p:cNvPicPr>
-            <a:picLocks noChangeAspect="1"/>
-          </p:cNvPicPr>
-          <p:nvPr/>
-        </p:nvPicPr>
-        <p:blipFill>
-          <a:blip r:embed="rId7"/>
-          <a:stretch>
-            <a:fillRect/>
-          </a:stretch>
-        </p:blipFill>
-        <p:spPr>
-          <a:xfrm>
-            <a:off x="4502051" y="3127772"/>
-            <a:ext cx="215801" cy="215801"/>
-          </a:xfrm>
-          <a:prstGeom prst="rect">
-            <a:avLst/>
-          </a:prstGeom>
-        </p:spPr>
-      </p:pic>
-      <p:sp>
-        <p:nvSpPr>
-          <p:cNvPr id="20" name="Text 12"/>
-          <p:cNvSpPr/>
-          <p:nvPr/>
-        </p:nvSpPr>
-        <p:spPr>
-          <a:xfrm>
-            <a:off x="4952851" y="3009751"/>
-            <a:ext cx="2614988" cy="228600"/>
-          </a:xfrm>
-          <a:prstGeom prst="rect">
-            <a:avLst/>
-          </a:prstGeom>
-          <a:noFill/>
-          <a:ln/>
-        </p:spPr>
-        <p:txBody>
-          <a:bodyPr wrap="square" lIns="0" tIns="0" rIns="0" bIns="0" rtlCol="0" anchor="t"/>
-          <a:lstStyle/>
-          <a:p>
-            <a:pPr algn="l" indent="0" marL="0">
-              <a:buNone/>
-            </a:pPr>
-            <a:r>
-              <a:rPr lang="en-US" sz="1550" b="1" dirty="0">
-                <a:solidFill>
-                  <a:srgbClr val="1F2328"/>
-                </a:solidFill>
-                <a:latin typeface="Arial" pitchFamily="34" charset="0"/>
-                <a:ea typeface="Arial" pitchFamily="34" charset="-122"/>
-                <a:cs typeface="Arial" pitchFamily="34" charset="-120"/>
-              </a:rPr>
-              <a:t>Tools</a:t>
-            </a:r>
-            <a:endParaRPr lang="en-US" sz="1550" dirty="0"/>
-          </a:p>
-        </p:txBody>
-      </p:sp>
-      <p:sp>
-        <p:nvSpPr>
-          <p:cNvPr id="21" name="Text 13"/>
-          <p:cNvSpPr/>
-          <p:nvPr/>
-        </p:nvSpPr>
-        <p:spPr>
-          <a:xfrm>
-            <a:off x="4952851" y="3263652"/>
-            <a:ext cx="2614988" cy="198090"/>
-          </a:xfrm>
-          <a:prstGeom prst="rect">
-            <a:avLst/>
-          </a:prstGeom>
-          <a:noFill/>
-          <a:ln/>
-        </p:spPr>
-        <p:txBody>
-          <a:bodyPr wrap="square" lIns="0" tIns="0" rIns="0" bIns="0" rtlCol="0" anchor="t"/>
-          <a:lstStyle/>
-          <a:p>
-            <a:pPr algn="l" indent="0" marL="0">
-              <a:lnSpc>
-                <a:spcPts val="1560"/>
-              </a:lnSpc>
-              <a:buNone/>
-            </a:pPr>
-            <a:r>
-              <a:rPr lang="en-US" sz="1350" dirty="0">
-                <a:solidFill>
-                  <a:srgbClr val="59636E"/>
-                </a:solidFill>
-                <a:latin typeface="Arial" pitchFamily="34" charset="0"/>
-                <a:ea typeface="Arial" pitchFamily="34" charset="-122"/>
-                <a:cs typeface="Arial" pitchFamily="34" charset="-120"/>
-              </a:rPr>
-              <a:t>What is the least access needed?</a:t>
-            </a:r>
-            <a:endParaRPr lang="en-US" sz="1350" dirty="0"/>
-          </a:p>
-        </p:txBody>
-      </p:sp>
-      <p:sp>
-        <p:nvSpPr>
-          <p:cNvPr id="22" name="Text 14"/>
-          <p:cNvSpPr/>
-          <p:nvPr/>
-        </p:nvSpPr>
-        <p:spPr>
-          <a:xfrm>
-            <a:off x="4419451" y="3700314"/>
-            <a:ext cx="381000" cy="381000"/>
-          </a:xfrm>
-          <a:prstGeom prst="roundRect">
-            <a:avLst>
-              <a:gd name="adj" fmla="val 23333"/>
-            </a:avLst>
-          </a:prstGeom>
-          <a:solidFill>
-            <a:srgbClr val="DDF4FF"/>
-          </a:solidFill>
-          <a:ln/>
-        </p:spPr>
-        <p:txBody>
-          <a:bodyPr wrap="square" rtlCol="0" anchor="ctr"/>
-          <a:lstStyle/>
-          <a:p>
-            <a:pPr indent="0" marL="0">
-              <a:buNone/>
-            </a:pPr>
-            <a:endParaRPr lang="en-US" dirty="0"/>
-          </a:p>
-        </p:txBody>
-      </p:sp>
-      <p:pic>
-        <p:nvPicPr>
-          <p:cNvPr id="23" name="Image 6" descr="">
-            <a:extLst>
-              <a:ext uri="{C183D7F6-B498-43B3-948B-1728B52AA6E4}">
-                <adec:decorative xmlns:adec="http://schemas.microsoft.com/office/drawing/2017/decorative" val="1"/>
-              </a:ext>
-            </a:extLst>
-          </p:cNvPr>
-          <p:cNvPicPr>
-            <a:picLocks noChangeAspect="1"/>
-          </p:cNvPicPr>
-          <p:nvPr/>
-        </p:nvPicPr>
-        <p:blipFill>
-          <a:blip r:embed="rId8"/>
-          <a:stretch>
-            <a:fillRect/>
-          </a:stretch>
-        </p:blipFill>
-        <p:spPr>
-          <a:xfrm>
-            <a:off x="4502051" y="3782913"/>
-            <a:ext cx="215801" cy="215801"/>
-          </a:xfrm>
-          <a:prstGeom prst="rect">
-            <a:avLst/>
-          </a:prstGeom>
-        </p:spPr>
-      </p:pic>
-      <p:sp>
-        <p:nvSpPr>
-          <p:cNvPr id="24" name="Text 15"/>
-          <p:cNvSpPr/>
-          <p:nvPr/>
-        </p:nvSpPr>
-        <p:spPr>
-          <a:xfrm>
-            <a:off x="4952851" y="3664893"/>
-            <a:ext cx="2226064" cy="228600"/>
-          </a:xfrm>
-          <a:prstGeom prst="rect">
-            <a:avLst/>
-          </a:prstGeom>
-          <a:noFill/>
-          <a:ln/>
-        </p:spPr>
-        <p:txBody>
-          <a:bodyPr wrap="square" lIns="0" tIns="0" rIns="0" bIns="0" rtlCol="0" anchor="t"/>
-          <a:lstStyle/>
-          <a:p>
-            <a:pPr algn="l" indent="0" marL="0">
-              <a:buNone/>
-            </a:pPr>
-            <a:r>
-              <a:rPr lang="en-US" sz="1550" b="1" dirty="0">
-                <a:solidFill>
-                  <a:srgbClr val="1F2328"/>
-                </a:solidFill>
-                <a:latin typeface="Arial" pitchFamily="34" charset="0"/>
-                <a:ea typeface="Arial" pitchFamily="34" charset="-122"/>
-                <a:cs typeface="Arial" pitchFamily="34" charset="-120"/>
-              </a:rPr>
-              <a:t>Review path</a:t>
-            </a:r>
-            <a:endParaRPr lang="en-US" sz="1550" dirty="0"/>
-          </a:p>
-        </p:txBody>
-      </p:sp>
-      <p:sp>
-        <p:nvSpPr>
-          <p:cNvPr id="25" name="Text 16"/>
-          <p:cNvSpPr/>
-          <p:nvPr/>
-        </p:nvSpPr>
-        <p:spPr>
-          <a:xfrm>
-            <a:off x="4952851" y="3918793"/>
-            <a:ext cx="2226064" cy="198090"/>
-          </a:xfrm>
-          <a:prstGeom prst="rect">
-            <a:avLst/>
-          </a:prstGeom>
-          <a:noFill/>
-          <a:ln/>
-        </p:spPr>
-        <p:txBody>
-          <a:bodyPr wrap="square" lIns="0" tIns="0" rIns="0" bIns="0" rtlCol="0" anchor="t"/>
-          <a:lstStyle/>
-          <a:p>
-            <a:pPr algn="l" indent="0" marL="0">
-              <a:lnSpc>
-                <a:spcPts val="1560"/>
-              </a:lnSpc>
-              <a:buNone/>
-            </a:pPr>
-            <a:r>
-              <a:rPr lang="en-US" sz="1350" dirty="0">
-                <a:solidFill>
-                  <a:srgbClr val="59636E"/>
-                </a:solidFill>
-                <a:latin typeface="Arial" pitchFamily="34" charset="0"/>
-                <a:ea typeface="Arial" pitchFamily="34" charset="-122"/>
-                <a:cs typeface="Arial" pitchFamily="34" charset="-120"/>
-              </a:rPr>
-              <a:t>Where do I check the result?</a:t>
-            </a:r>
-            <a:endParaRPr lang="en-US" sz="1350" dirty="0"/>
-          </a:p>
-        </p:txBody>
-      </p:sp>
     </p:spTree>
   </p:cSld>
   <p:clrMapOvr>
@@ -13587,8 +12940,8 @@
         </ns0:nvSpPr>
         <ns0:spPr>
           <ns1:xfrm>
-            <ns1:off x="551706" y="1577876"/>
-            <ns1:ext cx="4230291" cy="2990850"/>
+            <ns1:off x="557784" y="1636776"/>
+            <ns1:ext cx="4224528" cy="1485268"/>
           </ns1:xfrm>
           <ns1:prstGeom prst="roundRect">
             <ns1:avLst>
@@ -13624,22 +12977,22 @@
       </ns0:sp>
       <ns0:pic>
         <ns0:nvPicPr>
-          <ns0:cNvPr id="10" name="Image 2" descr="New automation form with Manual trigger, cloud off, selected repository, Current checkout, and Create and run"/>
+          <ns0:cNvPr id="10" name="Image 2" descr="New automation fields: PR review readiness report, Manual trigger, and Run in the cloud switched off."/>
           <ns0:cNvPicPr>
             <ns1:picLocks noChangeAspect="1"/>
           </ns0:cNvPicPr>
           <ns0:nvPr/>
         </ns0:nvPicPr>
         <ns0:blipFill>
-          <ns1:blip ns3:embed="rId4"/>
+          <ns1:blip ns3:embed="rId7"/>
           <ns1:stretch>
             <ns1:fillRect/>
           </ns1:stretch>
         </ns0:blipFill>
         <ns0:spPr>
           <ns1:xfrm>
-            <ns1:off x="599331" y="1625501"/>
-            <ns1:ext cx="4135041" cy="2895600"/>
+            <ns1:off x="603504" y="1682496"/>
+            <ns1:ext cx="4133088" cy="1393828"/>
           </ns1:xfrm>
           <ns1:prstGeom prst="rect">
             <ns1:avLst/>
@@ -14300,6 +13653,73 @@
           </ns1:p>
         </ns0:txBody>
       </ns0:sp>
+      <ns0:sp>
+        <ns0:nvSpPr>
+          <ns0:cNvPr id="28" name="Review create frame"/>
+          <ns0:cNvSpPr/>
+          <ns0:nvPr/>
+        </ns0:nvSpPr>
+        <ns0:spPr>
+          <ns1:xfrm>
+            <ns1:off x="557784" y="3438144"/>
+            <ns1:ext cx="4224528" cy="1090913"/>
+          </ns1:xfrm>
+          <ns1:prstGeom prst="roundRect">
+            <ns1:avLst>
+              <ns1:gd name="adj" fmla="val 2548"/>
+            </ns1:avLst>
+          </ns1:prstGeom>
+          <ns1:solidFill>
+            <ns1:srgbClr val="FFFFFF"/>
+          </ns1:solidFill>
+          <ns1:ln w="9525">
+            <ns1:solidFill>
+              <ns1:srgbClr val="D1D9E0"/>
+            </ns1:solidFill>
+          </ns1:ln>
+          <ns1:effectLst>
+            <ns1:outerShdw sx="100000" sy="100000" kx="0" ky="0" algn="bl" rotWithShape="0" blurRad="38100" dist="9525" dir="5400000">
+              <ns1:srgbClr val="1f2328">
+                <ns1:alpha val="12000"/>
+              </ns1:srgbClr>
+            </ns1:outerShdw>
+          </ns1:effectLst>
+        </ns0:spPr>
+        <ns0:txBody>
+          <ns1:bodyPr wrap="square" rtlCol="0" anchor="ctr"/>
+          <ns1:lstStyle/>
+          <ns1:p>
+            <ns1:pPr indent="0" marL="0">
+              <ns1:buNone/>
+            </ns1:pPr>
+            <ns1:endParaRPr lang="en-US" dirty="0"/>
+          </ns1:p>
+        </ns0:txBody>
+      </ns0:sp>
+      <ns0:pic>
+        <ns0:nvPicPr>
+          <ns0:cNvPr id="27" name="Review create menu" descr="Automation repository and Current checkout controls, with the Create and run menu open."/>
+          <ns0:cNvPicPr>
+            <ns1:picLocks noChangeAspect="1"/>
+          </ns0:cNvPicPr>
+          <ns0:nvPr/>
+        </ns0:nvPicPr>
+        <ns0:blipFill>
+          <ns1:blip ns3:embed="rId8"/>
+          <ns1:stretch>
+            <ns1:fillRect/>
+          </ns1:stretch>
+        </ns0:blipFill>
+        <ns0:spPr>
+          <ns1:xfrm>
+            <ns1:off x="603504" y="3483864"/>
+            <ns1:ext cx="4133088" cy="999473"/>
+          </ns1:xfrm>
+          <ns1:prstGeom prst="rect">
+            <ns1:avLst/>
+          </ns1:prstGeom>
+        </ns0:spPr>
+      </ns0:pic>
     </ns0:spTree>
   </ns0:cSld>
   <ns0:clrMapOvr>
